--- a/examples/project-intro-deck/project-intro.pptx
+++ b/examples/project-intro-deck/project-intro.pptx
@@ -3220,7 +3220,7 @@
               </a:spcAft>
             </a:pPr>
             <a:r>
-              <a:rPr sz="1650" b="1" i="0">
+              <a:rPr sz="1320" b="1" i="0">
                 <a:solidFill>
                   <a:srgbClr val="1263E6"/>
                 </a:solidFill>
@@ -3262,7 +3262,7 @@
               </a:spcAft>
             </a:pPr>
             <a:r>
-              <a:rPr sz="1500" b="1" i="0">
+              <a:rPr sz="1200" b="1" i="0">
                 <a:solidFill>
                   <a:srgbClr val="5A6B85"/>
                 </a:solidFill>
@@ -3544,7 +3544,7 @@
               </a:spcAft>
             </a:pPr>
             <a:r>
-              <a:rPr sz="6000" b="1" i="0">
+              <a:rPr sz="4800" b="1" i="0" dirty="0" err="1">
                 <a:solidFill>
                   <a:srgbClr val="0A1B3E"/>
                 </a:solidFill>
@@ -3552,6 +3552,12 @@
               </a:rPr>
               <a:t>VectorDeckPPT</a:t>
             </a:r>
+            <a:endParaRPr sz="4800" b="1" i="0" dirty="0">
+              <a:solidFill>
+                <a:srgbClr val="0A1B3E"/>
+              </a:solidFill>
+              <a:latin typeface="Microsoft YaHei"/>
+            </a:endParaRPr>
           </a:p>
         </p:txBody>
       </p:sp>
@@ -3586,14 +3592,29 @@
               </a:spcAft>
             </a:pPr>
             <a:r>
-              <a:rPr sz="2850" b="1" i="0">
+              <a:rPr sz="2279" b="1" i="0" dirty="0">
                 <a:solidFill>
                   <a:srgbClr val="173A73"/>
                 </a:solidFill>
                 <a:latin typeface="Microsoft YaHei"/>
               </a:rPr>
-              <a:t>让 AI 负责设计，让代码保证交付</a:t>
-            </a:r>
+              <a:t>让 AI </a:t>
+            </a:r>
+            <a:r>
+              <a:rPr sz="2279" b="1" i="0" dirty="0" err="1">
+                <a:solidFill>
+                  <a:srgbClr val="173A73"/>
+                </a:solidFill>
+                <a:latin typeface="Microsoft YaHei"/>
+              </a:rPr>
+              <a:t>负责设计，让代码保证交付</a:t>
+            </a:r>
+            <a:endParaRPr sz="2279" b="1" i="0" dirty="0">
+              <a:solidFill>
+                <a:srgbClr val="173A73"/>
+              </a:solidFill>
+              <a:latin typeface="Microsoft YaHei"/>
+            </a:endParaRPr>
           </a:p>
         </p:txBody>
       </p:sp>
@@ -3628,7 +3649,7 @@
               </a:spcAft>
             </a:pPr>
             <a:r>
-              <a:rPr sz="1650" b="0" i="0">
+              <a:rPr sz="1320" b="0" i="0">
                 <a:solidFill>
                   <a:srgbClr val="64748B"/>
                 </a:solidFill>
@@ -3800,7 +3821,7 @@
               </a:spcAft>
             </a:pPr>
             <a:r>
-              <a:rPr sz="1800" b="1" i="0">
+              <a:rPr sz="1440" b="1" i="0">
                 <a:solidFill>
                   <a:srgbClr val="FFFFFF"/>
                 </a:solidFill>
@@ -3842,7 +3863,7 @@
               </a:spcAft>
             </a:pPr>
             <a:r>
-              <a:rPr sz="2025" b="1" i="0">
+              <a:rPr sz="1620" b="1" i="0">
                 <a:solidFill>
                   <a:srgbClr val="FFFFFF"/>
                 </a:solidFill>
@@ -3884,7 +3905,7 @@
               </a:spcAft>
             </a:pPr>
             <a:r>
-              <a:rPr sz="1500" b="0" i="0">
+              <a:rPr sz="1200" b="0" i="0">
                 <a:solidFill>
                   <a:srgbClr val="DCEAFF"/>
                 </a:solidFill>
@@ -4022,7 +4043,7 @@
               </a:spcAft>
             </a:pPr>
             <a:r>
-              <a:rPr sz="1650" b="1" i="0">
+              <a:rPr sz="1320" b="1" i="0">
                 <a:solidFill>
                   <a:srgbClr val="1263E6"/>
                 </a:solidFill>
@@ -4064,7 +4085,7 @@
               </a:spcAft>
             </a:pPr>
             <a:r>
-              <a:rPr sz="2025" b="1" i="0">
+              <a:rPr sz="1620" b="1" i="0">
                 <a:solidFill>
                   <a:srgbClr val="0A1B3E"/>
                 </a:solidFill>
@@ -4106,7 +4127,7 @@
               </a:spcAft>
             </a:pPr>
             <a:r>
-              <a:rPr sz="1200" b="0" i="0">
+              <a:rPr sz="960" b="0" i="0">
                 <a:solidFill>
                   <a:srgbClr val="64748B"/>
                 </a:solidFill>
@@ -4244,7 +4265,7 @@
               </a:spcAft>
             </a:pPr>
             <a:r>
-              <a:rPr sz="1650" b="1" i="0">
+              <a:rPr sz="1320" b="1" i="0">
                 <a:solidFill>
                   <a:srgbClr val="12AABD"/>
                 </a:solidFill>
@@ -4286,7 +4307,7 @@
               </a:spcAft>
             </a:pPr>
             <a:r>
-              <a:rPr sz="2025" b="1" i="0">
+              <a:rPr sz="1620" b="1" i="0">
                 <a:solidFill>
                   <a:srgbClr val="0A1B3E"/>
                 </a:solidFill>
@@ -4328,7 +4349,7 @@
               </a:spcAft>
             </a:pPr>
             <a:r>
-              <a:rPr sz="1200" b="0" i="0">
+              <a:rPr sz="960" b="0" i="0">
                 <a:solidFill>
                   <a:srgbClr val="64748B"/>
                 </a:solidFill>
@@ -4466,7 +4487,7 @@
               </a:spcAft>
             </a:pPr>
             <a:r>
-              <a:rPr sz="1650" b="1" i="0">
+              <a:rPr sz="1320" b="1" i="0">
                 <a:solidFill>
                   <a:srgbClr val="2DAA57"/>
                 </a:solidFill>
@@ -4508,7 +4529,7 @@
               </a:spcAft>
             </a:pPr>
             <a:r>
-              <a:rPr sz="2025" b="1" i="0">
+              <a:rPr sz="1620" b="1" i="0">
                 <a:solidFill>
                   <a:srgbClr val="0A1B3E"/>
                 </a:solidFill>
@@ -4550,7 +4571,7 @@
               </a:spcAft>
             </a:pPr>
             <a:r>
-              <a:rPr sz="1200" b="0" i="0">
+              <a:rPr sz="960" b="0" i="0">
                 <a:solidFill>
                   <a:srgbClr val="64748B"/>
                 </a:solidFill>
@@ -4720,7 +4741,7 @@
               </a:spcAft>
             </a:pPr>
             <a:r>
-              <a:rPr sz="1500" b="1" i="0">
+              <a:rPr sz="1200" b="1" i="0">
                 <a:solidFill>
                   <a:srgbClr val="FFFFFF"/>
                 </a:solidFill>
@@ -4762,7 +4783,7 @@
               </a:spcAft>
             </a:pPr>
             <a:r>
-              <a:rPr sz="1275" b="0" i="0">
+              <a:rPr sz="1019" b="0" i="0">
                 <a:solidFill>
                   <a:srgbClr val="AFCBFA"/>
                 </a:solidFill>
@@ -4979,7 +5000,7 @@
               </a:spcAft>
             </a:pPr>
             <a:r>
-              <a:rPr sz="1500" b="1" i="0">
+              <a:rPr sz="1200" b="1" i="0">
                 <a:solidFill>
                   <a:srgbClr val="FFFFFF"/>
                 </a:solidFill>
@@ -5021,7 +5042,7 @@
               </a:spcAft>
             </a:pPr>
             <a:r>
-              <a:rPr sz="1500" b="1" i="0">
+              <a:rPr sz="1200" b="1" i="0">
                 <a:solidFill>
                   <a:srgbClr val="1263E6"/>
                 </a:solidFill>
@@ -5063,7 +5084,7 @@
               </a:spcAft>
             </a:pPr>
             <a:r>
-              <a:rPr sz="1500" b="1" i="0">
+              <a:rPr sz="1200" b="1" i="0">
                 <a:solidFill>
                   <a:srgbClr val="FFFFFF"/>
                 </a:solidFill>
@@ -5105,7 +5126,7 @@
               </a:spcAft>
             </a:pPr>
             <a:r>
-              <a:rPr sz="1500" b="1" i="0">
+              <a:rPr sz="1200" b="1" i="0">
                 <a:solidFill>
                   <a:srgbClr val="2DAA57"/>
                 </a:solidFill>
@@ -5147,7 +5168,7 @@
               </a:spcAft>
             </a:pPr>
             <a:r>
-              <a:rPr sz="1500" b="1" i="0">
+              <a:rPr sz="1200" b="1" i="0">
                 <a:solidFill>
                   <a:srgbClr val="FFFFFF"/>
                 </a:solidFill>
@@ -5189,7 +5210,7 @@
               </a:spcAft>
             </a:pPr>
             <a:r>
-              <a:rPr sz="1275" b="0" i="0">
+              <a:rPr sz="1019" b="0" i="0">
                 <a:solidFill>
                   <a:srgbClr val="64748B"/>
                 </a:solidFill>
@@ -5231,7 +5252,7 @@
               </a:spcAft>
             </a:pPr>
             <a:r>
-              <a:rPr sz="1275" b="0" i="0">
+              <a:rPr sz="1019" b="0" i="0">
                 <a:solidFill>
                   <a:srgbClr val="64748B"/>
                 </a:solidFill>
@@ -5273,7 +5294,7 @@
               </a:spcAft>
             </a:pPr>
             <a:r>
-              <a:rPr sz="1275" b="0" i="0">
+              <a:rPr sz="1019" b="0" i="0">
                 <a:solidFill>
                   <a:srgbClr val="64748B"/>
                 </a:solidFill>
@@ -5315,7 +5336,7 @@
               </a:spcAft>
             </a:pPr>
             <a:r>
-              <a:rPr sz="1275" b="0" i="0">
+              <a:rPr sz="1019" b="0" i="0">
                 <a:solidFill>
                   <a:srgbClr val="64748B"/>
                 </a:solidFill>
@@ -5357,7 +5378,7 @@
               </a:spcAft>
             </a:pPr>
             <a:r>
-              <a:rPr sz="1275" b="0" i="0">
+              <a:rPr sz="1019" b="0" i="0">
                 <a:solidFill>
                   <a:srgbClr val="64748B"/>
                 </a:solidFill>
@@ -5463,7 +5484,7 @@
               </a:spcAft>
             </a:pPr>
             <a:r>
-              <a:rPr sz="1725" b="1" i="0">
+              <a:rPr sz="1380" b="1" i="0">
                 <a:solidFill>
                   <a:srgbClr val="2DAA57"/>
                 </a:solidFill>
@@ -5505,7 +5526,7 @@
               </a:spcAft>
             </a:pPr>
             <a:r>
-              <a:rPr sz="1725" b="1" i="0">
+              <a:rPr sz="1380" b="1" i="0">
                 <a:solidFill>
                   <a:srgbClr val="0A1B3E"/>
                 </a:solidFill>
@@ -5547,7 +5568,7 @@
               </a:spcAft>
             </a:pPr>
             <a:r>
-              <a:rPr sz="1350" b="0" i="0">
+              <a:rPr sz="1080" b="0" i="0">
                 <a:solidFill>
                   <a:srgbClr val="64748B"/>
                 </a:solidFill>
@@ -5653,7 +5674,7 @@
               </a:spcAft>
             </a:pPr>
             <a:r>
-              <a:rPr sz="1650" b="1" i="0">
+              <a:rPr sz="1320" b="1" i="0">
                 <a:solidFill>
                   <a:srgbClr val="FFFFFF"/>
                 </a:solidFill>
@@ -5695,7 +5716,7 @@
               </a:spcAft>
             </a:pPr>
             <a:r>
-              <a:rPr sz="1875" b="1" i="0">
+              <a:rPr sz="1500" b="1" i="0">
                 <a:solidFill>
                   <a:srgbClr val="173A73"/>
                 </a:solidFill>
@@ -5737,13 +5758,13 @@
               </a:spcAft>
             </a:pPr>
             <a:r>
-              <a:rPr sz="1350" b="0" i="0">
+              <a:rPr sz="1080" b="0" i="0">
                 <a:solidFill>
                   <a:srgbClr val="64748B"/>
                 </a:solidFill>
                 <a:latin typeface="Microsoft YaHei"/>
               </a:rPr>
-              <a:t>V1.0 · 2026</a:t>
+              <a:t>V1.1 · 2026</a:t>
             </a:r>
           </a:p>
         </p:txBody>
@@ -5781,7 +5802,7 @@
         </p:nvSpPr>
         <p:spPr>
           <a:xfrm>
-            <a:off x="-1173480" y="2129790"/>
+            <a:off x="0" y="0"/>
             <a:ext cx="12192000" cy="6858000"/>
           </a:xfrm>
           <a:prstGeom prst="rect">
@@ -5811,7 +5832,7 @@
         </p:nvSpPr>
         <p:spPr>
           <a:xfrm>
-            <a:off x="10986211" y="1455420"/>
+            <a:off x="10820400" y="45720"/>
             <a:ext cx="1097280" cy="1097280"/>
           </a:xfrm>
           <a:prstGeom prst="ellipse">
@@ -5841,7 +5862,7 @@
         </p:nvSpPr>
         <p:spPr>
           <a:xfrm>
-            <a:off x="11030775" y="1179922"/>
+            <a:off x="10972800" y="198120"/>
             <a:ext cx="792480" cy="792480"/>
           </a:xfrm>
           <a:prstGeom prst="ellipse">
@@ -5958,7 +5979,7 @@
               </a:spcAft>
             </a:pPr>
             <a:r>
-              <a:rPr sz="3900" b="1" i="0">
+              <a:rPr sz="3120" b="1" i="0">
                 <a:solidFill>
                   <a:srgbClr val="FFFFFF"/>
                 </a:solidFill>
@@ -5978,36 +5999,36 @@
         <p:spPr>
           <a:xfrm>
             <a:off x="1813560" y="478231"/>
-            <a:ext cx="5344973" cy="292608"/>
-          </a:xfrm>
-          <a:prstGeom prst="rect">
-            <a:avLst/>
-          </a:prstGeom>
-          <a:noFill/>
-        </p:spPr>
-        <p:txBody>
-          <a:bodyPr wrap="none" lIns="0" tIns="0" rIns="0" bIns="0" anchor="t">
-            <a:spAutoFit/>
-          </a:bodyPr>
-          <a:lstStyle/>
-          <a:p>
-            <a:pPr algn="l">
-              <a:spcBef>
-                <a:spcPts val="0"/>
-              </a:spcBef>
-              <a:spcAft>
-                <a:spcPts val="0"/>
-              </a:spcAft>
-            </a:pPr>
-            <a:r>
-              <a:rPr sz="2400" b="1" i="0">
+            <a:ext cx="6160341" cy="350737"/>
+          </a:xfrm>
+          <a:prstGeom prst="rect">
+            <a:avLst/>
+          </a:prstGeom>
+          <a:noFill/>
+        </p:spPr>
+        <p:txBody>
+          <a:bodyPr wrap="none" lIns="0" tIns="0" rIns="0" bIns="0" anchor="t">
+            <a:spAutoFit/>
+          </a:bodyPr>
+          <a:lstStyle/>
+          <a:p>
+            <a:r>
+              <a:rPr lang="zh-CN" altLang="en-US" sz="2279" b="1" dirty="0">
                 <a:solidFill>
                   <a:srgbClr val="0A1B3E"/>
                 </a:solidFill>
-                <a:latin typeface="Microsoft YaHei"/>
+                <a:latin typeface="Microsoft YaHei UI" panose="020B0503020204020204" pitchFamily="34" charset="-122"/>
+                <a:ea typeface="Microsoft YaHei UI" panose="020B0503020204020204" pitchFamily="34" charset="-122"/>
               </a:rPr>
               <a:t>一句调用，得到一套可继续维护的演示文稿资产</a:t>
             </a:r>
+            <a:endParaRPr sz="2279" b="1" dirty="0">
+              <a:solidFill>
+                <a:srgbClr val="0A1B3E"/>
+              </a:solidFill>
+              <a:latin typeface="Microsoft YaHei UI" panose="020B0503020204020204" pitchFamily="34" charset="-122"/>
+              <a:ea typeface="Microsoft YaHei UI" panose="020B0503020204020204" pitchFamily="34" charset="-122"/>
+            </a:endParaRPr>
           </a:p>
         </p:txBody>
       </p:sp>
@@ -6042,7 +6063,7 @@
               </a:spcAft>
             </a:pPr>
             <a:r>
-              <a:rPr sz="1650" b="1" i="0">
+              <a:rPr sz="1320" b="1" i="0">
                 <a:solidFill>
                   <a:srgbClr val="1263E6"/>
                 </a:solidFill>
@@ -6546,7 +6567,7 @@
               </a:spcAft>
             </a:pPr>
             <a:r>
-              <a:rPr sz="1875" b="1" i="0">
+              <a:rPr sz="1500" b="1" i="0">
                 <a:solidFill>
                   <a:srgbClr val="FFFFFF"/>
                 </a:solidFill>
@@ -6588,7 +6609,7 @@
               </a:spcAft>
             </a:pPr>
             <a:r>
-              <a:rPr sz="1875" b="1" i="0">
+              <a:rPr sz="1500" b="1" i="0">
                 <a:solidFill>
                   <a:srgbClr val="FFFFFF"/>
                 </a:solidFill>
@@ -6784,7 +6805,7 @@
               </a:spcAft>
             </a:pPr>
             <a:r>
-              <a:rPr sz="2175" b="1" i="0">
+              <a:rPr sz="1739" b="1" i="0">
                 <a:solidFill>
                   <a:srgbClr val="53DB74"/>
                 </a:solidFill>
@@ -6826,7 +6847,7 @@
               </a:spcAft>
             </a:pPr>
             <a:r>
-              <a:rPr sz="1425" b="0" i="0">
+              <a:rPr sz="1139" b="0" i="0">
                 <a:solidFill>
                   <a:srgbClr val="FFFFFF"/>
                 </a:solidFill>
@@ -6868,7 +6889,7 @@
               </a:spcAft>
             </a:pPr>
             <a:r>
-              <a:rPr sz="1425" b="0" i="0">
+              <a:rPr sz="1139" b="0" i="0">
                 <a:solidFill>
                   <a:srgbClr val="FFFFFF"/>
                 </a:solidFill>
@@ -7006,7 +7027,7 @@
               </a:spcAft>
             </a:pPr>
             <a:r>
-              <a:rPr sz="2025" b="1" i="0">
+              <a:rPr sz="1620" b="1" i="0">
                 <a:solidFill>
                   <a:srgbClr val="FFFFFF"/>
                 </a:solidFill>
@@ -7048,7 +7069,7 @@
               </a:spcAft>
             </a:pPr>
             <a:r>
-              <a:rPr sz="1650" b="1" i="0">
+              <a:rPr sz="1320" b="1" i="0">
                 <a:solidFill>
                   <a:srgbClr val="1263E6"/>
                 </a:solidFill>
@@ -7120,7 +7141,7 @@
               </a:spcAft>
             </a:pPr>
             <a:r>
-              <a:rPr sz="1200" b="0" i="0">
+              <a:rPr sz="960" b="0" i="0">
                 <a:solidFill>
                   <a:srgbClr val="52647F"/>
                 </a:solidFill>
@@ -7162,7 +7183,7 @@
               </a:spcAft>
             </a:pPr>
             <a:r>
-              <a:rPr sz="1200" b="0" i="0">
+              <a:rPr sz="960" b="0" i="0">
                 <a:solidFill>
                   <a:srgbClr val="52647F"/>
                 </a:solidFill>
@@ -7204,7 +7225,7 @@
               </a:spcAft>
             </a:pPr>
             <a:r>
-              <a:rPr sz="4050" b="1" i="0">
+              <a:rPr sz="3240" b="1" i="0">
                 <a:solidFill>
                   <a:srgbClr val="2C83F3"/>
                 </a:solidFill>
@@ -7342,7 +7363,7 @@
               </a:spcAft>
             </a:pPr>
             <a:r>
-              <a:rPr sz="2025" b="1" i="0">
+              <a:rPr sz="1620" b="1" i="0">
                 <a:solidFill>
                   <a:srgbClr val="FFFFFF"/>
                 </a:solidFill>
@@ -7384,7 +7405,7 @@
               </a:spcAft>
             </a:pPr>
             <a:r>
-              <a:rPr sz="1650" b="1" i="0">
+              <a:rPr sz="1320" b="1" i="0">
                 <a:solidFill>
                   <a:srgbClr val="12AABD"/>
                 </a:solidFill>
@@ -7456,7 +7477,7 @@
               </a:spcAft>
             </a:pPr>
             <a:r>
-              <a:rPr sz="1200" b="0" i="0">
+              <a:rPr sz="960" b="0" i="0">
                 <a:solidFill>
                   <a:srgbClr val="52647F"/>
                 </a:solidFill>
@@ -7498,7 +7519,7 @@
               </a:spcAft>
             </a:pPr>
             <a:r>
-              <a:rPr sz="1200" b="0" i="0">
+              <a:rPr sz="960" b="0" i="0">
                 <a:solidFill>
                   <a:srgbClr val="52647F"/>
                 </a:solidFill>
@@ -7540,7 +7561,7 @@
               </a:spcAft>
             </a:pPr>
             <a:r>
-              <a:rPr sz="4050" b="1" i="0">
+              <a:rPr sz="3240" b="1" i="0">
                 <a:solidFill>
                   <a:srgbClr val="12AABD"/>
                 </a:solidFill>
@@ -7678,7 +7699,7 @@
               </a:spcAft>
             </a:pPr>
             <a:r>
-              <a:rPr sz="2025" b="1" i="0">
+              <a:rPr sz="1620" b="1" i="0">
                 <a:solidFill>
                   <a:srgbClr val="FFFFFF"/>
                 </a:solidFill>
@@ -7720,7 +7741,7 @@
               </a:spcAft>
             </a:pPr>
             <a:r>
-              <a:rPr sz="1650" b="1" i="0">
+              <a:rPr sz="1320" b="1" i="0">
                 <a:solidFill>
                   <a:srgbClr val="2DAA57"/>
                 </a:solidFill>
@@ -7792,7 +7813,7 @@
               </a:spcAft>
             </a:pPr>
             <a:r>
-              <a:rPr sz="1200" b="0" i="0">
+              <a:rPr sz="960" b="0" i="0">
                 <a:solidFill>
                   <a:srgbClr val="52647F"/>
                 </a:solidFill>
@@ -7834,7 +7855,7 @@
               </a:spcAft>
             </a:pPr>
             <a:r>
-              <a:rPr sz="1200" b="0" i="0">
+              <a:rPr sz="960" b="0" i="0">
                 <a:solidFill>
                   <a:srgbClr val="52647F"/>
                 </a:solidFill>
@@ -7876,7 +7897,7 @@
               </a:spcAft>
             </a:pPr>
             <a:r>
-              <a:rPr sz="4050" b="1" i="0">
+              <a:rPr sz="3240" b="1" i="0">
                 <a:solidFill>
                   <a:srgbClr val="2DAA57"/>
                 </a:solidFill>
@@ -8014,7 +8035,7 @@
               </a:spcAft>
             </a:pPr>
             <a:r>
-              <a:rPr sz="2025" b="1" i="0">
+              <a:rPr sz="1620" b="1" i="0">
                 <a:solidFill>
                   <a:srgbClr val="FFFFFF"/>
                 </a:solidFill>
@@ -8056,7 +8077,7 @@
               </a:spcAft>
             </a:pPr>
             <a:r>
-              <a:rPr sz="1650" b="1" i="0">
+              <a:rPr sz="1320" b="1" i="0">
                 <a:solidFill>
                   <a:srgbClr val="E28A00"/>
                 </a:solidFill>
@@ -8128,7 +8149,7 @@
               </a:spcAft>
             </a:pPr>
             <a:r>
-              <a:rPr sz="1200" b="0" i="0">
+              <a:rPr sz="960" b="0" i="0">
                 <a:solidFill>
                   <a:srgbClr val="52647F"/>
                 </a:solidFill>
@@ -8170,7 +8191,7 @@
               </a:spcAft>
             </a:pPr>
             <a:r>
-              <a:rPr sz="1200" b="0" i="0">
+              <a:rPr sz="960" b="0" i="0">
                 <a:solidFill>
                   <a:srgbClr val="52647F"/>
                 </a:solidFill>
@@ -8278,7 +8299,7 @@
               </a:spcAft>
             </a:pPr>
             <a:r>
-              <a:rPr sz="1575" b="1" i="0">
+              <a:rPr sz="1260" b="1" i="0">
                 <a:solidFill>
                   <a:srgbClr val="1263E6"/>
                 </a:solidFill>
@@ -8320,7 +8341,7 @@
               </a:spcAft>
             </a:pPr>
             <a:r>
-              <a:rPr sz="2100" b="1" i="0">
+              <a:rPr sz="1680" b="1" i="0">
                 <a:solidFill>
                   <a:srgbClr val="0A1B3E"/>
                 </a:solidFill>
@@ -8424,7 +8445,7 @@
               </a:spcAft>
             </a:pPr>
             <a:r>
-              <a:rPr sz="1725" b="1" i="0">
+              <a:rPr sz="1380" b="1" i="0">
                 <a:solidFill>
                   <a:srgbClr val="FFFFFF"/>
                 </a:solidFill>
@@ -8466,7 +8487,7 @@
               </a:spcAft>
             </a:pPr>
             <a:r>
-              <a:rPr sz="1500" b="1" i="0">
+              <a:rPr sz="1200" b="1" i="0">
                 <a:solidFill>
                   <a:srgbClr val="0A1B3E"/>
                 </a:solidFill>
@@ -8508,7 +8529,7 @@
               </a:spcAft>
             </a:pPr>
             <a:r>
-              <a:rPr sz="1125" b="0" i="0">
+              <a:rPr sz="900" b="0" i="0">
                 <a:solidFill>
                   <a:srgbClr val="52647F"/>
                 </a:solidFill>
@@ -8612,7 +8633,7 @@
               </a:spcAft>
             </a:pPr>
             <a:r>
-              <a:rPr sz="1575" b="1" i="0">
+              <a:rPr sz="1260" b="1" i="0">
                 <a:solidFill>
                   <a:srgbClr val="FFFFFF"/>
                 </a:solidFill>
@@ -8654,7 +8675,7 @@
               </a:spcAft>
             </a:pPr>
             <a:r>
-              <a:rPr sz="1500" b="1" i="0">
+              <a:rPr sz="1200" b="1" i="0">
                 <a:solidFill>
                   <a:srgbClr val="0A1B3E"/>
                 </a:solidFill>
@@ -8696,7 +8717,7 @@
               </a:spcAft>
             </a:pPr>
             <a:r>
-              <a:rPr sz="1125" b="0" i="0">
+              <a:rPr sz="900" b="0" i="0">
                 <a:solidFill>
                   <a:srgbClr val="52647F"/>
                 </a:solidFill>
@@ -8800,7 +8821,7 @@
               </a:spcAft>
             </a:pPr>
             <a:r>
-              <a:rPr sz="1650" b="1" i="0">
+              <a:rPr sz="1320" b="1" i="0">
                 <a:solidFill>
                   <a:srgbClr val="FFFFFF"/>
                 </a:solidFill>
@@ -8842,7 +8863,7 @@
               </a:spcAft>
             </a:pPr>
             <a:r>
-              <a:rPr sz="1500" b="1" i="0">
+              <a:rPr sz="1200" b="1" i="0">
                 <a:solidFill>
                   <a:srgbClr val="0A1B3E"/>
                 </a:solidFill>
@@ -8884,7 +8905,7 @@
               </a:spcAft>
             </a:pPr>
             <a:r>
-              <a:rPr sz="1125" b="0" i="0">
+              <a:rPr sz="900" b="0" i="0">
                 <a:solidFill>
                   <a:srgbClr val="52647F"/>
                 </a:solidFill>
@@ -8990,7 +9011,7 @@
               </a:spcAft>
             </a:pPr>
             <a:r>
-              <a:rPr sz="1950" b="1" i="0">
+              <a:rPr sz="1560" b="1" i="0">
                 <a:solidFill>
                   <a:srgbClr val="FFFFFF"/>
                 </a:solidFill>
@@ -9032,7 +9053,7 @@
               </a:spcAft>
             </a:pPr>
             <a:r>
-              <a:rPr sz="2250" b="1" i="0">
+              <a:rPr sz="1800" b="1" i="0">
                 <a:solidFill>
                   <a:srgbClr val="FFFFFF"/>
                 </a:solidFill>
@@ -9074,7 +9095,7 @@
               </a:spcAft>
             </a:pPr>
             <a:r>
-              <a:rPr sz="1350" b="1" i="0">
+              <a:rPr sz="1080" b="1" i="0">
                 <a:solidFill>
                   <a:srgbClr val="77A9FF"/>
                 </a:solidFill>
@@ -9267,7 +9288,7 @@
               </a:spcAft>
             </a:pPr>
             <a:r>
-              <a:rPr sz="3600" b="1" i="0">
+              <a:rPr sz="2880" b="1" i="0" dirty="0">
                 <a:solidFill>
                   <a:srgbClr val="FFFFFF"/>
                 </a:solidFill>
@@ -9287,7 +9308,7 @@
         <p:spPr>
           <a:xfrm>
             <a:off x="1813560" y="358140"/>
-            <a:ext cx="6370320" cy="457200"/>
+            <a:ext cx="4924425" cy="369332"/>
           </a:xfrm>
           <a:prstGeom prst="rect">
             <a:avLst/>
@@ -9309,7 +9330,7 @@
               </a:spcAft>
             </a:pPr>
             <a:r>
-              <a:rPr sz="3750" b="1" i="0">
+              <a:rPr sz="2400" b="1" i="0" dirty="0" err="1">
                 <a:solidFill>
                   <a:srgbClr val="0A1B3E"/>
                 </a:solidFill>
@@ -9317,6 +9338,12 @@
               </a:rPr>
               <a:t>高质量生成，不该在三件事之间妥协</a:t>
             </a:r>
+            <a:endParaRPr sz="2400" b="1" i="0" dirty="0">
+              <a:solidFill>
+                <a:srgbClr val="0A1B3E"/>
+              </a:solidFill>
+              <a:latin typeface="Microsoft YaHei"/>
+            </a:endParaRPr>
           </a:p>
         </p:txBody>
       </p:sp>
@@ -9351,7 +9378,7 @@
               </a:spcAft>
             </a:pPr>
             <a:r>
-              <a:rPr sz="1500" b="1" i="0">
+              <a:rPr sz="1200" b="1" i="0">
                 <a:solidFill>
                   <a:srgbClr val="1263E6"/>
                 </a:solidFill>
@@ -9393,7 +9420,7 @@
               </a:spcAft>
             </a:pPr>
             <a:r>
-              <a:rPr sz="1275" b="0" i="0">
+              <a:rPr sz="1019" b="0" i="0">
                 <a:solidFill>
                   <a:srgbClr val="64748B"/>
                 </a:solidFill>
@@ -9607,7 +9634,7 @@
               </a:spcAft>
             </a:pPr>
             <a:r>
-              <a:rPr sz="1650" b="1" i="0">
+              <a:rPr sz="1320" b="1" i="0">
                 <a:solidFill>
                   <a:srgbClr val="FFFFFF"/>
                 </a:solidFill>
@@ -9649,7 +9676,7 @@
               </a:spcAft>
             </a:pPr>
             <a:r>
-              <a:rPr sz="2325" b="1" i="0">
+              <a:rPr sz="1859" b="1" i="0">
                 <a:solidFill>
                   <a:srgbClr val="FFFFFF"/>
                 </a:solidFill>
@@ -9817,7 +9844,7 @@
               </a:spcAft>
             </a:pPr>
             <a:r>
-              <a:rPr sz="2100" b="1" i="0">
+              <a:rPr sz="1680" b="1" i="0">
                 <a:solidFill>
                   <a:srgbClr val="FFFFFF"/>
                 </a:solidFill>
@@ -9859,7 +9886,7 @@
               </a:spcAft>
             </a:pPr>
             <a:r>
-              <a:rPr sz="2850" b="1" i="0">
+              <a:rPr sz="2279" b="1" i="0">
                 <a:solidFill>
                   <a:srgbClr val="0A1B3E"/>
                 </a:solidFill>
@@ -9952,7 +9979,7 @@
               </a:spcAft>
             </a:pPr>
             <a:r>
-              <a:rPr sz="1650" b="1" i="0">
+              <a:rPr sz="1320" b="1" i="0">
                 <a:solidFill>
                   <a:srgbClr val="1263E6"/>
                 </a:solidFill>
@@ -9994,7 +10021,7 @@
               </a:spcAft>
             </a:pPr>
             <a:r>
-              <a:rPr sz="1800" b="1" i="0">
+              <a:rPr sz="1440" b="1" i="0">
                 <a:solidFill>
                   <a:srgbClr val="173A73"/>
                 </a:solidFill>
@@ -10036,7 +10063,7 @@
               </a:spcAft>
             </a:pPr>
             <a:r>
-              <a:rPr sz="1425" b="0" i="0">
+              <a:rPr sz="1139" b="0" i="0">
                 <a:solidFill>
                   <a:srgbClr val="64748B"/>
                 </a:solidFill>
@@ -10078,7 +10105,7 @@
               </a:spcAft>
             </a:pPr>
             <a:r>
-              <a:rPr sz="1575" b="0" i="0">
+              <a:rPr sz="1260" b="0" i="0">
                 <a:solidFill>
                   <a:srgbClr val="334155"/>
                 </a:solidFill>
@@ -10120,7 +10147,7 @@
               </a:spcAft>
             </a:pPr>
             <a:r>
-              <a:rPr sz="1575" b="0" i="0">
+              <a:rPr sz="1260" b="0" i="0">
                 <a:solidFill>
                   <a:srgbClr val="334155"/>
                 </a:solidFill>
@@ -10288,7 +10315,7 @@
               </a:spcAft>
             </a:pPr>
             <a:r>
-              <a:rPr sz="2100" b="1" i="0">
+              <a:rPr sz="1680" b="1" i="0">
                 <a:solidFill>
                   <a:srgbClr val="FFFFFF"/>
                 </a:solidFill>
@@ -10330,7 +10357,7 @@
               </a:spcAft>
             </a:pPr>
             <a:r>
-              <a:rPr sz="2850" b="1" i="0">
+              <a:rPr sz="2279" b="1" i="0">
                 <a:solidFill>
                   <a:srgbClr val="0A1B3E"/>
                 </a:solidFill>
@@ -10423,7 +10450,7 @@
               </a:spcAft>
             </a:pPr>
             <a:r>
-              <a:rPr sz="1650" b="1" i="0">
+              <a:rPr sz="1320" b="1" i="0">
                 <a:solidFill>
                   <a:srgbClr val="12AABD"/>
                 </a:solidFill>
@@ -10465,7 +10492,7 @@
               </a:spcAft>
             </a:pPr>
             <a:r>
-              <a:rPr sz="1800" b="1" i="0">
+              <a:rPr sz="1440" b="1" i="0">
                 <a:solidFill>
                   <a:srgbClr val="173A73"/>
                 </a:solidFill>
@@ -10507,7 +10534,7 @@
               </a:spcAft>
             </a:pPr>
             <a:r>
-              <a:rPr sz="1425" b="0" i="0">
+              <a:rPr sz="1139" b="0" i="0">
                 <a:solidFill>
                   <a:srgbClr val="64748B"/>
                 </a:solidFill>
@@ -10549,7 +10576,7 @@
               </a:spcAft>
             </a:pPr>
             <a:r>
-              <a:rPr sz="1575" b="0" i="0">
+              <a:rPr sz="1260" b="0" i="0">
                 <a:solidFill>
                   <a:srgbClr val="334155"/>
                 </a:solidFill>
@@ -10591,7 +10618,7 @@
               </a:spcAft>
             </a:pPr>
             <a:r>
-              <a:rPr sz="1575" b="0" i="0">
+              <a:rPr sz="1260" b="0" i="0">
                 <a:solidFill>
                   <a:srgbClr val="334155"/>
                 </a:solidFill>
@@ -10759,7 +10786,7 @@
               </a:spcAft>
             </a:pPr>
             <a:r>
-              <a:rPr sz="2100" b="1" i="0">
+              <a:rPr sz="1680" b="1" i="0">
                 <a:solidFill>
                   <a:srgbClr val="FFFFFF"/>
                 </a:solidFill>
@@ -10801,7 +10828,7 @@
               </a:spcAft>
             </a:pPr>
             <a:r>
-              <a:rPr sz="2850" b="1" i="0">
+              <a:rPr sz="2279" b="1" i="0">
                 <a:solidFill>
                   <a:srgbClr val="0A1B3E"/>
                 </a:solidFill>
@@ -10894,7 +10921,7 @@
               </a:spcAft>
             </a:pPr>
             <a:r>
-              <a:rPr sz="1650" b="1" i="0">
+              <a:rPr sz="1320" b="1" i="0">
                 <a:solidFill>
                   <a:srgbClr val="2DAA57"/>
                 </a:solidFill>
@@ -10936,7 +10963,7 @@
               </a:spcAft>
             </a:pPr>
             <a:r>
-              <a:rPr sz="1800" b="1" i="0">
+              <a:rPr sz="1440" b="1" i="0">
                 <a:solidFill>
                   <a:srgbClr val="173A73"/>
                 </a:solidFill>
@@ -10978,7 +11005,7 @@
               </a:spcAft>
             </a:pPr>
             <a:r>
-              <a:rPr sz="1425" b="0" i="0">
+              <a:rPr sz="1139" b="0" i="0">
                 <a:solidFill>
                   <a:srgbClr val="64748B"/>
                 </a:solidFill>
@@ -11020,7 +11047,7 @@
               </a:spcAft>
             </a:pPr>
             <a:r>
-              <a:rPr sz="1575" b="0" i="0">
+              <a:rPr sz="1260" b="0" i="0">
                 <a:solidFill>
                   <a:srgbClr val="334155"/>
                 </a:solidFill>
@@ -11062,7 +11089,7 @@
               </a:spcAft>
             </a:pPr>
             <a:r>
-              <a:rPr sz="1575" b="0" i="0">
+              <a:rPr sz="1260" b="0" i="0">
                 <a:solidFill>
                   <a:srgbClr val="334155"/>
                 </a:solidFill>
@@ -11200,7 +11227,7 @@
               </a:spcAft>
             </a:pPr>
             <a:r>
-              <a:rPr sz="1650" b="1" i="0">
+              <a:rPr sz="1320" b="1" i="0">
                 <a:solidFill>
                   <a:srgbClr val="FFFFFF"/>
                 </a:solidFill>
@@ -11242,7 +11269,7 @@
               </a:spcAft>
             </a:pPr>
             <a:r>
-              <a:rPr sz="1650" b="1" i="0">
+              <a:rPr sz="1320" b="1" i="0">
                 <a:solidFill>
                   <a:srgbClr val="64748B"/>
                 </a:solidFill>
@@ -11305,7 +11332,7 @@
               </a:spcAft>
             </a:pPr>
             <a:r>
-              <a:rPr sz="1875" b="1" i="0">
+              <a:rPr sz="1500" b="1" i="0">
                 <a:solidFill>
                   <a:srgbClr val="1263E6"/>
                 </a:solidFill>
@@ -11347,7 +11374,7 @@
               </a:spcAft>
             </a:pPr>
             <a:r>
-              <a:rPr sz="1350" b="0" i="0">
+              <a:rPr sz="1080" b="0" i="0">
                 <a:solidFill>
                   <a:srgbClr val="64748B"/>
                 </a:solidFill>
@@ -11389,7 +11416,7 @@
               </a:spcAft>
             </a:pPr>
             <a:r>
-              <a:rPr sz="1350" b="0" i="0">
+              <a:rPr sz="1080" b="0" i="0">
                 <a:solidFill>
                   <a:srgbClr val="94A3B8"/>
                 </a:solidFill>
@@ -11582,7 +11609,7 @@
               </a:spcAft>
             </a:pPr>
             <a:r>
-              <a:rPr sz="3600" b="1" i="0">
+              <a:rPr sz="2880" b="1" i="0">
                 <a:solidFill>
                   <a:srgbClr val="FFFFFF"/>
                 </a:solidFill>
@@ -11624,14 +11651,38 @@
               </a:spcAft>
             </a:pPr>
             <a:r>
-              <a:rPr sz="3000" b="1" i="0">
+              <a:rPr sz="2400" b="1" i="0" dirty="0" err="1">
                 <a:solidFill>
                   <a:srgbClr val="0A1B3E"/>
                 </a:solidFill>
                 <a:latin typeface="Microsoft YaHei"/>
               </a:rPr>
-              <a:t>这不是另一个 AI API，而是一套分层协作机制</a:t>
-            </a:r>
+              <a:t>这不是另一个</a:t>
+            </a:r>
+            <a:r>
+              <a:rPr sz="2400" b="1" i="0" dirty="0">
+                <a:solidFill>
+                  <a:srgbClr val="0A1B3E"/>
+                </a:solidFill>
+                <a:latin typeface="Microsoft YaHei"/>
+              </a:rPr>
+              <a:t> AI </a:t>
+            </a:r>
+            <a:r>
+              <a:rPr sz="2400" b="1" i="0" dirty="0" err="1">
+                <a:solidFill>
+                  <a:srgbClr val="0A1B3E"/>
+                </a:solidFill>
+                <a:latin typeface="Microsoft YaHei"/>
+              </a:rPr>
+              <a:t>API，而是一套分层协作机制</a:t>
+            </a:r>
+            <a:endParaRPr sz="2400" b="1" i="0" dirty="0">
+              <a:solidFill>
+                <a:srgbClr val="0A1B3E"/>
+              </a:solidFill>
+              <a:latin typeface="Microsoft YaHei"/>
+            </a:endParaRPr>
           </a:p>
         </p:txBody>
       </p:sp>
@@ -11666,7 +11717,7 @@
               </a:spcAft>
             </a:pPr>
             <a:r>
-              <a:rPr sz="1500" b="1" i="0">
+              <a:rPr sz="1200" b="1" i="0">
                 <a:solidFill>
                   <a:srgbClr val="1263E6"/>
                 </a:solidFill>
@@ -11708,7 +11759,7 @@
               </a:spcAft>
             </a:pPr>
             <a:r>
-              <a:rPr sz="1275" b="0" i="0">
+              <a:rPr sz="1019" b="0" i="0">
                 <a:solidFill>
                   <a:srgbClr val="64748B"/>
                 </a:solidFill>
@@ -11922,7 +11973,7 @@
               </a:spcAft>
             </a:pPr>
             <a:r>
-              <a:rPr sz="1650" b="1" i="0">
+              <a:rPr sz="1320" b="1" i="0">
                 <a:solidFill>
                   <a:srgbClr val="FFFFFF"/>
                 </a:solidFill>
@@ -11964,7 +12015,7 @@
               </a:spcAft>
             </a:pPr>
             <a:r>
-              <a:rPr sz="2325" b="1" i="0">
+              <a:rPr sz="1859" b="1" i="0">
                 <a:solidFill>
                   <a:srgbClr val="FFFFFF"/>
                 </a:solidFill>
@@ -12102,7 +12153,7 @@
               </a:spcAft>
             </a:pPr>
             <a:r>
-              <a:rPr sz="1425" b="1" i="0">
+              <a:rPr sz="1139" b="1" i="0">
                 <a:solidFill>
                   <a:srgbClr val="DCEAFF"/>
                 </a:solidFill>
@@ -12144,7 +12195,7 @@
               </a:spcAft>
             </a:pPr>
             <a:r>
-              <a:rPr sz="2025" b="1" i="0">
+              <a:rPr sz="1620" b="1" i="0">
                 <a:solidFill>
                   <a:srgbClr val="FFFFFF"/>
                 </a:solidFill>
@@ -12186,7 +12237,7 @@
               </a:spcAft>
             </a:pPr>
             <a:r>
-              <a:rPr sz="1350" b="0" i="0">
+              <a:rPr sz="1080" b="0" i="0">
                 <a:solidFill>
                   <a:srgbClr val="DCEAFF"/>
                 </a:solidFill>
@@ -12228,7 +12279,7 @@
               </a:spcAft>
             </a:pPr>
             <a:r>
-              <a:rPr sz="1350" b="0" i="0">
+              <a:rPr sz="1080" b="0" i="0">
                 <a:solidFill>
                   <a:srgbClr val="DCEAFF"/>
                 </a:solidFill>
@@ -12334,7 +12385,7 @@
               </a:spcAft>
             </a:pPr>
             <a:r>
-              <a:rPr sz="1575" b="1" i="0">
+              <a:rPr sz="1260" b="1" i="0">
                 <a:solidFill>
                   <a:srgbClr val="FFFFFF"/>
                 </a:solidFill>
@@ -12376,7 +12427,7 @@
               </a:spcAft>
             </a:pPr>
             <a:r>
-              <a:rPr sz="1950" b="1" i="0">
+              <a:rPr sz="1560" b="1" i="0">
                 <a:solidFill>
                   <a:srgbClr val="FFFFFF"/>
                 </a:solidFill>
@@ -12418,7 +12469,7 @@
               </a:spcAft>
             </a:pPr>
             <a:r>
-              <a:rPr sz="1350" b="0" i="0">
+              <a:rPr sz="1080" b="0" i="0">
                 <a:solidFill>
                   <a:srgbClr val="C9D9F1"/>
                 </a:solidFill>
@@ -12460,7 +12511,7 @@
               </a:spcAft>
             </a:pPr>
             <a:r>
-              <a:rPr sz="1350" b="0" i="0">
+              <a:rPr sz="1080" b="0" i="0">
                 <a:solidFill>
                   <a:srgbClr val="C9D9F1"/>
                 </a:solidFill>
@@ -12566,7 +12617,7 @@
               </a:spcAft>
             </a:pPr>
             <a:r>
-              <a:rPr sz="1575" b="1" i="0">
+              <a:rPr sz="1260" b="1" i="0">
                 <a:solidFill>
                   <a:srgbClr val="FFFFFF"/>
                 </a:solidFill>
@@ -12608,7 +12659,7 @@
               </a:spcAft>
             </a:pPr>
             <a:r>
-              <a:rPr sz="1950" b="1" i="0">
+              <a:rPr sz="1560" b="1" i="0">
                 <a:solidFill>
                   <a:srgbClr val="FFFFFF"/>
                 </a:solidFill>
@@ -12650,7 +12701,7 @@
               </a:spcAft>
             </a:pPr>
             <a:r>
-              <a:rPr sz="1350" b="0" i="0">
+              <a:rPr sz="1080" b="0" i="0">
                 <a:solidFill>
                   <a:srgbClr val="C9D9F1"/>
                 </a:solidFill>
@@ -12692,7 +12743,7 @@
               </a:spcAft>
             </a:pPr>
             <a:r>
-              <a:rPr sz="1350" b="0" i="0">
+              <a:rPr sz="1080" b="0" i="0">
                 <a:solidFill>
                   <a:srgbClr val="C9D9F1"/>
                 </a:solidFill>
@@ -12798,7 +12849,7 @@
               </a:spcAft>
             </a:pPr>
             <a:r>
-              <a:rPr sz="1575" b="1" i="0">
+              <a:rPr sz="1260" b="1" i="0">
                 <a:solidFill>
                   <a:srgbClr val="FFFFFF"/>
                 </a:solidFill>
@@ -12840,7 +12891,7 @@
               </a:spcAft>
             </a:pPr>
             <a:r>
-              <a:rPr sz="1950" b="1" i="0">
+              <a:rPr sz="1560" b="1" i="0">
                 <a:solidFill>
                   <a:srgbClr val="FFFFFF"/>
                 </a:solidFill>
@@ -12882,7 +12933,7 @@
               </a:spcAft>
             </a:pPr>
             <a:r>
-              <a:rPr sz="1350" b="0" i="0">
+              <a:rPr sz="1080" b="0" i="0">
                 <a:solidFill>
                   <a:srgbClr val="C9D9F1"/>
                 </a:solidFill>
@@ -12924,7 +12975,7 @@
               </a:spcAft>
             </a:pPr>
             <a:r>
-              <a:rPr sz="1350" b="0" i="0">
+              <a:rPr sz="1080" b="0" i="0">
                 <a:solidFill>
                   <a:srgbClr val="C9D9F1"/>
                 </a:solidFill>
@@ -13064,7 +13115,7 @@
               </a:spcAft>
             </a:pPr>
             <a:r>
-              <a:rPr sz="1425" b="1" i="0">
+              <a:rPr sz="1139" b="1" i="0">
                 <a:solidFill>
                   <a:srgbClr val="1263E6"/>
                 </a:solidFill>
@@ -13106,7 +13157,7 @@
               </a:spcAft>
             </a:pPr>
             <a:r>
-              <a:rPr sz="2250" b="1" i="0">
+              <a:rPr sz="1800" b="1" i="0">
                 <a:solidFill>
                   <a:srgbClr val="0A1B3E"/>
                 </a:solidFill>
@@ -13148,7 +13199,7 @@
               </a:spcAft>
             </a:pPr>
             <a:r>
-              <a:rPr sz="1350" b="0" i="0">
+              <a:rPr sz="1080" b="0" i="0">
                 <a:solidFill>
                   <a:srgbClr val="64748B"/>
                 </a:solidFill>
@@ -13335,7 +13386,7 @@
               </a:spcAft>
             </a:pPr>
             <a:r>
-              <a:rPr sz="1500" b="1" i="0">
+              <a:rPr sz="1200" b="1" i="0">
                 <a:solidFill>
                   <a:srgbClr val="FFFFFF"/>
                 </a:solidFill>
@@ -13377,7 +13428,7 @@
               </a:spcAft>
             </a:pPr>
             <a:r>
-              <a:rPr sz="1500" b="1" i="0">
+              <a:rPr sz="1200" b="1" i="0">
                 <a:solidFill>
                   <a:srgbClr val="1263E6"/>
                 </a:solidFill>
@@ -13419,7 +13470,7 @@
               </a:spcAft>
             </a:pPr>
             <a:r>
-              <a:rPr sz="1500" b="1" i="0">
+              <a:rPr sz="1200" b="1" i="0">
                 <a:solidFill>
                   <a:srgbClr val="FFFFFF"/>
                 </a:solidFill>
@@ -13461,7 +13512,7 @@
               </a:spcAft>
             </a:pPr>
             <a:r>
-              <a:rPr sz="1500" b="1" i="0">
+              <a:rPr sz="1200" b="1" i="0">
                 <a:solidFill>
                   <a:srgbClr val="2DAA57"/>
                 </a:solidFill>
@@ -13503,7 +13554,7 @@
               </a:spcAft>
             </a:pPr>
             <a:r>
-              <a:rPr sz="1350" b="1" i="0">
+              <a:rPr sz="1080" b="1" i="0">
                 <a:solidFill>
                   <a:srgbClr val="173A73"/>
                 </a:solidFill>
@@ -13545,7 +13596,7 @@
               </a:spcAft>
             </a:pPr>
             <a:r>
-              <a:rPr sz="1350" b="1" i="0">
+              <a:rPr sz="1080" b="1" i="0">
                 <a:solidFill>
                   <a:srgbClr val="173A73"/>
                 </a:solidFill>
@@ -13587,7 +13638,7 @@
               </a:spcAft>
             </a:pPr>
             <a:r>
-              <a:rPr sz="1350" b="1" i="0">
+              <a:rPr sz="1080" b="1" i="0">
                 <a:solidFill>
                   <a:srgbClr val="173A73"/>
                 </a:solidFill>
@@ -13629,7 +13680,7 @@
               </a:spcAft>
             </a:pPr>
             <a:r>
-              <a:rPr sz="1350" b="1" i="0">
+              <a:rPr sz="1080" b="1" i="0">
                 <a:solidFill>
                   <a:srgbClr val="173A73"/>
                 </a:solidFill>
@@ -13703,7 +13754,7 @@
               </a:spcAft>
             </a:pPr>
             <a:r>
-              <a:rPr sz="1800" b="1" i="0">
+              <a:rPr sz="1440" b="1" i="0">
                 <a:solidFill>
                   <a:srgbClr val="FFFFFF"/>
                 </a:solidFill>
@@ -13809,7 +13860,7 @@
               </a:spcAft>
             </a:pPr>
             <a:r>
-              <a:rPr sz="1575" b="1" i="0">
+              <a:rPr sz="1260" b="1" i="0">
                 <a:solidFill>
                   <a:srgbClr val="FFFFFF"/>
                 </a:solidFill>
@@ -13851,7 +13902,7 @@
               </a:spcAft>
             </a:pPr>
             <a:r>
-              <a:rPr sz="1800" b="1" i="0">
+              <a:rPr sz="1440" b="1" i="0">
                 <a:solidFill>
                   <a:srgbClr val="173A73"/>
                 </a:solidFill>
@@ -13893,7 +13944,7 @@
               </a:spcAft>
             </a:pPr>
             <a:r>
-              <a:rPr sz="1350" b="0" i="0">
+              <a:rPr sz="1080" b="0" i="0">
                 <a:solidFill>
                   <a:srgbClr val="94A3B8"/>
                 </a:solidFill>
@@ -14086,7 +14137,7 @@
               </a:spcAft>
             </a:pPr>
             <a:r>
-              <a:rPr sz="3600" b="1" i="0">
+              <a:rPr sz="2880" b="1" i="0">
                 <a:solidFill>
                   <a:srgbClr val="FFFFFF"/>
                 </a:solidFill>
@@ -14106,7 +14157,7 @@
         <p:spPr>
           <a:xfrm>
             <a:off x="1813560" y="408127"/>
-            <a:ext cx="6023409" cy="384048"/>
+            <a:ext cx="5518562" cy="369332"/>
           </a:xfrm>
           <a:prstGeom prst="rect">
             <a:avLst/>
@@ -14128,13 +14179,22 @@
               </a:spcAft>
             </a:pPr>
             <a:r>
-              <a:rPr sz="3150" b="1" i="0">
+              <a:rPr sz="2400" b="1" i="0" dirty="0" err="1">
                 <a:solidFill>
                   <a:srgbClr val="0A1B3E"/>
                 </a:solidFill>
                 <a:latin typeface="Microsoft YaHei"/>
               </a:rPr>
-              <a:t>五个阶段，把资料稳定变成可编辑 PPTX</a:t>
+              <a:t>五个阶段，把资料稳定变成可编辑</a:t>
+            </a:r>
+            <a:r>
+              <a:rPr sz="2400" b="1" i="0" dirty="0">
+                <a:solidFill>
+                  <a:srgbClr val="0A1B3E"/>
+                </a:solidFill>
+                <a:latin typeface="Microsoft YaHei"/>
+              </a:rPr>
+              <a:t> PPTX</a:t>
             </a:r>
           </a:p>
         </p:txBody>
@@ -14170,7 +14230,7 @@
               </a:spcAft>
             </a:pPr>
             <a:r>
-              <a:rPr sz="1500" b="1" i="0">
+              <a:rPr sz="1200" b="1" i="0">
                 <a:solidFill>
                   <a:srgbClr val="1263E6"/>
                 </a:solidFill>
@@ -14212,7 +14272,7 @@
               </a:spcAft>
             </a:pPr>
             <a:r>
-              <a:rPr sz="1275" b="0" i="0">
+              <a:rPr sz="1019" b="0" i="0">
                 <a:solidFill>
                   <a:srgbClr val="64748B"/>
                 </a:solidFill>
@@ -14426,7 +14486,7 @@
               </a:spcAft>
             </a:pPr>
             <a:r>
-              <a:rPr sz="1650" b="1" i="0">
+              <a:rPr sz="1320" b="1" i="0">
                 <a:solidFill>
                   <a:srgbClr val="FFFFFF"/>
                 </a:solidFill>
@@ -14468,7 +14528,7 @@
               </a:spcAft>
             </a:pPr>
             <a:r>
-              <a:rPr sz="2325" b="1" i="0">
+              <a:rPr sz="1859" b="1" i="0">
                 <a:solidFill>
                   <a:srgbClr val="FFFFFF"/>
                 </a:solidFill>
@@ -14531,7 +14591,7 @@
               </a:spcAft>
             </a:pPr>
             <a:r>
-              <a:rPr sz="3000" b="1" i="0">
+              <a:rPr sz="2400" b="1" i="0">
                 <a:solidFill>
                   <a:srgbClr val="1263E6"/>
                 </a:solidFill>
@@ -14573,7 +14633,7 @@
               </a:spcAft>
             </a:pPr>
             <a:r>
-              <a:rPr sz="3000" b="1" i="0">
+              <a:rPr sz="2400" b="1" i="0">
                 <a:solidFill>
                   <a:srgbClr val="12AABD"/>
                 </a:solidFill>
@@ -14615,7 +14675,7 @@
               </a:spcAft>
             </a:pPr>
             <a:r>
-              <a:rPr sz="3000" b="1" i="0">
+              <a:rPr sz="2400" b="1" i="0">
                 <a:solidFill>
                   <a:srgbClr val="2DAA57"/>
                 </a:solidFill>
@@ -14657,7 +14717,7 @@
               </a:spcAft>
             </a:pPr>
             <a:r>
-              <a:rPr sz="3000" b="1" i="0">
+              <a:rPr sz="2400" b="1" i="0">
                 <a:solidFill>
                   <a:srgbClr val="FFB21A"/>
                 </a:solidFill>
@@ -14825,7 +14885,7 @@
               </a:spcAft>
             </a:pPr>
             <a:r>
-              <a:rPr sz="2250" b="1" i="0">
+              <a:rPr sz="1800" b="1" i="0">
                 <a:solidFill>
                   <a:srgbClr val="FFFFFF"/>
                 </a:solidFill>
@@ -14897,7 +14957,7 @@
               </a:spcAft>
             </a:pPr>
             <a:r>
-              <a:rPr sz="1875" b="1" i="0">
+              <a:rPr sz="1500" b="1" i="0">
                 <a:solidFill>
                   <a:srgbClr val="1263E6"/>
                 </a:solidFill>
@@ -14939,7 +14999,7 @@
               </a:spcAft>
             </a:pPr>
             <a:r>
-              <a:rPr sz="2100" b="1" i="0">
+              <a:rPr sz="1680" b="1" i="0">
                 <a:solidFill>
                   <a:srgbClr val="1263E6"/>
                 </a:solidFill>
@@ -15002,7 +15062,7 @@
               </a:spcAft>
             </a:pPr>
             <a:r>
-              <a:rPr sz="1425" b="0" i="0">
+              <a:rPr sz="1139" b="0" i="0">
                 <a:solidFill>
                   <a:srgbClr val="334155"/>
                 </a:solidFill>
@@ -15044,7 +15104,7 @@
               </a:spcAft>
             </a:pPr>
             <a:r>
-              <a:rPr sz="1425" b="0" i="0">
+              <a:rPr sz="1139" b="0" i="0">
                 <a:solidFill>
                   <a:srgbClr val="334155"/>
                 </a:solidFill>
@@ -15212,7 +15272,7 @@
               </a:spcAft>
             </a:pPr>
             <a:r>
-              <a:rPr sz="2250" b="1" i="0">
+              <a:rPr sz="1800" b="1" i="0">
                 <a:solidFill>
                   <a:srgbClr val="FFFFFF"/>
                 </a:solidFill>
@@ -15284,7 +15344,7 @@
               </a:spcAft>
             </a:pPr>
             <a:r>
-              <a:rPr sz="1875" b="1" i="0">
+              <a:rPr sz="1500" b="1" i="0">
                 <a:solidFill>
                   <a:srgbClr val="1263E6"/>
                 </a:solidFill>
@@ -15326,7 +15386,7 @@
               </a:spcAft>
             </a:pPr>
             <a:r>
-              <a:rPr sz="2100" b="1" i="0">
+              <a:rPr sz="1680" b="1" i="0">
                 <a:solidFill>
                   <a:srgbClr val="1263E6"/>
                 </a:solidFill>
@@ -15389,7 +15449,7 @@
               </a:spcAft>
             </a:pPr>
             <a:r>
-              <a:rPr sz="1425" b="0" i="0">
+              <a:rPr sz="1139" b="0" i="0">
                 <a:solidFill>
                   <a:srgbClr val="334155"/>
                 </a:solidFill>
@@ -15431,7 +15491,7 @@
               </a:spcAft>
             </a:pPr>
             <a:r>
-              <a:rPr sz="1425" b="0" i="0">
+              <a:rPr sz="1139" b="0" i="0">
                 <a:solidFill>
                   <a:srgbClr val="334155"/>
                 </a:solidFill>
@@ -15599,7 +15659,7 @@
               </a:spcAft>
             </a:pPr>
             <a:r>
-              <a:rPr sz="2250" b="1" i="0">
+              <a:rPr sz="1800" b="1" i="0">
                 <a:solidFill>
                   <a:srgbClr val="FFFFFF"/>
                 </a:solidFill>
@@ -15671,7 +15731,7 @@
               </a:spcAft>
             </a:pPr>
             <a:r>
-              <a:rPr sz="1875" b="1" i="0">
+              <a:rPr sz="1500" b="1" i="0">
                 <a:solidFill>
                   <a:srgbClr val="12AABD"/>
                 </a:solidFill>
@@ -15713,7 +15773,7 @@
               </a:spcAft>
             </a:pPr>
             <a:r>
-              <a:rPr sz="2100" b="1" i="0">
+              <a:rPr sz="1680" b="1" i="0">
                 <a:solidFill>
                   <a:srgbClr val="12AABD"/>
                 </a:solidFill>
@@ -15776,7 +15836,7 @@
               </a:spcAft>
             </a:pPr>
             <a:r>
-              <a:rPr sz="1425" b="0" i="0">
+              <a:rPr sz="1139" b="0" i="0">
                 <a:solidFill>
                   <a:srgbClr val="334155"/>
                 </a:solidFill>
@@ -15818,7 +15878,7 @@
               </a:spcAft>
             </a:pPr>
             <a:r>
-              <a:rPr sz="1425" b="0" i="0">
+              <a:rPr sz="1139" b="0" i="0">
                 <a:solidFill>
                   <a:srgbClr val="334155"/>
                 </a:solidFill>
@@ -15986,7 +16046,7 @@
               </a:spcAft>
             </a:pPr>
             <a:r>
-              <a:rPr sz="2250" b="1" i="0">
+              <a:rPr sz="1800" b="1" i="0">
                 <a:solidFill>
                   <a:srgbClr val="FFFFFF"/>
                 </a:solidFill>
@@ -16058,7 +16118,7 @@
               </a:spcAft>
             </a:pPr>
             <a:r>
-              <a:rPr sz="1875" b="1" i="0">
+              <a:rPr sz="1500" b="1" i="0">
                 <a:solidFill>
                   <a:srgbClr val="2DAA57"/>
                 </a:solidFill>
@@ -16100,7 +16160,7 @@
               </a:spcAft>
             </a:pPr>
             <a:r>
-              <a:rPr sz="2100" b="1" i="0">
+              <a:rPr sz="1680" b="1" i="0">
                 <a:solidFill>
                   <a:srgbClr val="2DAA57"/>
                 </a:solidFill>
@@ -16163,7 +16223,7 @@
               </a:spcAft>
             </a:pPr>
             <a:r>
-              <a:rPr sz="1425" b="0" i="0">
+              <a:rPr sz="1139" b="0" i="0">
                 <a:solidFill>
                   <a:srgbClr val="334155"/>
                 </a:solidFill>
@@ -16205,7 +16265,7 @@
               </a:spcAft>
             </a:pPr>
             <a:r>
-              <a:rPr sz="1425" b="0" i="0">
+              <a:rPr sz="1139" b="0" i="0">
                 <a:solidFill>
                   <a:srgbClr val="334155"/>
                 </a:solidFill>
@@ -16373,7 +16433,7 @@
               </a:spcAft>
             </a:pPr>
             <a:r>
-              <a:rPr sz="2250" b="1" i="0">
+              <a:rPr sz="1800" b="1" i="0">
                 <a:solidFill>
                   <a:srgbClr val="FFFFFF"/>
                 </a:solidFill>
@@ -16445,7 +16505,7 @@
               </a:spcAft>
             </a:pPr>
             <a:r>
-              <a:rPr sz="1875" b="1" i="0">
+              <a:rPr sz="1500" b="1" i="0">
                 <a:solidFill>
                   <a:srgbClr val="E99500"/>
                 </a:solidFill>
@@ -16487,7 +16547,7 @@
               </a:spcAft>
             </a:pPr>
             <a:r>
-              <a:rPr sz="2100" b="1" i="0">
+              <a:rPr sz="1680" b="1" i="0">
                 <a:solidFill>
                   <a:srgbClr val="E99500"/>
                 </a:solidFill>
@@ -16550,7 +16610,7 @@
               </a:spcAft>
             </a:pPr>
             <a:r>
-              <a:rPr sz="1425" b="0" i="0">
+              <a:rPr sz="1139" b="0" i="0">
                 <a:solidFill>
                   <a:srgbClr val="334155"/>
                 </a:solidFill>
@@ -16592,7 +16652,7 @@
               </a:spcAft>
             </a:pPr>
             <a:r>
-              <a:rPr sz="1425" b="0" i="0">
+              <a:rPr sz="1139" b="0" i="0">
                 <a:solidFill>
                   <a:srgbClr val="334155"/>
                 </a:solidFill>
@@ -16698,7 +16758,7 @@
               </a:spcAft>
             </a:pPr>
             <a:r>
-              <a:rPr sz="1650" b="1" i="0">
+              <a:rPr sz="1320" b="1" i="0">
                 <a:solidFill>
                   <a:srgbClr val="FFFFFF"/>
                 </a:solidFill>
@@ -16740,7 +16800,7 @@
               </a:spcAft>
             </a:pPr>
             <a:r>
-              <a:rPr sz="1725" b="1" i="0">
+              <a:rPr sz="1380" b="1" i="0">
                 <a:solidFill>
                   <a:srgbClr val="173A73"/>
                 </a:solidFill>
@@ -16782,7 +16842,7 @@
               </a:spcAft>
             </a:pPr>
             <a:r>
-              <a:rPr sz="1350" b="0" i="0">
+              <a:rPr sz="1080" b="0" i="0">
                 <a:solidFill>
                   <a:srgbClr val="64748B"/>
                 </a:solidFill>
@@ -16824,7 +16884,7 @@
               </a:spcAft>
             </a:pPr>
             <a:r>
-              <a:rPr sz="1350" b="0" i="0">
+              <a:rPr sz="1080" b="0" i="0">
                 <a:solidFill>
                   <a:srgbClr val="94A3B8"/>
                 </a:solidFill>
@@ -16886,7 +16946,7 @@
           <a:lstStyle/>
           <a:p>
             <a:pPr algn="ctr"/>
-            <a:endParaRPr sz="1100" dirty="0"/>
+            <a:endParaRPr/>
           </a:p>
         </p:txBody>
       </p:sp>
@@ -16918,7 +16978,7 @@
           <a:lstStyle/>
           <a:p>
             <a:pPr algn="ctr"/>
-            <a:endParaRPr sz="1100"/>
+            <a:endParaRPr/>
           </a:p>
         </p:txBody>
       </p:sp>
@@ -16950,7 +17010,7 @@
           <a:lstStyle/>
           <a:p>
             <a:pPr algn="ctr"/>
-            <a:endParaRPr sz="1100"/>
+            <a:endParaRPr/>
           </a:p>
         </p:txBody>
       </p:sp>
@@ -16982,7 +17042,7 @@
           <a:lstStyle/>
           <a:p>
             <a:pPr algn="ctr"/>
-            <a:endParaRPr sz="1100"/>
+            <a:endParaRPr/>
           </a:p>
         </p:txBody>
       </p:sp>
@@ -16994,8 +17054,8 @@
         </p:nvSpPr>
         <p:spPr>
           <a:xfrm>
-            <a:off x="701754" y="370637"/>
-            <a:ext cx="317395" cy="307777"/>
+            <a:off x="625194" y="370637"/>
+            <a:ext cx="470514" cy="438912"/>
           </a:xfrm>
           <a:prstGeom prst="rect">
             <a:avLst/>
@@ -17017,7 +17077,7 @@
               </a:spcAft>
             </a:pPr>
             <a:r>
-              <a:rPr sz="2000" b="1" i="0">
+              <a:rPr sz="2880" b="1" i="0" dirty="0">
                 <a:solidFill>
                   <a:srgbClr val="FFFFFF"/>
                 </a:solidFill>
@@ -17037,7 +17097,7 @@
         <p:spPr>
           <a:xfrm>
             <a:off x="1813560" y="426872"/>
-            <a:ext cx="4307205" cy="276999"/>
+            <a:ext cx="5800240" cy="356616"/>
           </a:xfrm>
           <a:prstGeom prst="rect">
             <a:avLst/>
@@ -17059,14 +17119,38 @@
               </a:spcAft>
             </a:pPr>
             <a:r>
-              <a:rPr b="1" i="0">
+              <a:rPr sz="2340" b="1" i="0" dirty="0" err="1">
                 <a:solidFill>
                   <a:srgbClr val="0A1B3E"/>
                 </a:solidFill>
                 <a:latin typeface="Microsoft YaHei"/>
               </a:rPr>
-              <a:t>一页 SVG 同时承担设计、预览和编译真源</a:t>
-            </a:r>
+              <a:t>一页</a:t>
+            </a:r>
+            <a:r>
+              <a:rPr sz="2340" b="1" i="0" dirty="0">
+                <a:solidFill>
+                  <a:srgbClr val="0A1B3E"/>
+                </a:solidFill>
+                <a:latin typeface="Microsoft YaHei"/>
+              </a:rPr>
+              <a:t> SVG </a:t>
+            </a:r>
+            <a:r>
+              <a:rPr sz="2340" b="1" i="0" dirty="0" err="1">
+                <a:solidFill>
+                  <a:srgbClr val="0A1B3E"/>
+                </a:solidFill>
+                <a:latin typeface="Microsoft YaHei"/>
+              </a:rPr>
+              <a:t>同时承担设计、预览和编译真源</a:t>
+            </a:r>
+            <a:endParaRPr sz="2340" b="1" i="0" dirty="0">
+              <a:solidFill>
+                <a:srgbClr val="0A1B3E"/>
+              </a:solidFill>
+              <a:latin typeface="Microsoft YaHei"/>
+            </a:endParaRPr>
           </a:p>
         </p:txBody>
       </p:sp>
@@ -17078,8 +17162,8 @@
         </p:nvSpPr>
         <p:spPr>
           <a:xfrm>
-            <a:off x="10432323" y="316992"/>
-            <a:ext cx="1040349" cy="161583"/>
+            <a:off x="10244816" y="316992"/>
+            <a:ext cx="1227856" cy="182880"/>
           </a:xfrm>
           <a:prstGeom prst="rect">
             <a:avLst/>
@@ -17101,7 +17185,7 @@
               </a:spcAft>
             </a:pPr>
             <a:r>
-              <a:rPr sz="1050" b="1" i="0">
+              <a:rPr sz="1200" b="1" i="0">
                 <a:solidFill>
                   <a:srgbClr val="1263E6"/>
                 </a:solidFill>
@@ -17120,8 +17204,8 @@
         </p:nvSpPr>
         <p:spPr>
           <a:xfrm>
-            <a:off x="10279811" y="533857"/>
-            <a:ext cx="1191032" cy="153888"/>
+            <a:off x="10244099" y="533857"/>
+            <a:ext cx="1226744" cy="155448"/>
           </a:xfrm>
           <a:prstGeom prst="rect">
             <a:avLst/>
@@ -17143,7 +17227,7 @@
               </a:spcAft>
             </a:pPr>
             <a:r>
-              <a:rPr sz="1000" b="0" i="0">
+              <a:rPr sz="1019" b="0" i="0">
                 <a:solidFill>
                   <a:srgbClr val="64748B"/>
                 </a:solidFill>
@@ -17224,7 +17308,7 @@
           <a:lstStyle/>
           <a:p>
             <a:pPr algn="ctr"/>
-            <a:endParaRPr sz="1100"/>
+            <a:endParaRPr/>
           </a:p>
         </p:txBody>
       </p:sp>
@@ -17256,7 +17340,7 @@
           <a:lstStyle/>
           <a:p>
             <a:pPr algn="ctr"/>
-            <a:endParaRPr sz="1100"/>
+            <a:endParaRPr/>
           </a:p>
         </p:txBody>
       </p:sp>
@@ -17288,7 +17372,7 @@
           <a:lstStyle/>
           <a:p>
             <a:pPr algn="ctr"/>
-            <a:endParaRPr sz="1100"/>
+            <a:endParaRPr/>
           </a:p>
         </p:txBody>
       </p:sp>
@@ -17322,7 +17406,7 @@
           <a:lstStyle/>
           <a:p>
             <a:pPr algn="ctr"/>
-            <a:endParaRPr sz="1100"/>
+            <a:endParaRPr/>
           </a:p>
         </p:txBody>
       </p:sp>
@@ -17334,8 +17418,8 @@
         </p:nvSpPr>
         <p:spPr>
           <a:xfrm>
-            <a:off x="1625384" y="1584655"/>
-            <a:ext cx="84960" cy="169277"/>
+            <a:off x="1602754" y="1584655"/>
+            <a:ext cx="130223" cy="201168"/>
           </a:xfrm>
           <a:prstGeom prst="rect">
             <a:avLst/>
@@ -17357,7 +17441,7 @@
               </a:spcAft>
             </a:pPr>
             <a:r>
-              <a:rPr sz="1100" b="1" i="0" dirty="0">
+              <a:rPr sz="1320" b="1" i="0">
                 <a:solidFill>
                   <a:srgbClr val="FFFFFF"/>
                 </a:solidFill>
@@ -17377,7 +17461,7 @@
         <p:spPr>
           <a:xfrm>
             <a:off x="1981200" y="1543660"/>
-            <a:ext cx="5027017" cy="215444"/>
+            <a:ext cx="6897624" cy="283464"/>
           </a:xfrm>
           <a:prstGeom prst="rect">
             <a:avLst/>
@@ -17399,7 +17483,7 @@
               </a:spcAft>
             </a:pPr>
             <a:r>
-              <a:rPr sz="1400" b="1" i="0">
+              <a:rPr sz="1859" b="1" i="0">
                 <a:solidFill>
                   <a:srgbClr val="FFFFFF"/>
                 </a:solidFill>
@@ -17438,7 +17522,7 @@
           <a:lstStyle/>
           <a:p>
             <a:pPr algn="ctr"/>
-            <a:endParaRPr sz="1100"/>
+            <a:endParaRPr/>
           </a:p>
         </p:txBody>
       </p:sp>
@@ -17472,7 +17556,7 @@
           <a:lstStyle/>
           <a:p>
             <a:pPr algn="ctr"/>
-            <a:endParaRPr sz="1100"/>
+            <a:endParaRPr/>
           </a:p>
         </p:txBody>
       </p:sp>
@@ -17504,7 +17588,7 @@
           <a:lstStyle/>
           <a:p>
             <a:pPr algn="ctr"/>
-            <a:endParaRPr sz="1100"/>
+            <a:endParaRPr/>
           </a:p>
         </p:txBody>
       </p:sp>
@@ -17534,7 +17618,7 @@
           <a:lstStyle/>
           <a:p>
             <a:pPr algn="ctr"/>
-            <a:endParaRPr sz="1100"/>
+            <a:endParaRPr/>
           </a:p>
         </p:txBody>
       </p:sp>
@@ -17547,7 +17631,7 @@
         <p:spPr>
           <a:xfrm>
             <a:off x="1005840" y="2526792"/>
-            <a:ext cx="1835439" cy="161583"/>
+            <a:ext cx="2246986" cy="182880"/>
           </a:xfrm>
           <a:prstGeom prst="rect">
             <a:avLst/>
@@ -17569,7 +17653,7 @@
               </a:spcAft>
             </a:pPr>
             <a:r>
-              <a:rPr sz="1050" b="1" i="0" dirty="0">
+              <a:rPr sz="1200" b="1" i="0">
                 <a:solidFill>
                   <a:srgbClr val="FFFFFF"/>
                 </a:solidFill>
@@ -17606,7 +17690,7 @@
           <a:lstStyle/>
           <a:p>
             <a:pPr algn="ctr"/>
-            <a:endParaRPr sz="1100"/>
+            <a:endParaRPr/>
           </a:p>
         </p:txBody>
       </p:sp>
@@ -17636,7 +17720,7 @@
           <a:lstStyle/>
           <a:p>
             <a:pPr algn="ctr"/>
-            <a:endParaRPr sz="1100"/>
+            <a:endParaRPr/>
           </a:p>
         </p:txBody>
       </p:sp>
@@ -17666,7 +17750,7 @@
           <a:lstStyle/>
           <a:p>
             <a:pPr algn="ctr"/>
-            <a:endParaRPr sz="1100"/>
+            <a:endParaRPr/>
           </a:p>
         </p:txBody>
       </p:sp>
@@ -17698,7 +17782,7 @@
           <a:lstStyle/>
           <a:p>
             <a:pPr algn="ctr"/>
-            <a:endParaRPr sz="1100"/>
+            <a:endParaRPr/>
           </a:p>
         </p:txBody>
       </p:sp>
@@ -17728,7 +17812,7 @@
           <a:lstStyle/>
           <a:p>
             <a:pPr algn="ctr"/>
-            <a:endParaRPr sz="1100"/>
+            <a:endParaRPr/>
           </a:p>
         </p:txBody>
       </p:sp>
@@ -17758,7 +17842,7 @@
           <a:lstStyle/>
           <a:p>
             <a:pPr algn="ctr"/>
-            <a:endParaRPr sz="1100"/>
+            <a:endParaRPr/>
           </a:p>
         </p:txBody>
       </p:sp>
@@ -17788,7 +17872,7 @@
           <a:lstStyle/>
           <a:p>
             <a:pPr algn="ctr"/>
-            <a:endParaRPr sz="1100"/>
+            <a:endParaRPr/>
           </a:p>
         </p:txBody>
       </p:sp>
@@ -17818,7 +17902,7 @@
           <a:lstStyle/>
           <a:p>
             <a:pPr algn="ctr"/>
-            <a:endParaRPr sz="1100"/>
+            <a:endParaRPr/>
           </a:p>
         </p:txBody>
       </p:sp>
@@ -17848,7 +17932,7 @@
           <a:lstStyle/>
           <a:p>
             <a:pPr algn="ctr"/>
-            <a:endParaRPr sz="1100"/>
+            <a:endParaRPr/>
           </a:p>
         </p:txBody>
       </p:sp>
@@ -17878,7 +17962,7 @@
           <a:lstStyle/>
           <a:p>
             <a:pPr algn="ctr"/>
-            <a:endParaRPr sz="1100"/>
+            <a:endParaRPr/>
           </a:p>
         </p:txBody>
       </p:sp>
@@ -17911,8 +17995,8 @@
         </p:nvSpPr>
         <p:spPr>
           <a:xfrm>
-            <a:off x="4786649" y="5206289"/>
-            <a:ext cx="2051844" cy="153888"/>
+            <a:off x="4632960" y="5206289"/>
+            <a:ext cx="2205533" cy="164592"/>
           </a:xfrm>
           <a:prstGeom prst="rect">
             <a:avLst/>
@@ -17934,7 +18018,7 @@
               </a:spcAft>
             </a:pPr>
             <a:r>
-              <a:rPr sz="1000" b="0" i="0">
+              <a:rPr sz="1080" b="0" i="0">
                 <a:solidFill>
                   <a:srgbClr val="64748B"/>
                 </a:solidFill>
@@ -17973,7 +18057,7 @@
           <a:lstStyle/>
           <a:p>
             <a:pPr algn="ctr"/>
-            <a:endParaRPr sz="1100"/>
+            <a:endParaRPr/>
           </a:p>
         </p:txBody>
       </p:sp>
@@ -18007,7 +18091,7 @@
           <a:lstStyle/>
           <a:p>
             <a:pPr algn="ctr"/>
-            <a:endParaRPr sz="1100"/>
+            <a:endParaRPr/>
           </a:p>
         </p:txBody>
       </p:sp>
@@ -18037,7 +18121,7 @@
           <a:lstStyle/>
           <a:p>
             <a:pPr algn="ctr"/>
-            <a:endParaRPr sz="1100"/>
+            <a:endParaRPr/>
           </a:p>
         </p:txBody>
       </p:sp>
@@ -18049,8 +18133,8 @@
         </p:nvSpPr>
         <p:spPr>
           <a:xfrm>
-            <a:off x="7860973" y="2659075"/>
-            <a:ext cx="141064" cy="169277"/>
+            <a:off x="7837627" y="2659075"/>
+            <a:ext cx="187757" cy="201168"/>
           </a:xfrm>
           <a:prstGeom prst="rect">
             <a:avLst/>
@@ -18072,7 +18156,7 @@
               </a:spcAft>
             </a:pPr>
             <a:r>
-              <a:rPr sz="1100" b="1" i="0">
+              <a:rPr sz="1320" b="1" i="0">
                 <a:solidFill>
                   <a:srgbClr val="FFFFFF"/>
                 </a:solidFill>
@@ -18092,7 +18176,7 @@
         <p:spPr>
           <a:xfrm>
             <a:off x="8260080" y="2495550"/>
-            <a:ext cx="615553" cy="184666"/>
+            <a:ext cx="807720" cy="228600"/>
           </a:xfrm>
           <a:prstGeom prst="rect">
             <a:avLst/>
@@ -18114,7 +18198,7 @@
               </a:spcAft>
             </a:pPr>
             <a:r>
-              <a:rPr sz="1200" b="1" i="0">
+              <a:rPr sz="1500" b="1" i="0">
                 <a:solidFill>
                   <a:srgbClr val="1263E6"/>
                 </a:solidFill>
@@ -18134,7 +18218,7 @@
         <p:spPr>
           <a:xfrm>
             <a:off x="8260080" y="2798369"/>
-            <a:ext cx="2051844" cy="153888"/>
+            <a:ext cx="2205533" cy="164592"/>
           </a:xfrm>
           <a:prstGeom prst="rect">
             <a:avLst/>
@@ -18156,7 +18240,7 @@
               </a:spcAft>
             </a:pPr>
             <a:r>
-              <a:rPr sz="1000" b="0" i="0">
+              <a:rPr sz="1080" b="0" i="0">
                 <a:solidFill>
                   <a:srgbClr val="64748B"/>
                 </a:solidFill>
@@ -18195,7 +18279,7 @@
           <a:lstStyle/>
           <a:p>
             <a:pPr algn="ctr"/>
-            <a:endParaRPr sz="1100"/>
+            <a:endParaRPr/>
           </a:p>
         </p:txBody>
       </p:sp>
@@ -18229,7 +18313,7 @@
           <a:lstStyle/>
           <a:p>
             <a:pPr algn="ctr"/>
-            <a:endParaRPr sz="1100"/>
+            <a:endParaRPr/>
           </a:p>
         </p:txBody>
       </p:sp>
@@ -18259,7 +18343,7 @@
           <a:lstStyle/>
           <a:p>
             <a:pPr algn="ctr"/>
-            <a:endParaRPr sz="1100"/>
+            <a:endParaRPr/>
           </a:p>
         </p:txBody>
       </p:sp>
@@ -18271,8 +18355,8 @@
         </p:nvSpPr>
         <p:spPr>
           <a:xfrm>
-            <a:off x="7860973" y="3512515"/>
-            <a:ext cx="141064" cy="169277"/>
+            <a:off x="7837627" y="3512515"/>
+            <a:ext cx="187757" cy="201168"/>
           </a:xfrm>
           <a:prstGeom prst="rect">
             <a:avLst/>
@@ -18294,7 +18378,7 @@
               </a:spcAft>
             </a:pPr>
             <a:r>
-              <a:rPr sz="1100" b="1" i="0">
+              <a:rPr sz="1320" b="1" i="0">
                 <a:solidFill>
                   <a:srgbClr val="FFFFFF"/>
                 </a:solidFill>
@@ -18314,7 +18398,7 @@
         <p:spPr>
           <a:xfrm>
             <a:off x="8260080" y="3348990"/>
-            <a:ext cx="615553" cy="184666"/>
+            <a:ext cx="807720" cy="228600"/>
           </a:xfrm>
           <a:prstGeom prst="rect">
             <a:avLst/>
@@ -18336,7 +18420,7 @@
               </a:spcAft>
             </a:pPr>
             <a:r>
-              <a:rPr sz="1200" b="1" i="0">
+              <a:rPr sz="1500" b="1" i="0">
                 <a:solidFill>
                   <a:srgbClr val="12AABD"/>
                 </a:solidFill>
@@ -18356,7 +18440,7 @@
         <p:spPr>
           <a:xfrm>
             <a:off x="8260080" y="3651809"/>
-            <a:ext cx="1726435" cy="153888"/>
+            <a:ext cx="1842059" cy="164592"/>
           </a:xfrm>
           <a:prstGeom prst="rect">
             <a:avLst/>
@@ -18378,7 +18462,7 @@
               </a:spcAft>
             </a:pPr>
             <a:r>
-              <a:rPr sz="1000" b="0" i="0">
+              <a:rPr sz="1080" b="0" i="0">
                 <a:solidFill>
                   <a:srgbClr val="64748B"/>
                 </a:solidFill>
@@ -18417,7 +18501,7 @@
           <a:lstStyle/>
           <a:p>
             <a:pPr algn="ctr"/>
-            <a:endParaRPr sz="1100"/>
+            <a:endParaRPr/>
           </a:p>
         </p:txBody>
       </p:sp>
@@ -18451,7 +18535,7 @@
           <a:lstStyle/>
           <a:p>
             <a:pPr algn="ctr"/>
-            <a:endParaRPr sz="1100"/>
+            <a:endParaRPr/>
           </a:p>
         </p:txBody>
       </p:sp>
@@ -18481,7 +18565,7 @@
           <a:lstStyle/>
           <a:p>
             <a:pPr algn="ctr"/>
-            <a:endParaRPr sz="1100"/>
+            <a:endParaRPr/>
           </a:p>
         </p:txBody>
       </p:sp>
@@ -18493,8 +18577,8 @@
         </p:nvSpPr>
         <p:spPr>
           <a:xfrm>
-            <a:off x="7860973" y="4365955"/>
-            <a:ext cx="141064" cy="169277"/>
+            <a:off x="7837627" y="4365955"/>
+            <a:ext cx="187757" cy="201168"/>
           </a:xfrm>
           <a:prstGeom prst="rect">
             <a:avLst/>
@@ -18516,7 +18600,7 @@
               </a:spcAft>
             </a:pPr>
             <a:r>
-              <a:rPr sz="1100" b="1" i="0">
+              <a:rPr sz="1320" b="1" i="0">
                 <a:solidFill>
                   <a:srgbClr val="FFFFFF"/>
                 </a:solidFill>
@@ -18536,7 +18620,7 @@
         <p:spPr>
           <a:xfrm>
             <a:off x="8260080" y="4202430"/>
-            <a:ext cx="615553" cy="184666"/>
+            <a:ext cx="807720" cy="228600"/>
           </a:xfrm>
           <a:prstGeom prst="rect">
             <a:avLst/>
@@ -18558,7 +18642,7 @@
               </a:spcAft>
             </a:pPr>
             <a:r>
-              <a:rPr sz="1200" b="1" i="0">
+              <a:rPr sz="1500" b="1" i="0">
                 <a:solidFill>
                   <a:srgbClr val="2DAA57"/>
                 </a:solidFill>
@@ -18578,7 +18662,7 @@
         <p:spPr>
           <a:xfrm>
             <a:off x="8260080" y="4505249"/>
-            <a:ext cx="1923604" cy="153888"/>
+            <a:ext cx="2068373" cy="164592"/>
           </a:xfrm>
           <a:prstGeom prst="rect">
             <a:avLst/>
@@ -18600,7 +18684,7 @@
               </a:spcAft>
             </a:pPr>
             <a:r>
-              <a:rPr sz="1000" b="0" i="0">
+              <a:rPr sz="1080" b="0" i="0">
                 <a:solidFill>
                   <a:srgbClr val="64748B"/>
                 </a:solidFill>
@@ -18639,7 +18723,7 @@
           <a:lstStyle/>
           <a:p>
             <a:pPr algn="ctr"/>
-            <a:endParaRPr sz="1100"/>
+            <a:endParaRPr/>
           </a:p>
         </p:txBody>
       </p:sp>
@@ -18673,7 +18757,7 @@
           <a:lstStyle/>
           <a:p>
             <a:pPr algn="ctr"/>
-            <a:endParaRPr sz="1100"/>
+            <a:endParaRPr/>
           </a:p>
         </p:txBody>
       </p:sp>
@@ -18703,7 +18787,7 @@
           <a:lstStyle/>
           <a:p>
             <a:pPr algn="ctr"/>
-            <a:endParaRPr sz="1100"/>
+            <a:endParaRPr/>
           </a:p>
         </p:txBody>
       </p:sp>
@@ -18715,8 +18799,8 @@
         </p:nvSpPr>
         <p:spPr>
           <a:xfrm>
-            <a:off x="7860973" y="5158435"/>
-            <a:ext cx="141064" cy="169277"/>
+            <a:off x="7837627" y="5158435"/>
+            <a:ext cx="187757" cy="201168"/>
           </a:xfrm>
           <a:prstGeom prst="rect">
             <a:avLst/>
@@ -18738,7 +18822,7 @@
               </a:spcAft>
             </a:pPr>
             <a:r>
-              <a:rPr sz="1100" b="1" i="0">
+              <a:rPr sz="1320" b="1" i="0">
                 <a:solidFill>
                   <a:srgbClr val="FFFFFF"/>
                 </a:solidFill>
@@ -18758,7 +18842,7 @@
         <p:spPr>
           <a:xfrm>
             <a:off x="8260080" y="5010150"/>
-            <a:ext cx="615553" cy="184666"/>
+            <a:ext cx="807720" cy="228600"/>
           </a:xfrm>
           <a:prstGeom prst="rect">
             <a:avLst/>
@@ -18780,7 +18864,7 @@
               </a:spcAft>
             </a:pPr>
             <a:r>
-              <a:rPr sz="1200" b="1" i="0">
+              <a:rPr sz="1500" b="1" i="0">
                 <a:solidFill>
                   <a:srgbClr val="E99500"/>
                 </a:solidFill>
@@ -18800,7 +18884,7 @@
         <p:spPr>
           <a:xfrm>
             <a:off x="8260080" y="5297729"/>
-            <a:ext cx="1678345" cy="153888"/>
+            <a:ext cx="1840687" cy="164592"/>
           </a:xfrm>
           <a:prstGeom prst="rect">
             <a:avLst/>
@@ -18822,7 +18906,7 @@
               </a:spcAft>
             </a:pPr>
             <a:r>
-              <a:rPr sz="1000" b="0" i="0">
+              <a:rPr sz="1080" b="0" i="0">
                 <a:solidFill>
                   <a:srgbClr val="64748B"/>
                 </a:solidFill>
@@ -18863,7 +18947,7 @@
           <a:lstStyle/>
           <a:p>
             <a:pPr algn="ctr"/>
-            <a:endParaRPr sz="1100"/>
+            <a:endParaRPr/>
           </a:p>
         </p:txBody>
       </p:sp>
@@ -18893,7 +18977,7 @@
           <a:lstStyle/>
           <a:p>
             <a:pPr algn="ctr"/>
-            <a:endParaRPr sz="1100"/>
+            <a:endParaRPr/>
           </a:p>
         </p:txBody>
       </p:sp>
@@ -18905,8 +18989,8 @@
         </p:nvSpPr>
         <p:spPr>
           <a:xfrm>
-            <a:off x="1052384" y="6086704"/>
-            <a:ext cx="102592" cy="161583"/>
+            <a:off x="1052346" y="6086704"/>
+            <a:ext cx="102669" cy="192024"/>
           </a:xfrm>
           <a:prstGeom prst="rect">
             <a:avLst/>
@@ -18928,7 +19012,7 @@
               </a:spcAft>
             </a:pPr>
             <a:r>
-              <a:rPr sz="1050" b="1" i="0">
+              <a:rPr sz="1260" b="1" i="0">
                 <a:solidFill>
                   <a:srgbClr val="FFFFFF"/>
                 </a:solidFill>
@@ -18948,7 +19032,7 @@
         <p:spPr>
           <a:xfrm>
             <a:off x="1432560" y="6060338"/>
-            <a:ext cx="3579506" cy="169277"/>
+            <a:ext cx="4836079" cy="219456"/>
           </a:xfrm>
           <a:prstGeom prst="rect">
             <a:avLst/>
@@ -18970,7 +19054,7 @@
               </a:spcAft>
             </a:pPr>
             <a:r>
-              <a:rPr sz="1100" b="1" i="0">
+              <a:rPr sz="1440" b="1" i="0">
                 <a:solidFill>
                   <a:srgbClr val="173A73"/>
                 </a:solidFill>
@@ -18989,8 +19073,8 @@
         </p:nvSpPr>
         <p:spPr>
           <a:xfrm>
-            <a:off x="10642402" y="6097829"/>
-            <a:ext cx="432811" cy="153888"/>
+            <a:off x="10578694" y="6097829"/>
+            <a:ext cx="496519" cy="164592"/>
           </a:xfrm>
           <a:prstGeom prst="rect">
             <a:avLst/>
@@ -19012,7 +19096,7 @@
               </a:spcAft>
             </a:pPr>
             <a:r>
-              <a:rPr sz="1000" b="0" i="0">
+              <a:rPr sz="1080" b="0" i="0">
                 <a:solidFill>
                   <a:srgbClr val="94A3B8"/>
                 </a:solidFill>
@@ -19074,7 +19158,7 @@
           <a:lstStyle/>
           <a:p>
             <a:pPr algn="ctr"/>
-            <a:endParaRPr sz="1600"/>
+            <a:endParaRPr/>
           </a:p>
         </p:txBody>
       </p:sp>
@@ -19106,7 +19190,7 @@
           <a:lstStyle/>
           <a:p>
             <a:pPr algn="ctr"/>
-            <a:endParaRPr sz="1600"/>
+            <a:endParaRPr/>
           </a:p>
         </p:txBody>
       </p:sp>
@@ -19138,7 +19222,7 @@
           <a:lstStyle/>
           <a:p>
             <a:pPr algn="ctr"/>
-            <a:endParaRPr sz="1600"/>
+            <a:endParaRPr/>
           </a:p>
         </p:txBody>
       </p:sp>
@@ -19170,7 +19254,7 @@
           <a:lstStyle/>
           <a:p>
             <a:pPr algn="ctr"/>
-            <a:endParaRPr sz="1600"/>
+            <a:endParaRPr/>
           </a:p>
         </p:txBody>
       </p:sp>
@@ -19182,8 +19266,8 @@
         </p:nvSpPr>
         <p:spPr>
           <a:xfrm>
-            <a:off x="607177" y="370637"/>
-            <a:ext cx="506550" cy="492443"/>
+            <a:off x="625194" y="370637"/>
+            <a:ext cx="470514" cy="438912"/>
           </a:xfrm>
           <a:prstGeom prst="rect">
             <a:avLst/>
@@ -19205,7 +19289,7 @@
               </a:spcAft>
             </a:pPr>
             <a:r>
-              <a:rPr sz="3200" b="1" i="0">
+              <a:rPr sz="2880" b="1" i="0">
                 <a:solidFill>
                   <a:srgbClr val="FFFFFF"/>
                 </a:solidFill>
@@ -19225,7 +19309,7 @@
         <p:spPr>
           <a:xfrm>
             <a:off x="1813560" y="420624"/>
-            <a:ext cx="6463308" cy="430887"/>
+            <a:ext cx="5730240" cy="365760"/>
           </a:xfrm>
           <a:prstGeom prst="rect">
             <a:avLst/>
@@ -19247,7 +19331,7 @@
               </a:spcAft>
             </a:pPr>
             <a:r>
-              <a:rPr sz="2800" b="1" i="0">
+              <a:rPr sz="2400" b="1" i="0" dirty="0" err="1">
                 <a:solidFill>
                   <a:srgbClr val="0A1B3E"/>
                 </a:solidFill>
@@ -19255,6 +19339,12 @@
               </a:rPr>
               <a:t>转换策略优先保留编辑能力，再保住视觉</a:t>
             </a:r>
+            <a:endParaRPr sz="2400" b="1" i="0" dirty="0">
+              <a:solidFill>
+                <a:srgbClr val="0A1B3E"/>
+              </a:solidFill>
+              <a:latin typeface="Microsoft YaHei"/>
+            </a:endParaRPr>
           </a:p>
         </p:txBody>
       </p:sp>
@@ -19266,8 +19356,8 @@
         </p:nvSpPr>
         <p:spPr>
           <a:xfrm>
-            <a:off x="10096205" y="316992"/>
-            <a:ext cx="1376467" cy="215444"/>
+            <a:off x="10244816" y="316992"/>
+            <a:ext cx="1227856" cy="182880"/>
           </a:xfrm>
           <a:prstGeom prst="rect">
             <a:avLst/>
@@ -19289,7 +19379,7 @@
               </a:spcAft>
             </a:pPr>
             <a:r>
-              <a:rPr sz="1400" b="1" i="0">
+              <a:rPr sz="1200" b="1" i="0">
                 <a:solidFill>
                   <a:srgbClr val="1263E6"/>
                 </a:solidFill>
@@ -19308,8 +19398,8 @@
         </p:nvSpPr>
         <p:spPr>
           <a:xfrm>
-            <a:off x="10591371" y="533857"/>
-            <a:ext cx="879472" cy="184666"/>
+            <a:off x="10505770" y="533857"/>
+            <a:ext cx="965073" cy="155448"/>
           </a:xfrm>
           <a:prstGeom prst="rect">
             <a:avLst/>
@@ -19331,7 +19421,7 @@
               </a:spcAft>
             </a:pPr>
             <a:r>
-              <a:rPr sz="1200" b="0" i="0">
+              <a:rPr sz="1019" b="0" i="0">
                 <a:solidFill>
                   <a:srgbClr val="64748B"/>
                 </a:solidFill>
@@ -19412,7 +19502,7 @@
           <a:lstStyle/>
           <a:p>
             <a:pPr algn="ctr"/>
-            <a:endParaRPr sz="1600"/>
+            <a:endParaRPr/>
           </a:p>
         </p:txBody>
       </p:sp>
@@ -19444,7 +19534,7 @@
           <a:lstStyle/>
           <a:p>
             <a:pPr algn="ctr"/>
-            <a:endParaRPr sz="1600"/>
+            <a:endParaRPr/>
           </a:p>
         </p:txBody>
       </p:sp>
@@ -19476,7 +19566,7 @@
           <a:lstStyle/>
           <a:p>
             <a:pPr algn="ctr"/>
-            <a:endParaRPr sz="1600"/>
+            <a:endParaRPr/>
           </a:p>
         </p:txBody>
       </p:sp>
@@ -19510,7 +19600,7 @@
           <a:lstStyle/>
           <a:p>
             <a:pPr algn="ctr"/>
-            <a:endParaRPr sz="1600"/>
+            <a:endParaRPr/>
           </a:p>
         </p:txBody>
       </p:sp>
@@ -19522,8 +19612,8 @@
         </p:nvSpPr>
         <p:spPr>
           <a:xfrm>
-            <a:off x="1578899" y="1584655"/>
-            <a:ext cx="177934" cy="246221"/>
+            <a:off x="1614087" y="1584655"/>
+            <a:ext cx="107558" cy="201168"/>
           </a:xfrm>
           <a:prstGeom prst="rect">
             <a:avLst/>
@@ -19545,7 +19635,7 @@
               </a:spcAft>
             </a:pPr>
             <a:r>
-              <a:rPr sz="1600" b="1" i="0">
+              <a:rPr sz="1320" b="1" i="0">
                 <a:solidFill>
                   <a:srgbClr val="FFFFFF"/>
                 </a:solidFill>
@@ -19565,7 +19655,7 @@
         <p:spPr>
           <a:xfrm>
             <a:off x="1981200" y="1543660"/>
-            <a:ext cx="7150419" cy="307777"/>
+            <a:ext cx="6548774" cy="283464"/>
           </a:xfrm>
           <a:prstGeom prst="rect">
             <a:avLst/>
@@ -19587,7 +19677,7 @@
               </a:spcAft>
             </a:pPr>
             <a:r>
-              <a:rPr sz="2000" b="1" i="0">
+              <a:rPr sz="1859" b="1" i="0">
                 <a:solidFill>
                   <a:srgbClr val="FFFFFF"/>
                 </a:solidFill>
@@ -19626,7 +19716,7 @@
           <a:lstStyle/>
           <a:p>
             <a:pPr algn="ctr"/>
-            <a:endParaRPr sz="1600"/>
+            <a:endParaRPr/>
           </a:p>
         </p:txBody>
       </p:sp>
@@ -19660,7 +19750,7 @@
           <a:lstStyle/>
           <a:p>
             <a:pPr algn="ctr"/>
-            <a:endParaRPr sz="1600"/>
+            <a:endParaRPr/>
           </a:p>
         </p:txBody>
       </p:sp>
@@ -19692,7 +19782,7 @@
           <a:lstStyle/>
           <a:p>
             <a:pPr algn="ctr"/>
-            <a:endParaRPr sz="1600"/>
+            <a:endParaRPr/>
           </a:p>
         </p:txBody>
       </p:sp>
@@ -19722,7 +19812,7 @@
           <a:lstStyle/>
           <a:p>
             <a:pPr algn="ctr"/>
-            <a:endParaRPr sz="1600"/>
+            <a:endParaRPr/>
           </a:p>
         </p:txBody>
       </p:sp>
@@ -19756,7 +19846,7 @@
           <a:lstStyle/>
           <a:p>
             <a:pPr algn="ctr"/>
-            <a:endParaRPr sz="1600"/>
+            <a:endParaRPr/>
           </a:p>
         </p:txBody>
       </p:sp>
@@ -19768,8 +19858,8 @@
         </p:nvSpPr>
         <p:spPr>
           <a:xfrm>
-            <a:off x="1103851" y="2669438"/>
-            <a:ext cx="153888" cy="246221"/>
+            <a:off x="1122127" y="2669438"/>
+            <a:ext cx="117336" cy="219456"/>
           </a:xfrm>
           <a:prstGeom prst="rect">
             <a:avLst/>
@@ -19791,7 +19881,7 @@
               </a:spcAft>
             </a:pPr>
             <a:r>
-              <a:rPr sz="1600" b="1" i="0" dirty="0">
+              <a:rPr sz="1440" b="1" i="0">
                 <a:solidFill>
                   <a:srgbClr val="FFFFFF"/>
                 </a:solidFill>
@@ -19811,7 +19901,7 @@
         <p:spPr>
           <a:xfrm>
             <a:off x="1554480" y="2513533"/>
-            <a:ext cx="2068771" cy="307777"/>
+            <a:ext cx="1728216" cy="246888"/>
           </a:xfrm>
           <a:prstGeom prst="rect">
             <a:avLst/>
@@ -19833,7 +19923,7 @@
               </a:spcAft>
             </a:pPr>
             <a:r>
-              <a:rPr sz="2000" b="1" i="0">
+              <a:rPr sz="1620" b="1" i="0">
                 <a:solidFill>
                   <a:srgbClr val="FFFFFF"/>
                 </a:solidFill>
@@ -19853,7 +19943,7 @@
         <p:spPr>
           <a:xfrm>
             <a:off x="1554480" y="2813609"/>
-            <a:ext cx="1511632" cy="184666"/>
+            <a:ext cx="1412748" cy="164592"/>
           </a:xfrm>
           <a:prstGeom prst="rect">
             <a:avLst/>
@@ -19875,27 +19965,111 @@
               </a:spcAft>
             </a:pPr>
             <a:r>
+              <a:rPr sz="1080" b="0" i="0">
+                <a:solidFill>
+                  <a:srgbClr val="DCEAFF"/>
+                </a:solidFill>
+                <a:latin typeface="Microsoft YaHei"/>
+              </a:rPr>
+              <a:t>优先路径 · 逐项可编辑</a:t>
+            </a:r>
+          </a:p>
+        </p:txBody>
+      </p:sp>
+      <p:sp>
+        <p:nvSpPr>
+          <p:cNvPr id="26" name="SVG text 1"/>
+          <p:cNvSpPr txBox="1"/>
+          <p:nvPr/>
+        </p:nvSpPr>
+        <p:spPr>
+          <a:xfrm>
+            <a:off x="975360" y="3364230"/>
+            <a:ext cx="1402080" cy="228600"/>
+          </a:xfrm>
+          <a:prstGeom prst="rect">
+            <a:avLst/>
+          </a:prstGeom>
+          <a:noFill/>
+        </p:spPr>
+        <p:txBody>
+          <a:bodyPr wrap="none" lIns="0" tIns="0" rIns="0" bIns="0" anchor="t">
+            <a:spAutoFit/>
+          </a:bodyPr>
+          <a:lstStyle/>
+          <a:p>
+            <a:pPr algn="l">
+              <a:spcBef>
+                <a:spcPts val="0"/>
+              </a:spcBef>
+              <a:spcAft>
+                <a:spcPts val="0"/>
+              </a:spcAft>
+            </a:pPr>
+            <a:r>
+              <a:rPr sz="1500" b="1" i="0">
+                <a:solidFill>
+                  <a:srgbClr val="173A73"/>
+                </a:solidFill>
+                <a:latin typeface="Microsoft YaHei"/>
+              </a:rPr>
+              <a:t>文本与基础图形</a:t>
+            </a:r>
+          </a:p>
+        </p:txBody>
+      </p:sp>
+      <p:sp>
+        <p:nvSpPr>
+          <p:cNvPr id="27" name="SVG text 1"/>
+          <p:cNvSpPr txBox="1"/>
+          <p:nvPr/>
+        </p:nvSpPr>
+        <p:spPr>
+          <a:xfrm>
+            <a:off x="975360" y="3700272"/>
+            <a:ext cx="1072896" cy="182880"/>
+          </a:xfrm>
+          <a:prstGeom prst="rect">
+            <a:avLst/>
+          </a:prstGeom>
+          <a:noFill/>
+        </p:spPr>
+        <p:txBody>
+          <a:bodyPr wrap="none" lIns="0" tIns="0" rIns="0" bIns="0" anchor="t">
+            <a:spAutoFit/>
+          </a:bodyPr>
+          <a:lstStyle/>
+          <a:p>
+            <a:pPr algn="l">
+              <a:spcBef>
+                <a:spcPts val="0"/>
+              </a:spcBef>
+              <a:spcAft>
+                <a:spcPts val="0"/>
+              </a:spcAft>
+            </a:pPr>
+            <a:r>
               <a:rPr sz="1200" b="0" i="0">
                 <a:solidFill>
-                  <a:srgbClr val="DCEAFF"/>
-                </a:solidFill>
-                <a:latin typeface="Microsoft YaHei"/>
-              </a:rPr>
-              <a:t>优先路径 · 逐项可编辑</a:t>
-            </a:r>
-          </a:p>
-        </p:txBody>
-      </p:sp>
-      <p:sp>
-        <p:nvSpPr>
-          <p:cNvPr id="26" name="SVG text 1"/>
-          <p:cNvSpPr txBox="1"/>
-          <p:nvPr/>
-        </p:nvSpPr>
-        <p:spPr>
-          <a:xfrm>
-            <a:off x="975360" y="3364230"/>
-            <a:ext cx="1615827" cy="276999"/>
+                  <a:srgbClr val="334155"/>
+                </a:solidFill>
+                <a:latin typeface="Microsoft YaHei"/>
+              </a:rPr>
+              <a:t>• text / tspan</a:t>
+            </a:r>
+          </a:p>
+        </p:txBody>
+      </p:sp>
+      <p:sp>
+        <p:nvSpPr>
+          <p:cNvPr id="28" name="SVG text 1"/>
+          <p:cNvSpPr txBox="1"/>
+          <p:nvPr/>
+        </p:nvSpPr>
+        <p:spPr>
+          <a:xfrm>
+            <a:off x="975360" y="3959352"/>
+            <a:ext cx="2432304" cy="182880"/>
           </a:xfrm>
           <a:prstGeom prst="rect">
             <a:avLst/>
@@ -19917,27 +20091,27 @@
               </a:spcAft>
             </a:pPr>
             <a:r>
-              <a:rPr b="1" i="0">
-                <a:solidFill>
-                  <a:srgbClr val="173A73"/>
-                </a:solidFill>
-                <a:latin typeface="Microsoft YaHei"/>
-              </a:rPr>
-              <a:t>文本与基础图形</a:t>
-            </a:r>
-          </a:p>
-        </p:txBody>
-      </p:sp>
-      <p:sp>
-        <p:nvSpPr>
-          <p:cNvPr id="27" name="SVG text 1"/>
-          <p:cNvSpPr txBox="1"/>
-          <p:nvPr/>
-        </p:nvSpPr>
-        <p:spPr>
-          <a:xfrm>
-            <a:off x="975360" y="3700272"/>
-            <a:ext cx="1114857" cy="215444"/>
+              <a:rPr sz="1200" b="0" i="0">
+                <a:solidFill>
+                  <a:srgbClr val="334155"/>
+                </a:solidFill>
+                <a:latin typeface="Microsoft YaHei"/>
+              </a:rPr>
+              <a:t>• rect / circle / ellipse / line</a:t>
+            </a:r>
+          </a:p>
+        </p:txBody>
+      </p:sp>
+      <p:sp>
+        <p:nvSpPr>
+          <p:cNvPr id="29" name="SVG text 1"/>
+          <p:cNvSpPr txBox="1"/>
+          <p:nvPr/>
+        </p:nvSpPr>
+        <p:spPr>
+          <a:xfrm>
+            <a:off x="975360" y="4218432"/>
+            <a:ext cx="2761488" cy="182880"/>
           </a:xfrm>
           <a:prstGeom prst="rect">
             <a:avLst/>
@@ -19959,97 +20133,13 @@
               </a:spcAft>
             </a:pPr>
             <a:r>
-              <a:rPr sz="1400" b="0" i="0">
+              <a:rPr sz="1200" b="0" i="0">
                 <a:solidFill>
                   <a:srgbClr val="334155"/>
                 </a:solidFill>
                 <a:latin typeface="Microsoft YaHei"/>
               </a:rPr>
-              <a:t>• text / tspan</a:t>
-            </a:r>
-          </a:p>
-        </p:txBody>
-      </p:sp>
-      <p:sp>
-        <p:nvSpPr>
-          <p:cNvPr id="28" name="SVG text 1"/>
-          <p:cNvSpPr txBox="1"/>
-          <p:nvPr/>
-        </p:nvSpPr>
-        <p:spPr>
-          <a:xfrm>
-            <a:off x="975360" y="3959352"/>
-            <a:ext cx="2308004" cy="215444"/>
-          </a:xfrm>
-          <a:prstGeom prst="rect">
-            <a:avLst/>
-          </a:prstGeom>
-          <a:noFill/>
-        </p:spPr>
-        <p:txBody>
-          <a:bodyPr wrap="none" lIns="0" tIns="0" rIns="0" bIns="0" anchor="t">
-            <a:spAutoFit/>
-          </a:bodyPr>
-          <a:lstStyle/>
-          <a:p>
-            <a:pPr algn="l">
-              <a:spcBef>
-                <a:spcPts val="0"/>
-              </a:spcBef>
-              <a:spcAft>
-                <a:spcPts val="0"/>
-              </a:spcAft>
-            </a:pPr>
-            <a:r>
-              <a:rPr sz="1400" b="0" i="0">
-                <a:solidFill>
-                  <a:srgbClr val="334155"/>
-                </a:solidFill>
-                <a:latin typeface="Microsoft YaHei"/>
-              </a:rPr>
-              <a:t>• rect / circle / ellipse / line</a:t>
-            </a:r>
-          </a:p>
-        </p:txBody>
-      </p:sp>
-      <p:sp>
-        <p:nvSpPr>
-          <p:cNvPr id="29" name="SVG text 1"/>
-          <p:cNvSpPr txBox="1"/>
-          <p:nvPr/>
-        </p:nvSpPr>
-        <p:spPr>
-          <a:xfrm>
-            <a:off x="975360" y="4218432"/>
-            <a:ext cx="1781578" cy="215444"/>
-          </a:xfrm>
-          <a:prstGeom prst="rect">
-            <a:avLst/>
-          </a:prstGeom>
-          <a:noFill/>
-        </p:spPr>
-        <p:txBody>
-          <a:bodyPr wrap="none" lIns="0" tIns="0" rIns="0" bIns="0" anchor="t">
-            <a:spAutoFit/>
-          </a:bodyPr>
-          <a:lstStyle/>
-          <a:p>
-            <a:pPr algn="l">
-              <a:spcBef>
-                <a:spcPts val="0"/>
-              </a:spcBef>
-              <a:spcAft>
-                <a:spcPts val="0"/>
-              </a:spcAft>
-            </a:pPr>
-            <a:r>
-              <a:rPr sz="1400" b="0" i="0">
-                <a:solidFill>
-                  <a:srgbClr val="334155"/>
-                </a:solidFill>
-                <a:latin typeface="Microsoft YaHei"/>
-              </a:rPr>
-              <a:t>• image / 基础 group</a:t>
+              <a:t>• image / polygon / polyline / group</a:t>
             </a:r>
           </a:p>
         </p:txBody>
@@ -20084,7 +20174,7 @@
         <p:spPr>
           <a:xfrm>
             <a:off x="975360" y="4821784"/>
-            <a:ext cx="359073" cy="215444"/>
+            <a:ext cx="345643" cy="192024"/>
           </a:xfrm>
           <a:prstGeom prst="rect">
             <a:avLst/>
@@ -20106,7 +20196,7 @@
               </a:spcAft>
             </a:pPr>
             <a:r>
-              <a:rPr sz="1400" b="1" i="0">
+              <a:rPr sz="1260" b="1" i="0">
                 <a:solidFill>
                   <a:srgbClr val="1263E6"/>
                 </a:solidFill>
@@ -20126,7 +20216,7 @@
         <p:spPr>
           <a:xfrm>
             <a:off x="1447800" y="4840529"/>
-            <a:ext cx="2000548" cy="184666"/>
+            <a:ext cx="1794053" cy="164592"/>
           </a:xfrm>
           <a:prstGeom prst="rect">
             <a:avLst/>
@@ -20148,7 +20238,7 @@
               </a:spcAft>
             </a:pPr>
             <a:r>
-              <a:rPr sz="1200" b="0" i="0">
+              <a:rPr sz="1080" b="0" i="0">
                 <a:solidFill>
                   <a:srgbClr val="334155"/>
                 </a:solidFill>
@@ -20187,7 +20277,7 @@
           <a:lstStyle/>
           <a:p>
             <a:pPr algn="ctr"/>
-            <a:endParaRPr sz="1600"/>
+            <a:endParaRPr/>
           </a:p>
         </p:txBody>
       </p:sp>
@@ -20219,7 +20309,7 @@
           <a:lstStyle/>
           <a:p>
             <a:pPr algn="ctr"/>
-            <a:endParaRPr sz="1600"/>
+            <a:endParaRPr/>
           </a:p>
         </p:txBody>
       </p:sp>
@@ -20251,7 +20341,7 @@
           <a:lstStyle/>
           <a:p>
             <a:pPr algn="ctr"/>
-            <a:endParaRPr sz="1600"/>
+            <a:endParaRPr/>
           </a:p>
         </p:txBody>
       </p:sp>
@@ -20285,7 +20375,7 @@
           <a:lstStyle/>
           <a:p>
             <a:pPr algn="ctr"/>
-            <a:endParaRPr sz="1600"/>
+            <a:endParaRPr/>
           </a:p>
         </p:txBody>
       </p:sp>
@@ -20317,7 +20407,7 @@
           <a:lstStyle/>
           <a:p>
             <a:pPr algn="ctr"/>
-            <a:endParaRPr sz="1600"/>
+            <a:endParaRPr/>
           </a:p>
         </p:txBody>
       </p:sp>
@@ -20347,7 +20437,7 @@
           <a:lstStyle/>
           <a:p>
             <a:pPr algn="ctr"/>
-            <a:endParaRPr sz="1600"/>
+            <a:endParaRPr/>
           </a:p>
         </p:txBody>
       </p:sp>
@@ -20381,7 +20471,7 @@
           <a:lstStyle/>
           <a:p>
             <a:pPr algn="ctr"/>
-            <a:endParaRPr sz="1600"/>
+            <a:endParaRPr/>
           </a:p>
         </p:txBody>
       </p:sp>
@@ -20393,8 +20483,8 @@
         </p:nvSpPr>
         <p:spPr>
           <a:xfrm>
-            <a:off x="4868119" y="2669438"/>
-            <a:ext cx="123432" cy="246221"/>
+            <a:off x="4871167" y="2669438"/>
+            <a:ext cx="117336" cy="219456"/>
           </a:xfrm>
           <a:prstGeom prst="rect">
             <a:avLst/>
@@ -20416,7 +20506,7 @@
               </a:spcAft>
             </a:pPr>
             <a:r>
-              <a:rPr sz="1600" b="1" i="0">
+              <a:rPr sz="1440" b="1" i="0">
                 <a:solidFill>
                   <a:srgbClr val="FFFFFF"/>
                 </a:solidFill>
@@ -20436,7 +20526,7 @@
         <p:spPr>
           <a:xfrm>
             <a:off x="5303520" y="2494788"/>
-            <a:ext cx="1969514" cy="307777"/>
+            <a:ext cx="1934505" cy="274320"/>
           </a:xfrm>
           <a:prstGeom prst="rect">
             <a:avLst/>
@@ -20458,7 +20548,7 @@
               </a:spcAft>
             </a:pPr>
             <a:r>
-              <a:rPr sz="2000" b="1" i="0">
+              <a:rPr sz="1800" b="1" i="0">
                 <a:solidFill>
                   <a:srgbClr val="FFFFFF"/>
                 </a:solidFill>
@@ -20478,7 +20568,7 @@
         <p:spPr>
           <a:xfrm>
             <a:off x="5303520" y="2813609"/>
-            <a:ext cx="1511632" cy="184666"/>
+            <a:ext cx="1412748" cy="164592"/>
           </a:xfrm>
           <a:prstGeom prst="rect">
             <a:avLst/>
@@ -20500,27 +20590,111 @@
               </a:spcAft>
             </a:pPr>
             <a:r>
+              <a:rPr sz="1080" b="0" i="0">
+                <a:solidFill>
+                  <a:srgbClr val="FFF7E8"/>
+                </a:solidFill>
+                <a:latin typeface="Microsoft YaHei"/>
+              </a:rPr>
+              <a:t>保真路径 · 整体可编辑</a:t>
+            </a:r>
+          </a:p>
+        </p:txBody>
+      </p:sp>
+      <p:sp>
+        <p:nvSpPr>
+          <p:cNvPr id="43" name="SVG text 1"/>
+          <p:cNvSpPr txBox="1"/>
+          <p:nvPr/>
+        </p:nvSpPr>
+        <p:spPr>
+          <a:xfrm>
+            <a:off x="4724400" y="3364230"/>
+            <a:ext cx="1203960" cy="228600"/>
+          </a:xfrm>
+          <a:prstGeom prst="rect">
+            <a:avLst/>
+          </a:prstGeom>
+          <a:noFill/>
+        </p:spPr>
+        <p:txBody>
+          <a:bodyPr wrap="none" lIns="0" tIns="0" rIns="0" bIns="0" anchor="t">
+            <a:spAutoFit/>
+          </a:bodyPr>
+          <a:lstStyle/>
+          <a:p>
+            <a:pPr algn="l">
+              <a:spcBef>
+                <a:spcPts val="0"/>
+              </a:spcBef>
+              <a:spcAft>
+                <a:spcPts val="0"/>
+              </a:spcAft>
+            </a:pPr>
+            <a:r>
+              <a:rPr sz="1500" b="1" i="0">
+                <a:solidFill>
+                  <a:srgbClr val="8B5B00"/>
+                </a:solidFill>
+                <a:latin typeface="Microsoft YaHei"/>
+              </a:rPr>
+              <a:t>复杂视觉元素</a:t>
+            </a:r>
+          </a:p>
+        </p:txBody>
+      </p:sp>
+      <p:sp>
+        <p:nvSpPr>
+          <p:cNvPr id="44" name="SVG text 1"/>
+          <p:cNvSpPr txBox="1"/>
+          <p:nvPr/>
+        </p:nvSpPr>
+        <p:spPr>
+          <a:xfrm>
+            <a:off x="4724400" y="3700272"/>
+            <a:ext cx="2983992" cy="182880"/>
+          </a:xfrm>
+          <a:prstGeom prst="rect">
+            <a:avLst/>
+          </a:prstGeom>
+          <a:noFill/>
+        </p:spPr>
+        <p:txBody>
+          <a:bodyPr wrap="none" lIns="0" tIns="0" rIns="0" bIns="0" anchor="t">
+            <a:spAutoFit/>
+          </a:bodyPr>
+          <a:lstStyle/>
+          <a:p>
+            <a:pPr algn="l">
+              <a:spcBef>
+                <a:spcPts val="0"/>
+              </a:spcBef>
+              <a:spcAft>
+                <a:spcPts val="0"/>
+              </a:spcAft>
+            </a:pPr>
+            <a:r>
               <a:rPr sz="1200" b="0" i="0">
                 <a:solidFill>
-                  <a:srgbClr val="FFF7E8"/>
-                </a:solidFill>
-                <a:latin typeface="Microsoft YaHei"/>
-              </a:rPr>
-              <a:t>保真路径 · 整体可编辑</a:t>
-            </a:r>
-          </a:p>
-        </p:txBody>
-      </p:sp>
-      <p:sp>
-        <p:nvSpPr>
-          <p:cNvPr id="43" name="SVG text 1"/>
-          <p:cNvSpPr txBox="1"/>
-          <p:nvPr/>
-        </p:nvSpPr>
-        <p:spPr>
-          <a:xfrm>
-            <a:off x="4724400" y="3364230"/>
-            <a:ext cx="1384995" cy="276999"/>
+                  <a:srgbClr val="334155"/>
+                </a:solidFill>
+                <a:latin typeface="Microsoft YaHei"/>
+              </a:rPr>
+              <a:t>• complex path / marker / 虚线 freeform</a:t>
+            </a:r>
+          </a:p>
+        </p:txBody>
+      </p:sp>
+      <p:sp>
+        <p:nvSpPr>
+          <p:cNvPr id="45" name="SVG text 1"/>
+          <p:cNvSpPr txBox="1"/>
+          <p:nvPr/>
+        </p:nvSpPr>
+        <p:spPr>
+          <a:xfrm>
+            <a:off x="4724400" y="3959352"/>
+            <a:ext cx="1432560" cy="182880"/>
           </a:xfrm>
           <a:prstGeom prst="rect">
             <a:avLst/>
@@ -20542,27 +20716,27 @@
               </a:spcAft>
             </a:pPr>
             <a:r>
-              <a:rPr b="1" i="0">
-                <a:solidFill>
-                  <a:srgbClr val="8B5B00"/>
-                </a:solidFill>
-                <a:latin typeface="Microsoft YaHei"/>
-              </a:rPr>
-              <a:t>复杂视觉元素</a:t>
-            </a:r>
-          </a:p>
-        </p:txBody>
-      </p:sp>
-      <p:sp>
-        <p:nvSpPr>
-          <p:cNvPr id="44" name="SVG text 1"/>
-          <p:cNvSpPr txBox="1"/>
-          <p:nvPr/>
-        </p:nvSpPr>
-        <p:spPr>
-          <a:xfrm>
-            <a:off x="4724400" y="3700272"/>
-            <a:ext cx="2279150" cy="215444"/>
+              <a:rPr sz="1200" b="0" i="0">
+                <a:solidFill>
+                  <a:srgbClr val="334155"/>
+                </a:solidFill>
+                <a:latin typeface="Microsoft YaHei"/>
+              </a:rPr>
+              <a:t>• 渐变 / 裁剪 / 旋转</a:t>
+            </a:r>
+          </a:p>
+        </p:txBody>
+      </p:sp>
+      <p:sp>
+        <p:nvSpPr>
+          <p:cNvPr id="46" name="SVG text 1"/>
+          <p:cNvSpPr txBox="1"/>
+          <p:nvPr/>
+        </p:nvSpPr>
+        <p:spPr>
+          <a:xfrm>
+            <a:off x="4724400" y="4218432"/>
+            <a:ext cx="2223516" cy="182880"/>
           </a:xfrm>
           <a:prstGeom prst="rect">
             <a:avLst/>
@@ -20584,91 +20758,7 @@
               </a:spcAft>
             </a:pPr>
             <a:r>
-              <a:rPr sz="1400" b="0" i="0">
-                <a:solidFill>
-                  <a:srgbClr val="334155"/>
-                </a:solidFill>
-                <a:latin typeface="Microsoft YaHei"/>
-              </a:rPr>
-              <a:t>• path / polygon / polyline</a:t>
-            </a:r>
-          </a:p>
-        </p:txBody>
-      </p:sp>
-      <p:sp>
-        <p:nvSpPr>
-          <p:cNvPr id="45" name="SVG text 1"/>
-          <p:cNvSpPr txBox="1"/>
-          <p:nvPr/>
-        </p:nvSpPr>
-        <p:spPr>
-          <a:xfrm>
-            <a:off x="4724400" y="3959352"/>
-            <a:ext cx="1574149" cy="215444"/>
-          </a:xfrm>
-          <a:prstGeom prst="rect">
-            <a:avLst/>
-          </a:prstGeom>
-          <a:noFill/>
-        </p:spPr>
-        <p:txBody>
-          <a:bodyPr wrap="none" lIns="0" tIns="0" rIns="0" bIns="0" anchor="t">
-            <a:spAutoFit/>
-          </a:bodyPr>
-          <a:lstStyle/>
-          <a:p>
-            <a:pPr algn="l">
-              <a:spcBef>
-                <a:spcPts val="0"/>
-              </a:spcBef>
-              <a:spcAft>
-                <a:spcPts val="0"/>
-              </a:spcAft>
-            </a:pPr>
-            <a:r>
-              <a:rPr sz="1400" b="0" i="0">
-                <a:solidFill>
-                  <a:srgbClr val="334155"/>
-                </a:solidFill>
-                <a:latin typeface="Microsoft YaHei"/>
-              </a:rPr>
-              <a:t>• 渐变 / 裁剪 / 旋转</a:t>
-            </a:r>
-          </a:p>
-        </p:txBody>
-      </p:sp>
-      <p:sp>
-        <p:nvSpPr>
-          <p:cNvPr id="46" name="SVG text 1"/>
-          <p:cNvSpPr txBox="1"/>
-          <p:nvPr/>
-        </p:nvSpPr>
-        <p:spPr>
-          <a:xfrm>
-            <a:off x="4724400" y="4218432"/>
-            <a:ext cx="2503058" cy="215444"/>
-          </a:xfrm>
-          <a:prstGeom prst="rect">
-            <a:avLst/>
-          </a:prstGeom>
-          <a:noFill/>
-        </p:spPr>
-        <p:txBody>
-          <a:bodyPr wrap="none" lIns="0" tIns="0" rIns="0" bIns="0" anchor="t">
-            <a:spAutoFit/>
-          </a:bodyPr>
-          <a:lstStyle/>
-          <a:p>
-            <a:pPr algn="l">
-              <a:spcBef>
-                <a:spcPts val="0"/>
-              </a:spcBef>
-              <a:spcAft>
-                <a:spcPts val="0"/>
-              </a:spcAft>
-            </a:pPr>
-            <a:r>
-              <a:rPr sz="1400" b="0" i="0">
+              <a:rPr sz="1200" b="0" i="0">
                 <a:solidFill>
                   <a:srgbClr val="334155"/>
                 </a:solidFill>
@@ -20709,7 +20799,7 @@
         <p:spPr>
           <a:xfrm>
             <a:off x="4724400" y="4821784"/>
-            <a:ext cx="359073" cy="215444"/>
+            <a:ext cx="345643" cy="192024"/>
           </a:xfrm>
           <a:prstGeom prst="rect">
             <a:avLst/>
@@ -20731,7 +20821,7 @@
               </a:spcAft>
             </a:pPr>
             <a:r>
-              <a:rPr sz="1400" b="1" i="0">
+              <a:rPr sz="1260" b="1" i="0">
                 <a:solidFill>
                   <a:srgbClr val="E99500"/>
                 </a:solidFill>
@@ -20751,7 +20841,7 @@
         <p:spPr>
           <a:xfrm>
             <a:off x="5196840" y="4840529"/>
-            <a:ext cx="1846659" cy="184666"/>
+            <a:ext cx="1656893" cy="164592"/>
           </a:xfrm>
           <a:prstGeom prst="rect">
             <a:avLst/>
@@ -20773,7 +20863,7 @@
               </a:spcAft>
             </a:pPr>
             <a:r>
-              <a:rPr sz="1200" b="0" i="0">
+              <a:rPr sz="1080" b="0" i="0">
                 <a:solidFill>
                   <a:srgbClr val="334155"/>
                 </a:solidFill>
@@ -20812,7 +20902,7 @@
           <a:lstStyle/>
           <a:p>
             <a:pPr algn="ctr"/>
-            <a:endParaRPr sz="1600"/>
+            <a:endParaRPr/>
           </a:p>
         </p:txBody>
       </p:sp>
@@ -20844,7 +20934,7 @@
           <a:lstStyle/>
           <a:p>
             <a:pPr algn="ctr"/>
-            <a:endParaRPr sz="1600"/>
+            <a:endParaRPr/>
           </a:p>
         </p:txBody>
       </p:sp>
@@ -20876,7 +20966,7 @@
           <a:lstStyle/>
           <a:p>
             <a:pPr algn="ctr"/>
-            <a:endParaRPr sz="1600"/>
+            <a:endParaRPr/>
           </a:p>
         </p:txBody>
       </p:sp>
@@ -20910,7 +21000,7 @@
           <a:lstStyle/>
           <a:p>
             <a:pPr algn="ctr"/>
-            <a:endParaRPr sz="1600"/>
+            <a:endParaRPr/>
           </a:p>
         </p:txBody>
       </p:sp>
@@ -20942,7 +21032,7 @@
           <a:lstStyle/>
           <a:p>
             <a:pPr algn="ctr"/>
-            <a:endParaRPr sz="1600"/>
+            <a:endParaRPr/>
           </a:p>
         </p:txBody>
       </p:sp>
@@ -20972,7 +21062,7 @@
           <a:lstStyle/>
           <a:p>
             <a:pPr algn="ctr"/>
-            <a:endParaRPr sz="1600"/>
+            <a:endParaRPr/>
           </a:p>
         </p:txBody>
       </p:sp>
@@ -21006,7 +21096,7 @@
           <a:lstStyle/>
           <a:p>
             <a:pPr algn="ctr"/>
-            <a:endParaRPr sz="1600"/>
+            <a:endParaRPr/>
           </a:p>
         </p:txBody>
       </p:sp>
@@ -21018,8 +21108,8 @@
         </p:nvSpPr>
         <p:spPr>
           <a:xfrm>
-            <a:off x="8642807" y="2669438"/>
-            <a:ext cx="72136" cy="246221"/>
+            <a:off x="8620207" y="2669438"/>
+            <a:ext cx="117336" cy="219456"/>
           </a:xfrm>
           <a:prstGeom prst="rect">
             <a:avLst/>
@@ -21041,7 +21131,7 @@
               </a:spcAft>
             </a:pPr>
             <a:r>
-              <a:rPr sz="1600" b="1" i="0">
+              <a:rPr sz="1440" b="1" i="0">
                 <a:solidFill>
                   <a:srgbClr val="FFFFFF"/>
                 </a:solidFill>
@@ -21061,7 +21151,7 @@
         <p:spPr>
           <a:xfrm>
             <a:off x="9052560" y="2494788"/>
-            <a:ext cx="1025922" cy="307777"/>
+            <a:ext cx="969264" cy="274320"/>
           </a:xfrm>
           <a:prstGeom prst="rect">
             <a:avLst/>
@@ -21083,7 +21173,7 @@
               </a:spcAft>
             </a:pPr>
             <a:r>
-              <a:rPr sz="2000" b="1" i="0">
+              <a:rPr sz="1800" b="1" i="0">
                 <a:solidFill>
                   <a:srgbClr val="FFFFFF"/>
                 </a:solidFill>
@@ -21103,7 +21193,7 @@
         <p:spPr>
           <a:xfrm>
             <a:off x="9052560" y="2813609"/>
-            <a:ext cx="1357744" cy="184666"/>
+            <a:ext cx="1275588" cy="164592"/>
           </a:xfrm>
           <a:prstGeom prst="rect">
             <a:avLst/>
@@ -21125,27 +21215,111 @@
               </a:spcAft>
             </a:pPr>
             <a:r>
+              <a:rPr sz="1080" b="0" i="0">
+                <a:solidFill>
+                  <a:srgbClr val="FFE9EA"/>
+                </a:solidFill>
+                <a:latin typeface="Microsoft YaHei"/>
+              </a:rPr>
+              <a:t>阻断路径 · 给出诊断</a:t>
+            </a:r>
+          </a:p>
+        </p:txBody>
+      </p:sp>
+      <p:sp>
+        <p:nvSpPr>
+          <p:cNvPr id="60" name="SVG text 1"/>
+          <p:cNvSpPr txBox="1"/>
+          <p:nvPr/>
+        </p:nvSpPr>
+        <p:spPr>
+          <a:xfrm>
+            <a:off x="8473440" y="3364230"/>
+            <a:ext cx="1402080" cy="228600"/>
+          </a:xfrm>
+          <a:prstGeom prst="rect">
+            <a:avLst/>
+          </a:prstGeom>
+          <a:noFill/>
+        </p:spPr>
+        <p:txBody>
+          <a:bodyPr wrap="none" lIns="0" tIns="0" rIns="0" bIns="0" anchor="t">
+            <a:spAutoFit/>
+          </a:bodyPr>
+          <a:lstStyle/>
+          <a:p>
+            <a:pPr algn="l">
+              <a:spcBef>
+                <a:spcPts val="0"/>
+              </a:spcBef>
+              <a:spcAft>
+                <a:spcPts val="0"/>
+              </a:spcAft>
+            </a:pPr>
+            <a:r>
+              <a:rPr sz="1500" b="1" i="0">
+                <a:solidFill>
+                  <a:srgbClr val="A52229"/>
+                </a:solidFill>
+                <a:latin typeface="Microsoft YaHei"/>
+              </a:rPr>
+              <a:t>不可靠或不安全</a:t>
+            </a:r>
+          </a:p>
+        </p:txBody>
+      </p:sp>
+      <p:sp>
+        <p:nvSpPr>
+          <p:cNvPr id="61" name="SVG text 1"/>
+          <p:cNvSpPr txBox="1"/>
+          <p:nvPr/>
+        </p:nvSpPr>
+        <p:spPr>
+          <a:xfrm>
+            <a:off x="8473440" y="3700272"/>
+            <a:ext cx="1517904" cy="182880"/>
+          </a:xfrm>
+          <a:prstGeom prst="rect">
+            <a:avLst/>
+          </a:prstGeom>
+          <a:noFill/>
+        </p:spPr>
+        <p:txBody>
+          <a:bodyPr wrap="none" lIns="0" tIns="0" rIns="0" bIns="0" anchor="t">
+            <a:spAutoFit/>
+          </a:bodyPr>
+          <a:lstStyle/>
+          <a:p>
+            <a:pPr algn="l">
+              <a:spcBef>
+                <a:spcPts val="0"/>
+              </a:spcBef>
+              <a:spcAft>
+                <a:spcPts val="0"/>
+              </a:spcAft>
+            </a:pPr>
+            <a:r>
               <a:rPr sz="1200" b="0" i="0">
                 <a:solidFill>
-                  <a:srgbClr val="FFE9EA"/>
-                </a:solidFill>
-                <a:latin typeface="Microsoft YaHei"/>
-              </a:rPr>
-              <a:t>阻断路径 · 给出诊断</a:t>
-            </a:r>
-          </a:p>
-        </p:txBody>
-      </p:sp>
-      <p:sp>
-        <p:nvSpPr>
-          <p:cNvPr id="60" name="SVG text 1"/>
-          <p:cNvSpPr txBox="1"/>
-          <p:nvPr/>
-        </p:nvSpPr>
-        <p:spPr>
-          <a:xfrm>
-            <a:off x="8473440" y="3364230"/>
-            <a:ext cx="1615827" cy="276999"/>
+                  <a:srgbClr val="334155"/>
+                </a:solidFill>
+                <a:latin typeface="Microsoft YaHei"/>
+              </a:rPr>
+              <a:t>• 禁止元素或远程资源</a:t>
+            </a:r>
+          </a:p>
+        </p:txBody>
+      </p:sp>
+      <p:sp>
+        <p:nvSpPr>
+          <p:cNvPr id="62" name="SVG text 1"/>
+          <p:cNvSpPr txBox="1"/>
+          <p:nvPr/>
+        </p:nvSpPr>
+        <p:spPr>
+          <a:xfrm>
+            <a:off x="8473440" y="3959352"/>
+            <a:ext cx="1517904" cy="182880"/>
           </a:xfrm>
           <a:prstGeom prst="rect">
             <a:avLst/>
@@ -21167,27 +21341,27 @@
               </a:spcAft>
             </a:pPr>
             <a:r>
-              <a:rPr b="1" i="0">
-                <a:solidFill>
-                  <a:srgbClr val="A52229"/>
-                </a:solidFill>
-                <a:latin typeface="Microsoft YaHei"/>
-              </a:rPr>
-              <a:t>不可靠或不安全</a:t>
-            </a:r>
-          </a:p>
-        </p:txBody>
-      </p:sp>
-      <p:sp>
-        <p:nvSpPr>
-          <p:cNvPr id="61" name="SVG text 1"/>
-          <p:cNvSpPr txBox="1"/>
-          <p:nvPr/>
-        </p:nvSpPr>
-        <p:spPr>
-          <a:xfrm>
-            <a:off x="8473440" y="3700272"/>
-            <a:ext cx="1747273" cy="215444"/>
+              <a:rPr sz="1200" b="0" i="0">
+                <a:solidFill>
+                  <a:srgbClr val="334155"/>
+                </a:solidFill>
+                <a:latin typeface="Microsoft YaHei"/>
+              </a:rPr>
+              <a:t>• 无法保真的可见内容</a:t>
+            </a:r>
+          </a:p>
+        </p:txBody>
+      </p:sp>
+      <p:sp>
+        <p:nvSpPr>
+          <p:cNvPr id="63" name="SVG text 1"/>
+          <p:cNvSpPr txBox="1"/>
+          <p:nvPr/>
+        </p:nvSpPr>
+        <p:spPr>
+          <a:xfrm>
+            <a:off x="8473440" y="4218432"/>
+            <a:ext cx="1420368" cy="182880"/>
           </a:xfrm>
           <a:prstGeom prst="rect">
             <a:avLst/>
@@ -21209,91 +21383,7 @@
               </a:spcAft>
             </a:pPr>
             <a:r>
-              <a:rPr sz="1400" b="0" i="0">
-                <a:solidFill>
-                  <a:srgbClr val="334155"/>
-                </a:solidFill>
-                <a:latin typeface="Microsoft YaHei"/>
-              </a:rPr>
-              <a:t>• 禁止元素或远程资源</a:t>
-            </a:r>
-          </a:p>
-        </p:txBody>
-      </p:sp>
-      <p:sp>
-        <p:nvSpPr>
-          <p:cNvPr id="62" name="SVG text 1"/>
-          <p:cNvSpPr txBox="1"/>
-          <p:nvPr/>
-        </p:nvSpPr>
-        <p:spPr>
-          <a:xfrm>
-            <a:off x="8473440" y="3959352"/>
-            <a:ext cx="1747273" cy="215444"/>
-          </a:xfrm>
-          <a:prstGeom prst="rect">
-            <a:avLst/>
-          </a:prstGeom>
-          <a:noFill/>
-        </p:spPr>
-        <p:txBody>
-          <a:bodyPr wrap="none" lIns="0" tIns="0" rIns="0" bIns="0" anchor="t">
-            <a:spAutoFit/>
-          </a:bodyPr>
-          <a:lstStyle/>
-          <a:p>
-            <a:pPr algn="l">
-              <a:spcBef>
-                <a:spcPts val="0"/>
-              </a:spcBef>
-              <a:spcAft>
-                <a:spcPts val="0"/>
-              </a:spcAft>
-            </a:pPr>
-            <a:r>
-              <a:rPr sz="1400" b="0" i="0">
-                <a:solidFill>
-                  <a:srgbClr val="334155"/>
-                </a:solidFill>
-                <a:latin typeface="Microsoft YaHei"/>
-              </a:rPr>
-              <a:t>• 无法保真的可见内容</a:t>
-            </a:r>
-          </a:p>
-        </p:txBody>
-      </p:sp>
-      <p:sp>
-        <p:nvSpPr>
-          <p:cNvPr id="63" name="SVG text 1"/>
-          <p:cNvSpPr txBox="1"/>
-          <p:nvPr/>
-        </p:nvSpPr>
-        <p:spPr>
-          <a:xfrm>
-            <a:off x="8473440" y="4218432"/>
-            <a:ext cx="1573636" cy="215444"/>
-          </a:xfrm>
-          <a:prstGeom prst="rect">
-            <a:avLst/>
-          </a:prstGeom>
-          <a:noFill/>
-        </p:spPr>
-        <p:txBody>
-          <a:bodyPr wrap="none" lIns="0" tIns="0" rIns="0" bIns="0" anchor="t">
-            <a:spAutoFit/>
-          </a:bodyPr>
-          <a:lstStyle/>
-          <a:p>
-            <a:pPr algn="l">
-              <a:spcBef>
-                <a:spcPts val="0"/>
-              </a:spcBef>
-              <a:spcAft>
-                <a:spcPts val="0"/>
-              </a:spcAft>
-            </a:pPr>
-            <a:r>
-              <a:rPr sz="1400" b="0" i="0">
+              <a:rPr sz="1200" b="0" i="0">
                 <a:solidFill>
                   <a:srgbClr val="334155"/>
                 </a:solidFill>
@@ -21334,7 +21424,7 @@
         <p:spPr>
           <a:xfrm>
             <a:off x="8473440" y="4821784"/>
-            <a:ext cx="359073" cy="215444"/>
+            <a:ext cx="345643" cy="192024"/>
           </a:xfrm>
           <a:prstGeom prst="rect">
             <a:avLst/>
@@ -21356,7 +21446,7 @@
               </a:spcAft>
             </a:pPr>
             <a:r>
-              <a:rPr sz="1400" b="1" i="0">
+              <a:rPr sz="1260" b="1" i="0">
                 <a:solidFill>
                   <a:srgbClr val="EA3B42"/>
                 </a:solidFill>
@@ -21376,7 +21466,7 @@
         <p:spPr>
           <a:xfrm>
             <a:off x="8945880" y="4840529"/>
-            <a:ext cx="1692771" cy="184666"/>
+            <a:ext cx="1519733" cy="164592"/>
           </a:xfrm>
           <a:prstGeom prst="rect">
             <a:avLst/>
@@ -21398,7 +21488,7 @@
               </a:spcAft>
             </a:pPr>
             <a:r>
-              <a:rPr sz="1200" b="0" i="0">
+              <a:rPr sz="1080" b="0" i="0">
                 <a:solidFill>
                   <a:srgbClr val="334155"/>
                 </a:solidFill>
@@ -21437,7 +21527,7 @@
           <a:lstStyle/>
           <a:p>
             <a:pPr algn="ctr"/>
-            <a:endParaRPr sz="1600"/>
+            <a:endParaRPr/>
           </a:p>
         </p:txBody>
       </p:sp>
@@ -21469,7 +21559,7 @@
           <a:lstStyle/>
           <a:p>
             <a:pPr algn="ctr"/>
-            <a:endParaRPr sz="1600"/>
+            <a:endParaRPr/>
           </a:p>
         </p:txBody>
       </p:sp>
@@ -21503,7 +21593,7 @@
           <a:lstStyle/>
           <a:p>
             <a:pPr algn="ctr"/>
-            <a:endParaRPr sz="1600"/>
+            <a:endParaRPr/>
           </a:p>
         </p:txBody>
       </p:sp>
@@ -21533,7 +21623,7 @@
           <a:lstStyle/>
           <a:p>
             <a:pPr algn="ctr"/>
-            <a:endParaRPr sz="1600"/>
+            <a:endParaRPr/>
           </a:p>
         </p:txBody>
       </p:sp>
@@ -21545,8 +21635,8 @@
         </p:nvSpPr>
         <p:spPr>
           <a:xfrm>
-            <a:off x="1038263" y="6049975"/>
-            <a:ext cx="131447" cy="246221"/>
+            <a:off x="1050207" y="6049975"/>
+            <a:ext cx="107558" cy="201168"/>
           </a:xfrm>
           <a:prstGeom prst="rect">
             <a:avLst/>
@@ -21568,7 +21658,7 @@
               </a:spcAft>
             </a:pPr>
             <a:r>
-              <a:rPr sz="1600" b="1" i="0">
+              <a:rPr sz="1320" b="1" i="0">
                 <a:solidFill>
                   <a:srgbClr val="FFFFFF"/>
                 </a:solidFill>
@@ -21588,7 +21678,7 @@
         <p:spPr>
           <a:xfrm>
             <a:off x="1447800" y="5914187"/>
-            <a:ext cx="5207003" cy="246221"/>
+            <a:ext cx="4567135" cy="210312"/>
           </a:xfrm>
           <a:prstGeom prst="rect">
             <a:avLst/>
@@ -21610,7 +21700,7 @@
               </a:spcAft>
             </a:pPr>
             <a:r>
-              <a:rPr sz="1600" b="1" i="0">
+              <a:rPr sz="1380" b="1" i="0">
                 <a:solidFill>
                   <a:srgbClr val="173A73"/>
                 </a:solidFill>
@@ -21630,7 +21720,7 @@
         <p:spPr>
           <a:xfrm>
             <a:off x="1447800" y="6174029"/>
-            <a:ext cx="2476640" cy="184666"/>
+            <a:ext cx="2320747" cy="164592"/>
           </a:xfrm>
           <a:prstGeom prst="rect">
             <a:avLst/>
@@ -21652,7 +21742,7 @@
               </a:spcAft>
             </a:pPr>
             <a:r>
-              <a:rPr sz="1200" b="0" i="0">
+              <a:rPr sz="1080" b="0" i="0">
                 <a:solidFill>
                   <a:srgbClr val="64748B"/>
                 </a:solidFill>
@@ -21671,8 +21761,8 @@
         </p:nvSpPr>
         <p:spPr>
           <a:xfrm>
-            <a:off x="10560649" y="6074969"/>
-            <a:ext cx="514564" cy="184666"/>
+            <a:off x="10578694" y="6074969"/>
+            <a:ext cx="496519" cy="164592"/>
           </a:xfrm>
           <a:prstGeom prst="rect">
             <a:avLst/>
@@ -21694,7 +21784,7 @@
               </a:spcAft>
             </a:pPr>
             <a:r>
-              <a:rPr sz="1200" b="0" i="0">
+              <a:rPr sz="1080" b="0" i="0">
                 <a:solidFill>
                   <a:srgbClr val="94A3B8"/>
                 </a:solidFill>
@@ -21887,7 +21977,7 @@
               </a:spcAft>
             </a:pPr>
             <a:r>
-              <a:rPr sz="3600" b="1" i="0">
+              <a:rPr sz="2880" b="1" i="0">
                 <a:solidFill>
                   <a:srgbClr val="FFFFFF"/>
                 </a:solidFill>
@@ -21929,7 +22019,7 @@
               </a:spcAft>
             </a:pPr>
             <a:r>
-              <a:rPr sz="2775" b="1" i="0">
+              <a:rPr sz="2220" b="1" i="0">
                 <a:solidFill>
                   <a:srgbClr val="0A1B3E"/>
                 </a:solidFill>
@@ -21971,7 +22061,7 @@
               </a:spcAft>
             </a:pPr>
             <a:r>
-              <a:rPr sz="1500" b="1" i="0">
+              <a:rPr sz="1200" b="1" i="0">
                 <a:solidFill>
                   <a:srgbClr val="1263E6"/>
                 </a:solidFill>
@@ -22013,7 +22103,7 @@
               </a:spcAft>
             </a:pPr>
             <a:r>
-              <a:rPr sz="1275" b="0" i="0">
+              <a:rPr sz="1019" b="0" i="0">
                 <a:solidFill>
                   <a:srgbClr val="64748B"/>
                 </a:solidFill>
@@ -22227,7 +22317,7 @@
               </a:spcAft>
             </a:pPr>
             <a:r>
-              <a:rPr sz="1650" b="1" i="0">
+              <a:rPr sz="1320" b="1" i="0">
                 <a:solidFill>
                   <a:srgbClr val="FFFFFF"/>
                 </a:solidFill>
@@ -22269,7 +22359,7 @@
               </a:spcAft>
             </a:pPr>
             <a:r>
-              <a:rPr sz="2325" b="1" i="0">
+              <a:rPr sz="1859" b="1" i="0">
                 <a:solidFill>
                   <a:srgbClr val="FFFFFF"/>
                 </a:solidFill>
@@ -22407,7 +22497,7 @@
               </a:spcAft>
             </a:pPr>
             <a:r>
-              <a:rPr sz="1575" b="1" i="0">
+              <a:rPr sz="1260" b="1" i="0">
                 <a:solidFill>
                   <a:srgbClr val="FFFFFF"/>
                 </a:solidFill>
@@ -22449,7 +22539,7 @@
               </a:spcAft>
             </a:pPr>
             <a:r>
-              <a:rPr sz="1875" b="1" i="0">
+              <a:rPr sz="1500" b="1" i="0">
                 <a:solidFill>
                   <a:srgbClr val="1263E6"/>
                 </a:solidFill>
@@ -22491,7 +22581,7 @@
               </a:spcAft>
             </a:pPr>
             <a:r>
-              <a:rPr sz="1350" b="0" i="0">
+              <a:rPr sz="1080" b="0" i="0">
                 <a:solidFill>
                   <a:srgbClr val="64748B"/>
                 </a:solidFill>
@@ -22563,7 +22653,7 @@
               </a:spcAft>
             </a:pPr>
             <a:r>
-              <a:rPr sz="1275" b="1" i="0">
+              <a:rPr sz="1019" b="1" i="0">
                 <a:solidFill>
                   <a:srgbClr val="2DAA57"/>
                 </a:solidFill>
@@ -22701,7 +22791,7 @@
               </a:spcAft>
             </a:pPr>
             <a:r>
-              <a:rPr sz="1575" b="1" i="0">
+              <a:rPr sz="1260" b="1" i="0">
                 <a:solidFill>
                   <a:srgbClr val="FFFFFF"/>
                 </a:solidFill>
@@ -22743,7 +22833,7 @@
               </a:spcAft>
             </a:pPr>
             <a:r>
-              <a:rPr sz="1875" b="1" i="0">
+              <a:rPr sz="1500" b="1" i="0">
                 <a:solidFill>
                   <a:srgbClr val="12AABD"/>
                 </a:solidFill>
@@ -22785,7 +22875,7 @@
               </a:spcAft>
             </a:pPr>
             <a:r>
-              <a:rPr sz="1350" b="0" i="0">
+              <a:rPr sz="1080" b="0" i="0">
                 <a:solidFill>
                   <a:srgbClr val="64748B"/>
                 </a:solidFill>
@@ -22857,7 +22947,7 @@
               </a:spcAft>
             </a:pPr>
             <a:r>
-              <a:rPr sz="1275" b="1" i="0">
+              <a:rPr sz="1019" b="1" i="0">
                 <a:solidFill>
                   <a:srgbClr val="2DAA57"/>
                 </a:solidFill>
@@ -22995,7 +23085,7 @@
               </a:spcAft>
             </a:pPr>
             <a:r>
-              <a:rPr sz="1575" b="1" i="0">
+              <a:rPr sz="1260" b="1" i="0">
                 <a:solidFill>
                   <a:srgbClr val="FFFFFF"/>
                 </a:solidFill>
@@ -23037,7 +23127,7 @@
               </a:spcAft>
             </a:pPr>
             <a:r>
-              <a:rPr sz="1875" b="1" i="0">
+              <a:rPr sz="1500" b="1" i="0">
                 <a:solidFill>
                   <a:srgbClr val="2DAA57"/>
                 </a:solidFill>
@@ -23079,7 +23169,7 @@
               </a:spcAft>
             </a:pPr>
             <a:r>
-              <a:rPr sz="1350" b="0" i="0">
+              <a:rPr sz="1080" b="0" i="0">
                 <a:solidFill>
                   <a:srgbClr val="64748B"/>
                 </a:solidFill>
@@ -23151,7 +23241,7 @@
               </a:spcAft>
             </a:pPr>
             <a:r>
-              <a:rPr sz="1275" b="1" i="0">
+              <a:rPr sz="1019" b="1" i="0">
                 <a:solidFill>
                   <a:srgbClr val="2DAA57"/>
                 </a:solidFill>
@@ -23289,7 +23379,7 @@
               </a:spcAft>
             </a:pPr>
             <a:r>
-              <a:rPr sz="1575" b="1" i="0">
+              <a:rPr sz="1260" b="1" i="0">
                 <a:solidFill>
                   <a:srgbClr val="FFFFFF"/>
                 </a:solidFill>
@@ -23331,7 +23421,7 @@
               </a:spcAft>
             </a:pPr>
             <a:r>
-              <a:rPr sz="1875" b="1" i="0">
+              <a:rPr sz="1500" b="1" i="0">
                 <a:solidFill>
                   <a:srgbClr val="E99500"/>
                 </a:solidFill>
@@ -23373,7 +23463,7 @@
               </a:spcAft>
             </a:pPr>
             <a:r>
-              <a:rPr sz="1350" b="0" i="0">
+              <a:rPr sz="1080" b="0" i="0">
                 <a:solidFill>
                   <a:srgbClr val="64748B"/>
                 </a:solidFill>
@@ -23445,7 +23535,7 @@
               </a:spcAft>
             </a:pPr>
             <a:r>
-              <a:rPr sz="1275" b="1" i="0">
+              <a:rPr sz="1019" b="1" i="0">
                 <a:solidFill>
                   <a:srgbClr val="2DAA57"/>
                 </a:solidFill>
@@ -23583,7 +23673,7 @@
               </a:spcAft>
             </a:pPr>
             <a:r>
-              <a:rPr sz="1575" b="1" i="0">
+              <a:rPr sz="1260" b="1" i="0">
                 <a:solidFill>
                   <a:srgbClr val="FFFFFF"/>
                 </a:solidFill>
@@ -23625,7 +23715,7 @@
               </a:spcAft>
             </a:pPr>
             <a:r>
-              <a:rPr sz="1875" b="1" i="0">
+              <a:rPr sz="1500" b="1" i="0">
                 <a:solidFill>
                   <a:srgbClr val="EA3B42"/>
                 </a:solidFill>
@@ -23667,7 +23757,7 @@
               </a:spcAft>
             </a:pPr>
             <a:r>
-              <a:rPr sz="1350" b="0" i="0">
+              <a:rPr sz="1080" b="0" i="0">
                 <a:solidFill>
                   <a:srgbClr val="64748B"/>
                 </a:solidFill>
@@ -23739,7 +23829,7 @@
               </a:spcAft>
             </a:pPr>
             <a:r>
-              <a:rPr sz="1275" b="1" i="0">
+              <a:rPr sz="1019" b="1" i="0">
                 <a:solidFill>
                   <a:srgbClr val="2DAA57"/>
                 </a:solidFill>
@@ -23781,7 +23871,7 @@
               </a:spcAft>
             </a:pPr>
             <a:r>
-              <a:rPr sz="4800" b="1" i="0">
+              <a:rPr sz="3840" b="1" i="0">
                 <a:solidFill>
                   <a:srgbClr val="1263E6"/>
                 </a:solidFill>
@@ -23823,7 +23913,7 @@
               </a:spcAft>
             </a:pPr>
             <a:r>
-              <a:rPr sz="1800" b="1" i="0">
+              <a:rPr sz="1440" b="1" i="0">
                 <a:solidFill>
                   <a:srgbClr val="1263E6"/>
                 </a:solidFill>
@@ -23865,7 +23955,7 @@
               </a:spcAft>
             </a:pPr>
             <a:r>
-              <a:rPr sz="1350" b="0" i="0">
+              <a:rPr sz="1080" b="0" i="0">
                 <a:solidFill>
                   <a:srgbClr val="64748B"/>
                 </a:solidFill>
@@ -24067,7 +24157,7 @@
               </a:spcAft>
             </a:pPr>
             <a:r>
-              <a:rPr sz="1275" b="1" i="0">
+              <a:rPr sz="1019" b="1" i="0">
                 <a:solidFill>
                   <a:srgbClr val="FFFFFF"/>
                 </a:solidFill>
@@ -24139,7 +24229,7 @@
               </a:spcAft>
             </a:pPr>
             <a:r>
-              <a:rPr sz="2025" b="1" i="0">
+              <a:rPr sz="1620" b="1" i="0">
                 <a:solidFill>
                   <a:srgbClr val="0A1B3E"/>
                 </a:solidFill>
@@ -24245,7 +24335,7 @@
               </a:spcAft>
             </a:pPr>
             <a:r>
-              <a:rPr sz="1350" b="1" i="0">
+              <a:rPr sz="1080" b="1" i="0">
                 <a:solidFill>
                   <a:srgbClr val="2DAA57"/>
                 </a:solidFill>
@@ -24287,7 +24377,7 @@
               </a:spcAft>
             </a:pPr>
             <a:r>
-              <a:rPr sz="1950" b="1" i="0">
+              <a:rPr sz="1560" b="1" i="0">
                 <a:solidFill>
                   <a:srgbClr val="0A1B3E"/>
                 </a:solidFill>
@@ -24329,7 +24419,7 @@
               </a:spcAft>
             </a:pPr>
             <a:r>
-              <a:rPr sz="1350" b="1" i="0">
+              <a:rPr sz="1080" b="1" i="0">
                 <a:solidFill>
                   <a:srgbClr val="1263E6"/>
                 </a:solidFill>
@@ -24371,7 +24461,7 @@
               </a:spcAft>
             </a:pPr>
             <a:r>
-              <a:rPr sz="1950" b="1" i="0">
+              <a:rPr sz="1560" b="1" i="0">
                 <a:solidFill>
                   <a:srgbClr val="0A1B3E"/>
                 </a:solidFill>
@@ -24464,7 +24554,7 @@
               </a:spcAft>
             </a:pPr>
             <a:r>
-              <a:rPr sz="1350" b="0" i="0">
+              <a:rPr sz="1080" b="0" i="0">
                 <a:solidFill>
                   <a:srgbClr val="334155"/>
                 </a:solidFill>
@@ -24540,7 +24630,7 @@
               </a:spcAft>
             </a:pPr>
             <a:r>
-              <a:rPr sz="1500" b="1" i="0">
+              <a:rPr sz="1200" b="1" i="0">
                 <a:solidFill>
                   <a:srgbClr val="173A73"/>
                 </a:solidFill>
@@ -24582,7 +24672,7 @@
               </a:spcAft>
             </a:pPr>
             <a:r>
-              <a:rPr sz="1350" b="0" i="0">
+              <a:rPr sz="1080" b="0" i="0">
                 <a:solidFill>
                   <a:srgbClr val="94A3B8"/>
                 </a:solidFill>
@@ -24775,7 +24865,7 @@
               </a:spcAft>
             </a:pPr>
             <a:r>
-              <a:rPr sz="3600" b="1" i="0">
+              <a:rPr sz="2880" b="1" i="0">
                 <a:solidFill>
                   <a:srgbClr val="FFFFFF"/>
                 </a:solidFill>
@@ -24817,7 +24907,7 @@
               </a:spcAft>
             </a:pPr>
             <a:r>
-              <a:rPr sz="3000" b="1" i="0">
+              <a:rPr sz="2400" b="1" i="0" dirty="0" err="1">
                 <a:solidFill>
                   <a:srgbClr val="0A1B3E"/>
                 </a:solidFill>
@@ -24825,6 +24915,12 @@
               </a:rPr>
               <a:t>指令、知识与工具分层，仓库因此可维护</a:t>
             </a:r>
+            <a:endParaRPr sz="2400" b="1" i="0" dirty="0">
+              <a:solidFill>
+                <a:srgbClr val="0A1B3E"/>
+              </a:solidFill>
+              <a:latin typeface="Microsoft YaHei"/>
+            </a:endParaRPr>
           </a:p>
         </p:txBody>
       </p:sp>
@@ -24859,7 +24955,7 @@
               </a:spcAft>
             </a:pPr>
             <a:r>
-              <a:rPr sz="1500" b="1" i="0">
+              <a:rPr sz="1200" b="1" i="0">
                 <a:solidFill>
                   <a:srgbClr val="1263E6"/>
                 </a:solidFill>
@@ -24901,7 +24997,7 @@
               </a:spcAft>
             </a:pPr>
             <a:r>
-              <a:rPr sz="1275" b="0" i="0">
+              <a:rPr sz="1019" b="0" i="0">
                 <a:solidFill>
                   <a:srgbClr val="64748B"/>
                 </a:solidFill>
@@ -25115,7 +25211,7 @@
               </a:spcAft>
             </a:pPr>
             <a:r>
-              <a:rPr sz="1650" b="1" i="0">
+              <a:rPr sz="1320" b="1" i="0">
                 <a:solidFill>
                   <a:srgbClr val="FFFFFF"/>
                 </a:solidFill>
@@ -25157,7 +25253,7 @@
               </a:spcAft>
             </a:pPr>
             <a:r>
-              <a:rPr sz="1950" b="1" i="0">
+              <a:rPr sz="1560" b="1" i="0">
                 <a:solidFill>
                   <a:srgbClr val="FFFFFF"/>
                 </a:solidFill>
@@ -25327,7 +25423,7 @@
               </a:spcAft>
             </a:pPr>
             <a:r>
-              <a:rPr sz="1725" b="1" i="0">
+              <a:rPr sz="1380" b="1" i="0">
                 <a:solidFill>
                   <a:srgbClr val="FFFFFF"/>
                 </a:solidFill>
@@ -25594,7 +25690,7 @@
               </a:spcAft>
             </a:pPr>
             <a:r>
-              <a:rPr sz="2100" b="1" i="0">
+              <a:rPr sz="1680" b="1" i="0">
                 <a:solidFill>
                   <a:srgbClr val="0A1B3E"/>
                 </a:solidFill>
@@ -25636,7 +25732,7 @@
               </a:spcAft>
             </a:pPr>
             <a:r>
-              <a:rPr sz="1350" b="0" i="0">
+              <a:rPr sz="1080" b="0" i="0">
                 <a:solidFill>
                   <a:srgbClr val="64748B"/>
                 </a:solidFill>
@@ -25678,7 +25774,7 @@
               </a:spcAft>
             </a:pPr>
             <a:r>
-              <a:rPr sz="2100" b="1" i="0">
+              <a:rPr sz="1680" b="1" i="0">
                 <a:solidFill>
                   <a:srgbClr val="0A1B3E"/>
                 </a:solidFill>
@@ -25720,7 +25816,7 @@
               </a:spcAft>
             </a:pPr>
             <a:r>
-              <a:rPr sz="1350" b="0" i="0">
+              <a:rPr sz="1080" b="0" i="0">
                 <a:solidFill>
                   <a:srgbClr val="64748B"/>
                 </a:solidFill>
@@ -25762,7 +25858,7 @@
               </a:spcAft>
             </a:pPr>
             <a:r>
-              <a:rPr sz="2100" b="1" i="0">
+              <a:rPr sz="1680" b="1" i="0">
                 <a:solidFill>
                   <a:srgbClr val="0A1B3E"/>
                 </a:solidFill>
@@ -25804,7 +25900,7 @@
               </a:spcAft>
             </a:pPr>
             <a:r>
-              <a:rPr sz="1350" b="0" i="0">
+              <a:rPr sz="1080" b="0" i="0">
                 <a:solidFill>
                   <a:srgbClr val="64748B"/>
                 </a:solidFill>
@@ -25846,7 +25942,7 @@
               </a:spcAft>
             </a:pPr>
             <a:r>
-              <a:rPr sz="2100" b="1" i="0">
+              <a:rPr sz="1680" b="1" i="0">
                 <a:solidFill>
                   <a:srgbClr val="0A1B3E"/>
                 </a:solidFill>
@@ -25888,7 +25984,7 @@
               </a:spcAft>
             </a:pPr>
             <a:r>
-              <a:rPr sz="1350" b="0" i="0">
+              <a:rPr sz="1080" b="0" i="0">
                 <a:solidFill>
                   <a:srgbClr val="64748B"/>
                 </a:solidFill>
@@ -26026,7 +26122,7 @@
               </a:spcAft>
             </a:pPr>
             <a:r>
-              <a:rPr sz="1725" b="1" i="0">
+              <a:rPr sz="1380" b="1" i="0">
                 <a:solidFill>
                   <a:srgbClr val="FFFFFF"/>
                 </a:solidFill>
@@ -26068,7 +26164,7 @@
               </a:spcAft>
             </a:pPr>
             <a:r>
-              <a:rPr sz="2025" b="1" i="0">
+              <a:rPr sz="1620" b="1" i="0">
                 <a:solidFill>
                   <a:srgbClr val="1263E6"/>
                 </a:solidFill>
@@ -26110,7 +26206,7 @@
               </a:spcAft>
             </a:pPr>
             <a:r>
-              <a:rPr sz="1125" b="0" i="0">
+              <a:rPr sz="900" b="0" i="0">
                 <a:solidFill>
                   <a:srgbClr val="64748B"/>
                 </a:solidFill>
@@ -26248,7 +26344,7 @@
               </a:spcAft>
             </a:pPr>
             <a:r>
-              <a:rPr sz="1725" b="1" i="0">
+              <a:rPr sz="1380" b="1" i="0">
                 <a:solidFill>
                   <a:srgbClr val="FFFFFF"/>
                 </a:solidFill>
@@ -26290,7 +26386,7 @@
               </a:spcAft>
             </a:pPr>
             <a:r>
-              <a:rPr sz="2025" b="1" i="0">
+              <a:rPr sz="1620" b="1" i="0">
                 <a:solidFill>
                   <a:srgbClr val="12AABD"/>
                 </a:solidFill>
@@ -26332,7 +26428,7 @@
               </a:spcAft>
             </a:pPr>
             <a:r>
-              <a:rPr sz="1125" b="0" i="0">
+              <a:rPr sz="900" b="0" i="0">
                 <a:solidFill>
                   <a:srgbClr val="64748B"/>
                 </a:solidFill>
@@ -26470,7 +26566,7 @@
               </a:spcAft>
             </a:pPr>
             <a:r>
-              <a:rPr sz="1725" b="1" i="0">
+              <a:rPr sz="1380" b="1" i="0">
                 <a:solidFill>
                   <a:srgbClr val="FFFFFF"/>
                 </a:solidFill>
@@ -26512,7 +26608,7 @@
               </a:spcAft>
             </a:pPr>
             <a:r>
-              <a:rPr sz="2025" b="1" i="0">
+              <a:rPr sz="1620" b="1" i="0">
                 <a:solidFill>
                   <a:srgbClr val="2DAA57"/>
                 </a:solidFill>
@@ -26554,7 +26650,7 @@
               </a:spcAft>
             </a:pPr>
             <a:r>
-              <a:rPr sz="1125" b="0" i="0">
+              <a:rPr sz="900" b="0" i="0">
                 <a:solidFill>
                   <a:srgbClr val="64748B"/>
                 </a:solidFill>
@@ -26660,7 +26756,7 @@
               </a:spcAft>
             </a:pPr>
             <a:r>
-              <a:rPr sz="1500" b="1" i="0">
+              <a:rPr sz="1200" b="1" i="0">
                 <a:solidFill>
                   <a:srgbClr val="BFD6FF"/>
                 </a:solidFill>
@@ -26702,7 +26798,7 @@
               </a:spcAft>
             </a:pPr>
             <a:r>
-              <a:rPr sz="2325" b="1" i="0">
+              <a:rPr sz="1859" b="1" i="0">
                 <a:solidFill>
                   <a:srgbClr val="FFFFFF"/>
                 </a:solidFill>
@@ -26778,7 +26874,7 @@
               </a:spcAft>
             </a:pPr>
             <a:r>
-              <a:rPr sz="1500" b="1" i="0">
+              <a:rPr sz="1200" b="1" i="0">
                 <a:solidFill>
                   <a:srgbClr val="FFFFFF"/>
                 </a:solidFill>
@@ -26820,7 +26916,7 @@
               </a:spcAft>
             </a:pPr>
             <a:r>
-              <a:rPr sz="2325" b="1" i="0">
+              <a:rPr sz="1859" b="1" i="0">
                 <a:solidFill>
                   <a:srgbClr val="FFFFFF"/>
                 </a:solidFill>
@@ -26896,7 +26992,7 @@
               </a:spcAft>
             </a:pPr>
             <a:r>
-              <a:rPr sz="1500" b="1" i="0">
+              <a:rPr sz="1200" b="1" i="0">
                 <a:solidFill>
                   <a:srgbClr val="B7F24A"/>
                 </a:solidFill>
@@ -26972,7 +27068,7 @@
               </a:spcAft>
             </a:pPr>
             <a:r>
-              <a:rPr sz="1500" b="1" i="0">
+              <a:rPr sz="1200" b="1" i="0">
                 <a:solidFill>
                   <a:srgbClr val="FFFFFF"/>
                 </a:solidFill>
@@ -27078,7 +27174,7 @@
               </a:spcAft>
             </a:pPr>
             <a:r>
-              <a:rPr sz="1575" b="1" i="0">
+              <a:rPr sz="1260" b="1" i="0">
                 <a:solidFill>
                   <a:srgbClr val="FFFFFF"/>
                 </a:solidFill>
@@ -27120,7 +27216,7 @@
               </a:spcAft>
             </a:pPr>
             <a:r>
-              <a:rPr sz="1800" b="1" i="0">
+              <a:rPr sz="1440" b="1" i="0">
                 <a:solidFill>
                   <a:srgbClr val="173A73"/>
                 </a:solidFill>
@@ -27162,7 +27258,7 @@
               </a:spcAft>
             </a:pPr>
             <a:r>
-              <a:rPr sz="1350" b="0" i="0">
+              <a:rPr sz="1080" b="0" i="0">
                 <a:solidFill>
                   <a:srgbClr val="94A3B8"/>
                 </a:solidFill>
@@ -27383,7 +27479,7 @@
               </a:spcAft>
             </a:pPr>
             <a:r>
-              <a:rPr sz="3900" b="1" i="0">
+              <a:rPr sz="3120" b="1" i="0">
                 <a:solidFill>
                   <a:srgbClr val="FFFFFF"/>
                 </a:solidFill>
@@ -27425,14 +27521,29 @@
               </a:spcAft>
             </a:pPr>
             <a:r>
-              <a:rPr sz="2850" b="1" i="0">
+              <a:rPr sz="2279" b="1" i="0" dirty="0">
                 <a:solidFill>
                   <a:srgbClr val="0A1B3E"/>
                 </a:solidFill>
                 <a:latin typeface="Microsoft YaHei"/>
               </a:rPr>
-              <a:t>V1.0 已用可重复证据证明整条链路可行</a:t>
-            </a:r>
+              <a:t>V1.1 </a:t>
+            </a:r>
+            <a:r>
+              <a:rPr sz="2279" b="1" i="0" dirty="0" err="1">
+                <a:solidFill>
+                  <a:srgbClr val="0A1B3E"/>
+                </a:solidFill>
+                <a:latin typeface="Microsoft YaHei"/>
+              </a:rPr>
+              <a:t>已用可重复证据证明整条链路可行</a:t>
+            </a:r>
+            <a:endParaRPr sz="2279" b="1" i="0" dirty="0">
+              <a:solidFill>
+                <a:srgbClr val="0A1B3E"/>
+              </a:solidFill>
+              <a:latin typeface="Microsoft YaHei"/>
+            </a:endParaRPr>
           </a:p>
         </p:txBody>
       </p:sp>
@@ -27467,7 +27578,7 @@
               </a:spcAft>
             </a:pPr>
             <a:r>
-              <a:rPr sz="1650" b="1" i="0">
+              <a:rPr sz="1320" b="1" i="0">
                 <a:solidFill>
                   <a:srgbClr val="1263E6"/>
                 </a:solidFill>
@@ -27971,7 +28082,7 @@
               </a:spcAft>
             </a:pPr>
             <a:r>
-              <a:rPr sz="2025" b="1" i="0">
+              <a:rPr sz="1620" b="1" i="0">
                 <a:solidFill>
                   <a:srgbClr val="FFFFFF"/>
                 </a:solidFill>
@@ -28013,7 +28124,7 @@
               </a:spcAft>
             </a:pPr>
             <a:r>
-              <a:rPr sz="2175" b="1" i="0">
+              <a:rPr sz="1739" b="1" i="0" dirty="0" err="1">
                 <a:solidFill>
                   <a:srgbClr val="FFFFFF"/>
                 </a:solidFill>
@@ -28021,6 +28132,12 @@
               </a:rPr>
               <a:t>测试、双安装路径、端到端示例与编译报告共同构成工程证据</a:t>
             </a:r>
+            <a:endParaRPr sz="1739" b="1" i="0" dirty="0">
+              <a:solidFill>
+                <a:srgbClr val="FFFFFF"/>
+              </a:solidFill>
+              <a:latin typeface="Microsoft YaHei"/>
+            </a:endParaRPr>
           </a:p>
         </p:txBody>
       </p:sp>
@@ -28153,7 +28270,7 @@
               </a:spcAft>
             </a:pPr>
             <a:r>
-              <a:rPr sz="2325" b="1" i="0">
+              <a:rPr sz="1859" b="1" i="0">
                 <a:solidFill>
                   <a:srgbClr val="1263E6"/>
                 </a:solidFill>
@@ -28195,7 +28312,7 @@
               </a:spcAft>
             </a:pPr>
             <a:r>
-              <a:rPr sz="1350" b="1" i="0">
+              <a:rPr sz="1080" b="1" i="0">
                 <a:solidFill>
                   <a:srgbClr val="1263E6"/>
                 </a:solidFill>
@@ -28237,13 +28354,13 @@
               </a:spcAft>
             </a:pPr>
             <a:r>
-              <a:rPr sz="4950" b="1" i="0">
+              <a:rPr sz="3960" b="1" i="0">
                 <a:solidFill>
                   <a:srgbClr val="0A1B3E"/>
                 </a:solidFill>
                 <a:latin typeface="Microsoft YaHei"/>
               </a:rPr>
-              <a:t>40</a:t>
+              <a:t>65</a:t>
             </a:r>
           </a:p>
         </p:txBody>
@@ -28279,7 +28396,7 @@
               </a:spcAft>
             </a:pPr>
             <a:r>
-              <a:rPr sz="1875" b="1" i="0">
+              <a:rPr sz="1500" b="1" i="0">
                 <a:solidFill>
                   <a:srgbClr val="0A1B3E"/>
                 </a:solidFill>
@@ -28321,7 +28438,7 @@
               </a:spcAft>
             </a:pPr>
             <a:r>
-              <a:rPr sz="1200" b="0" i="0">
+              <a:rPr sz="960" b="0" i="0">
                 <a:solidFill>
                   <a:srgbClr val="52647F"/>
                 </a:solidFill>
@@ -28461,7 +28578,7 @@
               </a:spcAft>
             </a:pPr>
             <a:r>
-              <a:rPr sz="2025" b="1" i="0">
+              <a:rPr sz="1620" b="1" i="0">
                 <a:solidFill>
                   <a:srgbClr val="12AABD"/>
                 </a:solidFill>
@@ -28503,7 +28620,7 @@
               </a:spcAft>
             </a:pPr>
             <a:r>
-              <a:rPr sz="1575" b="1" i="0">
+              <a:rPr sz="1260" b="1" i="0">
                 <a:solidFill>
                   <a:srgbClr val="12AABD"/>
                 </a:solidFill>
@@ -28545,7 +28662,7 @@
               </a:spcAft>
             </a:pPr>
             <a:r>
-              <a:rPr sz="4950" b="1" i="0">
+              <a:rPr sz="3960" b="1" i="0">
                 <a:solidFill>
                   <a:srgbClr val="0A1B3E"/>
                 </a:solidFill>
@@ -28587,7 +28704,7 @@
               </a:spcAft>
             </a:pPr>
             <a:r>
-              <a:rPr sz="1875" b="1" i="0">
+              <a:rPr sz="1500" b="1" i="0">
                 <a:solidFill>
                   <a:srgbClr val="0A1B3E"/>
                 </a:solidFill>
@@ -28629,7 +28746,7 @@
               </a:spcAft>
             </a:pPr>
             <a:r>
-              <a:rPr sz="1050" b="0" i="0">
+              <a:rPr sz="840" b="0" i="0">
                 <a:solidFill>
                   <a:srgbClr val="52647F"/>
                 </a:solidFill>
@@ -28671,7 +28788,7 @@
               </a:spcAft>
             </a:pPr>
             <a:r>
-              <a:rPr sz="1050" b="0" i="0">
+              <a:rPr sz="840" b="0" i="0">
                 <a:solidFill>
                   <a:srgbClr val="52647F"/>
                 </a:solidFill>
@@ -28779,7 +28896,7 @@
               </a:spcAft>
             </a:pPr>
             <a:r>
-              <a:rPr sz="1500" b="1" i="0">
+              <a:rPr sz="1200" b="1" i="0">
                 <a:solidFill>
                   <a:srgbClr val="1263E6"/>
                 </a:solidFill>
@@ -28821,7 +28938,7 @@
               </a:spcAft>
             </a:pPr>
             <a:r>
-              <a:rPr sz="1875" b="1" i="0">
+              <a:rPr sz="1500" b="1" i="0">
                 <a:solidFill>
                   <a:srgbClr val="0A1B3E"/>
                 </a:solidFill>
@@ -28863,7 +28980,7 @@
               </a:spcAft>
             </a:pPr>
             <a:r>
-              <a:rPr sz="1350" b="0" i="0">
+              <a:rPr sz="1080" b="0" i="0">
                 <a:solidFill>
                   <a:srgbClr val="52647F"/>
                 </a:solidFill>
@@ -29135,7 +29252,7 @@
               </a:spcAft>
             </a:pPr>
             <a:r>
-              <a:rPr sz="3450" b="1" i="0">
+              <a:rPr sz="2760" b="1" i="0">
                 <a:solidFill>
                   <a:srgbClr val="2DAA57"/>
                 </a:solidFill>
@@ -29177,7 +29294,7 @@
               </a:spcAft>
             </a:pPr>
             <a:r>
-              <a:rPr sz="1500" b="1" i="0">
+              <a:rPr sz="1200" b="1" i="0">
                 <a:solidFill>
                   <a:srgbClr val="2DAA57"/>
                 </a:solidFill>
@@ -29249,7 +29366,7 @@
               </a:spcAft>
             </a:pPr>
             <a:r>
-              <a:rPr sz="1350" b="0" i="0">
+              <a:rPr sz="1080" b="0" i="0">
                 <a:solidFill>
                   <a:srgbClr val="52647F"/>
                 </a:solidFill>
@@ -29387,7 +29504,7 @@
               </a:spcAft>
             </a:pPr>
             <a:r>
-              <a:rPr sz="1200" b="1" i="0">
+              <a:rPr sz="960" b="1" i="0">
                 <a:solidFill>
                   <a:srgbClr val="BFD6FF"/>
                 </a:solidFill>
@@ -29429,7 +29546,7 @@
               </a:spcAft>
             </a:pPr>
             <a:r>
-              <a:rPr sz="6000" b="1" i="0">
+              <a:rPr sz="4800" b="1" i="0">
                 <a:solidFill>
                   <a:srgbClr val="FFFFFF"/>
                 </a:solidFill>
@@ -29471,7 +29588,7 @@
               </a:spcAft>
             </a:pPr>
             <a:r>
-              <a:rPr sz="1650" b="1" i="0">
+              <a:rPr sz="1320" b="1" i="0">
                 <a:solidFill>
                   <a:srgbClr val="FFFFFF"/>
                 </a:solidFill>
@@ -29513,7 +29630,7 @@
               </a:spcAft>
             </a:pPr>
             <a:r>
-              <a:rPr sz="1275" b="0" i="0">
+              <a:rPr sz="1019" b="0" i="0">
                 <a:solidFill>
                   <a:srgbClr val="AFC6E8"/>
                 </a:solidFill>
@@ -29649,7 +29766,7 @@
               </a:spcAft>
             </a:pPr>
             <a:r>
-              <a:rPr sz="1650" b="1" i="0">
+              <a:rPr sz="1320" b="1" i="0">
                 <a:solidFill>
                   <a:srgbClr val="FFFFFF"/>
                 </a:solidFill>
@@ -29691,7 +29808,7 @@
               </a:spcAft>
             </a:pPr>
             <a:r>
-              <a:rPr sz="1275" b="1" i="0">
+              <a:rPr sz="1019" b="1" i="0">
                 <a:solidFill>
                   <a:srgbClr val="FFFFFF"/>
                 </a:solidFill>
@@ -29733,7 +29850,7 @@
               </a:spcAft>
             </a:pPr>
             <a:r>
-              <a:rPr sz="1050" b="0" i="0">
+              <a:rPr sz="840" b="0" i="0">
                 <a:solidFill>
                   <a:srgbClr val="AFC6E8"/>
                 </a:solidFill>
@@ -29839,7 +29956,7 @@
               </a:spcAft>
             </a:pPr>
             <a:r>
-              <a:rPr sz="1650" b="1" i="0">
+              <a:rPr sz="1320" b="1" i="0">
                 <a:solidFill>
                   <a:srgbClr val="FFFFFF"/>
                 </a:solidFill>
@@ -29881,7 +29998,7 @@
               </a:spcAft>
             </a:pPr>
             <a:r>
-              <a:rPr sz="1275" b="1" i="0">
+              <a:rPr sz="1019" b="1" i="0">
                 <a:solidFill>
                   <a:srgbClr val="FFFFFF"/>
                 </a:solidFill>
@@ -29923,7 +30040,7 @@
               </a:spcAft>
             </a:pPr>
             <a:r>
-              <a:rPr sz="1050" b="0" i="0">
+              <a:rPr sz="840" b="0" i="0">
                 <a:solidFill>
                   <a:srgbClr val="AFC6E8"/>
                 </a:solidFill>
@@ -29965,7 +30082,7 @@
               </a:spcAft>
             </a:pPr>
             <a:r>
-              <a:rPr sz="1275" b="0" i="0">
+              <a:rPr sz="1019" b="0" i="0">
                 <a:solidFill>
                   <a:srgbClr val="AFC6E8"/>
                 </a:solidFill>
@@ -30007,7 +30124,7 @@
               </a:spcAft>
             </a:pPr>
             <a:r>
-              <a:rPr sz="1650" b="1" i="0">
+              <a:rPr sz="1320" b="1" i="0">
                 <a:solidFill>
                   <a:srgbClr val="53DB74"/>
                 </a:solidFill>
@@ -30111,7 +30228,7 @@
               </a:spcAft>
             </a:pPr>
             <a:r>
-              <a:rPr sz="2100" b="1" i="0">
+              <a:rPr sz="1680" b="1" i="0">
                 <a:solidFill>
                   <a:srgbClr val="FFFFFF"/>
                 </a:solidFill>
@@ -30153,7 +30270,7 @@
               </a:spcAft>
             </a:pPr>
             <a:r>
-              <a:rPr sz="1650" b="1" i="0">
+              <a:rPr sz="1320" b="1" i="0">
                 <a:solidFill>
                   <a:srgbClr val="0A1B3E"/>
                 </a:solidFill>
@@ -30195,7 +30312,7 @@
               </a:spcAft>
             </a:pPr>
             <a:r>
-              <a:rPr sz="1500" b="0" i="0">
+              <a:rPr sz="1200" b="0" i="0">
                 <a:solidFill>
                   <a:srgbClr val="334A6B"/>
                 </a:solidFill>
@@ -30237,7 +30354,7 @@
               </a:spcAft>
             </a:pPr>
             <a:r>
-              <a:rPr sz="1350" b="1" i="0">
+              <a:rPr sz="1080" b="1" i="0">
                 <a:solidFill>
                   <a:srgbClr val="1263E6"/>
                 </a:solidFill>

--- a/examples/project-intro-deck/project-intro.pptx
+++ b/examples/project-intro-deck/project-intro.pptx
@@ -5,18 +5,18 @@
     <p:sldMasterId id="2147483648" r:id="rId1"/>
   </p:sldMasterIdLst>
   <p:sldIdLst>
-    <p:sldId id="256" r:id="rId2"/>
-    <p:sldId id="257" r:id="rId3"/>
-    <p:sldId id="258" r:id="rId4"/>
-    <p:sldId id="259" r:id="rId5"/>
-    <p:sldId id="260" r:id="rId6"/>
-    <p:sldId id="261" r:id="rId7"/>
-    <p:sldId id="262" r:id="rId8"/>
-    <p:sldId id="263" r:id="rId9"/>
-    <p:sldId id="264" r:id="rId10"/>
-    <p:sldId id="265" r:id="rId11"/>
+    <p:sldId id="256" r:id="rId7"/>
+    <p:sldId id="257" r:id="rId8"/>
+    <p:sldId id="258" r:id="rId9"/>
+    <p:sldId id="259" r:id="rId10"/>
+    <p:sldId id="260" r:id="rId11"/>
+    <p:sldId id="261" r:id="rId12"/>
+    <p:sldId id="262" r:id="rId13"/>
+    <p:sldId id="263" r:id="rId14"/>
+    <p:sldId id="264" r:id="rId15"/>
+    <p:sldId id="265" r:id="rId16"/>
   </p:sldIdLst>
-  <p:sldSz cx="12192000" cy="6858000"/>
+  <p:sldSz cx="12192000" cy="6858000" type="screen4x3"/>
   <p:notesSz cx="6858000" cy="9144000"/>
   <p:defaultTextStyle>
     <a:defPPr>
@@ -113,22 +113,6 @@
       </a:defRPr>
     </a:lvl9pPr>
   </p:defaultTextStyle>
-  <p:extLst>
-    <p:ext uri="{EFAFB233-063F-42B5-8137-9DF3F51BA10A}">
-      <p15:sldGuideLst xmlns:p15="http://schemas.microsoft.com/office/powerpoint/2012/main">
-        <p15:guide id="1" orient="horz" pos="2160">
-          <p15:clr>
-            <a:srgbClr val="A4A3A4"/>
-          </p15:clr>
-        </p15:guide>
-        <p15:guide id="2" pos="2880">
-          <p15:clr>
-            <a:srgbClr val="A4A3A4"/>
-          </p15:clr>
-        </p15:guide>
-      </p15:sldGuideLst>
-    </p:ext>
-  </p:extLst>
 </p:presentation>
 </file>
 
@@ -170,9 +154,10 @@
           <a:lstStyle/>
           <a:p>
             <a:r>
-              <a:rPr lang="en-US"/>
+              <a:rPr lang="en-US" smtClean="0"/>
               <a:t>Click to edit Master title style</a:t>
             </a:r>
+            <a:endParaRPr lang="en-US"/>
           </a:p>
         </p:txBody>
       </p:sp>
@@ -288,9 +273,10 @@
           </a:lstStyle>
           <a:p>
             <a:r>
-              <a:rPr lang="en-US"/>
+              <a:rPr lang="en-US" smtClean="0"/>
               <a:t>Click to edit Master subtitle style</a:t>
             </a:r>
+            <a:endParaRPr lang="en-US"/>
           </a:p>
         </p:txBody>
       </p:sp>
@@ -311,7 +297,7 @@
           <a:p>
             <a:fld id="{5BCAD085-E8A6-8845-BD4E-CB4CCA059FC4}" type="datetimeFigureOut">
               <a:rPr lang="en-US" smtClean="0"/>
-              <a:t>8/9/2026</a:t>
+              <a:t>1/27/13</a:t>
             </a:fld>
             <a:endParaRPr lang="en-US"/>
           </a:p>
@@ -405,9 +391,10 @@
           <a:lstStyle/>
           <a:p>
             <a:r>
-              <a:rPr lang="en-US"/>
+              <a:rPr lang="en-US" smtClean="0"/>
               <a:t>Click to edit Master title style</a:t>
             </a:r>
+            <a:endParaRPr lang="en-US"/>
           </a:p>
         </p:txBody>
       </p:sp>
@@ -428,37 +415,38 @@
           <a:p>
             <a:pPr lvl="0"/>
             <a:r>
-              <a:rPr lang="en-US"/>
+              <a:rPr lang="en-US" smtClean="0"/>
               <a:t>Click to edit Master text styles</a:t>
             </a:r>
           </a:p>
           <a:p>
             <a:pPr lvl="1"/>
             <a:r>
-              <a:rPr lang="en-US"/>
+              <a:rPr lang="en-US" smtClean="0"/>
               <a:t>Second level</a:t>
             </a:r>
           </a:p>
           <a:p>
             <a:pPr lvl="2"/>
             <a:r>
-              <a:rPr lang="en-US"/>
+              <a:rPr lang="en-US" smtClean="0"/>
               <a:t>Third level</a:t>
             </a:r>
           </a:p>
           <a:p>
             <a:pPr lvl="3"/>
             <a:r>
-              <a:rPr lang="en-US"/>
+              <a:rPr lang="en-US" smtClean="0"/>
               <a:t>Fourth level</a:t>
             </a:r>
           </a:p>
           <a:p>
             <a:pPr lvl="4"/>
             <a:r>
-              <a:rPr lang="en-US"/>
+              <a:rPr lang="en-US" smtClean="0"/>
               <a:t>Fifth level</a:t>
             </a:r>
+            <a:endParaRPr lang="en-US"/>
           </a:p>
         </p:txBody>
       </p:sp>
@@ -479,7 +467,7 @@
           <a:p>
             <a:fld id="{5BCAD085-E8A6-8845-BD4E-CB4CCA059FC4}" type="datetimeFigureOut">
               <a:rPr lang="en-US" smtClean="0"/>
-              <a:t>8/9/2026</a:t>
+              <a:t>1/27/13</a:t>
             </a:fld>
             <a:endParaRPr lang="en-US"/>
           </a:p>
@@ -578,9 +566,10 @@
           <a:lstStyle/>
           <a:p>
             <a:r>
-              <a:rPr lang="en-US"/>
+              <a:rPr lang="en-US" smtClean="0"/>
               <a:t>Click to edit Master title style</a:t>
             </a:r>
+            <a:endParaRPr lang="en-US"/>
           </a:p>
         </p:txBody>
       </p:sp>
@@ -606,37 +595,38 @@
           <a:p>
             <a:pPr lvl="0"/>
             <a:r>
-              <a:rPr lang="en-US"/>
+              <a:rPr lang="en-US" smtClean="0"/>
               <a:t>Click to edit Master text styles</a:t>
             </a:r>
           </a:p>
           <a:p>
             <a:pPr lvl="1"/>
             <a:r>
-              <a:rPr lang="en-US"/>
+              <a:rPr lang="en-US" smtClean="0"/>
               <a:t>Second level</a:t>
             </a:r>
           </a:p>
           <a:p>
             <a:pPr lvl="2"/>
             <a:r>
-              <a:rPr lang="en-US"/>
+              <a:rPr lang="en-US" smtClean="0"/>
               <a:t>Third level</a:t>
             </a:r>
           </a:p>
           <a:p>
             <a:pPr lvl="3"/>
             <a:r>
-              <a:rPr lang="en-US"/>
+              <a:rPr lang="en-US" smtClean="0"/>
               <a:t>Fourth level</a:t>
             </a:r>
           </a:p>
           <a:p>
             <a:pPr lvl="4"/>
             <a:r>
-              <a:rPr lang="en-US"/>
+              <a:rPr lang="en-US" smtClean="0"/>
               <a:t>Fifth level</a:t>
             </a:r>
+            <a:endParaRPr lang="en-US"/>
           </a:p>
         </p:txBody>
       </p:sp>
@@ -657,7 +647,7 @@
           <a:p>
             <a:fld id="{5BCAD085-E8A6-8845-BD4E-CB4CCA059FC4}" type="datetimeFigureOut">
               <a:rPr lang="en-US" smtClean="0"/>
-              <a:t>8/9/2026</a:t>
+              <a:t>1/27/13</a:t>
             </a:fld>
             <a:endParaRPr lang="en-US"/>
           </a:p>
@@ -751,9 +741,10 @@
           <a:lstStyle/>
           <a:p>
             <a:r>
-              <a:rPr lang="en-US"/>
+              <a:rPr lang="en-US" smtClean="0"/>
               <a:t>Click to edit Master title style</a:t>
             </a:r>
+            <a:endParaRPr lang="en-US"/>
           </a:p>
         </p:txBody>
       </p:sp>
@@ -774,37 +765,38 @@
           <a:p>
             <a:pPr lvl="0"/>
             <a:r>
-              <a:rPr lang="en-US"/>
+              <a:rPr lang="en-US" smtClean="0"/>
               <a:t>Click to edit Master text styles</a:t>
             </a:r>
           </a:p>
           <a:p>
             <a:pPr lvl="1"/>
             <a:r>
-              <a:rPr lang="en-US"/>
+              <a:rPr lang="en-US" smtClean="0"/>
               <a:t>Second level</a:t>
             </a:r>
           </a:p>
           <a:p>
             <a:pPr lvl="2"/>
             <a:r>
-              <a:rPr lang="en-US"/>
+              <a:rPr lang="en-US" smtClean="0"/>
               <a:t>Third level</a:t>
             </a:r>
           </a:p>
           <a:p>
             <a:pPr lvl="3"/>
             <a:r>
-              <a:rPr lang="en-US"/>
+              <a:rPr lang="en-US" smtClean="0"/>
               <a:t>Fourth level</a:t>
             </a:r>
           </a:p>
           <a:p>
             <a:pPr lvl="4"/>
             <a:r>
-              <a:rPr lang="en-US"/>
+              <a:rPr lang="en-US" smtClean="0"/>
               <a:t>Fifth level</a:t>
             </a:r>
+            <a:endParaRPr lang="en-US"/>
           </a:p>
         </p:txBody>
       </p:sp>
@@ -825,7 +817,7 @@
           <a:p>
             <a:fld id="{5BCAD085-E8A6-8845-BD4E-CB4CCA059FC4}" type="datetimeFigureOut">
               <a:rPr lang="en-US" smtClean="0"/>
-              <a:t>8/9/2026</a:t>
+              <a:t>1/27/13</a:t>
             </a:fld>
             <a:endParaRPr lang="en-US"/>
           </a:p>
@@ -928,9 +920,10 @@
           </a:lstStyle>
           <a:p>
             <a:r>
-              <a:rPr lang="en-US"/>
+              <a:rPr lang="en-US" smtClean="0"/>
               <a:t>Click to edit Master title style</a:t>
             </a:r>
+            <a:endParaRPr lang="en-US"/>
           </a:p>
         </p:txBody>
       </p:sp>
@@ -1047,7 +1040,7 @@
           <a:p>
             <a:pPr lvl="0"/>
             <a:r>
-              <a:rPr lang="en-US"/>
+              <a:rPr lang="en-US" smtClean="0"/>
               <a:t>Click to edit Master text styles</a:t>
             </a:r>
           </a:p>
@@ -1070,7 +1063,7 @@
           <a:p>
             <a:fld id="{5BCAD085-E8A6-8845-BD4E-CB4CCA059FC4}" type="datetimeFigureOut">
               <a:rPr lang="en-US" smtClean="0"/>
-              <a:t>8/9/2026</a:t>
+              <a:t>1/27/13</a:t>
             </a:fld>
             <a:endParaRPr lang="en-US"/>
           </a:p>
@@ -1164,9 +1157,10 @@
           <a:lstStyle/>
           <a:p>
             <a:r>
-              <a:rPr lang="en-US"/>
+              <a:rPr lang="en-US" smtClean="0"/>
               <a:t>Click to edit Master title style</a:t>
             </a:r>
+            <a:endParaRPr lang="en-US"/>
           </a:p>
         </p:txBody>
       </p:sp>
@@ -1220,37 +1214,38 @@
           <a:p>
             <a:pPr lvl="0"/>
             <a:r>
-              <a:rPr lang="en-US"/>
+              <a:rPr lang="en-US" smtClean="0"/>
               <a:t>Click to edit Master text styles</a:t>
             </a:r>
           </a:p>
           <a:p>
             <a:pPr lvl="1"/>
             <a:r>
-              <a:rPr lang="en-US"/>
+              <a:rPr lang="en-US" smtClean="0"/>
               <a:t>Second level</a:t>
             </a:r>
           </a:p>
           <a:p>
             <a:pPr lvl="2"/>
             <a:r>
-              <a:rPr lang="en-US"/>
+              <a:rPr lang="en-US" smtClean="0"/>
               <a:t>Third level</a:t>
             </a:r>
           </a:p>
           <a:p>
             <a:pPr lvl="3"/>
             <a:r>
-              <a:rPr lang="en-US"/>
+              <a:rPr lang="en-US" smtClean="0"/>
               <a:t>Fourth level</a:t>
             </a:r>
           </a:p>
           <a:p>
             <a:pPr lvl="4"/>
             <a:r>
-              <a:rPr lang="en-US"/>
+              <a:rPr lang="en-US" smtClean="0"/>
               <a:t>Fifth level</a:t>
             </a:r>
+            <a:endParaRPr lang="en-US"/>
           </a:p>
         </p:txBody>
       </p:sp>
@@ -1304,37 +1299,38 @@
           <a:p>
             <a:pPr lvl="0"/>
             <a:r>
-              <a:rPr lang="en-US"/>
+              <a:rPr lang="en-US" smtClean="0"/>
               <a:t>Click to edit Master text styles</a:t>
             </a:r>
           </a:p>
           <a:p>
             <a:pPr lvl="1"/>
             <a:r>
-              <a:rPr lang="en-US"/>
+              <a:rPr lang="en-US" smtClean="0"/>
               <a:t>Second level</a:t>
             </a:r>
           </a:p>
           <a:p>
             <a:pPr lvl="2"/>
             <a:r>
-              <a:rPr lang="en-US"/>
+              <a:rPr lang="en-US" smtClean="0"/>
               <a:t>Third level</a:t>
             </a:r>
           </a:p>
           <a:p>
             <a:pPr lvl="3"/>
             <a:r>
-              <a:rPr lang="en-US"/>
+              <a:rPr lang="en-US" smtClean="0"/>
               <a:t>Fourth level</a:t>
             </a:r>
           </a:p>
           <a:p>
             <a:pPr lvl="4"/>
             <a:r>
-              <a:rPr lang="en-US"/>
+              <a:rPr lang="en-US" smtClean="0"/>
               <a:t>Fifth level</a:t>
             </a:r>
+            <a:endParaRPr lang="en-US"/>
           </a:p>
         </p:txBody>
       </p:sp>
@@ -1355,7 +1351,7 @@
           <a:p>
             <a:fld id="{5BCAD085-E8A6-8845-BD4E-CB4CCA059FC4}" type="datetimeFigureOut">
               <a:rPr lang="en-US" smtClean="0"/>
-              <a:t>8/9/2026</a:t>
+              <a:t>1/27/13</a:t>
             </a:fld>
             <a:endParaRPr lang="en-US"/>
           </a:p>
@@ -1453,9 +1449,10 @@
           </a:lstStyle>
           <a:p>
             <a:r>
-              <a:rPr lang="en-US"/>
+              <a:rPr lang="en-US" smtClean="0"/>
               <a:t>Click to edit Master title style</a:t>
             </a:r>
+            <a:endParaRPr lang="en-US"/>
           </a:p>
         </p:txBody>
       </p:sp>
@@ -1518,7 +1515,7 @@
           <a:p>
             <a:pPr lvl="0"/>
             <a:r>
-              <a:rPr lang="en-US"/>
+              <a:rPr lang="en-US" smtClean="0"/>
               <a:t>Click to edit Master text styles</a:t>
             </a:r>
           </a:p>
@@ -1574,37 +1571,38 @@
           <a:p>
             <a:pPr lvl="0"/>
             <a:r>
-              <a:rPr lang="en-US"/>
+              <a:rPr lang="en-US" smtClean="0"/>
               <a:t>Click to edit Master text styles</a:t>
             </a:r>
           </a:p>
           <a:p>
             <a:pPr lvl="1"/>
             <a:r>
-              <a:rPr lang="en-US"/>
+              <a:rPr lang="en-US" smtClean="0"/>
               <a:t>Second level</a:t>
             </a:r>
           </a:p>
           <a:p>
             <a:pPr lvl="2"/>
             <a:r>
-              <a:rPr lang="en-US"/>
+              <a:rPr lang="en-US" smtClean="0"/>
               <a:t>Third level</a:t>
             </a:r>
           </a:p>
           <a:p>
             <a:pPr lvl="3"/>
             <a:r>
-              <a:rPr lang="en-US"/>
+              <a:rPr lang="en-US" smtClean="0"/>
               <a:t>Fourth level</a:t>
             </a:r>
           </a:p>
           <a:p>
             <a:pPr lvl="4"/>
             <a:r>
-              <a:rPr lang="en-US"/>
+              <a:rPr lang="en-US" smtClean="0"/>
               <a:t>Fifth level</a:t>
             </a:r>
+            <a:endParaRPr lang="en-US"/>
           </a:p>
         </p:txBody>
       </p:sp>
@@ -1667,7 +1665,7 @@
           <a:p>
             <a:pPr lvl="0"/>
             <a:r>
-              <a:rPr lang="en-US"/>
+              <a:rPr lang="en-US" smtClean="0"/>
               <a:t>Click to edit Master text styles</a:t>
             </a:r>
           </a:p>
@@ -1723,37 +1721,38 @@
           <a:p>
             <a:pPr lvl="0"/>
             <a:r>
-              <a:rPr lang="en-US"/>
+              <a:rPr lang="en-US" smtClean="0"/>
               <a:t>Click to edit Master text styles</a:t>
             </a:r>
           </a:p>
           <a:p>
             <a:pPr lvl="1"/>
             <a:r>
-              <a:rPr lang="en-US"/>
+              <a:rPr lang="en-US" smtClean="0"/>
               <a:t>Second level</a:t>
             </a:r>
           </a:p>
           <a:p>
             <a:pPr lvl="2"/>
             <a:r>
-              <a:rPr lang="en-US"/>
+              <a:rPr lang="en-US" smtClean="0"/>
               <a:t>Third level</a:t>
             </a:r>
           </a:p>
           <a:p>
             <a:pPr lvl="3"/>
             <a:r>
-              <a:rPr lang="en-US"/>
+              <a:rPr lang="en-US" smtClean="0"/>
               <a:t>Fourth level</a:t>
             </a:r>
           </a:p>
           <a:p>
             <a:pPr lvl="4"/>
             <a:r>
-              <a:rPr lang="en-US"/>
+              <a:rPr lang="en-US" smtClean="0"/>
               <a:t>Fifth level</a:t>
             </a:r>
+            <a:endParaRPr lang="en-US"/>
           </a:p>
         </p:txBody>
       </p:sp>
@@ -1774,7 +1773,7 @@
           <a:p>
             <a:fld id="{5BCAD085-E8A6-8845-BD4E-CB4CCA059FC4}" type="datetimeFigureOut">
               <a:rPr lang="en-US" smtClean="0"/>
-              <a:t>8/9/2026</a:t>
+              <a:t>1/27/13</a:t>
             </a:fld>
             <a:endParaRPr lang="en-US"/>
           </a:p>
@@ -1868,9 +1867,10 @@
           <a:lstStyle/>
           <a:p>
             <a:r>
-              <a:rPr lang="en-US"/>
+              <a:rPr lang="en-US" smtClean="0"/>
               <a:t>Click to edit Master title style</a:t>
             </a:r>
+            <a:endParaRPr lang="en-US"/>
           </a:p>
         </p:txBody>
       </p:sp>
@@ -1891,7 +1891,7 @@
           <a:p>
             <a:fld id="{5BCAD085-E8A6-8845-BD4E-CB4CCA059FC4}" type="datetimeFigureOut">
               <a:rPr lang="en-US" smtClean="0"/>
-              <a:t>8/9/2026</a:t>
+              <a:t>1/27/13</a:t>
             </a:fld>
             <a:endParaRPr lang="en-US"/>
           </a:p>
@@ -1986,7 +1986,7 @@
           <a:p>
             <a:fld id="{5BCAD085-E8A6-8845-BD4E-CB4CCA059FC4}" type="datetimeFigureOut">
               <a:rPr lang="en-US" smtClean="0"/>
-              <a:t>8/9/2026</a:t>
+              <a:t>1/27/13</a:t>
             </a:fld>
             <a:endParaRPr lang="en-US"/>
           </a:p>
@@ -2089,9 +2089,10 @@
           </a:lstStyle>
           <a:p>
             <a:r>
-              <a:rPr lang="en-US"/>
+              <a:rPr lang="en-US" smtClean="0"/>
               <a:t>Click to edit Master title style</a:t>
             </a:r>
+            <a:endParaRPr lang="en-US"/>
           </a:p>
         </p:txBody>
       </p:sp>
@@ -2145,37 +2146,38 @@
           <a:p>
             <a:pPr lvl="0"/>
             <a:r>
-              <a:rPr lang="en-US"/>
+              <a:rPr lang="en-US" smtClean="0"/>
               <a:t>Click to edit Master text styles</a:t>
             </a:r>
           </a:p>
           <a:p>
             <a:pPr lvl="1"/>
             <a:r>
-              <a:rPr lang="en-US"/>
+              <a:rPr lang="en-US" smtClean="0"/>
               <a:t>Second level</a:t>
             </a:r>
           </a:p>
           <a:p>
             <a:pPr lvl="2"/>
             <a:r>
-              <a:rPr lang="en-US"/>
+              <a:rPr lang="en-US" smtClean="0"/>
               <a:t>Third level</a:t>
             </a:r>
           </a:p>
           <a:p>
             <a:pPr lvl="3"/>
             <a:r>
-              <a:rPr lang="en-US"/>
+              <a:rPr lang="en-US" smtClean="0"/>
               <a:t>Fourth level</a:t>
             </a:r>
           </a:p>
           <a:p>
             <a:pPr lvl="4"/>
             <a:r>
-              <a:rPr lang="en-US"/>
+              <a:rPr lang="en-US" smtClean="0"/>
               <a:t>Fifth level</a:t>
             </a:r>
+            <a:endParaRPr lang="en-US"/>
           </a:p>
         </p:txBody>
       </p:sp>
@@ -2238,7 +2240,7 @@
           <a:p>
             <a:pPr lvl="0"/>
             <a:r>
-              <a:rPr lang="en-US"/>
+              <a:rPr lang="en-US" smtClean="0"/>
               <a:t>Click to edit Master text styles</a:t>
             </a:r>
           </a:p>
@@ -2261,7 +2263,7 @@
           <a:p>
             <a:fld id="{5BCAD085-E8A6-8845-BD4E-CB4CCA059FC4}" type="datetimeFigureOut">
               <a:rPr lang="en-US" smtClean="0"/>
-              <a:t>8/9/2026</a:t>
+              <a:t>1/27/13</a:t>
             </a:fld>
             <a:endParaRPr lang="en-US"/>
           </a:p>
@@ -2364,9 +2366,10 @@
           </a:lstStyle>
           <a:p>
             <a:r>
-              <a:rPr lang="en-US"/>
+              <a:rPr lang="en-US" smtClean="0"/>
               <a:t>Click to edit Master title style</a:t>
             </a:r>
+            <a:endParaRPr lang="en-US"/>
           </a:p>
         </p:txBody>
       </p:sp>
@@ -2490,7 +2493,7 @@
           <a:p>
             <a:pPr lvl="0"/>
             <a:r>
-              <a:rPr lang="en-US"/>
+              <a:rPr lang="en-US" smtClean="0"/>
               <a:t>Click to edit Master text styles</a:t>
             </a:r>
           </a:p>
@@ -2513,7 +2516,7 @@
           <a:p>
             <a:fld id="{5BCAD085-E8A6-8845-BD4E-CB4CCA059FC4}" type="datetimeFigureOut">
               <a:rPr lang="en-US" smtClean="0"/>
-              <a:t>8/9/2026</a:t>
+              <a:t>1/27/13</a:t>
             </a:fld>
             <a:endParaRPr lang="en-US"/>
           </a:p>
@@ -2622,9 +2625,10 @@
           <a:lstStyle/>
           <a:p>
             <a:r>
-              <a:rPr lang="en-US"/>
+              <a:rPr lang="en-US" smtClean="0"/>
               <a:t>Click to edit Master title style</a:t>
             </a:r>
+            <a:endParaRPr lang="en-US"/>
           </a:p>
         </p:txBody>
       </p:sp>
@@ -2655,37 +2659,38 @@
           <a:p>
             <a:pPr lvl="0"/>
             <a:r>
-              <a:rPr lang="en-US"/>
+              <a:rPr lang="en-US" smtClean="0"/>
               <a:t>Click to edit Master text styles</a:t>
             </a:r>
           </a:p>
           <a:p>
             <a:pPr lvl="1"/>
             <a:r>
-              <a:rPr lang="en-US"/>
+              <a:rPr lang="en-US" smtClean="0"/>
               <a:t>Second level</a:t>
             </a:r>
           </a:p>
           <a:p>
             <a:pPr lvl="2"/>
             <a:r>
-              <a:rPr lang="en-US"/>
+              <a:rPr lang="en-US" smtClean="0"/>
               <a:t>Third level</a:t>
             </a:r>
           </a:p>
           <a:p>
             <a:pPr lvl="3"/>
             <a:r>
-              <a:rPr lang="en-US"/>
+              <a:rPr lang="en-US" smtClean="0"/>
               <a:t>Fourth level</a:t>
             </a:r>
           </a:p>
           <a:p>
             <a:pPr lvl="4"/>
             <a:r>
-              <a:rPr lang="en-US"/>
+              <a:rPr lang="en-US" smtClean="0"/>
               <a:t>Fifth level</a:t>
             </a:r>
+            <a:endParaRPr lang="en-US"/>
           </a:p>
         </p:txBody>
       </p:sp>
@@ -2724,7 +2729,7 @@
           <a:p>
             <a:fld id="{5BCAD085-E8A6-8845-BD4E-CB4CCA059FC4}" type="datetimeFigureOut">
               <a:rPr lang="en-US" smtClean="0"/>
-              <a:t>8/9/2026</a:t>
+              <a:t>1/27/13</a:t>
             </a:fld>
             <a:endParaRPr lang="en-US"/>
           </a:p>
@@ -3083,7 +3088,7 @@
 </file>
 
 <file path=ppt/slides/slide1.xml><?xml version="1.0" encoding="utf-8"?>
-<p:sld xmlns:a="http://schemas.openxmlformats.org/drawingml/2006/main" xmlns:r="http://schemas.openxmlformats.org/officeDocument/2006/relationships" xmlns:p="http://schemas.openxmlformats.org/presentationml/2006/main">
+<p:sld xmlns:a="http://schemas.openxmlformats.org/drawingml/2006/main" xmlns:p="http://schemas.openxmlformats.org/presentationml/2006/main" xmlns:r="http://schemas.openxmlformats.org/officeDocument/2006/relationships">
   <p:cSld>
     <p:spTree>
       <p:nvGrpSpPr>
@@ -3091,14 +3096,7 @@
         <p:cNvGrpSpPr/>
         <p:nvPr/>
       </p:nvGrpSpPr>
-      <p:grpSpPr>
-        <a:xfrm>
-          <a:off x="0" y="0"/>
-          <a:ext cx="0" cy="0"/>
-          <a:chOff x="0" y="0"/>
-          <a:chExt cx="0" cy="0"/>
-        </a:xfrm>
-      </p:grpSpPr>
+      <p:grpSpPr/>
       <p:sp>
         <p:nvSpPr>
           <p:cNvPr id="2" name="SVG rect"/>
@@ -3125,7 +3123,6 @@
           <a:lstStyle/>
           <a:p>
             <a:pPr algn="ctr"/>
-            <a:endParaRPr/>
           </a:p>
         </p:txBody>
       </p:sp>
@@ -3155,7 +3152,6 @@
           <a:lstStyle/>
           <a:p>
             <a:pPr algn="ctr"/>
-            <a:endParaRPr/>
           </a:p>
         </p:txBody>
       </p:sp>
@@ -3185,7 +3181,6 @@
           <a:lstStyle/>
           <a:p>
             <a:pPr algn="ctr"/>
-            <a:endParaRPr/>
           </a:p>
         </p:txBody>
       </p:sp>
@@ -3206,7 +3201,7 @@
           <a:noFill/>
         </p:spPr>
         <p:txBody>
-          <a:bodyPr wrap="none" lIns="0" tIns="0" rIns="0" bIns="0" anchor="t">
+          <a:bodyPr wrap="none" lIns="0" rIns="0" tIns="0" bIns="0" anchor="t">
             <a:spAutoFit/>
           </a:bodyPr>
           <a:lstStyle/>
@@ -3248,7 +3243,7 @@
           <a:noFill/>
         </p:spPr>
         <p:txBody>
-          <a:bodyPr wrap="none" lIns="0" tIns="0" rIns="0" bIns="0" anchor="t">
+          <a:bodyPr wrap="none" lIns="0" rIns="0" tIns="0" bIns="0" anchor="t">
             <a:spAutoFit/>
           </a:bodyPr>
           <a:lstStyle/>
@@ -3299,7 +3294,6 @@
           <a:lstStyle/>
           <a:p>
             <a:pPr algn="ctr"/>
-            <a:endParaRPr/>
           </a:p>
         </p:txBody>
       </p:sp>
@@ -3329,7 +3323,6 @@
           <a:lstStyle/>
           <a:p>
             <a:pPr algn="ctr"/>
-            <a:endParaRPr/>
           </a:p>
         </p:txBody>
       </p:sp>
@@ -3359,7 +3352,6 @@
           <a:lstStyle/>
           <a:p>
             <a:pPr algn="ctr"/>
-            <a:endParaRPr/>
           </a:p>
         </p:txBody>
       </p:sp>
@@ -3389,7 +3381,6 @@
           <a:lstStyle/>
           <a:p>
             <a:pPr algn="ctr"/>
-            <a:endParaRPr/>
           </a:p>
         </p:txBody>
       </p:sp>
@@ -3419,7 +3410,6 @@
           <a:lstStyle/>
           <a:p>
             <a:pPr algn="ctr"/>
-            <a:endParaRPr/>
           </a:p>
         </p:txBody>
       </p:sp>
@@ -3449,7 +3439,6 @@
           <a:lstStyle/>
           <a:p>
             <a:pPr algn="ctr"/>
-            <a:endParaRPr/>
           </a:p>
         </p:txBody>
       </p:sp>
@@ -3479,7 +3468,6 @@
           <a:lstStyle/>
           <a:p>
             <a:pPr algn="ctr"/>
-            <a:endParaRPr/>
           </a:p>
         </p:txBody>
       </p:sp>
@@ -3509,7 +3497,6 @@
           <a:lstStyle/>
           <a:p>
             <a:pPr algn="ctr"/>
-            <a:endParaRPr/>
           </a:p>
         </p:txBody>
       </p:sp>
@@ -3530,7 +3517,7 @@
           <a:noFill/>
         </p:spPr>
         <p:txBody>
-          <a:bodyPr wrap="none" lIns="0" tIns="0" rIns="0" bIns="0" anchor="t">
+          <a:bodyPr wrap="none" lIns="0" rIns="0" tIns="0" bIns="0" anchor="t">
             <a:spAutoFit/>
           </a:bodyPr>
           <a:lstStyle/>
@@ -3544,7 +3531,7 @@
               </a:spcAft>
             </a:pPr>
             <a:r>
-              <a:rPr sz="4800" b="1" i="0" dirty="0" err="1">
+              <a:rPr sz="4800" b="1" i="0">
                 <a:solidFill>
                   <a:srgbClr val="0A1B3E"/>
                 </a:solidFill>
@@ -3552,12 +3539,6 @@
               </a:rPr>
               <a:t>VectorDeckPPT</a:t>
             </a:r>
-            <a:endParaRPr sz="4800" b="1" i="0" dirty="0">
-              <a:solidFill>
-                <a:srgbClr val="0A1B3E"/>
-              </a:solidFill>
-              <a:latin typeface="Microsoft YaHei"/>
-            </a:endParaRPr>
           </a:p>
         </p:txBody>
       </p:sp>
@@ -3578,7 +3559,7 @@
           <a:noFill/>
         </p:spPr>
         <p:txBody>
-          <a:bodyPr wrap="none" lIns="0" tIns="0" rIns="0" bIns="0" anchor="t">
+          <a:bodyPr wrap="none" lIns="0" rIns="0" tIns="0" bIns="0" anchor="t">
             <a:spAutoFit/>
           </a:bodyPr>
           <a:lstStyle/>
@@ -3592,29 +3573,14 @@
               </a:spcAft>
             </a:pPr>
             <a:r>
-              <a:rPr sz="2279" b="1" i="0" dirty="0">
+              <a:rPr sz="2279" b="1" i="0">
                 <a:solidFill>
                   <a:srgbClr val="173A73"/>
                 </a:solidFill>
                 <a:latin typeface="Microsoft YaHei"/>
               </a:rPr>
-              <a:t>让 AI </a:t>
-            </a:r>
-            <a:r>
-              <a:rPr sz="2279" b="1" i="0" dirty="0" err="1">
-                <a:solidFill>
-                  <a:srgbClr val="173A73"/>
-                </a:solidFill>
-                <a:latin typeface="Microsoft YaHei"/>
-              </a:rPr>
-              <a:t>负责设计，让代码保证交付</a:t>
-            </a:r>
-            <a:endParaRPr sz="2279" b="1" i="0" dirty="0">
-              <a:solidFill>
-                <a:srgbClr val="173A73"/>
-              </a:solidFill>
-              <a:latin typeface="Microsoft YaHei"/>
-            </a:endParaRPr>
+              <a:t>让 AI 负责设计，让代码保证交付</a:t>
+            </a:r>
           </a:p>
         </p:txBody>
       </p:sp>
@@ -3635,7 +3601,7 @@
           <a:noFill/>
         </p:spPr>
         <p:txBody>
-          <a:bodyPr wrap="none" lIns="0" tIns="0" rIns="0" bIns="0" anchor="t">
+          <a:bodyPr wrap="none" lIns="0" rIns="0" tIns="0" bIns="0" anchor="t">
             <a:spAutoFit/>
           </a:bodyPr>
           <a:lstStyle/>
@@ -3688,7 +3654,6 @@
           <a:lstStyle/>
           <a:p>
             <a:pPr algn="ctr"/>
-            <a:endParaRPr/>
           </a:p>
         </p:txBody>
       </p:sp>
@@ -3720,7 +3685,6 @@
           <a:lstStyle/>
           <a:p>
             <a:pPr algn="ctr"/>
-            <a:endParaRPr/>
           </a:p>
         </p:txBody>
       </p:sp>
@@ -3752,7 +3716,6 @@
           <a:lstStyle/>
           <a:p>
             <a:pPr algn="ctr"/>
-            <a:endParaRPr/>
           </a:p>
         </p:txBody>
       </p:sp>
@@ -3786,7 +3749,6 @@
           <a:lstStyle/>
           <a:p>
             <a:pPr algn="ctr"/>
-            <a:endParaRPr/>
           </a:p>
         </p:txBody>
       </p:sp>
@@ -3807,7 +3769,7 @@
           <a:noFill/>
         </p:spPr>
         <p:txBody>
-          <a:bodyPr wrap="none" lIns="0" tIns="0" rIns="0" bIns="0" anchor="t">
+          <a:bodyPr wrap="none" lIns="0" rIns="0" tIns="0" bIns="0" anchor="t">
             <a:spAutoFit/>
           </a:bodyPr>
           <a:lstStyle/>
@@ -3849,7 +3811,7 @@
           <a:noFill/>
         </p:spPr>
         <p:txBody>
-          <a:bodyPr wrap="none" lIns="0" tIns="0" rIns="0" bIns="0" anchor="t">
+          <a:bodyPr wrap="none" lIns="0" rIns="0" tIns="0" bIns="0" anchor="t">
             <a:spAutoFit/>
           </a:bodyPr>
           <a:lstStyle/>
@@ -3891,7 +3853,7 @@
           <a:noFill/>
         </p:spPr>
         <p:txBody>
-          <a:bodyPr wrap="none" lIns="0" tIns="0" rIns="0" bIns="0" anchor="t">
+          <a:bodyPr wrap="none" lIns="0" rIns="0" tIns="0" bIns="0" anchor="t">
             <a:spAutoFit/>
           </a:bodyPr>
           <a:lstStyle/>
@@ -3944,7 +3906,6 @@
           <a:lstStyle/>
           <a:p>
             <a:pPr algn="ctr"/>
-            <a:endParaRPr/>
           </a:p>
         </p:txBody>
       </p:sp>
@@ -3978,7 +3939,6 @@
           <a:lstStyle/>
           <a:p>
             <a:pPr algn="ctr"/>
-            <a:endParaRPr/>
           </a:p>
         </p:txBody>
       </p:sp>
@@ -4008,7 +3968,6 @@
           <a:lstStyle/>
           <a:p>
             <a:pPr algn="ctr"/>
-            <a:endParaRPr/>
           </a:p>
         </p:txBody>
       </p:sp>
@@ -4029,7 +3988,7 @@
           <a:noFill/>
         </p:spPr>
         <p:txBody>
-          <a:bodyPr wrap="none" lIns="0" tIns="0" rIns="0" bIns="0" anchor="t">
+          <a:bodyPr wrap="none" lIns="0" rIns="0" tIns="0" bIns="0" anchor="t">
             <a:spAutoFit/>
           </a:bodyPr>
           <a:lstStyle/>
@@ -4071,7 +4030,7 @@
           <a:noFill/>
         </p:spPr>
         <p:txBody>
-          <a:bodyPr wrap="none" lIns="0" tIns="0" rIns="0" bIns="0" anchor="t">
+          <a:bodyPr wrap="none" lIns="0" rIns="0" tIns="0" bIns="0" anchor="t">
             <a:spAutoFit/>
           </a:bodyPr>
           <a:lstStyle/>
@@ -4113,7 +4072,7 @@
           <a:noFill/>
         </p:spPr>
         <p:txBody>
-          <a:bodyPr wrap="none" lIns="0" tIns="0" rIns="0" bIns="0" anchor="t">
+          <a:bodyPr wrap="none" lIns="0" rIns="0" tIns="0" bIns="0" anchor="t">
             <a:spAutoFit/>
           </a:bodyPr>
           <a:lstStyle/>
@@ -4166,7 +4125,6 @@
           <a:lstStyle/>
           <a:p>
             <a:pPr algn="ctr"/>
-            <a:endParaRPr/>
           </a:p>
         </p:txBody>
       </p:sp>
@@ -4200,7 +4158,6 @@
           <a:lstStyle/>
           <a:p>
             <a:pPr algn="ctr"/>
-            <a:endParaRPr/>
           </a:p>
         </p:txBody>
       </p:sp>
@@ -4230,7 +4187,6 @@
           <a:lstStyle/>
           <a:p>
             <a:pPr algn="ctr"/>
-            <a:endParaRPr/>
           </a:p>
         </p:txBody>
       </p:sp>
@@ -4251,7 +4207,7 @@
           <a:noFill/>
         </p:spPr>
         <p:txBody>
-          <a:bodyPr wrap="none" lIns="0" tIns="0" rIns="0" bIns="0" anchor="t">
+          <a:bodyPr wrap="none" lIns="0" rIns="0" tIns="0" bIns="0" anchor="t">
             <a:spAutoFit/>
           </a:bodyPr>
           <a:lstStyle/>
@@ -4293,7 +4249,7 @@
           <a:noFill/>
         </p:spPr>
         <p:txBody>
-          <a:bodyPr wrap="none" lIns="0" tIns="0" rIns="0" bIns="0" anchor="t">
+          <a:bodyPr wrap="none" lIns="0" rIns="0" tIns="0" bIns="0" anchor="t">
             <a:spAutoFit/>
           </a:bodyPr>
           <a:lstStyle/>
@@ -4335,7 +4291,7 @@
           <a:noFill/>
         </p:spPr>
         <p:txBody>
-          <a:bodyPr wrap="none" lIns="0" tIns="0" rIns="0" bIns="0" anchor="t">
+          <a:bodyPr wrap="none" lIns="0" rIns="0" tIns="0" bIns="0" anchor="t">
             <a:spAutoFit/>
           </a:bodyPr>
           <a:lstStyle/>
@@ -4388,7 +4344,6 @@
           <a:lstStyle/>
           <a:p>
             <a:pPr algn="ctr"/>
-            <a:endParaRPr/>
           </a:p>
         </p:txBody>
       </p:sp>
@@ -4422,7 +4377,6 @@
           <a:lstStyle/>
           <a:p>
             <a:pPr algn="ctr"/>
-            <a:endParaRPr/>
           </a:p>
         </p:txBody>
       </p:sp>
@@ -4452,7 +4406,6 @@
           <a:lstStyle/>
           <a:p>
             <a:pPr algn="ctr"/>
-            <a:endParaRPr/>
           </a:p>
         </p:txBody>
       </p:sp>
@@ -4473,7 +4426,7 @@
           <a:noFill/>
         </p:spPr>
         <p:txBody>
-          <a:bodyPr wrap="none" lIns="0" tIns="0" rIns="0" bIns="0" anchor="t">
+          <a:bodyPr wrap="none" lIns="0" rIns="0" tIns="0" bIns="0" anchor="t">
             <a:spAutoFit/>
           </a:bodyPr>
           <a:lstStyle/>
@@ -4515,7 +4468,7 @@
           <a:noFill/>
         </p:spPr>
         <p:txBody>
-          <a:bodyPr wrap="none" lIns="0" tIns="0" rIns="0" bIns="0" anchor="t">
+          <a:bodyPr wrap="none" lIns="0" rIns="0" tIns="0" bIns="0" anchor="t">
             <a:spAutoFit/>
           </a:bodyPr>
           <a:lstStyle/>
@@ -4557,7 +4510,7 @@
           <a:noFill/>
         </p:spPr>
         <p:txBody>
-          <a:bodyPr wrap="none" lIns="0" tIns="0" rIns="0" bIns="0" anchor="t">
+          <a:bodyPr wrap="none" lIns="0" rIns="0" tIns="0" bIns="0" anchor="t">
             <a:spAutoFit/>
           </a:bodyPr>
           <a:lstStyle/>
@@ -4610,7 +4563,6 @@
           <a:lstStyle/>
           <a:p>
             <a:pPr algn="ctr"/>
-            <a:endParaRPr/>
           </a:p>
         </p:txBody>
       </p:sp>
@@ -4644,7 +4596,6 @@
           <a:lstStyle/>
           <a:p>
             <a:pPr algn="ctr"/>
-            <a:endParaRPr/>
           </a:p>
         </p:txBody>
       </p:sp>
@@ -4676,7 +4627,6 @@
           <a:lstStyle/>
           <a:p>
             <a:pPr algn="ctr"/>
-            <a:endParaRPr/>
           </a:p>
         </p:txBody>
       </p:sp>
@@ -4706,7 +4656,6 @@
           <a:lstStyle/>
           <a:p>
             <a:pPr algn="ctr"/>
-            <a:endParaRPr/>
           </a:p>
         </p:txBody>
       </p:sp>
@@ -4727,7 +4676,7 @@
           <a:noFill/>
         </p:spPr>
         <p:txBody>
-          <a:bodyPr wrap="none" lIns="0" tIns="0" rIns="0" bIns="0" anchor="t">
+          <a:bodyPr wrap="none" lIns="0" rIns="0" tIns="0" bIns="0" anchor="t">
             <a:spAutoFit/>
           </a:bodyPr>
           <a:lstStyle/>
@@ -4769,7 +4718,7 @@
           <a:noFill/>
         </p:spPr>
         <p:txBody>
-          <a:bodyPr wrap="none" lIns="0" tIns="0" rIns="0" bIns="0" anchor="t">
+          <a:bodyPr wrap="none" lIns="0" rIns="0" tIns="0" bIns="0" anchor="t">
             <a:spAutoFit/>
           </a:bodyPr>
           <a:lstStyle/>
@@ -4841,7 +4790,6 @@
           <a:lstStyle/>
           <a:p>
             <a:pPr algn="ctr"/>
-            <a:endParaRPr/>
           </a:p>
         </p:txBody>
       </p:sp>
@@ -4873,7 +4821,6 @@
           <a:lstStyle/>
           <a:p>
             <a:pPr algn="ctr"/>
-            <a:endParaRPr/>
           </a:p>
         </p:txBody>
       </p:sp>
@@ -4903,7 +4850,6 @@
           <a:lstStyle/>
           <a:p>
             <a:pPr algn="ctr"/>
-            <a:endParaRPr/>
           </a:p>
         </p:txBody>
       </p:sp>
@@ -4935,7 +4881,6 @@
           <a:lstStyle/>
           <a:p>
             <a:pPr algn="ctr"/>
-            <a:endParaRPr/>
           </a:p>
         </p:txBody>
       </p:sp>
@@ -4965,7 +4910,6 @@
           <a:lstStyle/>
           <a:p>
             <a:pPr algn="ctr"/>
-            <a:endParaRPr/>
           </a:p>
         </p:txBody>
       </p:sp>
@@ -4986,7 +4930,7 @@
           <a:noFill/>
         </p:spPr>
         <p:txBody>
-          <a:bodyPr wrap="none" lIns="0" tIns="0" rIns="0" bIns="0" anchor="t">
+          <a:bodyPr wrap="none" lIns="0" rIns="0" tIns="0" bIns="0" anchor="t">
             <a:spAutoFit/>
           </a:bodyPr>
           <a:lstStyle/>
@@ -5028,7 +4972,7 @@
           <a:noFill/>
         </p:spPr>
         <p:txBody>
-          <a:bodyPr wrap="none" lIns="0" tIns="0" rIns="0" bIns="0" anchor="t">
+          <a:bodyPr wrap="none" lIns="0" rIns="0" tIns="0" bIns="0" anchor="t">
             <a:spAutoFit/>
           </a:bodyPr>
           <a:lstStyle/>
@@ -5070,7 +5014,7 @@
           <a:noFill/>
         </p:spPr>
         <p:txBody>
-          <a:bodyPr wrap="none" lIns="0" tIns="0" rIns="0" bIns="0" anchor="t">
+          <a:bodyPr wrap="none" lIns="0" rIns="0" tIns="0" bIns="0" anchor="t">
             <a:spAutoFit/>
           </a:bodyPr>
           <a:lstStyle/>
@@ -5112,7 +5056,7 @@
           <a:noFill/>
         </p:spPr>
         <p:txBody>
-          <a:bodyPr wrap="none" lIns="0" tIns="0" rIns="0" bIns="0" anchor="t">
+          <a:bodyPr wrap="none" lIns="0" rIns="0" tIns="0" bIns="0" anchor="t">
             <a:spAutoFit/>
           </a:bodyPr>
           <a:lstStyle/>
@@ -5154,7 +5098,7 @@
           <a:noFill/>
         </p:spPr>
         <p:txBody>
-          <a:bodyPr wrap="none" lIns="0" tIns="0" rIns="0" bIns="0" anchor="t">
+          <a:bodyPr wrap="none" lIns="0" rIns="0" tIns="0" bIns="0" anchor="t">
             <a:spAutoFit/>
           </a:bodyPr>
           <a:lstStyle/>
@@ -5196,7 +5140,7 @@
           <a:noFill/>
         </p:spPr>
         <p:txBody>
-          <a:bodyPr wrap="none" lIns="0" tIns="0" rIns="0" bIns="0" anchor="t">
+          <a:bodyPr wrap="none" lIns="0" rIns="0" tIns="0" bIns="0" anchor="t">
             <a:spAutoFit/>
           </a:bodyPr>
           <a:lstStyle/>
@@ -5238,7 +5182,7 @@
           <a:noFill/>
         </p:spPr>
         <p:txBody>
-          <a:bodyPr wrap="none" lIns="0" tIns="0" rIns="0" bIns="0" anchor="t">
+          <a:bodyPr wrap="none" lIns="0" rIns="0" tIns="0" bIns="0" anchor="t">
             <a:spAutoFit/>
           </a:bodyPr>
           <a:lstStyle/>
@@ -5280,7 +5224,7 @@
           <a:noFill/>
         </p:spPr>
         <p:txBody>
-          <a:bodyPr wrap="none" lIns="0" tIns="0" rIns="0" bIns="0" anchor="t">
+          <a:bodyPr wrap="none" lIns="0" rIns="0" tIns="0" bIns="0" anchor="t">
             <a:spAutoFit/>
           </a:bodyPr>
           <a:lstStyle/>
@@ -5322,7 +5266,7 @@
           <a:noFill/>
         </p:spPr>
         <p:txBody>
-          <a:bodyPr wrap="none" lIns="0" tIns="0" rIns="0" bIns="0" anchor="t">
+          <a:bodyPr wrap="none" lIns="0" rIns="0" tIns="0" bIns="0" anchor="t">
             <a:spAutoFit/>
           </a:bodyPr>
           <a:lstStyle/>
@@ -5364,7 +5308,7 @@
           <a:noFill/>
         </p:spPr>
         <p:txBody>
-          <a:bodyPr wrap="none" lIns="0" tIns="0" rIns="0" bIns="0" anchor="t">
+          <a:bodyPr wrap="none" lIns="0" rIns="0" tIns="0" bIns="0" anchor="t">
             <a:spAutoFit/>
           </a:bodyPr>
           <a:lstStyle/>
@@ -5419,7 +5363,6 @@
           <a:lstStyle/>
           <a:p>
             <a:pPr algn="ctr"/>
-            <a:endParaRPr/>
           </a:p>
         </p:txBody>
       </p:sp>
@@ -5449,7 +5392,6 @@
           <a:lstStyle/>
           <a:p>
             <a:pPr algn="ctr"/>
-            <a:endParaRPr/>
           </a:p>
         </p:txBody>
       </p:sp>
@@ -5470,7 +5412,7 @@
           <a:noFill/>
         </p:spPr>
         <p:txBody>
-          <a:bodyPr wrap="none" lIns="0" tIns="0" rIns="0" bIns="0" anchor="t">
+          <a:bodyPr wrap="none" lIns="0" rIns="0" tIns="0" bIns="0" anchor="t">
             <a:spAutoFit/>
           </a:bodyPr>
           <a:lstStyle/>
@@ -5512,7 +5454,7 @@
           <a:noFill/>
         </p:spPr>
         <p:txBody>
-          <a:bodyPr wrap="none" lIns="0" tIns="0" rIns="0" bIns="0" anchor="t">
+          <a:bodyPr wrap="none" lIns="0" rIns="0" tIns="0" bIns="0" anchor="t">
             <a:spAutoFit/>
           </a:bodyPr>
           <a:lstStyle/>
@@ -5554,7 +5496,7 @@
           <a:noFill/>
         </p:spPr>
         <p:txBody>
-          <a:bodyPr wrap="none" lIns="0" tIns="0" rIns="0" bIns="0" anchor="t">
+          <a:bodyPr wrap="none" lIns="0" rIns="0" tIns="0" bIns="0" anchor="t">
             <a:spAutoFit/>
           </a:bodyPr>
           <a:lstStyle/>
@@ -5609,7 +5551,6 @@
           <a:lstStyle/>
           <a:p>
             <a:pPr algn="ctr"/>
-            <a:endParaRPr/>
           </a:p>
         </p:txBody>
       </p:sp>
@@ -5639,7 +5580,6 @@
           <a:lstStyle/>
           <a:p>
             <a:pPr algn="ctr"/>
-            <a:endParaRPr/>
           </a:p>
         </p:txBody>
       </p:sp>
@@ -5660,7 +5600,7 @@
           <a:noFill/>
         </p:spPr>
         <p:txBody>
-          <a:bodyPr wrap="none" lIns="0" tIns="0" rIns="0" bIns="0" anchor="t">
+          <a:bodyPr wrap="none" lIns="0" rIns="0" tIns="0" bIns="0" anchor="t">
             <a:spAutoFit/>
           </a:bodyPr>
           <a:lstStyle/>
@@ -5702,7 +5642,7 @@
           <a:noFill/>
         </p:spPr>
         <p:txBody>
-          <a:bodyPr wrap="none" lIns="0" tIns="0" rIns="0" bIns="0" anchor="t">
+          <a:bodyPr wrap="none" lIns="0" rIns="0" tIns="0" bIns="0" anchor="t">
             <a:spAutoFit/>
           </a:bodyPr>
           <a:lstStyle/>
@@ -5744,7 +5684,7 @@
           <a:noFill/>
         </p:spPr>
         <p:txBody>
-          <a:bodyPr wrap="none" lIns="0" tIns="0" rIns="0" bIns="0" anchor="t">
+          <a:bodyPr wrap="none" lIns="0" rIns="0" tIns="0" bIns="0" anchor="t">
             <a:spAutoFit/>
           </a:bodyPr>
           <a:lstStyle/>
@@ -5764,7 +5704,7 @@
                 </a:solidFill>
                 <a:latin typeface="Microsoft YaHei"/>
               </a:rPr>
-              <a:t>V1.1 · 2026</a:t>
+              <a:t>V1.2 · 2026</a:t>
             </a:r>
           </a:p>
         </p:txBody>
@@ -5778,7 +5718,7 @@
 </file>
 
 <file path=ppt/slides/slide10.xml><?xml version="1.0" encoding="utf-8"?>
-<p:sld xmlns:a="http://schemas.openxmlformats.org/drawingml/2006/main" xmlns:r="http://schemas.openxmlformats.org/officeDocument/2006/relationships" xmlns:p="http://schemas.openxmlformats.org/presentationml/2006/main">
+<p:sld xmlns:a="http://schemas.openxmlformats.org/drawingml/2006/main" xmlns:p="http://schemas.openxmlformats.org/presentationml/2006/main" xmlns:r="http://schemas.openxmlformats.org/officeDocument/2006/relationships">
   <p:cSld>
     <p:spTree>
       <p:nvGrpSpPr>
@@ -5786,14 +5726,7 @@
         <p:cNvGrpSpPr/>
         <p:nvPr/>
       </p:nvGrpSpPr>
-      <p:grpSpPr>
-        <a:xfrm>
-          <a:off x="0" y="0"/>
-          <a:ext cx="0" cy="0"/>
-          <a:chOff x="0" y="0"/>
-          <a:chExt cx="0" cy="0"/>
-        </a:xfrm>
-      </p:grpSpPr>
+      <p:grpSpPr/>
       <p:sp>
         <p:nvSpPr>
           <p:cNvPr id="2" name="SVG rect"/>
@@ -5820,7 +5753,6 @@
           <a:lstStyle/>
           <a:p>
             <a:pPr algn="ctr"/>
-            <a:endParaRPr/>
           </a:p>
         </p:txBody>
       </p:sp>
@@ -5850,7 +5782,6 @@
           <a:lstStyle/>
           <a:p>
             <a:pPr algn="ctr"/>
-            <a:endParaRPr/>
           </a:p>
         </p:txBody>
       </p:sp>
@@ -5880,7 +5811,6 @@
           <a:lstStyle/>
           <a:p>
             <a:pPr algn="ctr"/>
-            <a:endParaRPr/>
           </a:p>
         </p:txBody>
       </p:sp>
@@ -5912,7 +5842,6 @@
           <a:lstStyle/>
           <a:p>
             <a:pPr algn="ctr"/>
-            <a:endParaRPr/>
           </a:p>
         </p:txBody>
       </p:sp>
@@ -5944,7 +5873,6 @@
           <a:lstStyle/>
           <a:p>
             <a:pPr algn="ctr"/>
-            <a:endParaRPr/>
           </a:p>
         </p:txBody>
       </p:sp>
@@ -5965,7 +5893,7 @@
           <a:noFill/>
         </p:spPr>
         <p:txBody>
-          <a:bodyPr wrap="none" lIns="0" tIns="0" rIns="0" bIns="0" anchor="t">
+          <a:bodyPr wrap="none" lIns="0" rIns="0" tIns="0" bIns="0" anchor="t">
             <a:spAutoFit/>
           </a:bodyPr>
           <a:lstStyle/>
@@ -5999,36 +5927,36 @@
         <p:spPr>
           <a:xfrm>
             <a:off x="1813560" y="478231"/>
-            <a:ext cx="6160341" cy="350737"/>
-          </a:xfrm>
-          <a:prstGeom prst="rect">
-            <a:avLst/>
-          </a:prstGeom>
-          <a:noFill/>
-        </p:spPr>
-        <p:txBody>
-          <a:bodyPr wrap="none" lIns="0" tIns="0" rIns="0" bIns="0" anchor="t">
-            <a:spAutoFit/>
-          </a:bodyPr>
-          <a:lstStyle/>
-          <a:p>
-            <a:r>
-              <a:rPr lang="zh-CN" altLang="en-US" sz="2279" b="1" dirty="0">
+            <a:ext cx="5344973" cy="292608"/>
+          </a:xfrm>
+          <a:prstGeom prst="rect">
+            <a:avLst/>
+          </a:prstGeom>
+          <a:noFill/>
+        </p:spPr>
+        <p:txBody>
+          <a:bodyPr wrap="none" lIns="0" rIns="0" tIns="0" bIns="0" anchor="t">
+            <a:spAutoFit/>
+          </a:bodyPr>
+          <a:lstStyle/>
+          <a:p>
+            <a:pPr algn="l">
+              <a:spcBef>
+                <a:spcPts val="0"/>
+              </a:spcBef>
+              <a:spcAft>
+                <a:spcPts val="0"/>
+              </a:spcAft>
+            </a:pPr>
+            <a:r>
+              <a:rPr sz="1920" b="1" i="0">
                 <a:solidFill>
                   <a:srgbClr val="0A1B3E"/>
                 </a:solidFill>
-                <a:latin typeface="Microsoft YaHei UI" panose="020B0503020204020204" pitchFamily="34" charset="-122"/>
-                <a:ea typeface="Microsoft YaHei UI" panose="020B0503020204020204" pitchFamily="34" charset="-122"/>
+                <a:latin typeface="Microsoft YaHei"/>
               </a:rPr>
               <a:t>一句调用，得到一套可继续维护的演示文稿资产</a:t>
             </a:r>
-            <a:endParaRPr sz="2279" b="1" dirty="0">
-              <a:solidFill>
-                <a:srgbClr val="0A1B3E"/>
-              </a:solidFill>
-              <a:latin typeface="Microsoft YaHei UI" panose="020B0503020204020204" pitchFamily="34" charset="-122"/>
-              <a:ea typeface="Microsoft YaHei UI" panose="020B0503020204020204" pitchFamily="34" charset="-122"/>
-            </a:endParaRPr>
           </a:p>
         </p:txBody>
       </p:sp>
@@ -6049,7 +5977,7 @@
           <a:noFill/>
         </p:spPr>
         <p:txBody>
-          <a:bodyPr wrap="none" lIns="0" tIns="0" rIns="0" bIns="0" anchor="t">
+          <a:bodyPr wrap="none" lIns="0" rIns="0" tIns="0" bIns="0" anchor="t">
             <a:spAutoFit/>
           </a:bodyPr>
           <a:lstStyle/>
@@ -6100,7 +6028,6 @@
           <a:lstStyle/>
           <a:p>
             <a:pPr algn="ctr"/>
-            <a:endParaRPr/>
           </a:p>
         </p:txBody>
       </p:sp>
@@ -6130,7 +6057,6 @@
           <a:lstStyle/>
           <a:p>
             <a:pPr algn="ctr"/>
-            <a:endParaRPr/>
           </a:p>
         </p:txBody>
       </p:sp>
@@ -6160,7 +6086,6 @@
           <a:lstStyle/>
           <a:p>
             <a:pPr algn="ctr"/>
-            <a:endParaRPr/>
           </a:p>
         </p:txBody>
       </p:sp>
@@ -6190,7 +6115,6 @@
           <a:lstStyle/>
           <a:p>
             <a:pPr algn="ctr"/>
-            <a:endParaRPr/>
           </a:p>
         </p:txBody>
       </p:sp>
@@ -6220,7 +6144,6 @@
           <a:lstStyle/>
           <a:p>
             <a:pPr algn="ctr"/>
-            <a:endParaRPr/>
           </a:p>
         </p:txBody>
       </p:sp>
@@ -6250,7 +6173,6 @@
           <a:lstStyle/>
           <a:p>
             <a:pPr algn="ctr"/>
-            <a:endParaRPr/>
           </a:p>
         </p:txBody>
       </p:sp>
@@ -6280,7 +6202,6 @@
           <a:lstStyle/>
           <a:p>
             <a:pPr algn="ctr"/>
-            <a:endParaRPr/>
           </a:p>
         </p:txBody>
       </p:sp>
@@ -6310,7 +6231,6 @@
           <a:lstStyle/>
           <a:p>
             <a:pPr algn="ctr"/>
-            <a:endParaRPr/>
           </a:p>
         </p:txBody>
       </p:sp>
@@ -6340,7 +6260,6 @@
           <a:lstStyle/>
           <a:p>
             <a:pPr algn="ctr"/>
-            <a:endParaRPr/>
           </a:p>
         </p:txBody>
       </p:sp>
@@ -6370,7 +6289,6 @@
           <a:lstStyle/>
           <a:p>
             <a:pPr algn="ctr"/>
-            <a:endParaRPr/>
           </a:p>
         </p:txBody>
       </p:sp>
@@ -6402,7 +6320,6 @@
           <a:lstStyle/>
           <a:p>
             <a:pPr algn="ctr"/>
-            <a:endParaRPr/>
           </a:p>
         </p:txBody>
       </p:sp>
@@ -6434,7 +6351,6 @@
           <a:lstStyle/>
           <a:p>
             <a:pPr algn="ctr"/>
-            <a:endParaRPr/>
           </a:p>
         </p:txBody>
       </p:sp>
@@ -6466,7 +6382,6 @@
           <a:lstStyle/>
           <a:p>
             <a:pPr algn="ctr"/>
-            <a:endParaRPr/>
           </a:p>
         </p:txBody>
       </p:sp>
@@ -6498,7 +6413,6 @@
           <a:lstStyle/>
           <a:p>
             <a:pPr algn="ctr"/>
-            <a:endParaRPr/>
           </a:p>
         </p:txBody>
       </p:sp>
@@ -6532,7 +6446,6 @@
           <a:lstStyle/>
           <a:p>
             <a:pPr algn="ctr"/>
-            <a:endParaRPr/>
           </a:p>
         </p:txBody>
       </p:sp>
@@ -6553,7 +6466,7 @@
           <a:noFill/>
         </p:spPr>
         <p:txBody>
-          <a:bodyPr wrap="none" lIns="0" tIns="0" rIns="0" bIns="0" anchor="t">
+          <a:bodyPr wrap="none" lIns="0" rIns="0" tIns="0" bIns="0" anchor="t">
             <a:spAutoFit/>
           </a:bodyPr>
           <a:lstStyle/>
@@ -6595,7 +6508,7 @@
           <a:noFill/>
         </p:spPr>
         <p:txBody>
-          <a:bodyPr wrap="none" lIns="0" tIns="0" rIns="0" bIns="0" anchor="t">
+          <a:bodyPr wrap="none" lIns="0" rIns="0" tIns="0" bIns="0" anchor="t">
             <a:spAutoFit/>
           </a:bodyPr>
           <a:lstStyle/>
@@ -6648,7 +6561,6 @@
           <a:lstStyle/>
           <a:p>
             <a:pPr algn="ctr"/>
-            <a:endParaRPr/>
           </a:p>
         </p:txBody>
       </p:sp>
@@ -6680,7 +6592,6 @@
           <a:lstStyle/>
           <a:p>
             <a:pPr algn="ctr"/>
-            <a:endParaRPr/>
           </a:p>
         </p:txBody>
       </p:sp>
@@ -6710,7 +6621,6 @@
           <a:lstStyle/>
           <a:p>
             <a:pPr algn="ctr"/>
-            <a:endParaRPr/>
           </a:p>
         </p:txBody>
       </p:sp>
@@ -6740,7 +6650,6 @@
           <a:lstStyle/>
           <a:p>
             <a:pPr algn="ctr"/>
-            <a:endParaRPr/>
           </a:p>
         </p:txBody>
       </p:sp>
@@ -6770,7 +6679,6 @@
           <a:lstStyle/>
           <a:p>
             <a:pPr algn="ctr"/>
-            <a:endParaRPr/>
           </a:p>
         </p:txBody>
       </p:sp>
@@ -6791,7 +6699,7 @@
           <a:noFill/>
         </p:spPr>
         <p:txBody>
-          <a:bodyPr wrap="none" lIns="0" tIns="0" rIns="0" bIns="0" anchor="t">
+          <a:bodyPr wrap="none" lIns="0" rIns="0" tIns="0" bIns="0" anchor="t">
             <a:spAutoFit/>
           </a:bodyPr>
           <a:lstStyle/>
@@ -6833,7 +6741,7 @@
           <a:noFill/>
         </p:spPr>
         <p:txBody>
-          <a:bodyPr wrap="none" lIns="0" tIns="0" rIns="0" bIns="0" anchor="t">
+          <a:bodyPr wrap="none" lIns="0" rIns="0" tIns="0" bIns="0" anchor="t">
             <a:spAutoFit/>
           </a:bodyPr>
           <a:lstStyle/>
@@ -6875,7 +6783,7 @@
           <a:noFill/>
         </p:spPr>
         <p:txBody>
-          <a:bodyPr wrap="none" lIns="0" tIns="0" rIns="0" bIns="0" anchor="t">
+          <a:bodyPr wrap="none" lIns="0" rIns="0" tIns="0" bIns="0" anchor="t">
             <a:spAutoFit/>
           </a:bodyPr>
           <a:lstStyle/>
@@ -6928,7 +6836,6 @@
           <a:lstStyle/>
           <a:p>
             <a:pPr algn="ctr"/>
-            <a:endParaRPr/>
           </a:p>
         </p:txBody>
       </p:sp>
@@ -6962,7 +6869,6 @@
           <a:lstStyle/>
           <a:p>
             <a:pPr algn="ctr"/>
-            <a:endParaRPr/>
           </a:p>
         </p:txBody>
       </p:sp>
@@ -6992,7 +6898,6 @@
           <a:lstStyle/>
           <a:p>
             <a:pPr algn="ctr"/>
-            <a:endParaRPr/>
           </a:p>
         </p:txBody>
       </p:sp>
@@ -7013,7 +6918,7 @@
           <a:noFill/>
         </p:spPr>
         <p:txBody>
-          <a:bodyPr wrap="none" lIns="0" tIns="0" rIns="0" bIns="0" anchor="t">
+          <a:bodyPr wrap="none" lIns="0" rIns="0" tIns="0" bIns="0" anchor="t">
             <a:spAutoFit/>
           </a:bodyPr>
           <a:lstStyle/>
@@ -7055,7 +6960,7 @@
           <a:noFill/>
         </p:spPr>
         <p:txBody>
-          <a:bodyPr wrap="none" lIns="0" tIns="0" rIns="0" bIns="0" anchor="t">
+          <a:bodyPr wrap="none" lIns="0" rIns="0" tIns="0" bIns="0" anchor="t">
             <a:spAutoFit/>
           </a:bodyPr>
           <a:lstStyle/>
@@ -7106,7 +7011,6 @@
           <a:lstStyle/>
           <a:p>
             <a:pPr algn="ctr"/>
-            <a:endParaRPr/>
           </a:p>
         </p:txBody>
       </p:sp>
@@ -7127,7 +7031,7 @@
           <a:noFill/>
         </p:spPr>
         <p:txBody>
-          <a:bodyPr wrap="none" lIns="0" tIns="0" rIns="0" bIns="0" anchor="t">
+          <a:bodyPr wrap="none" lIns="0" rIns="0" tIns="0" bIns="0" anchor="t">
             <a:spAutoFit/>
           </a:bodyPr>
           <a:lstStyle/>
@@ -7169,7 +7073,7 @@
           <a:noFill/>
         </p:spPr>
         <p:txBody>
-          <a:bodyPr wrap="none" lIns="0" tIns="0" rIns="0" bIns="0" anchor="t">
+          <a:bodyPr wrap="none" lIns="0" rIns="0" tIns="0" bIns="0" anchor="t">
             <a:spAutoFit/>
           </a:bodyPr>
           <a:lstStyle/>
@@ -7211,7 +7115,7 @@
           <a:noFill/>
         </p:spPr>
         <p:txBody>
-          <a:bodyPr wrap="none" lIns="0" tIns="0" rIns="0" bIns="0" anchor="t">
+          <a:bodyPr wrap="none" lIns="0" rIns="0" tIns="0" bIns="0" anchor="t">
             <a:spAutoFit/>
           </a:bodyPr>
           <a:lstStyle/>
@@ -7264,7 +7168,6 @@
           <a:lstStyle/>
           <a:p>
             <a:pPr algn="ctr"/>
-            <a:endParaRPr/>
           </a:p>
         </p:txBody>
       </p:sp>
@@ -7298,7 +7201,6 @@
           <a:lstStyle/>
           <a:p>
             <a:pPr algn="ctr"/>
-            <a:endParaRPr/>
           </a:p>
         </p:txBody>
       </p:sp>
@@ -7328,7 +7230,6 @@
           <a:lstStyle/>
           <a:p>
             <a:pPr algn="ctr"/>
-            <a:endParaRPr/>
           </a:p>
         </p:txBody>
       </p:sp>
@@ -7349,7 +7250,7 @@
           <a:noFill/>
         </p:spPr>
         <p:txBody>
-          <a:bodyPr wrap="none" lIns="0" tIns="0" rIns="0" bIns="0" anchor="t">
+          <a:bodyPr wrap="none" lIns="0" rIns="0" tIns="0" bIns="0" anchor="t">
             <a:spAutoFit/>
           </a:bodyPr>
           <a:lstStyle/>
@@ -7391,7 +7292,7 @@
           <a:noFill/>
         </p:spPr>
         <p:txBody>
-          <a:bodyPr wrap="none" lIns="0" tIns="0" rIns="0" bIns="0" anchor="t">
+          <a:bodyPr wrap="none" lIns="0" rIns="0" tIns="0" bIns="0" anchor="t">
             <a:spAutoFit/>
           </a:bodyPr>
           <a:lstStyle/>
@@ -7442,7 +7343,6 @@
           <a:lstStyle/>
           <a:p>
             <a:pPr algn="ctr"/>
-            <a:endParaRPr/>
           </a:p>
         </p:txBody>
       </p:sp>
@@ -7463,7 +7363,7 @@
           <a:noFill/>
         </p:spPr>
         <p:txBody>
-          <a:bodyPr wrap="none" lIns="0" tIns="0" rIns="0" bIns="0" anchor="t">
+          <a:bodyPr wrap="none" lIns="0" rIns="0" tIns="0" bIns="0" anchor="t">
             <a:spAutoFit/>
           </a:bodyPr>
           <a:lstStyle/>
@@ -7505,7 +7405,7 @@
           <a:noFill/>
         </p:spPr>
         <p:txBody>
-          <a:bodyPr wrap="none" lIns="0" tIns="0" rIns="0" bIns="0" anchor="t">
+          <a:bodyPr wrap="none" lIns="0" rIns="0" tIns="0" bIns="0" anchor="t">
             <a:spAutoFit/>
           </a:bodyPr>
           <a:lstStyle/>
@@ -7547,7 +7447,7 @@
           <a:noFill/>
         </p:spPr>
         <p:txBody>
-          <a:bodyPr wrap="none" lIns="0" tIns="0" rIns="0" bIns="0" anchor="t">
+          <a:bodyPr wrap="none" lIns="0" rIns="0" tIns="0" bIns="0" anchor="t">
             <a:spAutoFit/>
           </a:bodyPr>
           <a:lstStyle/>
@@ -7600,7 +7500,6 @@
           <a:lstStyle/>
           <a:p>
             <a:pPr algn="ctr"/>
-            <a:endParaRPr/>
           </a:p>
         </p:txBody>
       </p:sp>
@@ -7634,7 +7533,6 @@
           <a:lstStyle/>
           <a:p>
             <a:pPr algn="ctr"/>
-            <a:endParaRPr/>
           </a:p>
         </p:txBody>
       </p:sp>
@@ -7664,7 +7562,6 @@
           <a:lstStyle/>
           <a:p>
             <a:pPr algn="ctr"/>
-            <a:endParaRPr/>
           </a:p>
         </p:txBody>
       </p:sp>
@@ -7685,7 +7582,7 @@
           <a:noFill/>
         </p:spPr>
         <p:txBody>
-          <a:bodyPr wrap="none" lIns="0" tIns="0" rIns="0" bIns="0" anchor="t">
+          <a:bodyPr wrap="none" lIns="0" rIns="0" tIns="0" bIns="0" anchor="t">
             <a:spAutoFit/>
           </a:bodyPr>
           <a:lstStyle/>
@@ -7727,7 +7624,7 @@
           <a:noFill/>
         </p:spPr>
         <p:txBody>
-          <a:bodyPr wrap="none" lIns="0" tIns="0" rIns="0" bIns="0" anchor="t">
+          <a:bodyPr wrap="none" lIns="0" rIns="0" tIns="0" bIns="0" anchor="t">
             <a:spAutoFit/>
           </a:bodyPr>
           <a:lstStyle/>
@@ -7778,7 +7675,6 @@
           <a:lstStyle/>
           <a:p>
             <a:pPr algn="ctr"/>
-            <a:endParaRPr/>
           </a:p>
         </p:txBody>
       </p:sp>
@@ -7799,7 +7695,7 @@
           <a:noFill/>
         </p:spPr>
         <p:txBody>
-          <a:bodyPr wrap="none" lIns="0" tIns="0" rIns="0" bIns="0" anchor="t">
+          <a:bodyPr wrap="none" lIns="0" rIns="0" tIns="0" bIns="0" anchor="t">
             <a:spAutoFit/>
           </a:bodyPr>
           <a:lstStyle/>
@@ -7841,7 +7737,7 @@
           <a:noFill/>
         </p:spPr>
         <p:txBody>
-          <a:bodyPr wrap="none" lIns="0" tIns="0" rIns="0" bIns="0" anchor="t">
+          <a:bodyPr wrap="none" lIns="0" rIns="0" tIns="0" bIns="0" anchor="t">
             <a:spAutoFit/>
           </a:bodyPr>
           <a:lstStyle/>
@@ -7883,7 +7779,7 @@
           <a:noFill/>
         </p:spPr>
         <p:txBody>
-          <a:bodyPr wrap="none" lIns="0" tIns="0" rIns="0" bIns="0" anchor="t">
+          <a:bodyPr wrap="none" lIns="0" rIns="0" tIns="0" bIns="0" anchor="t">
             <a:spAutoFit/>
           </a:bodyPr>
           <a:lstStyle/>
@@ -7936,7 +7832,6 @@
           <a:lstStyle/>
           <a:p>
             <a:pPr algn="ctr"/>
-            <a:endParaRPr/>
           </a:p>
         </p:txBody>
       </p:sp>
@@ -7970,7 +7865,6 @@
           <a:lstStyle/>
           <a:p>
             <a:pPr algn="ctr"/>
-            <a:endParaRPr/>
           </a:p>
         </p:txBody>
       </p:sp>
@@ -8000,7 +7894,6 @@
           <a:lstStyle/>
           <a:p>
             <a:pPr algn="ctr"/>
-            <a:endParaRPr/>
           </a:p>
         </p:txBody>
       </p:sp>
@@ -8021,7 +7914,7 @@
           <a:noFill/>
         </p:spPr>
         <p:txBody>
-          <a:bodyPr wrap="none" lIns="0" tIns="0" rIns="0" bIns="0" anchor="t">
+          <a:bodyPr wrap="none" lIns="0" rIns="0" tIns="0" bIns="0" anchor="t">
             <a:spAutoFit/>
           </a:bodyPr>
           <a:lstStyle/>
@@ -8063,7 +7956,7 @@
           <a:noFill/>
         </p:spPr>
         <p:txBody>
-          <a:bodyPr wrap="none" lIns="0" tIns="0" rIns="0" bIns="0" anchor="t">
+          <a:bodyPr wrap="none" lIns="0" rIns="0" tIns="0" bIns="0" anchor="t">
             <a:spAutoFit/>
           </a:bodyPr>
           <a:lstStyle/>
@@ -8114,7 +8007,6 @@
           <a:lstStyle/>
           <a:p>
             <a:pPr algn="ctr"/>
-            <a:endParaRPr/>
           </a:p>
         </p:txBody>
       </p:sp>
@@ -8135,7 +8027,7 @@
           <a:noFill/>
         </p:spPr>
         <p:txBody>
-          <a:bodyPr wrap="none" lIns="0" tIns="0" rIns="0" bIns="0" anchor="t">
+          <a:bodyPr wrap="none" lIns="0" rIns="0" tIns="0" bIns="0" anchor="t">
             <a:spAutoFit/>
           </a:bodyPr>
           <a:lstStyle/>
@@ -8177,7 +8069,7 @@
           <a:noFill/>
         </p:spPr>
         <p:txBody>
-          <a:bodyPr wrap="none" lIns="0" tIns="0" rIns="0" bIns="0" anchor="t">
+          <a:bodyPr wrap="none" lIns="0" rIns="0" tIns="0" bIns="0" anchor="t">
             <a:spAutoFit/>
           </a:bodyPr>
           <a:lstStyle/>
@@ -8230,7 +8122,6 @@
           <a:lstStyle/>
           <a:p>
             <a:pPr algn="ctr"/>
-            <a:endParaRPr/>
           </a:p>
         </p:txBody>
       </p:sp>
@@ -8264,7 +8155,6 @@
           <a:lstStyle/>
           <a:p>
             <a:pPr algn="ctr"/>
-            <a:endParaRPr/>
           </a:p>
         </p:txBody>
       </p:sp>
@@ -8285,7 +8175,7 @@
           <a:noFill/>
         </p:spPr>
         <p:txBody>
-          <a:bodyPr wrap="none" lIns="0" tIns="0" rIns="0" bIns="0" anchor="t">
+          <a:bodyPr wrap="none" lIns="0" rIns="0" tIns="0" bIns="0" anchor="t">
             <a:spAutoFit/>
           </a:bodyPr>
           <a:lstStyle/>
@@ -8327,7 +8217,7 @@
           <a:noFill/>
         </p:spPr>
         <p:txBody>
-          <a:bodyPr wrap="none" lIns="0" tIns="0" rIns="0" bIns="0" anchor="t">
+          <a:bodyPr wrap="none" lIns="0" rIns="0" tIns="0" bIns="0" anchor="t">
             <a:spAutoFit/>
           </a:bodyPr>
           <a:lstStyle/>
@@ -8380,7 +8270,6 @@
           <a:lstStyle/>
           <a:p>
             <a:pPr algn="ctr"/>
-            <a:endParaRPr/>
           </a:p>
         </p:txBody>
       </p:sp>
@@ -8410,7 +8299,6 @@
           <a:lstStyle/>
           <a:p>
             <a:pPr algn="ctr"/>
-            <a:endParaRPr/>
           </a:p>
         </p:txBody>
       </p:sp>
@@ -8431,7 +8319,7 @@
           <a:noFill/>
         </p:spPr>
         <p:txBody>
-          <a:bodyPr wrap="none" lIns="0" tIns="0" rIns="0" bIns="0" anchor="t">
+          <a:bodyPr wrap="none" lIns="0" rIns="0" tIns="0" bIns="0" anchor="t">
             <a:spAutoFit/>
           </a:bodyPr>
           <a:lstStyle/>
@@ -8473,7 +8361,7 @@
           <a:noFill/>
         </p:spPr>
         <p:txBody>
-          <a:bodyPr wrap="none" lIns="0" tIns="0" rIns="0" bIns="0" anchor="t">
+          <a:bodyPr wrap="none" lIns="0" rIns="0" tIns="0" bIns="0" anchor="t">
             <a:spAutoFit/>
           </a:bodyPr>
           <a:lstStyle/>
@@ -8515,7 +8403,7 @@
           <a:noFill/>
         </p:spPr>
         <p:txBody>
-          <a:bodyPr wrap="none" lIns="0" tIns="0" rIns="0" bIns="0" anchor="t">
+          <a:bodyPr wrap="none" lIns="0" rIns="0" tIns="0" bIns="0" anchor="t">
             <a:spAutoFit/>
           </a:bodyPr>
           <a:lstStyle/>
@@ -8568,7 +8456,6 @@
           <a:lstStyle/>
           <a:p>
             <a:pPr algn="ctr"/>
-            <a:endParaRPr/>
           </a:p>
         </p:txBody>
       </p:sp>
@@ -8598,7 +8485,6 @@
           <a:lstStyle/>
           <a:p>
             <a:pPr algn="ctr"/>
-            <a:endParaRPr/>
           </a:p>
         </p:txBody>
       </p:sp>
@@ -8619,7 +8505,7 @@
           <a:noFill/>
         </p:spPr>
         <p:txBody>
-          <a:bodyPr wrap="none" lIns="0" tIns="0" rIns="0" bIns="0" anchor="t">
+          <a:bodyPr wrap="none" lIns="0" rIns="0" tIns="0" bIns="0" anchor="t">
             <a:spAutoFit/>
           </a:bodyPr>
           <a:lstStyle/>
@@ -8661,7 +8547,7 @@
           <a:noFill/>
         </p:spPr>
         <p:txBody>
-          <a:bodyPr wrap="none" lIns="0" tIns="0" rIns="0" bIns="0" anchor="t">
+          <a:bodyPr wrap="none" lIns="0" rIns="0" tIns="0" bIns="0" anchor="t">
             <a:spAutoFit/>
           </a:bodyPr>
           <a:lstStyle/>
@@ -8703,7 +8589,7 @@
           <a:noFill/>
         </p:spPr>
         <p:txBody>
-          <a:bodyPr wrap="none" lIns="0" tIns="0" rIns="0" bIns="0" anchor="t">
+          <a:bodyPr wrap="none" lIns="0" rIns="0" tIns="0" bIns="0" anchor="t">
             <a:spAutoFit/>
           </a:bodyPr>
           <a:lstStyle/>
@@ -8756,7 +8642,6 @@
           <a:lstStyle/>
           <a:p>
             <a:pPr algn="ctr"/>
-            <a:endParaRPr/>
           </a:p>
         </p:txBody>
       </p:sp>
@@ -8786,7 +8671,6 @@
           <a:lstStyle/>
           <a:p>
             <a:pPr algn="ctr"/>
-            <a:endParaRPr/>
           </a:p>
         </p:txBody>
       </p:sp>
@@ -8807,7 +8691,7 @@
           <a:noFill/>
         </p:spPr>
         <p:txBody>
-          <a:bodyPr wrap="none" lIns="0" tIns="0" rIns="0" bIns="0" anchor="t">
+          <a:bodyPr wrap="none" lIns="0" rIns="0" tIns="0" bIns="0" anchor="t">
             <a:spAutoFit/>
           </a:bodyPr>
           <a:lstStyle/>
@@ -8849,7 +8733,7 @@
           <a:noFill/>
         </p:spPr>
         <p:txBody>
-          <a:bodyPr wrap="none" lIns="0" tIns="0" rIns="0" bIns="0" anchor="t">
+          <a:bodyPr wrap="none" lIns="0" rIns="0" tIns="0" bIns="0" anchor="t">
             <a:spAutoFit/>
           </a:bodyPr>
           <a:lstStyle/>
@@ -8891,7 +8775,7 @@
           <a:noFill/>
         </p:spPr>
         <p:txBody>
-          <a:bodyPr wrap="none" lIns="0" tIns="0" rIns="0" bIns="0" anchor="t">
+          <a:bodyPr wrap="none" lIns="0" rIns="0" tIns="0" bIns="0" anchor="t">
             <a:spAutoFit/>
           </a:bodyPr>
           <a:lstStyle/>
@@ -8944,7 +8828,6 @@
           <a:lstStyle/>
           <a:p>
             <a:pPr algn="ctr"/>
-            <a:endParaRPr/>
           </a:p>
         </p:txBody>
       </p:sp>
@@ -8976,7 +8859,6 @@
           <a:lstStyle/>
           <a:p>
             <a:pPr algn="ctr"/>
-            <a:endParaRPr/>
           </a:p>
         </p:txBody>
       </p:sp>
@@ -8997,7 +8879,7 @@
           <a:noFill/>
         </p:spPr>
         <p:txBody>
-          <a:bodyPr wrap="none" lIns="0" tIns="0" rIns="0" bIns="0" anchor="t">
+          <a:bodyPr wrap="none" lIns="0" rIns="0" tIns="0" bIns="0" anchor="t">
             <a:spAutoFit/>
           </a:bodyPr>
           <a:lstStyle/>
@@ -9039,7 +8921,7 @@
           <a:noFill/>
         </p:spPr>
         <p:txBody>
-          <a:bodyPr wrap="none" lIns="0" tIns="0" rIns="0" bIns="0" anchor="t">
+          <a:bodyPr wrap="none" lIns="0" rIns="0" tIns="0" bIns="0" anchor="t">
             <a:spAutoFit/>
           </a:bodyPr>
           <a:lstStyle/>
@@ -9081,7 +8963,7 @@
           <a:noFill/>
         </p:spPr>
         <p:txBody>
-          <a:bodyPr wrap="none" lIns="0" tIns="0" rIns="0" bIns="0" anchor="t">
+          <a:bodyPr wrap="none" lIns="0" rIns="0" tIns="0" bIns="0" anchor="t">
             <a:spAutoFit/>
           </a:bodyPr>
           <a:lstStyle/>
@@ -9115,7 +8997,7 @@
 </file>
 
 <file path=ppt/slides/slide2.xml><?xml version="1.0" encoding="utf-8"?>
-<p:sld xmlns:a="http://schemas.openxmlformats.org/drawingml/2006/main" xmlns:r="http://schemas.openxmlformats.org/officeDocument/2006/relationships" xmlns:p="http://schemas.openxmlformats.org/presentationml/2006/main">
+<p:sld xmlns:a="http://schemas.openxmlformats.org/drawingml/2006/main" xmlns:p="http://schemas.openxmlformats.org/presentationml/2006/main" xmlns:r="http://schemas.openxmlformats.org/officeDocument/2006/relationships">
   <p:cSld>
     <p:spTree>
       <p:nvGrpSpPr>
@@ -9123,14 +9005,7 @@
         <p:cNvGrpSpPr/>
         <p:nvPr/>
       </p:nvGrpSpPr>
-      <p:grpSpPr>
-        <a:xfrm>
-          <a:off x="0" y="0"/>
-          <a:ext cx="0" cy="0"/>
-          <a:chOff x="0" y="0"/>
-          <a:chExt cx="0" cy="0"/>
-        </a:xfrm>
-      </p:grpSpPr>
+      <p:grpSpPr/>
       <p:sp>
         <p:nvSpPr>
           <p:cNvPr id="2" name="SVG rect"/>
@@ -9157,7 +9032,6 @@
           <a:lstStyle/>
           <a:p>
             <a:pPr algn="ctr"/>
-            <a:endParaRPr/>
           </a:p>
         </p:txBody>
       </p:sp>
@@ -9189,7 +9063,6 @@
           <a:lstStyle/>
           <a:p>
             <a:pPr algn="ctr"/>
-            <a:endParaRPr/>
           </a:p>
         </p:txBody>
       </p:sp>
@@ -9221,7 +9094,6 @@
           <a:lstStyle/>
           <a:p>
             <a:pPr algn="ctr"/>
-            <a:endParaRPr/>
           </a:p>
         </p:txBody>
       </p:sp>
@@ -9253,7 +9125,6 @@
           <a:lstStyle/>
           <a:p>
             <a:pPr algn="ctr"/>
-            <a:endParaRPr/>
           </a:p>
         </p:txBody>
       </p:sp>
@@ -9274,7 +9145,7 @@
           <a:noFill/>
         </p:spPr>
         <p:txBody>
-          <a:bodyPr wrap="none" lIns="0" tIns="0" rIns="0" bIns="0" anchor="t">
+          <a:bodyPr wrap="none" lIns="0" rIns="0" tIns="0" bIns="0" anchor="t">
             <a:spAutoFit/>
           </a:bodyPr>
           <a:lstStyle/>
@@ -9288,7 +9159,7 @@
               </a:spcAft>
             </a:pPr>
             <a:r>
-              <a:rPr sz="2880" b="1" i="0" dirty="0">
+              <a:rPr sz="2880" b="1" i="0">
                 <a:solidFill>
                   <a:srgbClr val="FFFFFF"/>
                 </a:solidFill>
@@ -9308,15 +9179,15 @@
         <p:spPr>
           <a:xfrm>
             <a:off x="1813560" y="358140"/>
-            <a:ext cx="4924425" cy="369332"/>
-          </a:xfrm>
-          <a:prstGeom prst="rect">
-            <a:avLst/>
-          </a:prstGeom>
-          <a:noFill/>
-        </p:spPr>
-        <p:txBody>
-          <a:bodyPr wrap="none" lIns="0" tIns="0" rIns="0" bIns="0" anchor="t">
+            <a:ext cx="6370320" cy="457200"/>
+          </a:xfrm>
+          <a:prstGeom prst="rect">
+            <a:avLst/>
+          </a:prstGeom>
+          <a:noFill/>
+        </p:spPr>
+        <p:txBody>
+          <a:bodyPr wrap="none" lIns="0" rIns="0" tIns="0" bIns="0" anchor="t">
             <a:spAutoFit/>
           </a:bodyPr>
           <a:lstStyle/>
@@ -9330,7 +9201,7 @@
               </a:spcAft>
             </a:pPr>
             <a:r>
-              <a:rPr sz="2400" b="1" i="0" dirty="0" err="1">
+              <a:rPr sz="3000" b="1" i="0">
                 <a:solidFill>
                   <a:srgbClr val="0A1B3E"/>
                 </a:solidFill>
@@ -9338,12 +9209,6 @@
               </a:rPr>
               <a:t>高质量生成，不该在三件事之间妥协</a:t>
             </a:r>
-            <a:endParaRPr sz="2400" b="1" i="0" dirty="0">
-              <a:solidFill>
-                <a:srgbClr val="0A1B3E"/>
-              </a:solidFill>
-              <a:latin typeface="Microsoft YaHei"/>
-            </a:endParaRPr>
           </a:p>
         </p:txBody>
       </p:sp>
@@ -9364,7 +9229,7 @@
           <a:noFill/>
         </p:spPr>
         <p:txBody>
-          <a:bodyPr wrap="none" lIns="0" tIns="0" rIns="0" bIns="0" anchor="t">
+          <a:bodyPr wrap="none" lIns="0" rIns="0" tIns="0" bIns="0" anchor="t">
             <a:spAutoFit/>
           </a:bodyPr>
           <a:lstStyle/>
@@ -9406,7 +9271,7 @@
           <a:noFill/>
         </p:spPr>
         <p:txBody>
-          <a:bodyPr wrap="none" lIns="0" tIns="0" rIns="0" bIns="0" anchor="t">
+          <a:bodyPr wrap="none" lIns="0" rIns="0" tIns="0" bIns="0" anchor="t">
             <a:spAutoFit/>
           </a:bodyPr>
           <a:lstStyle/>
@@ -9501,7 +9366,6 @@
           <a:lstStyle/>
           <a:p>
             <a:pPr algn="ctr"/>
-            <a:endParaRPr/>
           </a:p>
         </p:txBody>
       </p:sp>
@@ -9533,7 +9397,6 @@
           <a:lstStyle/>
           <a:p>
             <a:pPr algn="ctr"/>
-            <a:endParaRPr/>
           </a:p>
         </p:txBody>
       </p:sp>
@@ -9565,7 +9428,6 @@
           <a:lstStyle/>
           <a:p>
             <a:pPr algn="ctr"/>
-            <a:endParaRPr/>
           </a:p>
         </p:txBody>
       </p:sp>
@@ -9599,7 +9461,6 @@
           <a:lstStyle/>
           <a:p>
             <a:pPr algn="ctr"/>
-            <a:endParaRPr/>
           </a:p>
         </p:txBody>
       </p:sp>
@@ -9620,7 +9481,7 @@
           <a:noFill/>
         </p:spPr>
         <p:txBody>
-          <a:bodyPr wrap="none" lIns="0" tIns="0" rIns="0" bIns="0" anchor="t">
+          <a:bodyPr wrap="none" lIns="0" rIns="0" tIns="0" bIns="0" anchor="t">
             <a:spAutoFit/>
           </a:bodyPr>
           <a:lstStyle/>
@@ -9662,7 +9523,7 @@
           <a:noFill/>
         </p:spPr>
         <p:txBody>
-          <a:bodyPr wrap="none" lIns="0" tIns="0" rIns="0" bIns="0" anchor="t">
+          <a:bodyPr wrap="none" lIns="0" rIns="0" tIns="0" bIns="0" anchor="t">
             <a:spAutoFit/>
           </a:bodyPr>
           <a:lstStyle/>
@@ -9715,7 +9576,6 @@
           <a:lstStyle/>
           <a:p>
             <a:pPr algn="ctr"/>
-            <a:endParaRPr/>
           </a:p>
         </p:txBody>
       </p:sp>
@@ -9749,7 +9609,6 @@
           <a:lstStyle/>
           <a:p>
             <a:pPr algn="ctr"/>
-            <a:endParaRPr/>
           </a:p>
         </p:txBody>
       </p:sp>
@@ -9779,7 +9638,6 @@
           <a:lstStyle/>
           <a:p>
             <a:pPr algn="ctr"/>
-            <a:endParaRPr/>
           </a:p>
         </p:txBody>
       </p:sp>
@@ -9809,7 +9667,6 @@
           <a:lstStyle/>
           <a:p>
             <a:pPr algn="ctr"/>
-            <a:endParaRPr/>
           </a:p>
         </p:txBody>
       </p:sp>
@@ -9830,7 +9687,7 @@
           <a:noFill/>
         </p:spPr>
         <p:txBody>
-          <a:bodyPr wrap="none" lIns="0" tIns="0" rIns="0" bIns="0" anchor="t">
+          <a:bodyPr wrap="none" lIns="0" rIns="0" tIns="0" bIns="0" anchor="t">
             <a:spAutoFit/>
           </a:bodyPr>
           <a:lstStyle/>
@@ -9872,7 +9729,7 @@
           <a:noFill/>
         </p:spPr>
         <p:txBody>
-          <a:bodyPr wrap="none" lIns="0" tIns="0" rIns="0" bIns="0" anchor="t">
+          <a:bodyPr wrap="none" lIns="0" rIns="0" tIns="0" bIns="0" anchor="t">
             <a:spAutoFit/>
           </a:bodyPr>
           <a:lstStyle/>
@@ -9944,7 +9801,6 @@
           <a:lstStyle/>
           <a:p>
             <a:pPr algn="ctr"/>
-            <a:endParaRPr/>
           </a:p>
         </p:txBody>
       </p:sp>
@@ -9965,7 +9821,7 @@
           <a:noFill/>
         </p:spPr>
         <p:txBody>
-          <a:bodyPr wrap="none" lIns="0" tIns="0" rIns="0" bIns="0" anchor="t">
+          <a:bodyPr wrap="none" lIns="0" rIns="0" tIns="0" bIns="0" anchor="t">
             <a:spAutoFit/>
           </a:bodyPr>
           <a:lstStyle/>
@@ -10007,7 +9863,7 @@
           <a:noFill/>
         </p:spPr>
         <p:txBody>
-          <a:bodyPr wrap="none" lIns="0" tIns="0" rIns="0" bIns="0" anchor="t">
+          <a:bodyPr wrap="none" lIns="0" rIns="0" tIns="0" bIns="0" anchor="t">
             <a:spAutoFit/>
           </a:bodyPr>
           <a:lstStyle/>
@@ -10049,7 +9905,7 @@
           <a:noFill/>
         </p:spPr>
         <p:txBody>
-          <a:bodyPr wrap="none" lIns="0" tIns="0" rIns="0" bIns="0" anchor="t">
+          <a:bodyPr wrap="none" lIns="0" rIns="0" tIns="0" bIns="0" anchor="t">
             <a:spAutoFit/>
           </a:bodyPr>
           <a:lstStyle/>
@@ -10091,7 +9947,7 @@
           <a:noFill/>
         </p:spPr>
         <p:txBody>
-          <a:bodyPr wrap="none" lIns="0" tIns="0" rIns="0" bIns="0" anchor="t">
+          <a:bodyPr wrap="none" lIns="0" rIns="0" tIns="0" bIns="0" anchor="t">
             <a:spAutoFit/>
           </a:bodyPr>
           <a:lstStyle/>
@@ -10133,7 +9989,7 @@
           <a:noFill/>
         </p:spPr>
         <p:txBody>
-          <a:bodyPr wrap="none" lIns="0" tIns="0" rIns="0" bIns="0" anchor="t">
+          <a:bodyPr wrap="none" lIns="0" rIns="0" tIns="0" bIns="0" anchor="t">
             <a:spAutoFit/>
           </a:bodyPr>
           <a:lstStyle/>
@@ -10186,7 +10042,6 @@
           <a:lstStyle/>
           <a:p>
             <a:pPr algn="ctr"/>
-            <a:endParaRPr/>
           </a:p>
         </p:txBody>
       </p:sp>
@@ -10220,7 +10075,6 @@
           <a:lstStyle/>
           <a:p>
             <a:pPr algn="ctr"/>
-            <a:endParaRPr/>
           </a:p>
         </p:txBody>
       </p:sp>
@@ -10250,7 +10104,6 @@
           <a:lstStyle/>
           <a:p>
             <a:pPr algn="ctr"/>
-            <a:endParaRPr/>
           </a:p>
         </p:txBody>
       </p:sp>
@@ -10280,7 +10133,6 @@
           <a:lstStyle/>
           <a:p>
             <a:pPr algn="ctr"/>
-            <a:endParaRPr/>
           </a:p>
         </p:txBody>
       </p:sp>
@@ -10301,7 +10153,7 @@
           <a:noFill/>
         </p:spPr>
         <p:txBody>
-          <a:bodyPr wrap="none" lIns="0" tIns="0" rIns="0" bIns="0" anchor="t">
+          <a:bodyPr wrap="none" lIns="0" rIns="0" tIns="0" bIns="0" anchor="t">
             <a:spAutoFit/>
           </a:bodyPr>
           <a:lstStyle/>
@@ -10343,7 +10195,7 @@
           <a:noFill/>
         </p:spPr>
         <p:txBody>
-          <a:bodyPr wrap="none" lIns="0" tIns="0" rIns="0" bIns="0" anchor="t">
+          <a:bodyPr wrap="none" lIns="0" rIns="0" tIns="0" bIns="0" anchor="t">
             <a:spAutoFit/>
           </a:bodyPr>
           <a:lstStyle/>
@@ -10415,7 +10267,6 @@
           <a:lstStyle/>
           <a:p>
             <a:pPr algn="ctr"/>
-            <a:endParaRPr/>
           </a:p>
         </p:txBody>
       </p:sp>
@@ -10436,7 +10287,7 @@
           <a:noFill/>
         </p:spPr>
         <p:txBody>
-          <a:bodyPr wrap="none" lIns="0" tIns="0" rIns="0" bIns="0" anchor="t">
+          <a:bodyPr wrap="none" lIns="0" rIns="0" tIns="0" bIns="0" anchor="t">
             <a:spAutoFit/>
           </a:bodyPr>
           <a:lstStyle/>
@@ -10478,7 +10329,7 @@
           <a:noFill/>
         </p:spPr>
         <p:txBody>
-          <a:bodyPr wrap="none" lIns="0" tIns="0" rIns="0" bIns="0" anchor="t">
+          <a:bodyPr wrap="none" lIns="0" rIns="0" tIns="0" bIns="0" anchor="t">
             <a:spAutoFit/>
           </a:bodyPr>
           <a:lstStyle/>
@@ -10520,7 +10371,7 @@
           <a:noFill/>
         </p:spPr>
         <p:txBody>
-          <a:bodyPr wrap="none" lIns="0" tIns="0" rIns="0" bIns="0" anchor="t">
+          <a:bodyPr wrap="none" lIns="0" rIns="0" tIns="0" bIns="0" anchor="t">
             <a:spAutoFit/>
           </a:bodyPr>
           <a:lstStyle/>
@@ -10562,7 +10413,7 @@
           <a:noFill/>
         </p:spPr>
         <p:txBody>
-          <a:bodyPr wrap="none" lIns="0" tIns="0" rIns="0" bIns="0" anchor="t">
+          <a:bodyPr wrap="none" lIns="0" rIns="0" tIns="0" bIns="0" anchor="t">
             <a:spAutoFit/>
           </a:bodyPr>
           <a:lstStyle/>
@@ -10604,7 +10455,7 @@
           <a:noFill/>
         </p:spPr>
         <p:txBody>
-          <a:bodyPr wrap="none" lIns="0" tIns="0" rIns="0" bIns="0" anchor="t">
+          <a:bodyPr wrap="none" lIns="0" rIns="0" tIns="0" bIns="0" anchor="t">
             <a:spAutoFit/>
           </a:bodyPr>
           <a:lstStyle/>
@@ -10657,7 +10508,6 @@
           <a:lstStyle/>
           <a:p>
             <a:pPr algn="ctr"/>
-            <a:endParaRPr/>
           </a:p>
         </p:txBody>
       </p:sp>
@@ -10691,7 +10541,6 @@
           <a:lstStyle/>
           <a:p>
             <a:pPr algn="ctr"/>
-            <a:endParaRPr/>
           </a:p>
         </p:txBody>
       </p:sp>
@@ -10721,7 +10570,6 @@
           <a:lstStyle/>
           <a:p>
             <a:pPr algn="ctr"/>
-            <a:endParaRPr/>
           </a:p>
         </p:txBody>
       </p:sp>
@@ -10751,7 +10599,6 @@
           <a:lstStyle/>
           <a:p>
             <a:pPr algn="ctr"/>
-            <a:endParaRPr/>
           </a:p>
         </p:txBody>
       </p:sp>
@@ -10772,7 +10619,7 @@
           <a:noFill/>
         </p:spPr>
         <p:txBody>
-          <a:bodyPr wrap="none" lIns="0" tIns="0" rIns="0" bIns="0" anchor="t">
+          <a:bodyPr wrap="none" lIns="0" rIns="0" tIns="0" bIns="0" anchor="t">
             <a:spAutoFit/>
           </a:bodyPr>
           <a:lstStyle/>
@@ -10814,7 +10661,7 @@
           <a:noFill/>
         </p:spPr>
         <p:txBody>
-          <a:bodyPr wrap="none" lIns="0" tIns="0" rIns="0" bIns="0" anchor="t">
+          <a:bodyPr wrap="none" lIns="0" rIns="0" tIns="0" bIns="0" anchor="t">
             <a:spAutoFit/>
           </a:bodyPr>
           <a:lstStyle/>
@@ -10886,7 +10733,6 @@
           <a:lstStyle/>
           <a:p>
             <a:pPr algn="ctr"/>
-            <a:endParaRPr/>
           </a:p>
         </p:txBody>
       </p:sp>
@@ -10907,7 +10753,7 @@
           <a:noFill/>
         </p:spPr>
         <p:txBody>
-          <a:bodyPr wrap="none" lIns="0" tIns="0" rIns="0" bIns="0" anchor="t">
+          <a:bodyPr wrap="none" lIns="0" rIns="0" tIns="0" bIns="0" anchor="t">
             <a:spAutoFit/>
           </a:bodyPr>
           <a:lstStyle/>
@@ -10949,7 +10795,7 @@
           <a:noFill/>
         </p:spPr>
         <p:txBody>
-          <a:bodyPr wrap="none" lIns="0" tIns="0" rIns="0" bIns="0" anchor="t">
+          <a:bodyPr wrap="none" lIns="0" rIns="0" tIns="0" bIns="0" anchor="t">
             <a:spAutoFit/>
           </a:bodyPr>
           <a:lstStyle/>
@@ -10991,7 +10837,7 @@
           <a:noFill/>
         </p:spPr>
         <p:txBody>
-          <a:bodyPr wrap="none" lIns="0" tIns="0" rIns="0" bIns="0" anchor="t">
+          <a:bodyPr wrap="none" lIns="0" rIns="0" tIns="0" bIns="0" anchor="t">
             <a:spAutoFit/>
           </a:bodyPr>
           <a:lstStyle/>
@@ -11033,7 +10879,7 @@
           <a:noFill/>
         </p:spPr>
         <p:txBody>
-          <a:bodyPr wrap="none" lIns="0" tIns="0" rIns="0" bIns="0" anchor="t">
+          <a:bodyPr wrap="none" lIns="0" rIns="0" tIns="0" bIns="0" anchor="t">
             <a:spAutoFit/>
           </a:bodyPr>
           <a:lstStyle/>
@@ -11075,7 +10921,7 @@
           <a:noFill/>
         </p:spPr>
         <p:txBody>
-          <a:bodyPr wrap="none" lIns="0" tIns="0" rIns="0" bIns="0" anchor="t">
+          <a:bodyPr wrap="none" lIns="0" rIns="0" tIns="0" bIns="0" anchor="t">
             <a:spAutoFit/>
           </a:bodyPr>
           <a:lstStyle/>
@@ -11128,7 +10974,6 @@
           <a:lstStyle/>
           <a:p>
             <a:pPr algn="ctr"/>
-            <a:endParaRPr/>
           </a:p>
         </p:txBody>
       </p:sp>
@@ -11162,7 +11007,6 @@
           <a:lstStyle/>
           <a:p>
             <a:pPr algn="ctr"/>
-            <a:endParaRPr/>
           </a:p>
         </p:txBody>
       </p:sp>
@@ -11192,7 +11036,6 @@
           <a:lstStyle/>
           <a:p>
             <a:pPr algn="ctr"/>
-            <a:endParaRPr/>
           </a:p>
         </p:txBody>
       </p:sp>
@@ -11213,7 +11056,7 @@
           <a:noFill/>
         </p:spPr>
         <p:txBody>
-          <a:bodyPr wrap="none" lIns="0" tIns="0" rIns="0" bIns="0" anchor="t">
+          <a:bodyPr wrap="none" lIns="0" rIns="0" tIns="0" bIns="0" anchor="t">
             <a:spAutoFit/>
           </a:bodyPr>
           <a:lstStyle/>
@@ -11255,7 +11098,7 @@
           <a:noFill/>
         </p:spPr>
         <p:txBody>
-          <a:bodyPr wrap="none" lIns="0" tIns="0" rIns="0" bIns="0" anchor="t">
+          <a:bodyPr wrap="none" lIns="0" rIns="0" tIns="0" bIns="0" anchor="t">
             <a:spAutoFit/>
           </a:bodyPr>
           <a:lstStyle/>
@@ -11318,7 +11161,7 @@
           <a:noFill/>
         </p:spPr>
         <p:txBody>
-          <a:bodyPr wrap="none" lIns="0" tIns="0" rIns="0" bIns="0" anchor="t">
+          <a:bodyPr wrap="none" lIns="0" rIns="0" tIns="0" bIns="0" anchor="t">
             <a:spAutoFit/>
           </a:bodyPr>
           <a:lstStyle/>
@@ -11360,7 +11203,7 @@
           <a:noFill/>
         </p:spPr>
         <p:txBody>
-          <a:bodyPr wrap="none" lIns="0" tIns="0" rIns="0" bIns="0" anchor="t">
+          <a:bodyPr wrap="none" lIns="0" rIns="0" tIns="0" bIns="0" anchor="t">
             <a:spAutoFit/>
           </a:bodyPr>
           <a:lstStyle/>
@@ -11402,7 +11245,7 @@
           <a:noFill/>
         </p:spPr>
         <p:txBody>
-          <a:bodyPr wrap="none" lIns="0" tIns="0" rIns="0" bIns="0" anchor="t">
+          <a:bodyPr wrap="none" lIns="0" rIns="0" tIns="0" bIns="0" anchor="t">
             <a:spAutoFit/>
           </a:bodyPr>
           <a:lstStyle/>
@@ -11436,7 +11279,7 @@
 </file>
 
 <file path=ppt/slides/slide3.xml><?xml version="1.0" encoding="utf-8"?>
-<p:sld xmlns:a="http://schemas.openxmlformats.org/drawingml/2006/main" xmlns:r="http://schemas.openxmlformats.org/officeDocument/2006/relationships" xmlns:p="http://schemas.openxmlformats.org/presentationml/2006/main">
+<p:sld xmlns:a="http://schemas.openxmlformats.org/drawingml/2006/main" xmlns:p="http://schemas.openxmlformats.org/presentationml/2006/main" xmlns:r="http://schemas.openxmlformats.org/officeDocument/2006/relationships">
   <p:cSld>
     <p:spTree>
       <p:nvGrpSpPr>
@@ -11444,14 +11287,7 @@
         <p:cNvGrpSpPr/>
         <p:nvPr/>
       </p:nvGrpSpPr>
-      <p:grpSpPr>
-        <a:xfrm>
-          <a:off x="0" y="0"/>
-          <a:ext cx="0" cy="0"/>
-          <a:chOff x="0" y="0"/>
-          <a:chExt cx="0" cy="0"/>
-        </a:xfrm>
-      </p:grpSpPr>
+      <p:grpSpPr/>
       <p:sp>
         <p:nvSpPr>
           <p:cNvPr id="2" name="SVG rect"/>
@@ -11478,7 +11314,6 @@
           <a:lstStyle/>
           <a:p>
             <a:pPr algn="ctr"/>
-            <a:endParaRPr/>
           </a:p>
         </p:txBody>
       </p:sp>
@@ -11510,7 +11345,6 @@
           <a:lstStyle/>
           <a:p>
             <a:pPr algn="ctr"/>
-            <a:endParaRPr/>
           </a:p>
         </p:txBody>
       </p:sp>
@@ -11542,7 +11376,6 @@
           <a:lstStyle/>
           <a:p>
             <a:pPr algn="ctr"/>
-            <a:endParaRPr/>
           </a:p>
         </p:txBody>
       </p:sp>
@@ -11574,7 +11407,6 @@
           <a:lstStyle/>
           <a:p>
             <a:pPr algn="ctr"/>
-            <a:endParaRPr/>
           </a:p>
         </p:txBody>
       </p:sp>
@@ -11595,7 +11427,7 @@
           <a:noFill/>
         </p:spPr>
         <p:txBody>
-          <a:bodyPr wrap="none" lIns="0" tIns="0" rIns="0" bIns="0" anchor="t">
+          <a:bodyPr wrap="none" lIns="0" rIns="0" tIns="0" bIns="0" anchor="t">
             <a:spAutoFit/>
           </a:bodyPr>
           <a:lstStyle/>
@@ -11637,7 +11469,7 @@
           <a:noFill/>
         </p:spPr>
         <p:txBody>
-          <a:bodyPr wrap="none" lIns="0" tIns="0" rIns="0" bIns="0" anchor="t">
+          <a:bodyPr wrap="none" lIns="0" rIns="0" tIns="0" bIns="0" anchor="t">
             <a:spAutoFit/>
           </a:bodyPr>
           <a:lstStyle/>
@@ -11651,38 +11483,14 @@
               </a:spcAft>
             </a:pPr>
             <a:r>
-              <a:rPr sz="2400" b="1" i="0" dirty="0" err="1">
+              <a:rPr sz="2400" b="1" i="0">
                 <a:solidFill>
                   <a:srgbClr val="0A1B3E"/>
                 </a:solidFill>
                 <a:latin typeface="Microsoft YaHei"/>
               </a:rPr>
-              <a:t>这不是另一个</a:t>
-            </a:r>
-            <a:r>
-              <a:rPr sz="2400" b="1" i="0" dirty="0">
-                <a:solidFill>
-                  <a:srgbClr val="0A1B3E"/>
-                </a:solidFill>
-                <a:latin typeface="Microsoft YaHei"/>
-              </a:rPr>
-              <a:t> AI </a:t>
-            </a:r>
-            <a:r>
-              <a:rPr sz="2400" b="1" i="0" dirty="0" err="1">
-                <a:solidFill>
-                  <a:srgbClr val="0A1B3E"/>
-                </a:solidFill>
-                <a:latin typeface="Microsoft YaHei"/>
-              </a:rPr>
-              <a:t>API，而是一套分层协作机制</a:t>
-            </a:r>
-            <a:endParaRPr sz="2400" b="1" i="0" dirty="0">
-              <a:solidFill>
-                <a:srgbClr val="0A1B3E"/>
-              </a:solidFill>
-              <a:latin typeface="Microsoft YaHei"/>
-            </a:endParaRPr>
+              <a:t>这不是另一个 AI API，而是一套分层协作机制</a:t>
+            </a:r>
           </a:p>
         </p:txBody>
       </p:sp>
@@ -11703,7 +11511,7 @@
           <a:noFill/>
         </p:spPr>
         <p:txBody>
-          <a:bodyPr wrap="none" lIns="0" tIns="0" rIns="0" bIns="0" anchor="t">
+          <a:bodyPr wrap="none" lIns="0" rIns="0" tIns="0" bIns="0" anchor="t">
             <a:spAutoFit/>
           </a:bodyPr>
           <a:lstStyle/>
@@ -11745,7 +11553,7 @@
           <a:noFill/>
         </p:spPr>
         <p:txBody>
-          <a:bodyPr wrap="none" lIns="0" tIns="0" rIns="0" bIns="0" anchor="t">
+          <a:bodyPr wrap="none" lIns="0" rIns="0" tIns="0" bIns="0" anchor="t">
             <a:spAutoFit/>
           </a:bodyPr>
           <a:lstStyle/>
@@ -11840,7 +11648,6 @@
           <a:lstStyle/>
           <a:p>
             <a:pPr algn="ctr"/>
-            <a:endParaRPr/>
           </a:p>
         </p:txBody>
       </p:sp>
@@ -11872,7 +11679,6 @@
           <a:lstStyle/>
           <a:p>
             <a:pPr algn="ctr"/>
-            <a:endParaRPr/>
           </a:p>
         </p:txBody>
       </p:sp>
@@ -11904,7 +11710,6 @@
           <a:lstStyle/>
           <a:p>
             <a:pPr algn="ctr"/>
-            <a:endParaRPr/>
           </a:p>
         </p:txBody>
       </p:sp>
@@ -11938,7 +11743,6 @@
           <a:lstStyle/>
           <a:p>
             <a:pPr algn="ctr"/>
-            <a:endParaRPr/>
           </a:p>
         </p:txBody>
       </p:sp>
@@ -11959,7 +11763,7 @@
           <a:noFill/>
         </p:spPr>
         <p:txBody>
-          <a:bodyPr wrap="none" lIns="0" tIns="0" rIns="0" bIns="0" anchor="t">
+          <a:bodyPr wrap="none" lIns="0" rIns="0" tIns="0" bIns="0" anchor="t">
             <a:spAutoFit/>
           </a:bodyPr>
           <a:lstStyle/>
@@ -12001,7 +11805,7 @@
           <a:noFill/>
         </p:spPr>
         <p:txBody>
-          <a:bodyPr wrap="none" lIns="0" tIns="0" rIns="0" bIns="0" anchor="t">
+          <a:bodyPr wrap="none" lIns="0" rIns="0" tIns="0" bIns="0" anchor="t">
             <a:spAutoFit/>
           </a:bodyPr>
           <a:lstStyle/>
@@ -12054,7 +11858,6 @@
           <a:lstStyle/>
           <a:p>
             <a:pPr algn="ctr"/>
-            <a:endParaRPr/>
           </a:p>
         </p:txBody>
       </p:sp>
@@ -12086,7 +11889,6 @@
           <a:lstStyle/>
           <a:p>
             <a:pPr algn="ctr"/>
-            <a:endParaRPr/>
           </a:p>
         </p:txBody>
       </p:sp>
@@ -12118,7 +11920,6 @@
           <a:lstStyle/>
           <a:p>
             <a:pPr algn="ctr"/>
-            <a:endParaRPr/>
           </a:p>
         </p:txBody>
       </p:sp>
@@ -12139,7 +11940,7 @@
           <a:noFill/>
         </p:spPr>
         <p:txBody>
-          <a:bodyPr wrap="none" lIns="0" tIns="0" rIns="0" bIns="0" anchor="t">
+          <a:bodyPr wrap="none" lIns="0" rIns="0" tIns="0" bIns="0" anchor="t">
             <a:spAutoFit/>
           </a:bodyPr>
           <a:lstStyle/>
@@ -12181,7 +11982,7 @@
           <a:noFill/>
         </p:spPr>
         <p:txBody>
-          <a:bodyPr wrap="none" lIns="0" tIns="0" rIns="0" bIns="0" anchor="t">
+          <a:bodyPr wrap="none" lIns="0" rIns="0" tIns="0" bIns="0" anchor="t">
             <a:spAutoFit/>
           </a:bodyPr>
           <a:lstStyle/>
@@ -12223,7 +12024,7 @@
           <a:noFill/>
         </p:spPr>
         <p:txBody>
-          <a:bodyPr wrap="none" lIns="0" tIns="0" rIns="0" bIns="0" anchor="t">
+          <a:bodyPr wrap="none" lIns="0" rIns="0" tIns="0" bIns="0" anchor="t">
             <a:spAutoFit/>
           </a:bodyPr>
           <a:lstStyle/>
@@ -12265,7 +12066,7 @@
           <a:noFill/>
         </p:spPr>
         <p:txBody>
-          <a:bodyPr wrap="none" lIns="0" tIns="0" rIns="0" bIns="0" anchor="t">
+          <a:bodyPr wrap="none" lIns="0" rIns="0" tIns="0" bIns="0" anchor="t">
             <a:spAutoFit/>
           </a:bodyPr>
           <a:lstStyle/>
@@ -12320,7 +12121,6 @@
           <a:lstStyle/>
           <a:p>
             <a:pPr algn="ctr"/>
-            <a:endParaRPr/>
           </a:p>
         </p:txBody>
       </p:sp>
@@ -12350,7 +12150,6 @@
           <a:lstStyle/>
           <a:p>
             <a:pPr algn="ctr"/>
-            <a:endParaRPr/>
           </a:p>
         </p:txBody>
       </p:sp>
@@ -12371,7 +12170,7 @@
           <a:noFill/>
         </p:spPr>
         <p:txBody>
-          <a:bodyPr wrap="none" lIns="0" tIns="0" rIns="0" bIns="0" anchor="t">
+          <a:bodyPr wrap="none" lIns="0" rIns="0" tIns="0" bIns="0" anchor="t">
             <a:spAutoFit/>
           </a:bodyPr>
           <a:lstStyle/>
@@ -12413,7 +12212,7 @@
           <a:noFill/>
         </p:spPr>
         <p:txBody>
-          <a:bodyPr wrap="none" lIns="0" tIns="0" rIns="0" bIns="0" anchor="t">
+          <a:bodyPr wrap="none" lIns="0" rIns="0" tIns="0" bIns="0" anchor="t">
             <a:spAutoFit/>
           </a:bodyPr>
           <a:lstStyle/>
@@ -12455,7 +12254,7 @@
           <a:noFill/>
         </p:spPr>
         <p:txBody>
-          <a:bodyPr wrap="none" lIns="0" tIns="0" rIns="0" bIns="0" anchor="t">
+          <a:bodyPr wrap="none" lIns="0" rIns="0" tIns="0" bIns="0" anchor="t">
             <a:spAutoFit/>
           </a:bodyPr>
           <a:lstStyle/>
@@ -12497,7 +12296,7 @@
           <a:noFill/>
         </p:spPr>
         <p:txBody>
-          <a:bodyPr wrap="none" lIns="0" tIns="0" rIns="0" bIns="0" anchor="t">
+          <a:bodyPr wrap="none" lIns="0" rIns="0" tIns="0" bIns="0" anchor="t">
             <a:spAutoFit/>
           </a:bodyPr>
           <a:lstStyle/>
@@ -12552,7 +12351,6 @@
           <a:lstStyle/>
           <a:p>
             <a:pPr algn="ctr"/>
-            <a:endParaRPr/>
           </a:p>
         </p:txBody>
       </p:sp>
@@ -12582,7 +12380,6 @@
           <a:lstStyle/>
           <a:p>
             <a:pPr algn="ctr"/>
-            <a:endParaRPr/>
           </a:p>
         </p:txBody>
       </p:sp>
@@ -12603,7 +12400,7 @@
           <a:noFill/>
         </p:spPr>
         <p:txBody>
-          <a:bodyPr wrap="none" lIns="0" tIns="0" rIns="0" bIns="0" anchor="t">
+          <a:bodyPr wrap="none" lIns="0" rIns="0" tIns="0" bIns="0" anchor="t">
             <a:spAutoFit/>
           </a:bodyPr>
           <a:lstStyle/>
@@ -12645,7 +12442,7 @@
           <a:noFill/>
         </p:spPr>
         <p:txBody>
-          <a:bodyPr wrap="none" lIns="0" tIns="0" rIns="0" bIns="0" anchor="t">
+          <a:bodyPr wrap="none" lIns="0" rIns="0" tIns="0" bIns="0" anchor="t">
             <a:spAutoFit/>
           </a:bodyPr>
           <a:lstStyle/>
@@ -12687,7 +12484,7 @@
           <a:noFill/>
         </p:spPr>
         <p:txBody>
-          <a:bodyPr wrap="none" lIns="0" tIns="0" rIns="0" bIns="0" anchor="t">
+          <a:bodyPr wrap="none" lIns="0" rIns="0" tIns="0" bIns="0" anchor="t">
             <a:spAutoFit/>
           </a:bodyPr>
           <a:lstStyle/>
@@ -12729,7 +12526,7 @@
           <a:noFill/>
         </p:spPr>
         <p:txBody>
-          <a:bodyPr wrap="none" lIns="0" tIns="0" rIns="0" bIns="0" anchor="t">
+          <a:bodyPr wrap="none" lIns="0" rIns="0" tIns="0" bIns="0" anchor="t">
             <a:spAutoFit/>
           </a:bodyPr>
           <a:lstStyle/>
@@ -12784,7 +12581,6 @@
           <a:lstStyle/>
           <a:p>
             <a:pPr algn="ctr"/>
-            <a:endParaRPr/>
           </a:p>
         </p:txBody>
       </p:sp>
@@ -12814,7 +12610,6 @@
           <a:lstStyle/>
           <a:p>
             <a:pPr algn="ctr"/>
-            <a:endParaRPr/>
           </a:p>
         </p:txBody>
       </p:sp>
@@ -12835,7 +12630,7 @@
           <a:noFill/>
         </p:spPr>
         <p:txBody>
-          <a:bodyPr wrap="none" lIns="0" tIns="0" rIns="0" bIns="0" anchor="t">
+          <a:bodyPr wrap="none" lIns="0" rIns="0" tIns="0" bIns="0" anchor="t">
             <a:spAutoFit/>
           </a:bodyPr>
           <a:lstStyle/>
@@ -12877,7 +12672,7 @@
           <a:noFill/>
         </p:spPr>
         <p:txBody>
-          <a:bodyPr wrap="none" lIns="0" tIns="0" rIns="0" bIns="0" anchor="t">
+          <a:bodyPr wrap="none" lIns="0" rIns="0" tIns="0" bIns="0" anchor="t">
             <a:spAutoFit/>
           </a:bodyPr>
           <a:lstStyle/>
@@ -12919,7 +12714,7 @@
           <a:noFill/>
         </p:spPr>
         <p:txBody>
-          <a:bodyPr wrap="none" lIns="0" tIns="0" rIns="0" bIns="0" anchor="t">
+          <a:bodyPr wrap="none" lIns="0" rIns="0" tIns="0" bIns="0" anchor="t">
             <a:spAutoFit/>
           </a:bodyPr>
           <a:lstStyle/>
@@ -12961,7 +12756,7 @@
           <a:noFill/>
         </p:spPr>
         <p:txBody>
-          <a:bodyPr wrap="none" lIns="0" tIns="0" rIns="0" bIns="0" anchor="t">
+          <a:bodyPr wrap="none" lIns="0" rIns="0" tIns="0" bIns="0" anchor="t">
             <a:spAutoFit/>
           </a:bodyPr>
           <a:lstStyle/>
@@ -13014,7 +12809,6 @@
           <a:lstStyle/>
           <a:p>
             <a:pPr algn="ctr"/>
-            <a:endParaRPr/>
           </a:p>
         </p:txBody>
       </p:sp>
@@ -13048,7 +12842,6 @@
           <a:lstStyle/>
           <a:p>
             <a:pPr algn="ctr"/>
-            <a:endParaRPr/>
           </a:p>
         </p:txBody>
       </p:sp>
@@ -13080,7 +12873,6 @@
           <a:lstStyle/>
           <a:p>
             <a:pPr algn="ctr"/>
-            <a:endParaRPr/>
           </a:p>
         </p:txBody>
       </p:sp>
@@ -13101,7 +12893,7 @@
           <a:noFill/>
         </p:spPr>
         <p:txBody>
-          <a:bodyPr wrap="none" lIns="0" tIns="0" rIns="0" bIns="0" anchor="t">
+          <a:bodyPr wrap="none" lIns="0" rIns="0" tIns="0" bIns="0" anchor="t">
             <a:spAutoFit/>
           </a:bodyPr>
           <a:lstStyle/>
@@ -13143,7 +12935,7 @@
           <a:noFill/>
         </p:spPr>
         <p:txBody>
-          <a:bodyPr wrap="none" lIns="0" tIns="0" rIns="0" bIns="0" anchor="t">
+          <a:bodyPr wrap="none" lIns="0" rIns="0" tIns="0" bIns="0" anchor="t">
             <a:spAutoFit/>
           </a:bodyPr>
           <a:lstStyle/>
@@ -13185,7 +12977,7 @@
           <a:noFill/>
         </p:spPr>
         <p:txBody>
-          <a:bodyPr wrap="none" lIns="0" tIns="0" rIns="0" bIns="0" anchor="t">
+          <a:bodyPr wrap="none" lIns="0" rIns="0" tIns="0" bIns="0" anchor="t">
             <a:spAutoFit/>
           </a:bodyPr>
           <a:lstStyle/>
@@ -13257,7 +13049,6 @@
           <a:lstStyle/>
           <a:p>
             <a:pPr algn="ctr"/>
-            <a:endParaRPr/>
           </a:p>
         </p:txBody>
       </p:sp>
@@ -13289,7 +13080,6 @@
           <a:lstStyle/>
           <a:p>
             <a:pPr algn="ctr"/>
-            <a:endParaRPr/>
           </a:p>
         </p:txBody>
       </p:sp>
@@ -13319,7 +13109,6 @@
           <a:lstStyle/>
           <a:p>
             <a:pPr algn="ctr"/>
-            <a:endParaRPr/>
           </a:p>
         </p:txBody>
       </p:sp>
@@ -13351,7 +13140,6 @@
           <a:lstStyle/>
           <a:p>
             <a:pPr algn="ctr"/>
-            <a:endParaRPr/>
           </a:p>
         </p:txBody>
       </p:sp>
@@ -13372,7 +13160,7 @@
           <a:noFill/>
         </p:spPr>
         <p:txBody>
-          <a:bodyPr wrap="none" lIns="0" tIns="0" rIns="0" bIns="0" anchor="t">
+          <a:bodyPr wrap="none" lIns="0" rIns="0" tIns="0" bIns="0" anchor="t">
             <a:spAutoFit/>
           </a:bodyPr>
           <a:lstStyle/>
@@ -13414,7 +13202,7 @@
           <a:noFill/>
         </p:spPr>
         <p:txBody>
-          <a:bodyPr wrap="none" lIns="0" tIns="0" rIns="0" bIns="0" anchor="t">
+          <a:bodyPr wrap="none" lIns="0" rIns="0" tIns="0" bIns="0" anchor="t">
             <a:spAutoFit/>
           </a:bodyPr>
           <a:lstStyle/>
@@ -13456,7 +13244,7 @@
           <a:noFill/>
         </p:spPr>
         <p:txBody>
-          <a:bodyPr wrap="none" lIns="0" tIns="0" rIns="0" bIns="0" anchor="t">
+          <a:bodyPr wrap="none" lIns="0" rIns="0" tIns="0" bIns="0" anchor="t">
             <a:spAutoFit/>
           </a:bodyPr>
           <a:lstStyle/>
@@ -13498,7 +13286,7 @@
           <a:noFill/>
         </p:spPr>
         <p:txBody>
-          <a:bodyPr wrap="none" lIns="0" tIns="0" rIns="0" bIns="0" anchor="t">
+          <a:bodyPr wrap="none" lIns="0" rIns="0" tIns="0" bIns="0" anchor="t">
             <a:spAutoFit/>
           </a:bodyPr>
           <a:lstStyle/>
@@ -13540,7 +13328,7 @@
           <a:noFill/>
         </p:spPr>
         <p:txBody>
-          <a:bodyPr wrap="none" lIns="0" tIns="0" rIns="0" bIns="0" anchor="t">
+          <a:bodyPr wrap="none" lIns="0" rIns="0" tIns="0" bIns="0" anchor="t">
             <a:spAutoFit/>
           </a:bodyPr>
           <a:lstStyle/>
@@ -13582,7 +13370,7 @@
           <a:noFill/>
         </p:spPr>
         <p:txBody>
-          <a:bodyPr wrap="none" lIns="0" tIns="0" rIns="0" bIns="0" anchor="t">
+          <a:bodyPr wrap="none" lIns="0" rIns="0" tIns="0" bIns="0" anchor="t">
             <a:spAutoFit/>
           </a:bodyPr>
           <a:lstStyle/>
@@ -13624,7 +13412,7 @@
           <a:noFill/>
         </p:spPr>
         <p:txBody>
-          <a:bodyPr wrap="none" lIns="0" tIns="0" rIns="0" bIns="0" anchor="t">
+          <a:bodyPr wrap="none" lIns="0" rIns="0" tIns="0" bIns="0" anchor="t">
             <a:spAutoFit/>
           </a:bodyPr>
           <a:lstStyle/>
@@ -13666,7 +13454,7 @@
           <a:noFill/>
         </p:spPr>
         <p:txBody>
-          <a:bodyPr wrap="none" lIns="0" tIns="0" rIns="0" bIns="0" anchor="t">
+          <a:bodyPr wrap="none" lIns="0" rIns="0" tIns="0" bIns="0" anchor="t">
             <a:spAutoFit/>
           </a:bodyPr>
           <a:lstStyle/>
@@ -13719,7 +13507,6 @@
           <a:lstStyle/>
           <a:p>
             <a:pPr algn="ctr"/>
-            <a:endParaRPr/>
           </a:p>
         </p:txBody>
       </p:sp>
@@ -13740,7 +13527,7 @@
           <a:noFill/>
         </p:spPr>
         <p:txBody>
-          <a:bodyPr wrap="none" lIns="0" tIns="0" rIns="0" bIns="0" anchor="t">
+          <a:bodyPr wrap="none" lIns="0" rIns="0" tIns="0" bIns="0" anchor="t">
             <a:spAutoFit/>
           </a:bodyPr>
           <a:lstStyle/>
@@ -13795,7 +13582,6 @@
           <a:lstStyle/>
           <a:p>
             <a:pPr algn="ctr"/>
-            <a:endParaRPr/>
           </a:p>
         </p:txBody>
       </p:sp>
@@ -13825,7 +13611,6 @@
           <a:lstStyle/>
           <a:p>
             <a:pPr algn="ctr"/>
-            <a:endParaRPr/>
           </a:p>
         </p:txBody>
       </p:sp>
@@ -13846,7 +13631,7 @@
           <a:noFill/>
         </p:spPr>
         <p:txBody>
-          <a:bodyPr wrap="none" lIns="0" tIns="0" rIns="0" bIns="0" anchor="t">
+          <a:bodyPr wrap="none" lIns="0" rIns="0" tIns="0" bIns="0" anchor="t">
             <a:spAutoFit/>
           </a:bodyPr>
           <a:lstStyle/>
@@ -13888,7 +13673,7 @@
           <a:noFill/>
         </p:spPr>
         <p:txBody>
-          <a:bodyPr wrap="none" lIns="0" tIns="0" rIns="0" bIns="0" anchor="t">
+          <a:bodyPr wrap="none" lIns="0" rIns="0" tIns="0" bIns="0" anchor="t">
             <a:spAutoFit/>
           </a:bodyPr>
           <a:lstStyle/>
@@ -13930,7 +13715,7 @@
           <a:noFill/>
         </p:spPr>
         <p:txBody>
-          <a:bodyPr wrap="none" lIns="0" tIns="0" rIns="0" bIns="0" anchor="t">
+          <a:bodyPr wrap="none" lIns="0" rIns="0" tIns="0" bIns="0" anchor="t">
             <a:spAutoFit/>
           </a:bodyPr>
           <a:lstStyle/>
@@ -13964,7 +13749,7 @@
 </file>
 
 <file path=ppt/slides/slide4.xml><?xml version="1.0" encoding="utf-8"?>
-<p:sld xmlns:a="http://schemas.openxmlformats.org/drawingml/2006/main" xmlns:r="http://schemas.openxmlformats.org/officeDocument/2006/relationships" xmlns:p="http://schemas.openxmlformats.org/presentationml/2006/main">
+<p:sld xmlns:a="http://schemas.openxmlformats.org/drawingml/2006/main" xmlns:p="http://schemas.openxmlformats.org/presentationml/2006/main" xmlns:r="http://schemas.openxmlformats.org/officeDocument/2006/relationships">
   <p:cSld>
     <p:spTree>
       <p:nvGrpSpPr>
@@ -13972,14 +13757,7 @@
         <p:cNvGrpSpPr/>
         <p:nvPr/>
       </p:nvGrpSpPr>
-      <p:grpSpPr>
-        <a:xfrm>
-          <a:off x="0" y="0"/>
-          <a:ext cx="0" cy="0"/>
-          <a:chOff x="0" y="0"/>
-          <a:chExt cx="0" cy="0"/>
-        </a:xfrm>
-      </p:grpSpPr>
+      <p:grpSpPr/>
       <p:sp>
         <p:nvSpPr>
           <p:cNvPr id="2" name="SVG rect"/>
@@ -14006,7 +13784,6 @@
           <a:lstStyle/>
           <a:p>
             <a:pPr algn="ctr"/>
-            <a:endParaRPr/>
           </a:p>
         </p:txBody>
       </p:sp>
@@ -14038,7 +13815,6 @@
           <a:lstStyle/>
           <a:p>
             <a:pPr algn="ctr"/>
-            <a:endParaRPr/>
           </a:p>
         </p:txBody>
       </p:sp>
@@ -14070,7 +13846,6 @@
           <a:lstStyle/>
           <a:p>
             <a:pPr algn="ctr"/>
-            <a:endParaRPr/>
           </a:p>
         </p:txBody>
       </p:sp>
@@ -14102,7 +13877,6 @@
           <a:lstStyle/>
           <a:p>
             <a:pPr algn="ctr"/>
-            <a:endParaRPr/>
           </a:p>
         </p:txBody>
       </p:sp>
@@ -14123,7 +13897,7 @@
           <a:noFill/>
         </p:spPr>
         <p:txBody>
-          <a:bodyPr wrap="none" lIns="0" tIns="0" rIns="0" bIns="0" anchor="t">
+          <a:bodyPr wrap="none" lIns="0" rIns="0" tIns="0" bIns="0" anchor="t">
             <a:spAutoFit/>
           </a:bodyPr>
           <a:lstStyle/>
@@ -14157,15 +13931,15 @@
         <p:spPr>
           <a:xfrm>
             <a:off x="1813560" y="408127"/>
-            <a:ext cx="5518562" cy="369332"/>
-          </a:xfrm>
-          <a:prstGeom prst="rect">
-            <a:avLst/>
-          </a:prstGeom>
-          <a:noFill/>
-        </p:spPr>
-        <p:txBody>
-          <a:bodyPr wrap="none" lIns="0" tIns="0" rIns="0" bIns="0" anchor="t">
+            <a:ext cx="6023409" cy="384048"/>
+          </a:xfrm>
+          <a:prstGeom prst="rect">
+            <a:avLst/>
+          </a:prstGeom>
+          <a:noFill/>
+        </p:spPr>
+        <p:txBody>
+          <a:bodyPr wrap="none" lIns="0" rIns="0" tIns="0" bIns="0" anchor="t">
             <a:spAutoFit/>
           </a:bodyPr>
           <a:lstStyle/>
@@ -14179,22 +13953,13 @@
               </a:spcAft>
             </a:pPr>
             <a:r>
-              <a:rPr sz="2400" b="1" i="0" dirty="0" err="1">
+              <a:rPr sz="2520" b="1" i="0">
                 <a:solidFill>
                   <a:srgbClr val="0A1B3E"/>
                 </a:solidFill>
                 <a:latin typeface="Microsoft YaHei"/>
               </a:rPr>
-              <a:t>五个阶段，把资料稳定变成可编辑</a:t>
-            </a:r>
-            <a:r>
-              <a:rPr sz="2400" b="1" i="0" dirty="0">
-                <a:solidFill>
-                  <a:srgbClr val="0A1B3E"/>
-                </a:solidFill>
-                <a:latin typeface="Microsoft YaHei"/>
-              </a:rPr>
-              <a:t> PPTX</a:t>
+              <a:t>五个阶段，把资料稳定变成可编辑 PPTX</a:t>
             </a:r>
           </a:p>
         </p:txBody>
@@ -14216,7 +13981,7 @@
           <a:noFill/>
         </p:spPr>
         <p:txBody>
-          <a:bodyPr wrap="none" lIns="0" tIns="0" rIns="0" bIns="0" anchor="t">
+          <a:bodyPr wrap="none" lIns="0" rIns="0" tIns="0" bIns="0" anchor="t">
             <a:spAutoFit/>
           </a:bodyPr>
           <a:lstStyle/>
@@ -14258,7 +14023,7 @@
           <a:noFill/>
         </p:spPr>
         <p:txBody>
-          <a:bodyPr wrap="none" lIns="0" tIns="0" rIns="0" bIns="0" anchor="t">
+          <a:bodyPr wrap="none" lIns="0" rIns="0" tIns="0" bIns="0" anchor="t">
             <a:spAutoFit/>
           </a:bodyPr>
           <a:lstStyle/>
@@ -14353,7 +14118,6 @@
           <a:lstStyle/>
           <a:p>
             <a:pPr algn="ctr"/>
-            <a:endParaRPr/>
           </a:p>
         </p:txBody>
       </p:sp>
@@ -14385,7 +14149,6 @@
           <a:lstStyle/>
           <a:p>
             <a:pPr algn="ctr"/>
-            <a:endParaRPr/>
           </a:p>
         </p:txBody>
       </p:sp>
@@ -14417,7 +14180,6 @@
           <a:lstStyle/>
           <a:p>
             <a:pPr algn="ctr"/>
-            <a:endParaRPr/>
           </a:p>
         </p:txBody>
       </p:sp>
@@ -14451,7 +14213,6 @@
           <a:lstStyle/>
           <a:p>
             <a:pPr algn="ctr"/>
-            <a:endParaRPr/>
           </a:p>
         </p:txBody>
       </p:sp>
@@ -14472,7 +14233,7 @@
           <a:noFill/>
         </p:spPr>
         <p:txBody>
-          <a:bodyPr wrap="none" lIns="0" tIns="0" rIns="0" bIns="0" anchor="t">
+          <a:bodyPr wrap="none" lIns="0" rIns="0" tIns="0" bIns="0" anchor="t">
             <a:spAutoFit/>
           </a:bodyPr>
           <a:lstStyle/>
@@ -14514,7 +14275,7 @@
           <a:noFill/>
         </p:spPr>
         <p:txBody>
-          <a:bodyPr wrap="none" lIns="0" tIns="0" rIns="0" bIns="0" anchor="t">
+          <a:bodyPr wrap="none" lIns="0" rIns="0" tIns="0" bIns="0" anchor="t">
             <a:spAutoFit/>
           </a:bodyPr>
           <a:lstStyle/>
@@ -14577,7 +14338,7 @@
           <a:noFill/>
         </p:spPr>
         <p:txBody>
-          <a:bodyPr wrap="none" lIns="0" tIns="0" rIns="0" bIns="0" anchor="t">
+          <a:bodyPr wrap="none" lIns="0" rIns="0" tIns="0" bIns="0" anchor="t">
             <a:spAutoFit/>
           </a:bodyPr>
           <a:lstStyle/>
@@ -14619,7 +14380,7 @@
           <a:noFill/>
         </p:spPr>
         <p:txBody>
-          <a:bodyPr wrap="none" lIns="0" tIns="0" rIns="0" bIns="0" anchor="t">
+          <a:bodyPr wrap="none" lIns="0" rIns="0" tIns="0" bIns="0" anchor="t">
             <a:spAutoFit/>
           </a:bodyPr>
           <a:lstStyle/>
@@ -14661,7 +14422,7 @@
           <a:noFill/>
         </p:spPr>
         <p:txBody>
-          <a:bodyPr wrap="none" lIns="0" tIns="0" rIns="0" bIns="0" anchor="t">
+          <a:bodyPr wrap="none" lIns="0" rIns="0" tIns="0" bIns="0" anchor="t">
             <a:spAutoFit/>
           </a:bodyPr>
           <a:lstStyle/>
@@ -14703,7 +14464,7 @@
           <a:noFill/>
         </p:spPr>
         <p:txBody>
-          <a:bodyPr wrap="none" lIns="0" tIns="0" rIns="0" bIns="0" anchor="t">
+          <a:bodyPr wrap="none" lIns="0" rIns="0" tIns="0" bIns="0" anchor="t">
             <a:spAutoFit/>
           </a:bodyPr>
           <a:lstStyle/>
@@ -14756,7 +14517,6 @@
           <a:lstStyle/>
           <a:p>
             <a:pPr algn="ctr"/>
-            <a:endParaRPr/>
           </a:p>
         </p:txBody>
       </p:sp>
@@ -14790,7 +14550,6 @@
           <a:lstStyle/>
           <a:p>
             <a:pPr algn="ctr"/>
-            <a:endParaRPr/>
           </a:p>
         </p:txBody>
       </p:sp>
@@ -14820,7 +14579,6 @@
           <a:lstStyle/>
           <a:p>
             <a:pPr algn="ctr"/>
-            <a:endParaRPr/>
           </a:p>
         </p:txBody>
       </p:sp>
@@ -14850,7 +14608,6 @@
           <a:lstStyle/>
           <a:p>
             <a:pPr algn="ctr"/>
-            <a:endParaRPr/>
           </a:p>
         </p:txBody>
       </p:sp>
@@ -14871,7 +14628,7 @@
           <a:noFill/>
         </p:spPr>
         <p:txBody>
-          <a:bodyPr wrap="none" lIns="0" tIns="0" rIns="0" bIns="0" anchor="t">
+          <a:bodyPr wrap="none" lIns="0" rIns="0" tIns="0" bIns="0" anchor="t">
             <a:spAutoFit/>
           </a:bodyPr>
           <a:lstStyle/>
@@ -14922,7 +14679,6 @@
           <a:lstStyle/>
           <a:p>
             <a:pPr algn="ctr"/>
-            <a:endParaRPr/>
           </a:p>
         </p:txBody>
       </p:sp>
@@ -14943,7 +14699,7 @@
           <a:noFill/>
         </p:spPr>
         <p:txBody>
-          <a:bodyPr wrap="none" lIns="0" tIns="0" rIns="0" bIns="0" anchor="t">
+          <a:bodyPr wrap="none" lIns="0" rIns="0" tIns="0" bIns="0" anchor="t">
             <a:spAutoFit/>
           </a:bodyPr>
           <a:lstStyle/>
@@ -14985,7 +14741,7 @@
           <a:noFill/>
         </p:spPr>
         <p:txBody>
-          <a:bodyPr wrap="none" lIns="0" tIns="0" rIns="0" bIns="0" anchor="t">
+          <a:bodyPr wrap="none" lIns="0" rIns="0" tIns="0" bIns="0" anchor="t">
             <a:spAutoFit/>
           </a:bodyPr>
           <a:lstStyle/>
@@ -15048,7 +14804,7 @@
           <a:noFill/>
         </p:spPr>
         <p:txBody>
-          <a:bodyPr wrap="none" lIns="0" tIns="0" rIns="0" bIns="0" anchor="t">
+          <a:bodyPr wrap="none" lIns="0" rIns="0" tIns="0" bIns="0" anchor="t">
             <a:spAutoFit/>
           </a:bodyPr>
           <a:lstStyle/>
@@ -15090,7 +14846,7 @@
           <a:noFill/>
         </p:spPr>
         <p:txBody>
-          <a:bodyPr wrap="none" lIns="0" tIns="0" rIns="0" bIns="0" anchor="t">
+          <a:bodyPr wrap="none" lIns="0" rIns="0" tIns="0" bIns="0" anchor="t">
             <a:spAutoFit/>
           </a:bodyPr>
           <a:lstStyle/>
@@ -15143,7 +14899,6 @@
           <a:lstStyle/>
           <a:p>
             <a:pPr algn="ctr"/>
-            <a:endParaRPr/>
           </a:p>
         </p:txBody>
       </p:sp>
@@ -15177,7 +14932,6 @@
           <a:lstStyle/>
           <a:p>
             <a:pPr algn="ctr"/>
-            <a:endParaRPr/>
           </a:p>
         </p:txBody>
       </p:sp>
@@ -15207,7 +14961,6 @@
           <a:lstStyle/>
           <a:p>
             <a:pPr algn="ctr"/>
-            <a:endParaRPr/>
           </a:p>
         </p:txBody>
       </p:sp>
@@ -15237,7 +14990,6 @@
           <a:lstStyle/>
           <a:p>
             <a:pPr algn="ctr"/>
-            <a:endParaRPr/>
           </a:p>
         </p:txBody>
       </p:sp>
@@ -15258,7 +15010,7 @@
           <a:noFill/>
         </p:spPr>
         <p:txBody>
-          <a:bodyPr wrap="none" lIns="0" tIns="0" rIns="0" bIns="0" anchor="t">
+          <a:bodyPr wrap="none" lIns="0" rIns="0" tIns="0" bIns="0" anchor="t">
             <a:spAutoFit/>
           </a:bodyPr>
           <a:lstStyle/>
@@ -15309,7 +15061,6 @@
           <a:lstStyle/>
           <a:p>
             <a:pPr algn="ctr"/>
-            <a:endParaRPr/>
           </a:p>
         </p:txBody>
       </p:sp>
@@ -15330,7 +15081,7 @@
           <a:noFill/>
         </p:spPr>
         <p:txBody>
-          <a:bodyPr wrap="none" lIns="0" tIns="0" rIns="0" bIns="0" anchor="t">
+          <a:bodyPr wrap="none" lIns="0" rIns="0" tIns="0" bIns="0" anchor="t">
             <a:spAutoFit/>
           </a:bodyPr>
           <a:lstStyle/>
@@ -15372,7 +15123,7 @@
           <a:noFill/>
         </p:spPr>
         <p:txBody>
-          <a:bodyPr wrap="none" lIns="0" tIns="0" rIns="0" bIns="0" anchor="t">
+          <a:bodyPr wrap="none" lIns="0" rIns="0" tIns="0" bIns="0" anchor="t">
             <a:spAutoFit/>
           </a:bodyPr>
           <a:lstStyle/>
@@ -15435,7 +15186,7 @@
           <a:noFill/>
         </p:spPr>
         <p:txBody>
-          <a:bodyPr wrap="none" lIns="0" tIns="0" rIns="0" bIns="0" anchor="t">
+          <a:bodyPr wrap="none" lIns="0" rIns="0" tIns="0" bIns="0" anchor="t">
             <a:spAutoFit/>
           </a:bodyPr>
           <a:lstStyle/>
@@ -15477,7 +15228,7 @@
           <a:noFill/>
         </p:spPr>
         <p:txBody>
-          <a:bodyPr wrap="none" lIns="0" tIns="0" rIns="0" bIns="0" anchor="t">
+          <a:bodyPr wrap="none" lIns="0" rIns="0" tIns="0" bIns="0" anchor="t">
             <a:spAutoFit/>
           </a:bodyPr>
           <a:lstStyle/>
@@ -15530,7 +15281,6 @@
           <a:lstStyle/>
           <a:p>
             <a:pPr algn="ctr"/>
-            <a:endParaRPr/>
           </a:p>
         </p:txBody>
       </p:sp>
@@ -15564,7 +15314,6 @@
           <a:lstStyle/>
           <a:p>
             <a:pPr algn="ctr"/>
-            <a:endParaRPr/>
           </a:p>
         </p:txBody>
       </p:sp>
@@ -15594,7 +15343,6 @@
           <a:lstStyle/>
           <a:p>
             <a:pPr algn="ctr"/>
-            <a:endParaRPr/>
           </a:p>
         </p:txBody>
       </p:sp>
@@ -15624,7 +15372,6 @@
           <a:lstStyle/>
           <a:p>
             <a:pPr algn="ctr"/>
-            <a:endParaRPr/>
           </a:p>
         </p:txBody>
       </p:sp>
@@ -15645,7 +15392,7 @@
           <a:noFill/>
         </p:spPr>
         <p:txBody>
-          <a:bodyPr wrap="none" lIns="0" tIns="0" rIns="0" bIns="0" anchor="t">
+          <a:bodyPr wrap="none" lIns="0" rIns="0" tIns="0" bIns="0" anchor="t">
             <a:spAutoFit/>
           </a:bodyPr>
           <a:lstStyle/>
@@ -15696,7 +15443,6 @@
           <a:lstStyle/>
           <a:p>
             <a:pPr algn="ctr"/>
-            <a:endParaRPr/>
           </a:p>
         </p:txBody>
       </p:sp>
@@ -15717,7 +15463,7 @@
           <a:noFill/>
         </p:spPr>
         <p:txBody>
-          <a:bodyPr wrap="none" lIns="0" tIns="0" rIns="0" bIns="0" anchor="t">
+          <a:bodyPr wrap="none" lIns="0" rIns="0" tIns="0" bIns="0" anchor="t">
             <a:spAutoFit/>
           </a:bodyPr>
           <a:lstStyle/>
@@ -15759,7 +15505,7 @@
           <a:noFill/>
         </p:spPr>
         <p:txBody>
-          <a:bodyPr wrap="none" lIns="0" tIns="0" rIns="0" bIns="0" anchor="t">
+          <a:bodyPr wrap="none" lIns="0" rIns="0" tIns="0" bIns="0" anchor="t">
             <a:spAutoFit/>
           </a:bodyPr>
           <a:lstStyle/>
@@ -15822,7 +15568,7 @@
           <a:noFill/>
         </p:spPr>
         <p:txBody>
-          <a:bodyPr wrap="none" lIns="0" tIns="0" rIns="0" bIns="0" anchor="t">
+          <a:bodyPr wrap="none" lIns="0" rIns="0" tIns="0" bIns="0" anchor="t">
             <a:spAutoFit/>
           </a:bodyPr>
           <a:lstStyle/>
@@ -15864,7 +15610,7 @@
           <a:noFill/>
         </p:spPr>
         <p:txBody>
-          <a:bodyPr wrap="none" lIns="0" tIns="0" rIns="0" bIns="0" anchor="t">
+          <a:bodyPr wrap="none" lIns="0" rIns="0" tIns="0" bIns="0" anchor="t">
             <a:spAutoFit/>
           </a:bodyPr>
           <a:lstStyle/>
@@ -15917,7 +15663,6 @@
           <a:lstStyle/>
           <a:p>
             <a:pPr algn="ctr"/>
-            <a:endParaRPr/>
           </a:p>
         </p:txBody>
       </p:sp>
@@ -15951,7 +15696,6 @@
           <a:lstStyle/>
           <a:p>
             <a:pPr algn="ctr"/>
-            <a:endParaRPr/>
           </a:p>
         </p:txBody>
       </p:sp>
@@ -15981,7 +15725,6 @@
           <a:lstStyle/>
           <a:p>
             <a:pPr algn="ctr"/>
-            <a:endParaRPr/>
           </a:p>
         </p:txBody>
       </p:sp>
@@ -16011,7 +15754,6 @@
           <a:lstStyle/>
           <a:p>
             <a:pPr algn="ctr"/>
-            <a:endParaRPr/>
           </a:p>
         </p:txBody>
       </p:sp>
@@ -16032,7 +15774,7 @@
           <a:noFill/>
         </p:spPr>
         <p:txBody>
-          <a:bodyPr wrap="none" lIns="0" tIns="0" rIns="0" bIns="0" anchor="t">
+          <a:bodyPr wrap="none" lIns="0" rIns="0" tIns="0" bIns="0" anchor="t">
             <a:spAutoFit/>
           </a:bodyPr>
           <a:lstStyle/>
@@ -16083,7 +15825,6 @@
           <a:lstStyle/>
           <a:p>
             <a:pPr algn="ctr"/>
-            <a:endParaRPr/>
           </a:p>
         </p:txBody>
       </p:sp>
@@ -16104,7 +15845,7 @@
           <a:noFill/>
         </p:spPr>
         <p:txBody>
-          <a:bodyPr wrap="none" lIns="0" tIns="0" rIns="0" bIns="0" anchor="t">
+          <a:bodyPr wrap="none" lIns="0" rIns="0" tIns="0" bIns="0" anchor="t">
             <a:spAutoFit/>
           </a:bodyPr>
           <a:lstStyle/>
@@ -16146,7 +15887,7 @@
           <a:noFill/>
         </p:spPr>
         <p:txBody>
-          <a:bodyPr wrap="none" lIns="0" tIns="0" rIns="0" bIns="0" anchor="t">
+          <a:bodyPr wrap="none" lIns="0" rIns="0" tIns="0" bIns="0" anchor="t">
             <a:spAutoFit/>
           </a:bodyPr>
           <a:lstStyle/>
@@ -16209,7 +15950,7 @@
           <a:noFill/>
         </p:spPr>
         <p:txBody>
-          <a:bodyPr wrap="none" lIns="0" tIns="0" rIns="0" bIns="0" anchor="t">
+          <a:bodyPr wrap="none" lIns="0" rIns="0" tIns="0" bIns="0" anchor="t">
             <a:spAutoFit/>
           </a:bodyPr>
           <a:lstStyle/>
@@ -16251,7 +15992,7 @@
           <a:noFill/>
         </p:spPr>
         <p:txBody>
-          <a:bodyPr wrap="none" lIns="0" tIns="0" rIns="0" bIns="0" anchor="t">
+          <a:bodyPr wrap="none" lIns="0" rIns="0" tIns="0" bIns="0" anchor="t">
             <a:spAutoFit/>
           </a:bodyPr>
           <a:lstStyle/>
@@ -16304,7 +16045,6 @@
           <a:lstStyle/>
           <a:p>
             <a:pPr algn="ctr"/>
-            <a:endParaRPr/>
           </a:p>
         </p:txBody>
       </p:sp>
@@ -16338,7 +16078,6 @@
           <a:lstStyle/>
           <a:p>
             <a:pPr algn="ctr"/>
-            <a:endParaRPr/>
           </a:p>
         </p:txBody>
       </p:sp>
@@ -16368,7 +16107,6 @@
           <a:lstStyle/>
           <a:p>
             <a:pPr algn="ctr"/>
-            <a:endParaRPr/>
           </a:p>
         </p:txBody>
       </p:sp>
@@ -16398,7 +16136,6 @@
           <a:lstStyle/>
           <a:p>
             <a:pPr algn="ctr"/>
-            <a:endParaRPr/>
           </a:p>
         </p:txBody>
       </p:sp>
@@ -16419,7 +16156,7 @@
           <a:noFill/>
         </p:spPr>
         <p:txBody>
-          <a:bodyPr wrap="none" lIns="0" tIns="0" rIns="0" bIns="0" anchor="t">
+          <a:bodyPr wrap="none" lIns="0" rIns="0" tIns="0" bIns="0" anchor="t">
             <a:spAutoFit/>
           </a:bodyPr>
           <a:lstStyle/>
@@ -16470,7 +16207,6 @@
           <a:lstStyle/>
           <a:p>
             <a:pPr algn="ctr"/>
-            <a:endParaRPr/>
           </a:p>
         </p:txBody>
       </p:sp>
@@ -16491,7 +16227,7 @@
           <a:noFill/>
         </p:spPr>
         <p:txBody>
-          <a:bodyPr wrap="none" lIns="0" tIns="0" rIns="0" bIns="0" anchor="t">
+          <a:bodyPr wrap="none" lIns="0" rIns="0" tIns="0" bIns="0" anchor="t">
             <a:spAutoFit/>
           </a:bodyPr>
           <a:lstStyle/>
@@ -16533,7 +16269,7 @@
           <a:noFill/>
         </p:spPr>
         <p:txBody>
-          <a:bodyPr wrap="none" lIns="0" tIns="0" rIns="0" bIns="0" anchor="t">
+          <a:bodyPr wrap="none" lIns="0" rIns="0" tIns="0" bIns="0" anchor="t">
             <a:spAutoFit/>
           </a:bodyPr>
           <a:lstStyle/>
@@ -16596,7 +16332,7 @@
           <a:noFill/>
         </p:spPr>
         <p:txBody>
-          <a:bodyPr wrap="none" lIns="0" tIns="0" rIns="0" bIns="0" anchor="t">
+          <a:bodyPr wrap="none" lIns="0" rIns="0" tIns="0" bIns="0" anchor="t">
             <a:spAutoFit/>
           </a:bodyPr>
           <a:lstStyle/>
@@ -16638,7 +16374,7 @@
           <a:noFill/>
         </p:spPr>
         <p:txBody>
-          <a:bodyPr wrap="none" lIns="0" tIns="0" rIns="0" bIns="0" anchor="t">
+          <a:bodyPr wrap="none" lIns="0" rIns="0" tIns="0" bIns="0" anchor="t">
             <a:spAutoFit/>
           </a:bodyPr>
           <a:lstStyle/>
@@ -16693,7 +16429,6 @@
           <a:lstStyle/>
           <a:p>
             <a:pPr algn="ctr"/>
-            <a:endParaRPr/>
           </a:p>
         </p:txBody>
       </p:sp>
@@ -16723,7 +16458,6 @@
           <a:lstStyle/>
           <a:p>
             <a:pPr algn="ctr"/>
-            <a:endParaRPr/>
           </a:p>
         </p:txBody>
       </p:sp>
@@ -16744,7 +16478,7 @@
           <a:noFill/>
         </p:spPr>
         <p:txBody>
-          <a:bodyPr wrap="none" lIns="0" tIns="0" rIns="0" bIns="0" anchor="t">
+          <a:bodyPr wrap="none" lIns="0" rIns="0" tIns="0" bIns="0" anchor="t">
             <a:spAutoFit/>
           </a:bodyPr>
           <a:lstStyle/>
@@ -16786,7 +16520,7 @@
           <a:noFill/>
         </p:spPr>
         <p:txBody>
-          <a:bodyPr wrap="none" lIns="0" tIns="0" rIns="0" bIns="0" anchor="t">
+          <a:bodyPr wrap="none" lIns="0" rIns="0" tIns="0" bIns="0" anchor="t">
             <a:spAutoFit/>
           </a:bodyPr>
           <a:lstStyle/>
@@ -16828,7 +16562,7 @@
           <a:noFill/>
         </p:spPr>
         <p:txBody>
-          <a:bodyPr wrap="none" lIns="0" tIns="0" rIns="0" bIns="0" anchor="t">
+          <a:bodyPr wrap="none" lIns="0" rIns="0" tIns="0" bIns="0" anchor="t">
             <a:spAutoFit/>
           </a:bodyPr>
           <a:lstStyle/>
@@ -16870,7 +16604,7 @@
           <a:noFill/>
         </p:spPr>
         <p:txBody>
-          <a:bodyPr wrap="none" lIns="0" tIns="0" rIns="0" bIns="0" anchor="t">
+          <a:bodyPr wrap="none" lIns="0" rIns="0" tIns="0" bIns="0" anchor="t">
             <a:spAutoFit/>
           </a:bodyPr>
           <a:lstStyle/>
@@ -16904,7 +16638,7 @@
 </file>
 
 <file path=ppt/slides/slide5.xml><?xml version="1.0" encoding="utf-8"?>
-<p:sld xmlns:a="http://schemas.openxmlformats.org/drawingml/2006/main" xmlns:r="http://schemas.openxmlformats.org/officeDocument/2006/relationships" xmlns:p="http://schemas.openxmlformats.org/presentationml/2006/main">
+<p:sld xmlns:a="http://schemas.openxmlformats.org/drawingml/2006/main" xmlns:p="http://schemas.openxmlformats.org/presentationml/2006/main" xmlns:r="http://schemas.openxmlformats.org/officeDocument/2006/relationships">
   <p:cSld>
     <p:spTree>
       <p:nvGrpSpPr>
@@ -16912,14 +16646,7 @@
         <p:cNvGrpSpPr/>
         <p:nvPr/>
       </p:nvGrpSpPr>
-      <p:grpSpPr>
-        <a:xfrm>
-          <a:off x="0" y="0"/>
-          <a:ext cx="0" cy="0"/>
-          <a:chOff x="0" y="0"/>
-          <a:chExt cx="0" cy="0"/>
-        </a:xfrm>
-      </p:grpSpPr>
+      <p:grpSpPr/>
       <p:sp>
         <p:nvSpPr>
           <p:cNvPr id="2" name="SVG rect"/>
@@ -16946,7 +16673,6 @@
           <a:lstStyle/>
           <a:p>
             <a:pPr algn="ctr"/>
-            <a:endParaRPr/>
           </a:p>
         </p:txBody>
       </p:sp>
@@ -16978,7 +16704,6 @@
           <a:lstStyle/>
           <a:p>
             <a:pPr algn="ctr"/>
-            <a:endParaRPr/>
           </a:p>
         </p:txBody>
       </p:sp>
@@ -17010,7 +16735,6 @@
           <a:lstStyle/>
           <a:p>
             <a:pPr algn="ctr"/>
-            <a:endParaRPr/>
           </a:p>
         </p:txBody>
       </p:sp>
@@ -17042,7 +16766,6 @@
           <a:lstStyle/>
           <a:p>
             <a:pPr algn="ctr"/>
-            <a:endParaRPr/>
           </a:p>
         </p:txBody>
       </p:sp>
@@ -17063,7 +16786,7 @@
           <a:noFill/>
         </p:spPr>
         <p:txBody>
-          <a:bodyPr wrap="none" lIns="0" tIns="0" rIns="0" bIns="0" anchor="t">
+          <a:bodyPr wrap="none" lIns="0" rIns="0" tIns="0" bIns="0" anchor="t">
             <a:spAutoFit/>
           </a:bodyPr>
           <a:lstStyle/>
@@ -17077,7 +16800,7 @@
               </a:spcAft>
             </a:pPr>
             <a:r>
-              <a:rPr sz="2880" b="1" i="0" dirty="0">
+              <a:rPr sz="2880" b="1" i="0">
                 <a:solidFill>
                   <a:srgbClr val="FFFFFF"/>
                 </a:solidFill>
@@ -17105,7 +16828,7 @@
           <a:noFill/>
         </p:spPr>
         <p:txBody>
-          <a:bodyPr wrap="none" lIns="0" tIns="0" rIns="0" bIns="0" anchor="t">
+          <a:bodyPr wrap="none" lIns="0" rIns="0" tIns="0" bIns="0" anchor="t">
             <a:spAutoFit/>
           </a:bodyPr>
           <a:lstStyle/>
@@ -17119,38 +16842,14 @@
               </a:spcAft>
             </a:pPr>
             <a:r>
-              <a:rPr sz="2340" b="1" i="0" dirty="0" err="1">
+              <a:rPr sz="2340" b="1" i="0">
                 <a:solidFill>
                   <a:srgbClr val="0A1B3E"/>
                 </a:solidFill>
                 <a:latin typeface="Microsoft YaHei"/>
               </a:rPr>
-              <a:t>一页</a:t>
-            </a:r>
-            <a:r>
-              <a:rPr sz="2340" b="1" i="0" dirty="0">
-                <a:solidFill>
-                  <a:srgbClr val="0A1B3E"/>
-                </a:solidFill>
-                <a:latin typeface="Microsoft YaHei"/>
-              </a:rPr>
-              <a:t> SVG </a:t>
-            </a:r>
-            <a:r>
-              <a:rPr sz="2340" b="1" i="0" dirty="0" err="1">
-                <a:solidFill>
-                  <a:srgbClr val="0A1B3E"/>
-                </a:solidFill>
-                <a:latin typeface="Microsoft YaHei"/>
-              </a:rPr>
-              <a:t>同时承担设计、预览和编译真源</a:t>
-            </a:r>
-            <a:endParaRPr sz="2340" b="1" i="0" dirty="0">
-              <a:solidFill>
-                <a:srgbClr val="0A1B3E"/>
-              </a:solidFill>
-              <a:latin typeface="Microsoft YaHei"/>
-            </a:endParaRPr>
+              <a:t>一页 SVG 同时承担设计、预览和编译真源</a:t>
+            </a:r>
           </a:p>
         </p:txBody>
       </p:sp>
@@ -17171,7 +16870,7 @@
           <a:noFill/>
         </p:spPr>
         <p:txBody>
-          <a:bodyPr wrap="none" lIns="0" tIns="0" rIns="0" bIns="0" anchor="t">
+          <a:bodyPr wrap="none" lIns="0" rIns="0" tIns="0" bIns="0" anchor="t">
             <a:spAutoFit/>
           </a:bodyPr>
           <a:lstStyle/>
@@ -17213,7 +16912,7 @@
           <a:noFill/>
         </p:spPr>
         <p:txBody>
-          <a:bodyPr wrap="none" lIns="0" tIns="0" rIns="0" bIns="0" anchor="t">
+          <a:bodyPr wrap="none" lIns="0" rIns="0" tIns="0" bIns="0" anchor="t">
             <a:spAutoFit/>
           </a:bodyPr>
           <a:lstStyle/>
@@ -17308,7 +17007,6 @@
           <a:lstStyle/>
           <a:p>
             <a:pPr algn="ctr"/>
-            <a:endParaRPr/>
           </a:p>
         </p:txBody>
       </p:sp>
@@ -17340,7 +17038,6 @@
           <a:lstStyle/>
           <a:p>
             <a:pPr algn="ctr"/>
-            <a:endParaRPr/>
           </a:p>
         </p:txBody>
       </p:sp>
@@ -17372,7 +17069,6 @@
           <a:lstStyle/>
           <a:p>
             <a:pPr algn="ctr"/>
-            <a:endParaRPr/>
           </a:p>
         </p:txBody>
       </p:sp>
@@ -17406,7 +17102,6 @@
           <a:lstStyle/>
           <a:p>
             <a:pPr algn="ctr"/>
-            <a:endParaRPr/>
           </a:p>
         </p:txBody>
       </p:sp>
@@ -17427,7 +17122,7 @@
           <a:noFill/>
         </p:spPr>
         <p:txBody>
-          <a:bodyPr wrap="none" lIns="0" tIns="0" rIns="0" bIns="0" anchor="t">
+          <a:bodyPr wrap="none" lIns="0" rIns="0" tIns="0" bIns="0" anchor="t">
             <a:spAutoFit/>
           </a:bodyPr>
           <a:lstStyle/>
@@ -17469,7 +17164,7 @@
           <a:noFill/>
         </p:spPr>
         <p:txBody>
-          <a:bodyPr wrap="none" lIns="0" tIns="0" rIns="0" bIns="0" anchor="t">
+          <a:bodyPr wrap="none" lIns="0" rIns="0" tIns="0" bIns="0" anchor="t">
             <a:spAutoFit/>
           </a:bodyPr>
           <a:lstStyle/>
@@ -17522,7 +17217,6 @@
           <a:lstStyle/>
           <a:p>
             <a:pPr algn="ctr"/>
-            <a:endParaRPr/>
           </a:p>
         </p:txBody>
       </p:sp>
@@ -17556,7 +17250,6 @@
           <a:lstStyle/>
           <a:p>
             <a:pPr algn="ctr"/>
-            <a:endParaRPr/>
           </a:p>
         </p:txBody>
       </p:sp>
@@ -17588,7 +17281,6 @@
           <a:lstStyle/>
           <a:p>
             <a:pPr algn="ctr"/>
-            <a:endParaRPr/>
           </a:p>
         </p:txBody>
       </p:sp>
@@ -17618,7 +17310,6 @@
           <a:lstStyle/>
           <a:p>
             <a:pPr algn="ctr"/>
-            <a:endParaRPr/>
           </a:p>
         </p:txBody>
       </p:sp>
@@ -17639,7 +17330,7 @@
           <a:noFill/>
         </p:spPr>
         <p:txBody>
-          <a:bodyPr wrap="none" lIns="0" tIns="0" rIns="0" bIns="0" anchor="t">
+          <a:bodyPr wrap="none" lIns="0" rIns="0" tIns="0" bIns="0" anchor="t">
             <a:spAutoFit/>
           </a:bodyPr>
           <a:lstStyle/>
@@ -17690,7 +17381,6 @@
           <a:lstStyle/>
           <a:p>
             <a:pPr algn="ctr"/>
-            <a:endParaRPr/>
           </a:p>
         </p:txBody>
       </p:sp>
@@ -17720,7 +17410,6 @@
           <a:lstStyle/>
           <a:p>
             <a:pPr algn="ctr"/>
-            <a:endParaRPr/>
           </a:p>
         </p:txBody>
       </p:sp>
@@ -17750,7 +17439,6 @@
           <a:lstStyle/>
           <a:p>
             <a:pPr algn="ctr"/>
-            <a:endParaRPr/>
           </a:p>
         </p:txBody>
       </p:sp>
@@ -17782,7 +17470,6 @@
           <a:lstStyle/>
           <a:p>
             <a:pPr algn="ctr"/>
-            <a:endParaRPr/>
           </a:p>
         </p:txBody>
       </p:sp>
@@ -17812,7 +17499,6 @@
           <a:lstStyle/>
           <a:p>
             <a:pPr algn="ctr"/>
-            <a:endParaRPr/>
           </a:p>
         </p:txBody>
       </p:sp>
@@ -17842,7 +17528,6 @@
           <a:lstStyle/>
           <a:p>
             <a:pPr algn="ctr"/>
-            <a:endParaRPr/>
           </a:p>
         </p:txBody>
       </p:sp>
@@ -17872,7 +17557,6 @@
           <a:lstStyle/>
           <a:p>
             <a:pPr algn="ctr"/>
-            <a:endParaRPr/>
           </a:p>
         </p:txBody>
       </p:sp>
@@ -17902,7 +17586,6 @@
           <a:lstStyle/>
           <a:p>
             <a:pPr algn="ctr"/>
-            <a:endParaRPr/>
           </a:p>
         </p:txBody>
       </p:sp>
@@ -17932,7 +17615,6 @@
           <a:lstStyle/>
           <a:p>
             <a:pPr algn="ctr"/>
-            <a:endParaRPr/>
           </a:p>
         </p:txBody>
       </p:sp>
@@ -17962,7 +17644,6 @@
           <a:lstStyle/>
           <a:p>
             <a:pPr algn="ctr"/>
-            <a:endParaRPr/>
           </a:p>
         </p:txBody>
       </p:sp>
@@ -18004,7 +17685,7 @@
           <a:noFill/>
         </p:spPr>
         <p:txBody>
-          <a:bodyPr wrap="none" lIns="0" tIns="0" rIns="0" bIns="0" anchor="t">
+          <a:bodyPr wrap="none" lIns="0" rIns="0" tIns="0" bIns="0" anchor="t">
             <a:spAutoFit/>
           </a:bodyPr>
           <a:lstStyle/>
@@ -18057,7 +17738,6 @@
           <a:lstStyle/>
           <a:p>
             <a:pPr algn="ctr"/>
-            <a:endParaRPr/>
           </a:p>
         </p:txBody>
       </p:sp>
@@ -18091,7 +17771,6 @@
           <a:lstStyle/>
           <a:p>
             <a:pPr algn="ctr"/>
-            <a:endParaRPr/>
           </a:p>
         </p:txBody>
       </p:sp>
@@ -18121,7 +17800,6 @@
           <a:lstStyle/>
           <a:p>
             <a:pPr algn="ctr"/>
-            <a:endParaRPr/>
           </a:p>
         </p:txBody>
       </p:sp>
@@ -18142,7 +17820,7 @@
           <a:noFill/>
         </p:spPr>
         <p:txBody>
-          <a:bodyPr wrap="none" lIns="0" tIns="0" rIns="0" bIns="0" anchor="t">
+          <a:bodyPr wrap="none" lIns="0" rIns="0" tIns="0" bIns="0" anchor="t">
             <a:spAutoFit/>
           </a:bodyPr>
           <a:lstStyle/>
@@ -18184,7 +17862,7 @@
           <a:noFill/>
         </p:spPr>
         <p:txBody>
-          <a:bodyPr wrap="none" lIns="0" tIns="0" rIns="0" bIns="0" anchor="t">
+          <a:bodyPr wrap="none" lIns="0" rIns="0" tIns="0" bIns="0" anchor="t">
             <a:spAutoFit/>
           </a:bodyPr>
           <a:lstStyle/>
@@ -18226,7 +17904,7 @@
           <a:noFill/>
         </p:spPr>
         <p:txBody>
-          <a:bodyPr wrap="none" lIns="0" tIns="0" rIns="0" bIns="0" anchor="t">
+          <a:bodyPr wrap="none" lIns="0" rIns="0" tIns="0" bIns="0" anchor="t">
             <a:spAutoFit/>
           </a:bodyPr>
           <a:lstStyle/>
@@ -18279,7 +17957,6 @@
           <a:lstStyle/>
           <a:p>
             <a:pPr algn="ctr"/>
-            <a:endParaRPr/>
           </a:p>
         </p:txBody>
       </p:sp>
@@ -18313,7 +17990,6 @@
           <a:lstStyle/>
           <a:p>
             <a:pPr algn="ctr"/>
-            <a:endParaRPr/>
           </a:p>
         </p:txBody>
       </p:sp>
@@ -18343,7 +18019,6 @@
           <a:lstStyle/>
           <a:p>
             <a:pPr algn="ctr"/>
-            <a:endParaRPr/>
           </a:p>
         </p:txBody>
       </p:sp>
@@ -18364,7 +18039,7 @@
           <a:noFill/>
         </p:spPr>
         <p:txBody>
-          <a:bodyPr wrap="none" lIns="0" tIns="0" rIns="0" bIns="0" anchor="t">
+          <a:bodyPr wrap="none" lIns="0" rIns="0" tIns="0" bIns="0" anchor="t">
             <a:spAutoFit/>
           </a:bodyPr>
           <a:lstStyle/>
@@ -18406,7 +18081,7 @@
           <a:noFill/>
         </p:spPr>
         <p:txBody>
-          <a:bodyPr wrap="none" lIns="0" tIns="0" rIns="0" bIns="0" anchor="t">
+          <a:bodyPr wrap="none" lIns="0" rIns="0" tIns="0" bIns="0" anchor="t">
             <a:spAutoFit/>
           </a:bodyPr>
           <a:lstStyle/>
@@ -18448,7 +18123,7 @@
           <a:noFill/>
         </p:spPr>
         <p:txBody>
-          <a:bodyPr wrap="none" lIns="0" tIns="0" rIns="0" bIns="0" anchor="t">
+          <a:bodyPr wrap="none" lIns="0" rIns="0" tIns="0" bIns="0" anchor="t">
             <a:spAutoFit/>
           </a:bodyPr>
           <a:lstStyle/>
@@ -18501,7 +18176,6 @@
           <a:lstStyle/>
           <a:p>
             <a:pPr algn="ctr"/>
-            <a:endParaRPr/>
           </a:p>
         </p:txBody>
       </p:sp>
@@ -18535,7 +18209,6 @@
           <a:lstStyle/>
           <a:p>
             <a:pPr algn="ctr"/>
-            <a:endParaRPr/>
           </a:p>
         </p:txBody>
       </p:sp>
@@ -18565,7 +18238,6 @@
           <a:lstStyle/>
           <a:p>
             <a:pPr algn="ctr"/>
-            <a:endParaRPr/>
           </a:p>
         </p:txBody>
       </p:sp>
@@ -18586,7 +18258,7 @@
           <a:noFill/>
         </p:spPr>
         <p:txBody>
-          <a:bodyPr wrap="none" lIns="0" tIns="0" rIns="0" bIns="0" anchor="t">
+          <a:bodyPr wrap="none" lIns="0" rIns="0" tIns="0" bIns="0" anchor="t">
             <a:spAutoFit/>
           </a:bodyPr>
           <a:lstStyle/>
@@ -18628,7 +18300,7 @@
           <a:noFill/>
         </p:spPr>
         <p:txBody>
-          <a:bodyPr wrap="none" lIns="0" tIns="0" rIns="0" bIns="0" anchor="t">
+          <a:bodyPr wrap="none" lIns="0" rIns="0" tIns="0" bIns="0" anchor="t">
             <a:spAutoFit/>
           </a:bodyPr>
           <a:lstStyle/>
@@ -18670,7 +18342,7 @@
           <a:noFill/>
         </p:spPr>
         <p:txBody>
-          <a:bodyPr wrap="none" lIns="0" tIns="0" rIns="0" bIns="0" anchor="t">
+          <a:bodyPr wrap="none" lIns="0" rIns="0" tIns="0" bIns="0" anchor="t">
             <a:spAutoFit/>
           </a:bodyPr>
           <a:lstStyle/>
@@ -18723,7 +18395,6 @@
           <a:lstStyle/>
           <a:p>
             <a:pPr algn="ctr"/>
-            <a:endParaRPr/>
           </a:p>
         </p:txBody>
       </p:sp>
@@ -18757,7 +18428,6 @@
           <a:lstStyle/>
           <a:p>
             <a:pPr algn="ctr"/>
-            <a:endParaRPr/>
           </a:p>
         </p:txBody>
       </p:sp>
@@ -18787,7 +18457,6 @@
           <a:lstStyle/>
           <a:p>
             <a:pPr algn="ctr"/>
-            <a:endParaRPr/>
           </a:p>
         </p:txBody>
       </p:sp>
@@ -18808,7 +18477,7 @@
           <a:noFill/>
         </p:spPr>
         <p:txBody>
-          <a:bodyPr wrap="none" lIns="0" tIns="0" rIns="0" bIns="0" anchor="t">
+          <a:bodyPr wrap="none" lIns="0" rIns="0" tIns="0" bIns="0" anchor="t">
             <a:spAutoFit/>
           </a:bodyPr>
           <a:lstStyle/>
@@ -18850,7 +18519,7 @@
           <a:noFill/>
         </p:spPr>
         <p:txBody>
-          <a:bodyPr wrap="none" lIns="0" tIns="0" rIns="0" bIns="0" anchor="t">
+          <a:bodyPr wrap="none" lIns="0" rIns="0" tIns="0" bIns="0" anchor="t">
             <a:spAutoFit/>
           </a:bodyPr>
           <a:lstStyle/>
@@ -18892,7 +18561,7 @@
           <a:noFill/>
         </p:spPr>
         <p:txBody>
-          <a:bodyPr wrap="none" lIns="0" tIns="0" rIns="0" bIns="0" anchor="t">
+          <a:bodyPr wrap="none" lIns="0" rIns="0" tIns="0" bIns="0" anchor="t">
             <a:spAutoFit/>
           </a:bodyPr>
           <a:lstStyle/>
@@ -18947,7 +18616,6 @@
           <a:lstStyle/>
           <a:p>
             <a:pPr algn="ctr"/>
-            <a:endParaRPr/>
           </a:p>
         </p:txBody>
       </p:sp>
@@ -18977,7 +18645,6 @@
           <a:lstStyle/>
           <a:p>
             <a:pPr algn="ctr"/>
-            <a:endParaRPr/>
           </a:p>
         </p:txBody>
       </p:sp>
@@ -18998,7 +18665,7 @@
           <a:noFill/>
         </p:spPr>
         <p:txBody>
-          <a:bodyPr wrap="none" lIns="0" tIns="0" rIns="0" bIns="0" anchor="t">
+          <a:bodyPr wrap="none" lIns="0" rIns="0" tIns="0" bIns="0" anchor="t">
             <a:spAutoFit/>
           </a:bodyPr>
           <a:lstStyle/>
@@ -19040,7 +18707,7 @@
           <a:noFill/>
         </p:spPr>
         <p:txBody>
-          <a:bodyPr wrap="none" lIns="0" tIns="0" rIns="0" bIns="0" anchor="t">
+          <a:bodyPr wrap="none" lIns="0" rIns="0" tIns="0" bIns="0" anchor="t">
             <a:spAutoFit/>
           </a:bodyPr>
           <a:lstStyle/>
@@ -19082,7 +18749,7 @@
           <a:noFill/>
         </p:spPr>
         <p:txBody>
-          <a:bodyPr wrap="none" lIns="0" tIns="0" rIns="0" bIns="0" anchor="t">
+          <a:bodyPr wrap="none" lIns="0" rIns="0" tIns="0" bIns="0" anchor="t">
             <a:spAutoFit/>
           </a:bodyPr>
           <a:lstStyle/>
@@ -19116,7 +18783,7 @@
 </file>
 
 <file path=ppt/slides/slide6.xml><?xml version="1.0" encoding="utf-8"?>
-<p:sld xmlns:a="http://schemas.openxmlformats.org/drawingml/2006/main" xmlns:r="http://schemas.openxmlformats.org/officeDocument/2006/relationships" xmlns:p="http://schemas.openxmlformats.org/presentationml/2006/main">
+<p:sld xmlns:a="http://schemas.openxmlformats.org/drawingml/2006/main" xmlns:p="http://schemas.openxmlformats.org/presentationml/2006/main" xmlns:r="http://schemas.openxmlformats.org/officeDocument/2006/relationships">
   <p:cSld>
     <p:spTree>
       <p:nvGrpSpPr>
@@ -19124,14 +18791,7 @@
         <p:cNvGrpSpPr/>
         <p:nvPr/>
       </p:nvGrpSpPr>
-      <p:grpSpPr>
-        <a:xfrm>
-          <a:off x="0" y="0"/>
-          <a:ext cx="0" cy="0"/>
-          <a:chOff x="0" y="0"/>
-          <a:chExt cx="0" cy="0"/>
-        </a:xfrm>
-      </p:grpSpPr>
+      <p:grpSpPr/>
       <p:sp>
         <p:nvSpPr>
           <p:cNvPr id="2" name="SVG rect"/>
@@ -19158,7 +18818,6 @@
           <a:lstStyle/>
           <a:p>
             <a:pPr algn="ctr"/>
-            <a:endParaRPr/>
           </a:p>
         </p:txBody>
       </p:sp>
@@ -19190,7 +18849,6 @@
           <a:lstStyle/>
           <a:p>
             <a:pPr algn="ctr"/>
-            <a:endParaRPr/>
           </a:p>
         </p:txBody>
       </p:sp>
@@ -19222,7 +18880,6 @@
           <a:lstStyle/>
           <a:p>
             <a:pPr algn="ctr"/>
-            <a:endParaRPr/>
           </a:p>
         </p:txBody>
       </p:sp>
@@ -19254,7 +18911,6 @@
           <a:lstStyle/>
           <a:p>
             <a:pPr algn="ctr"/>
-            <a:endParaRPr/>
           </a:p>
         </p:txBody>
       </p:sp>
@@ -19275,7 +18931,7 @@
           <a:noFill/>
         </p:spPr>
         <p:txBody>
-          <a:bodyPr wrap="none" lIns="0" tIns="0" rIns="0" bIns="0" anchor="t">
+          <a:bodyPr wrap="none" lIns="0" rIns="0" tIns="0" bIns="0" anchor="t">
             <a:spAutoFit/>
           </a:bodyPr>
           <a:lstStyle/>
@@ -19317,7 +18973,7 @@
           <a:noFill/>
         </p:spPr>
         <p:txBody>
-          <a:bodyPr wrap="none" lIns="0" tIns="0" rIns="0" bIns="0" anchor="t">
+          <a:bodyPr wrap="none" lIns="0" rIns="0" tIns="0" bIns="0" anchor="t">
             <a:spAutoFit/>
           </a:bodyPr>
           <a:lstStyle/>
@@ -19331,7 +18987,7 @@
               </a:spcAft>
             </a:pPr>
             <a:r>
-              <a:rPr sz="2400" b="1" i="0" dirty="0" err="1">
+              <a:rPr sz="2400" b="1" i="0">
                 <a:solidFill>
                   <a:srgbClr val="0A1B3E"/>
                 </a:solidFill>
@@ -19339,12 +18995,6 @@
               </a:rPr>
               <a:t>转换策略优先保留编辑能力，再保住视觉</a:t>
             </a:r>
-            <a:endParaRPr sz="2400" b="1" i="0" dirty="0">
-              <a:solidFill>
-                <a:srgbClr val="0A1B3E"/>
-              </a:solidFill>
-              <a:latin typeface="Microsoft YaHei"/>
-            </a:endParaRPr>
           </a:p>
         </p:txBody>
       </p:sp>
@@ -19365,7 +19015,7 @@
           <a:noFill/>
         </p:spPr>
         <p:txBody>
-          <a:bodyPr wrap="none" lIns="0" tIns="0" rIns="0" bIns="0" anchor="t">
+          <a:bodyPr wrap="none" lIns="0" rIns="0" tIns="0" bIns="0" anchor="t">
             <a:spAutoFit/>
           </a:bodyPr>
           <a:lstStyle/>
@@ -19407,7 +19057,7 @@
           <a:noFill/>
         </p:spPr>
         <p:txBody>
-          <a:bodyPr wrap="none" lIns="0" tIns="0" rIns="0" bIns="0" anchor="t">
+          <a:bodyPr wrap="none" lIns="0" rIns="0" tIns="0" bIns="0" anchor="t">
             <a:spAutoFit/>
           </a:bodyPr>
           <a:lstStyle/>
@@ -19502,7 +19152,6 @@
           <a:lstStyle/>
           <a:p>
             <a:pPr algn="ctr"/>
-            <a:endParaRPr/>
           </a:p>
         </p:txBody>
       </p:sp>
@@ -19534,7 +19183,6 @@
           <a:lstStyle/>
           <a:p>
             <a:pPr algn="ctr"/>
-            <a:endParaRPr/>
           </a:p>
         </p:txBody>
       </p:sp>
@@ -19566,7 +19214,6 @@
           <a:lstStyle/>
           <a:p>
             <a:pPr algn="ctr"/>
-            <a:endParaRPr/>
           </a:p>
         </p:txBody>
       </p:sp>
@@ -19600,7 +19247,6 @@
           <a:lstStyle/>
           <a:p>
             <a:pPr algn="ctr"/>
-            <a:endParaRPr/>
           </a:p>
         </p:txBody>
       </p:sp>
@@ -19621,7 +19267,7 @@
           <a:noFill/>
         </p:spPr>
         <p:txBody>
-          <a:bodyPr wrap="none" lIns="0" tIns="0" rIns="0" bIns="0" anchor="t">
+          <a:bodyPr wrap="none" lIns="0" rIns="0" tIns="0" bIns="0" anchor="t">
             <a:spAutoFit/>
           </a:bodyPr>
           <a:lstStyle/>
@@ -19663,7 +19309,7 @@
           <a:noFill/>
         </p:spPr>
         <p:txBody>
-          <a:bodyPr wrap="none" lIns="0" tIns="0" rIns="0" bIns="0" anchor="t">
+          <a:bodyPr wrap="none" lIns="0" rIns="0" tIns="0" bIns="0" anchor="t">
             <a:spAutoFit/>
           </a:bodyPr>
           <a:lstStyle/>
@@ -19716,7 +19362,6 @@
           <a:lstStyle/>
           <a:p>
             <a:pPr algn="ctr"/>
-            <a:endParaRPr/>
           </a:p>
         </p:txBody>
       </p:sp>
@@ -19750,7 +19395,6 @@
           <a:lstStyle/>
           <a:p>
             <a:pPr algn="ctr"/>
-            <a:endParaRPr/>
           </a:p>
         </p:txBody>
       </p:sp>
@@ -19782,7 +19426,6 @@
           <a:lstStyle/>
           <a:p>
             <a:pPr algn="ctr"/>
-            <a:endParaRPr/>
           </a:p>
         </p:txBody>
       </p:sp>
@@ -19812,7 +19455,6 @@
           <a:lstStyle/>
           <a:p>
             <a:pPr algn="ctr"/>
-            <a:endParaRPr/>
           </a:p>
         </p:txBody>
       </p:sp>
@@ -19846,7 +19488,6 @@
           <a:lstStyle/>
           <a:p>
             <a:pPr algn="ctr"/>
-            <a:endParaRPr/>
           </a:p>
         </p:txBody>
       </p:sp>
@@ -19867,7 +19508,7 @@
           <a:noFill/>
         </p:spPr>
         <p:txBody>
-          <a:bodyPr wrap="none" lIns="0" tIns="0" rIns="0" bIns="0" anchor="t">
+          <a:bodyPr wrap="none" lIns="0" rIns="0" tIns="0" bIns="0" anchor="t">
             <a:spAutoFit/>
           </a:bodyPr>
           <a:lstStyle/>
@@ -19909,7 +19550,7 @@
           <a:noFill/>
         </p:spPr>
         <p:txBody>
-          <a:bodyPr wrap="none" lIns="0" tIns="0" rIns="0" bIns="0" anchor="t">
+          <a:bodyPr wrap="none" lIns="0" rIns="0" tIns="0" bIns="0" anchor="t">
             <a:spAutoFit/>
           </a:bodyPr>
           <a:lstStyle/>
@@ -19951,7 +19592,7 @@
           <a:noFill/>
         </p:spPr>
         <p:txBody>
-          <a:bodyPr wrap="none" lIns="0" tIns="0" rIns="0" bIns="0" anchor="t">
+          <a:bodyPr wrap="none" lIns="0" rIns="0" tIns="0" bIns="0" anchor="t">
             <a:spAutoFit/>
           </a:bodyPr>
           <a:lstStyle/>
@@ -19993,7 +19634,7 @@
           <a:noFill/>
         </p:spPr>
         <p:txBody>
-          <a:bodyPr wrap="none" lIns="0" tIns="0" rIns="0" bIns="0" anchor="t">
+          <a:bodyPr wrap="none" lIns="0" rIns="0" tIns="0" bIns="0" anchor="t">
             <a:spAutoFit/>
           </a:bodyPr>
           <a:lstStyle/>
@@ -20035,7 +19676,7 @@
           <a:noFill/>
         </p:spPr>
         <p:txBody>
-          <a:bodyPr wrap="none" lIns="0" tIns="0" rIns="0" bIns="0" anchor="t">
+          <a:bodyPr wrap="none" lIns="0" rIns="0" tIns="0" bIns="0" anchor="t">
             <a:spAutoFit/>
           </a:bodyPr>
           <a:lstStyle/>
@@ -20077,7 +19718,7 @@
           <a:noFill/>
         </p:spPr>
         <p:txBody>
-          <a:bodyPr wrap="none" lIns="0" tIns="0" rIns="0" bIns="0" anchor="t">
+          <a:bodyPr wrap="none" lIns="0" rIns="0" tIns="0" bIns="0" anchor="t">
             <a:spAutoFit/>
           </a:bodyPr>
           <a:lstStyle/>
@@ -20119,7 +19760,7 @@
           <a:noFill/>
         </p:spPr>
         <p:txBody>
-          <a:bodyPr wrap="none" lIns="0" tIns="0" rIns="0" bIns="0" anchor="t">
+          <a:bodyPr wrap="none" lIns="0" rIns="0" tIns="0" bIns="0" anchor="t">
             <a:spAutoFit/>
           </a:bodyPr>
           <a:lstStyle/>
@@ -20182,7 +19823,7 @@
           <a:noFill/>
         </p:spPr>
         <p:txBody>
-          <a:bodyPr wrap="none" lIns="0" tIns="0" rIns="0" bIns="0" anchor="t">
+          <a:bodyPr wrap="none" lIns="0" rIns="0" tIns="0" bIns="0" anchor="t">
             <a:spAutoFit/>
           </a:bodyPr>
           <a:lstStyle/>
@@ -20224,7 +19865,7 @@
           <a:noFill/>
         </p:spPr>
         <p:txBody>
-          <a:bodyPr wrap="none" lIns="0" tIns="0" rIns="0" bIns="0" anchor="t">
+          <a:bodyPr wrap="none" lIns="0" rIns="0" tIns="0" bIns="0" anchor="t">
             <a:spAutoFit/>
           </a:bodyPr>
           <a:lstStyle/>
@@ -20277,7 +19918,6 @@
           <a:lstStyle/>
           <a:p>
             <a:pPr algn="ctr"/>
-            <a:endParaRPr/>
           </a:p>
         </p:txBody>
       </p:sp>
@@ -20309,7 +19949,6 @@
           <a:lstStyle/>
           <a:p>
             <a:pPr algn="ctr"/>
-            <a:endParaRPr/>
           </a:p>
         </p:txBody>
       </p:sp>
@@ -20341,7 +19980,6 @@
           <a:lstStyle/>
           <a:p>
             <a:pPr algn="ctr"/>
-            <a:endParaRPr/>
           </a:p>
         </p:txBody>
       </p:sp>
@@ -20375,7 +20013,6 @@
           <a:lstStyle/>
           <a:p>
             <a:pPr algn="ctr"/>
-            <a:endParaRPr/>
           </a:p>
         </p:txBody>
       </p:sp>
@@ -20407,7 +20044,6 @@
           <a:lstStyle/>
           <a:p>
             <a:pPr algn="ctr"/>
-            <a:endParaRPr/>
           </a:p>
         </p:txBody>
       </p:sp>
@@ -20437,7 +20073,6 @@
           <a:lstStyle/>
           <a:p>
             <a:pPr algn="ctr"/>
-            <a:endParaRPr/>
           </a:p>
         </p:txBody>
       </p:sp>
@@ -20471,7 +20106,6 @@
           <a:lstStyle/>
           <a:p>
             <a:pPr algn="ctr"/>
-            <a:endParaRPr/>
           </a:p>
         </p:txBody>
       </p:sp>
@@ -20492,7 +20126,7 @@
           <a:noFill/>
         </p:spPr>
         <p:txBody>
-          <a:bodyPr wrap="none" lIns="0" tIns="0" rIns="0" bIns="0" anchor="t">
+          <a:bodyPr wrap="none" lIns="0" rIns="0" tIns="0" bIns="0" anchor="t">
             <a:spAutoFit/>
           </a:bodyPr>
           <a:lstStyle/>
@@ -20534,7 +20168,7 @@
           <a:noFill/>
         </p:spPr>
         <p:txBody>
-          <a:bodyPr wrap="none" lIns="0" tIns="0" rIns="0" bIns="0" anchor="t">
+          <a:bodyPr wrap="none" lIns="0" rIns="0" tIns="0" bIns="0" anchor="t">
             <a:spAutoFit/>
           </a:bodyPr>
           <a:lstStyle/>
@@ -20576,7 +20210,7 @@
           <a:noFill/>
         </p:spPr>
         <p:txBody>
-          <a:bodyPr wrap="none" lIns="0" tIns="0" rIns="0" bIns="0" anchor="t">
+          <a:bodyPr wrap="none" lIns="0" rIns="0" tIns="0" bIns="0" anchor="t">
             <a:spAutoFit/>
           </a:bodyPr>
           <a:lstStyle/>
@@ -20618,7 +20252,7 @@
           <a:noFill/>
         </p:spPr>
         <p:txBody>
-          <a:bodyPr wrap="none" lIns="0" tIns="0" rIns="0" bIns="0" anchor="t">
+          <a:bodyPr wrap="none" lIns="0" rIns="0" tIns="0" bIns="0" anchor="t">
             <a:spAutoFit/>
           </a:bodyPr>
           <a:lstStyle/>
@@ -20660,7 +20294,7 @@
           <a:noFill/>
         </p:spPr>
         <p:txBody>
-          <a:bodyPr wrap="none" lIns="0" tIns="0" rIns="0" bIns="0" anchor="t">
+          <a:bodyPr wrap="none" lIns="0" rIns="0" tIns="0" bIns="0" anchor="t">
             <a:spAutoFit/>
           </a:bodyPr>
           <a:lstStyle/>
@@ -20702,7 +20336,7 @@
           <a:noFill/>
         </p:spPr>
         <p:txBody>
-          <a:bodyPr wrap="none" lIns="0" tIns="0" rIns="0" bIns="0" anchor="t">
+          <a:bodyPr wrap="none" lIns="0" rIns="0" tIns="0" bIns="0" anchor="t">
             <a:spAutoFit/>
           </a:bodyPr>
           <a:lstStyle/>
@@ -20744,7 +20378,7 @@
           <a:noFill/>
         </p:spPr>
         <p:txBody>
-          <a:bodyPr wrap="none" lIns="0" tIns="0" rIns="0" bIns="0" anchor="t">
+          <a:bodyPr wrap="none" lIns="0" rIns="0" tIns="0" bIns="0" anchor="t">
             <a:spAutoFit/>
           </a:bodyPr>
           <a:lstStyle/>
@@ -20807,7 +20441,7 @@
           <a:noFill/>
         </p:spPr>
         <p:txBody>
-          <a:bodyPr wrap="none" lIns="0" tIns="0" rIns="0" bIns="0" anchor="t">
+          <a:bodyPr wrap="none" lIns="0" rIns="0" tIns="0" bIns="0" anchor="t">
             <a:spAutoFit/>
           </a:bodyPr>
           <a:lstStyle/>
@@ -20849,7 +20483,7 @@
           <a:noFill/>
         </p:spPr>
         <p:txBody>
-          <a:bodyPr wrap="none" lIns="0" tIns="0" rIns="0" bIns="0" anchor="t">
+          <a:bodyPr wrap="none" lIns="0" rIns="0" tIns="0" bIns="0" anchor="t">
             <a:spAutoFit/>
           </a:bodyPr>
           <a:lstStyle/>
@@ -20902,7 +20536,6 @@
           <a:lstStyle/>
           <a:p>
             <a:pPr algn="ctr"/>
-            <a:endParaRPr/>
           </a:p>
         </p:txBody>
       </p:sp>
@@ -20934,7 +20567,6 @@
           <a:lstStyle/>
           <a:p>
             <a:pPr algn="ctr"/>
-            <a:endParaRPr/>
           </a:p>
         </p:txBody>
       </p:sp>
@@ -20966,7 +20598,6 @@
           <a:lstStyle/>
           <a:p>
             <a:pPr algn="ctr"/>
-            <a:endParaRPr/>
           </a:p>
         </p:txBody>
       </p:sp>
@@ -21000,7 +20631,6 @@
           <a:lstStyle/>
           <a:p>
             <a:pPr algn="ctr"/>
-            <a:endParaRPr/>
           </a:p>
         </p:txBody>
       </p:sp>
@@ -21032,7 +20662,6 @@
           <a:lstStyle/>
           <a:p>
             <a:pPr algn="ctr"/>
-            <a:endParaRPr/>
           </a:p>
         </p:txBody>
       </p:sp>
@@ -21062,7 +20691,6 @@
           <a:lstStyle/>
           <a:p>
             <a:pPr algn="ctr"/>
-            <a:endParaRPr/>
           </a:p>
         </p:txBody>
       </p:sp>
@@ -21096,7 +20724,6 @@
           <a:lstStyle/>
           <a:p>
             <a:pPr algn="ctr"/>
-            <a:endParaRPr/>
           </a:p>
         </p:txBody>
       </p:sp>
@@ -21117,7 +20744,7 @@
           <a:noFill/>
         </p:spPr>
         <p:txBody>
-          <a:bodyPr wrap="none" lIns="0" tIns="0" rIns="0" bIns="0" anchor="t">
+          <a:bodyPr wrap="none" lIns="0" rIns="0" tIns="0" bIns="0" anchor="t">
             <a:spAutoFit/>
           </a:bodyPr>
           <a:lstStyle/>
@@ -21159,7 +20786,7 @@
           <a:noFill/>
         </p:spPr>
         <p:txBody>
-          <a:bodyPr wrap="none" lIns="0" tIns="0" rIns="0" bIns="0" anchor="t">
+          <a:bodyPr wrap="none" lIns="0" rIns="0" tIns="0" bIns="0" anchor="t">
             <a:spAutoFit/>
           </a:bodyPr>
           <a:lstStyle/>
@@ -21201,7 +20828,7 @@
           <a:noFill/>
         </p:spPr>
         <p:txBody>
-          <a:bodyPr wrap="none" lIns="0" tIns="0" rIns="0" bIns="0" anchor="t">
+          <a:bodyPr wrap="none" lIns="0" rIns="0" tIns="0" bIns="0" anchor="t">
             <a:spAutoFit/>
           </a:bodyPr>
           <a:lstStyle/>
@@ -21243,7 +20870,7 @@
           <a:noFill/>
         </p:spPr>
         <p:txBody>
-          <a:bodyPr wrap="none" lIns="0" tIns="0" rIns="0" bIns="0" anchor="t">
+          <a:bodyPr wrap="none" lIns="0" rIns="0" tIns="0" bIns="0" anchor="t">
             <a:spAutoFit/>
           </a:bodyPr>
           <a:lstStyle/>
@@ -21285,7 +20912,7 @@
           <a:noFill/>
         </p:spPr>
         <p:txBody>
-          <a:bodyPr wrap="none" lIns="0" tIns="0" rIns="0" bIns="0" anchor="t">
+          <a:bodyPr wrap="none" lIns="0" rIns="0" tIns="0" bIns="0" anchor="t">
             <a:spAutoFit/>
           </a:bodyPr>
           <a:lstStyle/>
@@ -21327,7 +20954,7 @@
           <a:noFill/>
         </p:spPr>
         <p:txBody>
-          <a:bodyPr wrap="none" lIns="0" tIns="0" rIns="0" bIns="0" anchor="t">
+          <a:bodyPr wrap="none" lIns="0" rIns="0" tIns="0" bIns="0" anchor="t">
             <a:spAutoFit/>
           </a:bodyPr>
           <a:lstStyle/>
@@ -21369,7 +20996,7 @@
           <a:noFill/>
         </p:spPr>
         <p:txBody>
-          <a:bodyPr wrap="none" lIns="0" tIns="0" rIns="0" bIns="0" anchor="t">
+          <a:bodyPr wrap="none" lIns="0" rIns="0" tIns="0" bIns="0" anchor="t">
             <a:spAutoFit/>
           </a:bodyPr>
           <a:lstStyle/>
@@ -21432,7 +21059,7 @@
           <a:noFill/>
         </p:spPr>
         <p:txBody>
-          <a:bodyPr wrap="none" lIns="0" tIns="0" rIns="0" bIns="0" anchor="t">
+          <a:bodyPr wrap="none" lIns="0" rIns="0" tIns="0" bIns="0" anchor="t">
             <a:spAutoFit/>
           </a:bodyPr>
           <a:lstStyle/>
@@ -21474,7 +21101,7 @@
           <a:noFill/>
         </p:spPr>
         <p:txBody>
-          <a:bodyPr wrap="none" lIns="0" tIns="0" rIns="0" bIns="0" anchor="t">
+          <a:bodyPr wrap="none" lIns="0" rIns="0" tIns="0" bIns="0" anchor="t">
             <a:spAutoFit/>
           </a:bodyPr>
           <a:lstStyle/>
@@ -21527,7 +21154,6 @@
           <a:lstStyle/>
           <a:p>
             <a:pPr algn="ctr"/>
-            <a:endParaRPr/>
           </a:p>
         </p:txBody>
       </p:sp>
@@ -21559,7 +21185,6 @@
           <a:lstStyle/>
           <a:p>
             <a:pPr algn="ctr"/>
-            <a:endParaRPr/>
           </a:p>
         </p:txBody>
       </p:sp>
@@ -21593,7 +21218,6 @@
           <a:lstStyle/>
           <a:p>
             <a:pPr algn="ctr"/>
-            <a:endParaRPr/>
           </a:p>
         </p:txBody>
       </p:sp>
@@ -21623,7 +21247,6 @@
           <a:lstStyle/>
           <a:p>
             <a:pPr algn="ctr"/>
-            <a:endParaRPr/>
           </a:p>
         </p:txBody>
       </p:sp>
@@ -21644,7 +21267,7 @@
           <a:noFill/>
         </p:spPr>
         <p:txBody>
-          <a:bodyPr wrap="none" lIns="0" tIns="0" rIns="0" bIns="0" anchor="t">
+          <a:bodyPr wrap="none" lIns="0" rIns="0" tIns="0" bIns="0" anchor="t">
             <a:spAutoFit/>
           </a:bodyPr>
           <a:lstStyle/>
@@ -21686,7 +21309,7 @@
           <a:noFill/>
         </p:spPr>
         <p:txBody>
-          <a:bodyPr wrap="none" lIns="0" tIns="0" rIns="0" bIns="0" anchor="t">
+          <a:bodyPr wrap="none" lIns="0" rIns="0" tIns="0" bIns="0" anchor="t">
             <a:spAutoFit/>
           </a:bodyPr>
           <a:lstStyle/>
@@ -21728,7 +21351,7 @@
           <a:noFill/>
         </p:spPr>
         <p:txBody>
-          <a:bodyPr wrap="none" lIns="0" tIns="0" rIns="0" bIns="0" anchor="t">
+          <a:bodyPr wrap="none" lIns="0" rIns="0" tIns="0" bIns="0" anchor="t">
             <a:spAutoFit/>
           </a:bodyPr>
           <a:lstStyle/>
@@ -21770,7 +21393,7 @@
           <a:noFill/>
         </p:spPr>
         <p:txBody>
-          <a:bodyPr wrap="none" lIns="0" tIns="0" rIns="0" bIns="0" anchor="t">
+          <a:bodyPr wrap="none" lIns="0" rIns="0" tIns="0" bIns="0" anchor="t">
             <a:spAutoFit/>
           </a:bodyPr>
           <a:lstStyle/>
@@ -21804,7 +21427,7 @@
 </file>
 
 <file path=ppt/slides/slide7.xml><?xml version="1.0" encoding="utf-8"?>
-<p:sld xmlns:a="http://schemas.openxmlformats.org/drawingml/2006/main" xmlns:r="http://schemas.openxmlformats.org/officeDocument/2006/relationships" xmlns:p="http://schemas.openxmlformats.org/presentationml/2006/main">
+<p:sld xmlns:a="http://schemas.openxmlformats.org/drawingml/2006/main" xmlns:p="http://schemas.openxmlformats.org/presentationml/2006/main" xmlns:r="http://schemas.openxmlformats.org/officeDocument/2006/relationships">
   <p:cSld>
     <p:spTree>
       <p:nvGrpSpPr>
@@ -21812,14 +21435,7 @@
         <p:cNvGrpSpPr/>
         <p:nvPr/>
       </p:nvGrpSpPr>
-      <p:grpSpPr>
-        <a:xfrm>
-          <a:off x="0" y="0"/>
-          <a:ext cx="0" cy="0"/>
-          <a:chOff x="0" y="0"/>
-          <a:chExt cx="0" cy="0"/>
-        </a:xfrm>
-      </p:grpSpPr>
+      <p:grpSpPr/>
       <p:sp>
         <p:nvSpPr>
           <p:cNvPr id="2" name="SVG rect"/>
@@ -21846,7 +21462,6 @@
           <a:lstStyle/>
           <a:p>
             <a:pPr algn="ctr"/>
-            <a:endParaRPr/>
           </a:p>
         </p:txBody>
       </p:sp>
@@ -21878,7 +21493,6 @@
           <a:lstStyle/>
           <a:p>
             <a:pPr algn="ctr"/>
-            <a:endParaRPr/>
           </a:p>
         </p:txBody>
       </p:sp>
@@ -21910,7 +21524,6 @@
           <a:lstStyle/>
           <a:p>
             <a:pPr algn="ctr"/>
-            <a:endParaRPr/>
           </a:p>
         </p:txBody>
       </p:sp>
@@ -21942,7 +21555,6 @@
           <a:lstStyle/>
           <a:p>
             <a:pPr algn="ctr"/>
-            <a:endParaRPr/>
           </a:p>
         </p:txBody>
       </p:sp>
@@ -21963,7 +21575,7 @@
           <a:noFill/>
         </p:spPr>
         <p:txBody>
-          <a:bodyPr wrap="none" lIns="0" tIns="0" rIns="0" bIns="0" anchor="t">
+          <a:bodyPr wrap="none" lIns="0" rIns="0" tIns="0" bIns="0" anchor="t">
             <a:spAutoFit/>
           </a:bodyPr>
           <a:lstStyle/>
@@ -22005,7 +21617,7 @@
           <a:noFill/>
         </p:spPr>
         <p:txBody>
-          <a:bodyPr wrap="none" lIns="0" tIns="0" rIns="0" bIns="0" anchor="t">
+          <a:bodyPr wrap="none" lIns="0" rIns="0" tIns="0" bIns="0" anchor="t">
             <a:spAutoFit/>
           </a:bodyPr>
           <a:lstStyle/>
@@ -22047,7 +21659,7 @@
           <a:noFill/>
         </p:spPr>
         <p:txBody>
-          <a:bodyPr wrap="none" lIns="0" tIns="0" rIns="0" bIns="0" anchor="t">
+          <a:bodyPr wrap="none" lIns="0" rIns="0" tIns="0" bIns="0" anchor="t">
             <a:spAutoFit/>
           </a:bodyPr>
           <a:lstStyle/>
@@ -22089,7 +21701,7 @@
           <a:noFill/>
         </p:spPr>
         <p:txBody>
-          <a:bodyPr wrap="none" lIns="0" tIns="0" rIns="0" bIns="0" anchor="t">
+          <a:bodyPr wrap="none" lIns="0" rIns="0" tIns="0" bIns="0" anchor="t">
             <a:spAutoFit/>
           </a:bodyPr>
           <a:lstStyle/>
@@ -22184,7 +21796,6 @@
           <a:lstStyle/>
           <a:p>
             <a:pPr algn="ctr"/>
-            <a:endParaRPr/>
           </a:p>
         </p:txBody>
       </p:sp>
@@ -22216,7 +21827,6 @@
           <a:lstStyle/>
           <a:p>
             <a:pPr algn="ctr"/>
-            <a:endParaRPr/>
           </a:p>
         </p:txBody>
       </p:sp>
@@ -22248,7 +21858,6 @@
           <a:lstStyle/>
           <a:p>
             <a:pPr algn="ctr"/>
-            <a:endParaRPr/>
           </a:p>
         </p:txBody>
       </p:sp>
@@ -22282,7 +21891,6 @@
           <a:lstStyle/>
           <a:p>
             <a:pPr algn="ctr"/>
-            <a:endParaRPr/>
           </a:p>
         </p:txBody>
       </p:sp>
@@ -22303,7 +21911,7 @@
           <a:noFill/>
         </p:spPr>
         <p:txBody>
-          <a:bodyPr wrap="none" lIns="0" tIns="0" rIns="0" bIns="0" anchor="t">
+          <a:bodyPr wrap="none" lIns="0" rIns="0" tIns="0" bIns="0" anchor="t">
             <a:spAutoFit/>
           </a:bodyPr>
           <a:lstStyle/>
@@ -22345,7 +21953,7 @@
           <a:noFill/>
         </p:spPr>
         <p:txBody>
-          <a:bodyPr wrap="none" lIns="0" tIns="0" rIns="0" bIns="0" anchor="t">
+          <a:bodyPr wrap="none" lIns="0" rIns="0" tIns="0" bIns="0" anchor="t">
             <a:spAutoFit/>
           </a:bodyPr>
           <a:lstStyle/>
@@ -22398,7 +22006,6 @@
           <a:lstStyle/>
           <a:p>
             <a:pPr algn="ctr"/>
-            <a:endParaRPr/>
           </a:p>
         </p:txBody>
       </p:sp>
@@ -22432,7 +22039,6 @@
           <a:lstStyle/>
           <a:p>
             <a:pPr algn="ctr"/>
-            <a:endParaRPr/>
           </a:p>
         </p:txBody>
       </p:sp>
@@ -22462,7 +22068,6 @@
           <a:lstStyle/>
           <a:p>
             <a:pPr algn="ctr"/>
-            <a:endParaRPr/>
           </a:p>
         </p:txBody>
       </p:sp>
@@ -22483,7 +22088,7 @@
           <a:noFill/>
         </p:spPr>
         <p:txBody>
-          <a:bodyPr wrap="none" lIns="0" tIns="0" rIns="0" bIns="0" anchor="t">
+          <a:bodyPr wrap="none" lIns="0" rIns="0" tIns="0" bIns="0" anchor="t">
             <a:spAutoFit/>
           </a:bodyPr>
           <a:lstStyle/>
@@ -22525,7 +22130,7 @@
           <a:noFill/>
         </p:spPr>
         <p:txBody>
-          <a:bodyPr wrap="none" lIns="0" tIns="0" rIns="0" bIns="0" anchor="t">
+          <a:bodyPr wrap="none" lIns="0" rIns="0" tIns="0" bIns="0" anchor="t">
             <a:spAutoFit/>
           </a:bodyPr>
           <a:lstStyle/>
@@ -22567,7 +22172,7 @@
           <a:noFill/>
         </p:spPr>
         <p:txBody>
-          <a:bodyPr wrap="none" lIns="0" tIns="0" rIns="0" bIns="0" anchor="t">
+          <a:bodyPr wrap="none" lIns="0" rIns="0" tIns="0" bIns="0" anchor="t">
             <a:spAutoFit/>
           </a:bodyPr>
           <a:lstStyle/>
@@ -22618,7 +22223,6 @@
           <a:lstStyle/>
           <a:p>
             <a:pPr algn="ctr"/>
-            <a:endParaRPr/>
           </a:p>
         </p:txBody>
       </p:sp>
@@ -22639,7 +22243,7 @@
           <a:noFill/>
         </p:spPr>
         <p:txBody>
-          <a:bodyPr wrap="none" lIns="0" tIns="0" rIns="0" bIns="0" anchor="t">
+          <a:bodyPr wrap="none" lIns="0" rIns="0" tIns="0" bIns="0" anchor="t">
             <a:spAutoFit/>
           </a:bodyPr>
           <a:lstStyle/>
@@ -22692,7 +22296,6 @@
           <a:lstStyle/>
           <a:p>
             <a:pPr algn="ctr"/>
-            <a:endParaRPr/>
           </a:p>
         </p:txBody>
       </p:sp>
@@ -22726,7 +22329,6 @@
           <a:lstStyle/>
           <a:p>
             <a:pPr algn="ctr"/>
-            <a:endParaRPr/>
           </a:p>
         </p:txBody>
       </p:sp>
@@ -22756,7 +22358,6 @@
           <a:lstStyle/>
           <a:p>
             <a:pPr algn="ctr"/>
-            <a:endParaRPr/>
           </a:p>
         </p:txBody>
       </p:sp>
@@ -22777,7 +22378,7 @@
           <a:noFill/>
         </p:spPr>
         <p:txBody>
-          <a:bodyPr wrap="none" lIns="0" tIns="0" rIns="0" bIns="0" anchor="t">
+          <a:bodyPr wrap="none" lIns="0" rIns="0" tIns="0" bIns="0" anchor="t">
             <a:spAutoFit/>
           </a:bodyPr>
           <a:lstStyle/>
@@ -22819,7 +22420,7 @@
           <a:noFill/>
         </p:spPr>
         <p:txBody>
-          <a:bodyPr wrap="none" lIns="0" tIns="0" rIns="0" bIns="0" anchor="t">
+          <a:bodyPr wrap="none" lIns="0" rIns="0" tIns="0" bIns="0" anchor="t">
             <a:spAutoFit/>
           </a:bodyPr>
           <a:lstStyle/>
@@ -22861,7 +22462,7 @@
           <a:noFill/>
         </p:spPr>
         <p:txBody>
-          <a:bodyPr wrap="none" lIns="0" tIns="0" rIns="0" bIns="0" anchor="t">
+          <a:bodyPr wrap="none" lIns="0" rIns="0" tIns="0" bIns="0" anchor="t">
             <a:spAutoFit/>
           </a:bodyPr>
           <a:lstStyle/>
@@ -22912,7 +22513,6 @@
           <a:lstStyle/>
           <a:p>
             <a:pPr algn="ctr"/>
-            <a:endParaRPr/>
           </a:p>
         </p:txBody>
       </p:sp>
@@ -22933,7 +22533,7 @@
           <a:noFill/>
         </p:spPr>
         <p:txBody>
-          <a:bodyPr wrap="none" lIns="0" tIns="0" rIns="0" bIns="0" anchor="t">
+          <a:bodyPr wrap="none" lIns="0" rIns="0" tIns="0" bIns="0" anchor="t">
             <a:spAutoFit/>
           </a:bodyPr>
           <a:lstStyle/>
@@ -22986,7 +22586,6 @@
           <a:lstStyle/>
           <a:p>
             <a:pPr algn="ctr"/>
-            <a:endParaRPr/>
           </a:p>
         </p:txBody>
       </p:sp>
@@ -23020,7 +22619,6 @@
           <a:lstStyle/>
           <a:p>
             <a:pPr algn="ctr"/>
-            <a:endParaRPr/>
           </a:p>
         </p:txBody>
       </p:sp>
@@ -23050,7 +22648,6 @@
           <a:lstStyle/>
           <a:p>
             <a:pPr algn="ctr"/>
-            <a:endParaRPr/>
           </a:p>
         </p:txBody>
       </p:sp>
@@ -23071,7 +22668,7 @@
           <a:noFill/>
         </p:spPr>
         <p:txBody>
-          <a:bodyPr wrap="none" lIns="0" tIns="0" rIns="0" bIns="0" anchor="t">
+          <a:bodyPr wrap="none" lIns="0" rIns="0" tIns="0" bIns="0" anchor="t">
             <a:spAutoFit/>
           </a:bodyPr>
           <a:lstStyle/>
@@ -23113,7 +22710,7 @@
           <a:noFill/>
         </p:spPr>
         <p:txBody>
-          <a:bodyPr wrap="none" lIns="0" tIns="0" rIns="0" bIns="0" anchor="t">
+          <a:bodyPr wrap="none" lIns="0" rIns="0" tIns="0" bIns="0" anchor="t">
             <a:spAutoFit/>
           </a:bodyPr>
           <a:lstStyle/>
@@ -23155,7 +22752,7 @@
           <a:noFill/>
         </p:spPr>
         <p:txBody>
-          <a:bodyPr wrap="none" lIns="0" tIns="0" rIns="0" bIns="0" anchor="t">
+          <a:bodyPr wrap="none" lIns="0" rIns="0" tIns="0" bIns="0" anchor="t">
             <a:spAutoFit/>
           </a:bodyPr>
           <a:lstStyle/>
@@ -23206,7 +22803,6 @@
           <a:lstStyle/>
           <a:p>
             <a:pPr algn="ctr"/>
-            <a:endParaRPr/>
           </a:p>
         </p:txBody>
       </p:sp>
@@ -23227,7 +22823,7 @@
           <a:noFill/>
         </p:spPr>
         <p:txBody>
-          <a:bodyPr wrap="none" lIns="0" tIns="0" rIns="0" bIns="0" anchor="t">
+          <a:bodyPr wrap="none" lIns="0" rIns="0" tIns="0" bIns="0" anchor="t">
             <a:spAutoFit/>
           </a:bodyPr>
           <a:lstStyle/>
@@ -23280,7 +22876,6 @@
           <a:lstStyle/>
           <a:p>
             <a:pPr algn="ctr"/>
-            <a:endParaRPr/>
           </a:p>
         </p:txBody>
       </p:sp>
@@ -23314,7 +22909,6 @@
           <a:lstStyle/>
           <a:p>
             <a:pPr algn="ctr"/>
-            <a:endParaRPr/>
           </a:p>
         </p:txBody>
       </p:sp>
@@ -23344,7 +22938,6 @@
           <a:lstStyle/>
           <a:p>
             <a:pPr algn="ctr"/>
-            <a:endParaRPr/>
           </a:p>
         </p:txBody>
       </p:sp>
@@ -23365,7 +22958,7 @@
           <a:noFill/>
         </p:spPr>
         <p:txBody>
-          <a:bodyPr wrap="none" lIns="0" tIns="0" rIns="0" bIns="0" anchor="t">
+          <a:bodyPr wrap="none" lIns="0" rIns="0" tIns="0" bIns="0" anchor="t">
             <a:spAutoFit/>
           </a:bodyPr>
           <a:lstStyle/>
@@ -23407,7 +23000,7 @@
           <a:noFill/>
         </p:spPr>
         <p:txBody>
-          <a:bodyPr wrap="none" lIns="0" tIns="0" rIns="0" bIns="0" anchor="t">
+          <a:bodyPr wrap="none" lIns="0" rIns="0" tIns="0" bIns="0" anchor="t">
             <a:spAutoFit/>
           </a:bodyPr>
           <a:lstStyle/>
@@ -23449,7 +23042,7 @@
           <a:noFill/>
         </p:spPr>
         <p:txBody>
-          <a:bodyPr wrap="none" lIns="0" tIns="0" rIns="0" bIns="0" anchor="t">
+          <a:bodyPr wrap="none" lIns="0" rIns="0" tIns="0" bIns="0" anchor="t">
             <a:spAutoFit/>
           </a:bodyPr>
           <a:lstStyle/>
@@ -23500,7 +23093,6 @@
           <a:lstStyle/>
           <a:p>
             <a:pPr algn="ctr"/>
-            <a:endParaRPr/>
           </a:p>
         </p:txBody>
       </p:sp>
@@ -23521,7 +23113,7 @@
           <a:noFill/>
         </p:spPr>
         <p:txBody>
-          <a:bodyPr wrap="none" lIns="0" tIns="0" rIns="0" bIns="0" anchor="t">
+          <a:bodyPr wrap="none" lIns="0" rIns="0" tIns="0" bIns="0" anchor="t">
             <a:spAutoFit/>
           </a:bodyPr>
           <a:lstStyle/>
@@ -23574,7 +23166,6 @@
           <a:lstStyle/>
           <a:p>
             <a:pPr algn="ctr"/>
-            <a:endParaRPr/>
           </a:p>
         </p:txBody>
       </p:sp>
@@ -23608,7 +23199,6 @@
           <a:lstStyle/>
           <a:p>
             <a:pPr algn="ctr"/>
-            <a:endParaRPr/>
           </a:p>
         </p:txBody>
       </p:sp>
@@ -23638,7 +23228,6 @@
           <a:lstStyle/>
           <a:p>
             <a:pPr algn="ctr"/>
-            <a:endParaRPr/>
           </a:p>
         </p:txBody>
       </p:sp>
@@ -23659,7 +23248,7 @@
           <a:noFill/>
         </p:spPr>
         <p:txBody>
-          <a:bodyPr wrap="none" lIns="0" tIns="0" rIns="0" bIns="0" anchor="t">
+          <a:bodyPr wrap="none" lIns="0" rIns="0" tIns="0" bIns="0" anchor="t">
             <a:spAutoFit/>
           </a:bodyPr>
           <a:lstStyle/>
@@ -23701,7 +23290,7 @@
           <a:noFill/>
         </p:spPr>
         <p:txBody>
-          <a:bodyPr wrap="none" lIns="0" tIns="0" rIns="0" bIns="0" anchor="t">
+          <a:bodyPr wrap="none" lIns="0" rIns="0" tIns="0" bIns="0" anchor="t">
             <a:spAutoFit/>
           </a:bodyPr>
           <a:lstStyle/>
@@ -23743,7 +23332,7 @@
           <a:noFill/>
         </p:spPr>
         <p:txBody>
-          <a:bodyPr wrap="none" lIns="0" tIns="0" rIns="0" bIns="0" anchor="t">
+          <a:bodyPr wrap="none" lIns="0" rIns="0" tIns="0" bIns="0" anchor="t">
             <a:spAutoFit/>
           </a:bodyPr>
           <a:lstStyle/>
@@ -23794,7 +23383,6 @@
           <a:lstStyle/>
           <a:p>
             <a:pPr algn="ctr"/>
-            <a:endParaRPr/>
           </a:p>
         </p:txBody>
       </p:sp>
@@ -23815,7 +23403,7 @@
           <a:noFill/>
         </p:spPr>
         <p:txBody>
-          <a:bodyPr wrap="none" lIns="0" tIns="0" rIns="0" bIns="0" anchor="t">
+          <a:bodyPr wrap="none" lIns="0" rIns="0" tIns="0" bIns="0" anchor="t">
             <a:spAutoFit/>
           </a:bodyPr>
           <a:lstStyle/>
@@ -23857,7 +23445,7 @@
           <a:noFill/>
         </p:spPr>
         <p:txBody>
-          <a:bodyPr wrap="none" lIns="0" tIns="0" rIns="0" bIns="0" anchor="t">
+          <a:bodyPr wrap="none" lIns="0" rIns="0" tIns="0" bIns="0" anchor="t">
             <a:spAutoFit/>
           </a:bodyPr>
           <a:lstStyle/>
@@ -23899,7 +23487,7 @@
           <a:noFill/>
         </p:spPr>
         <p:txBody>
-          <a:bodyPr wrap="none" lIns="0" tIns="0" rIns="0" bIns="0" anchor="t">
+          <a:bodyPr wrap="none" lIns="0" rIns="0" tIns="0" bIns="0" anchor="t">
             <a:spAutoFit/>
           </a:bodyPr>
           <a:lstStyle/>
@@ -23941,7 +23529,7 @@
           <a:noFill/>
         </p:spPr>
         <p:txBody>
-          <a:bodyPr wrap="none" lIns="0" tIns="0" rIns="0" bIns="0" anchor="t">
+          <a:bodyPr wrap="none" lIns="0" rIns="0" tIns="0" bIns="0" anchor="t">
             <a:spAutoFit/>
           </a:bodyPr>
           <a:lstStyle/>
@@ -23994,7 +23582,6 @@
           <a:lstStyle/>
           <a:p>
             <a:pPr algn="ctr"/>
-            <a:endParaRPr/>
           </a:p>
         </p:txBody>
       </p:sp>
@@ -24026,7 +23613,6 @@
           <a:lstStyle/>
           <a:p>
             <a:pPr algn="ctr"/>
-            <a:endParaRPr/>
           </a:p>
         </p:txBody>
       </p:sp>
@@ -24060,7 +23646,6 @@
           <a:lstStyle/>
           <a:p>
             <a:pPr algn="ctr"/>
-            <a:endParaRPr/>
           </a:p>
         </p:txBody>
       </p:sp>
@@ -24092,7 +23677,6 @@
           <a:lstStyle/>
           <a:p>
             <a:pPr algn="ctr"/>
-            <a:endParaRPr/>
           </a:p>
         </p:txBody>
       </p:sp>
@@ -24122,7 +23706,6 @@
           <a:lstStyle/>
           <a:p>
             <a:pPr algn="ctr"/>
-            <a:endParaRPr/>
           </a:p>
         </p:txBody>
       </p:sp>
@@ -24143,7 +23726,7 @@
           <a:noFill/>
         </p:spPr>
         <p:txBody>
-          <a:bodyPr wrap="none" lIns="0" tIns="0" rIns="0" bIns="0" anchor="t">
+          <a:bodyPr wrap="none" lIns="0" rIns="0" tIns="0" bIns="0" anchor="t">
             <a:spAutoFit/>
           </a:bodyPr>
           <a:lstStyle/>
@@ -24194,7 +23777,6 @@
           <a:lstStyle/>
           <a:p>
             <a:pPr algn="ctr"/>
-            <a:endParaRPr/>
           </a:p>
         </p:txBody>
       </p:sp>
@@ -24215,7 +23797,7 @@
           <a:noFill/>
         </p:spPr>
         <p:txBody>
-          <a:bodyPr wrap="none" lIns="0" tIns="0" rIns="0" bIns="0" anchor="t">
+          <a:bodyPr wrap="none" lIns="0" rIns="0" tIns="0" bIns="0" anchor="t">
             <a:spAutoFit/>
           </a:bodyPr>
           <a:lstStyle/>
@@ -24268,7 +23850,6 @@
           <a:lstStyle/>
           <a:p>
             <a:pPr algn="ctr"/>
-            <a:endParaRPr/>
           </a:p>
         </p:txBody>
       </p:sp>
@@ -24300,7 +23881,6 @@
           <a:lstStyle/>
           <a:p>
             <a:pPr algn="ctr"/>
-            <a:endParaRPr/>
           </a:p>
         </p:txBody>
       </p:sp>
@@ -24321,7 +23901,7 @@
           <a:noFill/>
         </p:spPr>
         <p:txBody>
-          <a:bodyPr wrap="none" lIns="0" tIns="0" rIns="0" bIns="0" anchor="t">
+          <a:bodyPr wrap="none" lIns="0" rIns="0" tIns="0" bIns="0" anchor="t">
             <a:spAutoFit/>
           </a:bodyPr>
           <a:lstStyle/>
@@ -24363,7 +23943,7 @@
           <a:noFill/>
         </p:spPr>
         <p:txBody>
-          <a:bodyPr wrap="none" lIns="0" tIns="0" rIns="0" bIns="0" anchor="t">
+          <a:bodyPr wrap="none" lIns="0" rIns="0" tIns="0" bIns="0" anchor="t">
             <a:spAutoFit/>
           </a:bodyPr>
           <a:lstStyle/>
@@ -24405,7 +23985,7 @@
           <a:noFill/>
         </p:spPr>
         <p:txBody>
-          <a:bodyPr wrap="none" lIns="0" tIns="0" rIns="0" bIns="0" anchor="t">
+          <a:bodyPr wrap="none" lIns="0" rIns="0" tIns="0" bIns="0" anchor="t">
             <a:spAutoFit/>
           </a:bodyPr>
           <a:lstStyle/>
@@ -24447,7 +24027,7 @@
           <a:noFill/>
         </p:spPr>
         <p:txBody>
-          <a:bodyPr wrap="none" lIns="0" tIns="0" rIns="0" bIns="0" anchor="t">
+          <a:bodyPr wrap="none" lIns="0" rIns="0" tIns="0" bIns="0" anchor="t">
             <a:spAutoFit/>
           </a:bodyPr>
           <a:lstStyle/>
@@ -24519,7 +24099,6 @@
           <a:lstStyle/>
           <a:p>
             <a:pPr algn="ctr"/>
-            <a:endParaRPr/>
           </a:p>
         </p:txBody>
       </p:sp>
@@ -24540,7 +24119,7 @@
           <a:noFill/>
         </p:spPr>
         <p:txBody>
-          <a:bodyPr wrap="none" lIns="0" tIns="0" rIns="0" bIns="0" anchor="t">
+          <a:bodyPr wrap="none" lIns="0" rIns="0" tIns="0" bIns="0" anchor="t">
             <a:spAutoFit/>
           </a:bodyPr>
           <a:lstStyle/>
@@ -24595,7 +24174,6 @@
           <a:lstStyle/>
           <a:p>
             <a:pPr algn="ctr"/>
-            <a:endParaRPr/>
           </a:p>
         </p:txBody>
       </p:sp>
@@ -24616,7 +24194,7 @@
           <a:noFill/>
         </p:spPr>
         <p:txBody>
-          <a:bodyPr wrap="none" lIns="0" tIns="0" rIns="0" bIns="0" anchor="t">
+          <a:bodyPr wrap="none" lIns="0" rIns="0" tIns="0" bIns="0" anchor="t">
             <a:spAutoFit/>
           </a:bodyPr>
           <a:lstStyle/>
@@ -24658,7 +24236,7 @@
           <a:noFill/>
         </p:spPr>
         <p:txBody>
-          <a:bodyPr wrap="none" lIns="0" tIns="0" rIns="0" bIns="0" anchor="t">
+          <a:bodyPr wrap="none" lIns="0" rIns="0" tIns="0" bIns="0" anchor="t">
             <a:spAutoFit/>
           </a:bodyPr>
           <a:lstStyle/>
@@ -24692,7 +24270,7 @@
 </file>
 
 <file path=ppt/slides/slide8.xml><?xml version="1.0" encoding="utf-8"?>
-<p:sld xmlns:a="http://schemas.openxmlformats.org/drawingml/2006/main" xmlns:r="http://schemas.openxmlformats.org/officeDocument/2006/relationships" xmlns:p="http://schemas.openxmlformats.org/presentationml/2006/main">
+<p:sld xmlns:a="http://schemas.openxmlformats.org/drawingml/2006/main" xmlns:p="http://schemas.openxmlformats.org/presentationml/2006/main" xmlns:r="http://schemas.openxmlformats.org/officeDocument/2006/relationships">
   <p:cSld>
     <p:spTree>
       <p:nvGrpSpPr>
@@ -24700,14 +24278,7 @@
         <p:cNvGrpSpPr/>
         <p:nvPr/>
       </p:nvGrpSpPr>
-      <p:grpSpPr>
-        <a:xfrm>
-          <a:off x="0" y="0"/>
-          <a:ext cx="0" cy="0"/>
-          <a:chOff x="0" y="0"/>
-          <a:chExt cx="0" cy="0"/>
-        </a:xfrm>
-      </p:grpSpPr>
+      <p:grpSpPr/>
       <p:sp>
         <p:nvSpPr>
           <p:cNvPr id="2" name="SVG rect"/>
@@ -24734,7 +24305,6 @@
           <a:lstStyle/>
           <a:p>
             <a:pPr algn="ctr"/>
-            <a:endParaRPr/>
           </a:p>
         </p:txBody>
       </p:sp>
@@ -24766,7 +24336,6 @@
           <a:lstStyle/>
           <a:p>
             <a:pPr algn="ctr"/>
-            <a:endParaRPr/>
           </a:p>
         </p:txBody>
       </p:sp>
@@ -24798,7 +24367,6 @@
           <a:lstStyle/>
           <a:p>
             <a:pPr algn="ctr"/>
-            <a:endParaRPr/>
           </a:p>
         </p:txBody>
       </p:sp>
@@ -24830,7 +24398,6 @@
           <a:lstStyle/>
           <a:p>
             <a:pPr algn="ctr"/>
-            <a:endParaRPr/>
           </a:p>
         </p:txBody>
       </p:sp>
@@ -24851,7 +24418,7 @@
           <a:noFill/>
         </p:spPr>
         <p:txBody>
-          <a:bodyPr wrap="none" lIns="0" tIns="0" rIns="0" bIns="0" anchor="t">
+          <a:bodyPr wrap="none" lIns="0" rIns="0" tIns="0" bIns="0" anchor="t">
             <a:spAutoFit/>
           </a:bodyPr>
           <a:lstStyle/>
@@ -24893,7 +24460,7 @@
           <a:noFill/>
         </p:spPr>
         <p:txBody>
-          <a:bodyPr wrap="none" lIns="0" tIns="0" rIns="0" bIns="0" anchor="t">
+          <a:bodyPr wrap="none" lIns="0" rIns="0" tIns="0" bIns="0" anchor="t">
             <a:spAutoFit/>
           </a:bodyPr>
           <a:lstStyle/>
@@ -24907,7 +24474,7 @@
               </a:spcAft>
             </a:pPr>
             <a:r>
-              <a:rPr sz="2400" b="1" i="0" dirty="0" err="1">
+              <a:rPr sz="2400" b="1" i="0">
                 <a:solidFill>
                   <a:srgbClr val="0A1B3E"/>
                 </a:solidFill>
@@ -24915,12 +24482,6 @@
               </a:rPr>
               <a:t>指令、知识与工具分层，仓库因此可维护</a:t>
             </a:r>
-            <a:endParaRPr sz="2400" b="1" i="0" dirty="0">
-              <a:solidFill>
-                <a:srgbClr val="0A1B3E"/>
-              </a:solidFill>
-              <a:latin typeface="Microsoft YaHei"/>
-            </a:endParaRPr>
           </a:p>
         </p:txBody>
       </p:sp>
@@ -24941,7 +24502,7 @@
           <a:noFill/>
         </p:spPr>
         <p:txBody>
-          <a:bodyPr wrap="none" lIns="0" tIns="0" rIns="0" bIns="0" anchor="t">
+          <a:bodyPr wrap="none" lIns="0" rIns="0" tIns="0" bIns="0" anchor="t">
             <a:spAutoFit/>
           </a:bodyPr>
           <a:lstStyle/>
@@ -24983,7 +24544,7 @@
           <a:noFill/>
         </p:spPr>
         <p:txBody>
-          <a:bodyPr wrap="none" lIns="0" tIns="0" rIns="0" bIns="0" anchor="t">
+          <a:bodyPr wrap="none" lIns="0" rIns="0" tIns="0" bIns="0" anchor="t">
             <a:spAutoFit/>
           </a:bodyPr>
           <a:lstStyle/>
@@ -25078,7 +24639,6 @@
           <a:lstStyle/>
           <a:p>
             <a:pPr algn="ctr"/>
-            <a:endParaRPr/>
           </a:p>
         </p:txBody>
       </p:sp>
@@ -25110,7 +24670,6 @@
           <a:lstStyle/>
           <a:p>
             <a:pPr algn="ctr"/>
-            <a:endParaRPr/>
           </a:p>
         </p:txBody>
       </p:sp>
@@ -25142,7 +24701,6 @@
           <a:lstStyle/>
           <a:p>
             <a:pPr algn="ctr"/>
-            <a:endParaRPr/>
           </a:p>
         </p:txBody>
       </p:sp>
@@ -25176,7 +24734,6 @@
           <a:lstStyle/>
           <a:p>
             <a:pPr algn="ctr"/>
-            <a:endParaRPr/>
           </a:p>
         </p:txBody>
       </p:sp>
@@ -25197,7 +24754,7 @@
           <a:noFill/>
         </p:spPr>
         <p:txBody>
-          <a:bodyPr wrap="none" lIns="0" tIns="0" rIns="0" bIns="0" anchor="t">
+          <a:bodyPr wrap="none" lIns="0" rIns="0" tIns="0" bIns="0" anchor="t">
             <a:spAutoFit/>
           </a:bodyPr>
           <a:lstStyle/>
@@ -25239,7 +24796,7 @@
           <a:noFill/>
         </p:spPr>
         <p:txBody>
-          <a:bodyPr wrap="none" lIns="0" tIns="0" rIns="0" bIns="0" anchor="t">
+          <a:bodyPr wrap="none" lIns="0" rIns="0" tIns="0" bIns="0" anchor="t">
             <a:spAutoFit/>
           </a:bodyPr>
           <a:lstStyle/>
@@ -25292,7 +24849,6 @@
           <a:lstStyle/>
           <a:p>
             <a:pPr algn="ctr"/>
-            <a:endParaRPr/>
           </a:p>
         </p:txBody>
       </p:sp>
@@ -25326,7 +24882,6 @@
           <a:lstStyle/>
           <a:p>
             <a:pPr algn="ctr"/>
-            <a:endParaRPr/>
           </a:p>
         </p:txBody>
       </p:sp>
@@ -25358,7 +24913,6 @@
           <a:lstStyle/>
           <a:p>
             <a:pPr algn="ctr"/>
-            <a:endParaRPr/>
           </a:p>
         </p:txBody>
       </p:sp>
@@ -25388,7 +24942,6 @@
           <a:lstStyle/>
           <a:p>
             <a:pPr algn="ctr"/>
-            <a:endParaRPr/>
           </a:p>
         </p:txBody>
       </p:sp>
@@ -25409,7 +24962,7 @@
           <a:noFill/>
         </p:spPr>
         <p:txBody>
-          <a:bodyPr wrap="none" lIns="0" tIns="0" rIns="0" bIns="0" anchor="t">
+          <a:bodyPr wrap="none" lIns="0" rIns="0" tIns="0" bIns="0" anchor="t">
             <a:spAutoFit/>
           </a:bodyPr>
           <a:lstStyle/>
@@ -25565,7 +25118,6 @@
           <a:lstStyle/>
           <a:p>
             <a:pPr algn="ctr"/>
-            <a:endParaRPr/>
           </a:p>
         </p:txBody>
       </p:sp>
@@ -25595,7 +25147,6 @@
           <a:lstStyle/>
           <a:p>
             <a:pPr algn="ctr"/>
-            <a:endParaRPr/>
           </a:p>
         </p:txBody>
       </p:sp>
@@ -25625,7 +25176,6 @@
           <a:lstStyle/>
           <a:p>
             <a:pPr algn="ctr"/>
-            <a:endParaRPr/>
           </a:p>
         </p:txBody>
       </p:sp>
@@ -25655,7 +25205,6 @@
           <a:lstStyle/>
           <a:p>
             <a:pPr algn="ctr"/>
-            <a:endParaRPr/>
           </a:p>
         </p:txBody>
       </p:sp>
@@ -25676,7 +25225,7 @@
           <a:noFill/>
         </p:spPr>
         <p:txBody>
-          <a:bodyPr wrap="none" lIns="0" tIns="0" rIns="0" bIns="0" anchor="t">
+          <a:bodyPr wrap="none" lIns="0" rIns="0" tIns="0" bIns="0" anchor="t">
             <a:spAutoFit/>
           </a:bodyPr>
           <a:lstStyle/>
@@ -25718,7 +25267,7 @@
           <a:noFill/>
         </p:spPr>
         <p:txBody>
-          <a:bodyPr wrap="none" lIns="0" tIns="0" rIns="0" bIns="0" anchor="t">
+          <a:bodyPr wrap="none" lIns="0" rIns="0" tIns="0" bIns="0" anchor="t">
             <a:spAutoFit/>
           </a:bodyPr>
           <a:lstStyle/>
@@ -25760,7 +25309,7 @@
           <a:noFill/>
         </p:spPr>
         <p:txBody>
-          <a:bodyPr wrap="none" lIns="0" tIns="0" rIns="0" bIns="0" anchor="t">
+          <a:bodyPr wrap="none" lIns="0" rIns="0" tIns="0" bIns="0" anchor="t">
             <a:spAutoFit/>
           </a:bodyPr>
           <a:lstStyle/>
@@ -25802,7 +25351,7 @@
           <a:noFill/>
         </p:spPr>
         <p:txBody>
-          <a:bodyPr wrap="none" lIns="0" tIns="0" rIns="0" bIns="0" anchor="t">
+          <a:bodyPr wrap="none" lIns="0" rIns="0" tIns="0" bIns="0" anchor="t">
             <a:spAutoFit/>
           </a:bodyPr>
           <a:lstStyle/>
@@ -25844,7 +25393,7 @@
           <a:noFill/>
         </p:spPr>
         <p:txBody>
-          <a:bodyPr wrap="none" lIns="0" tIns="0" rIns="0" bIns="0" anchor="t">
+          <a:bodyPr wrap="none" lIns="0" rIns="0" tIns="0" bIns="0" anchor="t">
             <a:spAutoFit/>
           </a:bodyPr>
           <a:lstStyle/>
@@ -25886,7 +25435,7 @@
           <a:noFill/>
         </p:spPr>
         <p:txBody>
-          <a:bodyPr wrap="none" lIns="0" tIns="0" rIns="0" bIns="0" anchor="t">
+          <a:bodyPr wrap="none" lIns="0" rIns="0" tIns="0" bIns="0" anchor="t">
             <a:spAutoFit/>
           </a:bodyPr>
           <a:lstStyle/>
@@ -25928,7 +25477,7 @@
           <a:noFill/>
         </p:spPr>
         <p:txBody>
-          <a:bodyPr wrap="none" lIns="0" tIns="0" rIns="0" bIns="0" anchor="t">
+          <a:bodyPr wrap="none" lIns="0" rIns="0" tIns="0" bIns="0" anchor="t">
             <a:spAutoFit/>
           </a:bodyPr>
           <a:lstStyle/>
@@ -25970,7 +25519,7 @@
           <a:noFill/>
         </p:spPr>
         <p:txBody>
-          <a:bodyPr wrap="none" lIns="0" tIns="0" rIns="0" bIns="0" anchor="t">
+          <a:bodyPr wrap="none" lIns="0" rIns="0" tIns="0" bIns="0" anchor="t">
             <a:spAutoFit/>
           </a:bodyPr>
           <a:lstStyle/>
@@ -26023,7 +25572,6 @@
           <a:lstStyle/>
           <a:p>
             <a:pPr algn="ctr"/>
-            <a:endParaRPr/>
           </a:p>
         </p:txBody>
       </p:sp>
@@ -26057,7 +25605,6 @@
           <a:lstStyle/>
           <a:p>
             <a:pPr algn="ctr"/>
-            <a:endParaRPr/>
           </a:p>
         </p:txBody>
       </p:sp>
@@ -26087,7 +25634,6 @@
           <a:lstStyle/>
           <a:p>
             <a:pPr algn="ctr"/>
-            <a:endParaRPr/>
           </a:p>
         </p:txBody>
       </p:sp>
@@ -26108,7 +25654,7 @@
           <a:noFill/>
         </p:spPr>
         <p:txBody>
-          <a:bodyPr wrap="none" lIns="0" tIns="0" rIns="0" bIns="0" anchor="t">
+          <a:bodyPr wrap="none" lIns="0" rIns="0" tIns="0" bIns="0" anchor="t">
             <a:spAutoFit/>
           </a:bodyPr>
           <a:lstStyle/>
@@ -26150,7 +25696,7 @@
           <a:noFill/>
         </p:spPr>
         <p:txBody>
-          <a:bodyPr wrap="none" lIns="0" tIns="0" rIns="0" bIns="0" anchor="t">
+          <a:bodyPr wrap="none" lIns="0" rIns="0" tIns="0" bIns="0" anchor="t">
             <a:spAutoFit/>
           </a:bodyPr>
           <a:lstStyle/>
@@ -26192,7 +25738,7 @@
           <a:noFill/>
         </p:spPr>
         <p:txBody>
-          <a:bodyPr wrap="none" lIns="0" tIns="0" rIns="0" bIns="0" anchor="t">
+          <a:bodyPr wrap="none" lIns="0" rIns="0" tIns="0" bIns="0" anchor="t">
             <a:spAutoFit/>
           </a:bodyPr>
           <a:lstStyle/>
@@ -26245,7 +25791,6 @@
           <a:lstStyle/>
           <a:p>
             <a:pPr algn="ctr"/>
-            <a:endParaRPr/>
           </a:p>
         </p:txBody>
       </p:sp>
@@ -26279,7 +25824,6 @@
           <a:lstStyle/>
           <a:p>
             <a:pPr algn="ctr"/>
-            <a:endParaRPr/>
           </a:p>
         </p:txBody>
       </p:sp>
@@ -26309,7 +25853,6 @@
           <a:lstStyle/>
           <a:p>
             <a:pPr algn="ctr"/>
-            <a:endParaRPr/>
           </a:p>
         </p:txBody>
       </p:sp>
@@ -26330,7 +25873,7 @@
           <a:noFill/>
         </p:spPr>
         <p:txBody>
-          <a:bodyPr wrap="none" lIns="0" tIns="0" rIns="0" bIns="0" anchor="t">
+          <a:bodyPr wrap="none" lIns="0" rIns="0" tIns="0" bIns="0" anchor="t">
             <a:spAutoFit/>
           </a:bodyPr>
           <a:lstStyle/>
@@ -26372,7 +25915,7 @@
           <a:noFill/>
         </p:spPr>
         <p:txBody>
-          <a:bodyPr wrap="none" lIns="0" tIns="0" rIns="0" bIns="0" anchor="t">
+          <a:bodyPr wrap="none" lIns="0" rIns="0" tIns="0" bIns="0" anchor="t">
             <a:spAutoFit/>
           </a:bodyPr>
           <a:lstStyle/>
@@ -26414,7 +25957,7 @@
           <a:noFill/>
         </p:spPr>
         <p:txBody>
-          <a:bodyPr wrap="none" lIns="0" tIns="0" rIns="0" bIns="0" anchor="t">
+          <a:bodyPr wrap="none" lIns="0" rIns="0" tIns="0" bIns="0" anchor="t">
             <a:spAutoFit/>
           </a:bodyPr>
           <a:lstStyle/>
@@ -26467,7 +26010,6 @@
           <a:lstStyle/>
           <a:p>
             <a:pPr algn="ctr"/>
-            <a:endParaRPr/>
           </a:p>
         </p:txBody>
       </p:sp>
@@ -26501,7 +26043,6 @@
           <a:lstStyle/>
           <a:p>
             <a:pPr algn="ctr"/>
-            <a:endParaRPr/>
           </a:p>
         </p:txBody>
       </p:sp>
@@ -26531,7 +26072,6 @@
           <a:lstStyle/>
           <a:p>
             <a:pPr algn="ctr"/>
-            <a:endParaRPr/>
           </a:p>
         </p:txBody>
       </p:sp>
@@ -26552,7 +26092,7 @@
           <a:noFill/>
         </p:spPr>
         <p:txBody>
-          <a:bodyPr wrap="none" lIns="0" tIns="0" rIns="0" bIns="0" anchor="t">
+          <a:bodyPr wrap="none" lIns="0" rIns="0" tIns="0" bIns="0" anchor="t">
             <a:spAutoFit/>
           </a:bodyPr>
           <a:lstStyle/>
@@ -26594,7 +26134,7 @@
           <a:noFill/>
         </p:spPr>
         <p:txBody>
-          <a:bodyPr wrap="none" lIns="0" tIns="0" rIns="0" bIns="0" anchor="t">
+          <a:bodyPr wrap="none" lIns="0" rIns="0" tIns="0" bIns="0" anchor="t">
             <a:spAutoFit/>
           </a:bodyPr>
           <a:lstStyle/>
@@ -26636,7 +26176,7 @@
           <a:noFill/>
         </p:spPr>
         <p:txBody>
-          <a:bodyPr wrap="none" lIns="0" tIns="0" rIns="0" bIns="0" anchor="t">
+          <a:bodyPr wrap="none" lIns="0" rIns="0" tIns="0" bIns="0" anchor="t">
             <a:spAutoFit/>
           </a:bodyPr>
           <a:lstStyle/>
@@ -26689,7 +26229,6 @@
           <a:lstStyle/>
           <a:p>
             <a:pPr algn="ctr"/>
-            <a:endParaRPr/>
           </a:p>
         </p:txBody>
       </p:sp>
@@ -26721,7 +26260,6 @@
           <a:lstStyle/>
           <a:p>
             <a:pPr algn="ctr"/>
-            <a:endParaRPr/>
           </a:p>
         </p:txBody>
       </p:sp>
@@ -26742,7 +26280,7 @@
           <a:noFill/>
         </p:spPr>
         <p:txBody>
-          <a:bodyPr wrap="none" lIns="0" tIns="0" rIns="0" bIns="0" anchor="t">
+          <a:bodyPr wrap="none" lIns="0" rIns="0" tIns="0" bIns="0" anchor="t">
             <a:spAutoFit/>
           </a:bodyPr>
           <a:lstStyle/>
@@ -26784,7 +26322,7 @@
           <a:noFill/>
         </p:spPr>
         <p:txBody>
-          <a:bodyPr wrap="none" lIns="0" tIns="0" rIns="0" bIns="0" anchor="t">
+          <a:bodyPr wrap="none" lIns="0" rIns="0" tIns="0" bIns="0" anchor="t">
             <a:spAutoFit/>
           </a:bodyPr>
           <a:lstStyle/>
@@ -26839,7 +26377,6 @@
           <a:lstStyle/>
           <a:p>
             <a:pPr algn="ctr"/>
-            <a:endParaRPr/>
           </a:p>
         </p:txBody>
       </p:sp>
@@ -26860,7 +26397,7 @@
           <a:noFill/>
         </p:spPr>
         <p:txBody>
-          <a:bodyPr wrap="none" lIns="0" tIns="0" rIns="0" bIns="0" anchor="t">
+          <a:bodyPr wrap="none" lIns="0" rIns="0" tIns="0" bIns="0" anchor="t">
             <a:spAutoFit/>
           </a:bodyPr>
           <a:lstStyle/>
@@ -26902,7 +26439,7 @@
           <a:noFill/>
         </p:spPr>
         <p:txBody>
-          <a:bodyPr wrap="none" lIns="0" tIns="0" rIns="0" bIns="0" anchor="t">
+          <a:bodyPr wrap="none" lIns="0" rIns="0" tIns="0" bIns="0" anchor="t">
             <a:spAutoFit/>
           </a:bodyPr>
           <a:lstStyle/>
@@ -26957,7 +26494,6 @@
           <a:lstStyle/>
           <a:p>
             <a:pPr algn="ctr"/>
-            <a:endParaRPr/>
           </a:p>
         </p:txBody>
       </p:sp>
@@ -26978,7 +26514,7 @@
           <a:noFill/>
         </p:spPr>
         <p:txBody>
-          <a:bodyPr wrap="none" lIns="0" tIns="0" rIns="0" bIns="0" anchor="t">
+          <a:bodyPr wrap="none" lIns="0" rIns="0" tIns="0" bIns="0" anchor="t">
             <a:spAutoFit/>
           </a:bodyPr>
           <a:lstStyle/>
@@ -27033,7 +26569,6 @@
           <a:lstStyle/>
           <a:p>
             <a:pPr algn="ctr"/>
-            <a:endParaRPr/>
           </a:p>
         </p:txBody>
       </p:sp>
@@ -27054,7 +26589,7 @@
           <a:noFill/>
         </p:spPr>
         <p:txBody>
-          <a:bodyPr wrap="none" lIns="0" tIns="0" rIns="0" bIns="0" anchor="t">
+          <a:bodyPr wrap="none" lIns="0" rIns="0" tIns="0" bIns="0" anchor="t">
             <a:spAutoFit/>
           </a:bodyPr>
           <a:lstStyle/>
@@ -27109,7 +26644,6 @@
           <a:lstStyle/>
           <a:p>
             <a:pPr algn="ctr"/>
-            <a:endParaRPr/>
           </a:p>
         </p:txBody>
       </p:sp>
@@ -27139,7 +26673,6 @@
           <a:lstStyle/>
           <a:p>
             <a:pPr algn="ctr"/>
-            <a:endParaRPr/>
           </a:p>
         </p:txBody>
       </p:sp>
@@ -27160,7 +26693,7 @@
           <a:noFill/>
         </p:spPr>
         <p:txBody>
-          <a:bodyPr wrap="none" lIns="0" tIns="0" rIns="0" bIns="0" anchor="t">
+          <a:bodyPr wrap="none" lIns="0" rIns="0" tIns="0" bIns="0" anchor="t">
             <a:spAutoFit/>
           </a:bodyPr>
           <a:lstStyle/>
@@ -27202,7 +26735,7 @@
           <a:noFill/>
         </p:spPr>
         <p:txBody>
-          <a:bodyPr wrap="none" lIns="0" tIns="0" rIns="0" bIns="0" anchor="t">
+          <a:bodyPr wrap="none" lIns="0" rIns="0" tIns="0" bIns="0" anchor="t">
             <a:spAutoFit/>
           </a:bodyPr>
           <a:lstStyle/>
@@ -27244,7 +26777,7 @@
           <a:noFill/>
         </p:spPr>
         <p:txBody>
-          <a:bodyPr wrap="none" lIns="0" tIns="0" rIns="0" bIns="0" anchor="t">
+          <a:bodyPr wrap="none" lIns="0" rIns="0" tIns="0" bIns="0" anchor="t">
             <a:spAutoFit/>
           </a:bodyPr>
           <a:lstStyle/>
@@ -27278,7 +26811,7 @@
 </file>
 
 <file path=ppt/slides/slide9.xml><?xml version="1.0" encoding="utf-8"?>
-<p:sld xmlns:a="http://schemas.openxmlformats.org/drawingml/2006/main" xmlns:r="http://schemas.openxmlformats.org/officeDocument/2006/relationships" xmlns:p="http://schemas.openxmlformats.org/presentationml/2006/main">
+<p:sld xmlns:a="http://schemas.openxmlformats.org/drawingml/2006/main" xmlns:p="http://schemas.openxmlformats.org/presentationml/2006/main" xmlns:r="http://schemas.openxmlformats.org/officeDocument/2006/relationships">
   <p:cSld>
     <p:spTree>
       <p:nvGrpSpPr>
@@ -27286,14 +26819,7 @@
         <p:cNvGrpSpPr/>
         <p:nvPr/>
       </p:nvGrpSpPr>
-      <p:grpSpPr>
-        <a:xfrm>
-          <a:off x="0" y="0"/>
-          <a:ext cx="0" cy="0"/>
-          <a:chOff x="0" y="0"/>
-          <a:chExt cx="0" cy="0"/>
-        </a:xfrm>
-      </p:grpSpPr>
+      <p:grpSpPr/>
       <p:sp>
         <p:nvSpPr>
           <p:cNvPr id="2" name="SVG rect"/>
@@ -27320,7 +26846,6 @@
           <a:lstStyle/>
           <a:p>
             <a:pPr algn="ctr"/>
-            <a:endParaRPr/>
           </a:p>
         </p:txBody>
       </p:sp>
@@ -27350,7 +26875,6 @@
           <a:lstStyle/>
           <a:p>
             <a:pPr algn="ctr"/>
-            <a:endParaRPr/>
           </a:p>
         </p:txBody>
       </p:sp>
@@ -27380,7 +26904,6 @@
           <a:lstStyle/>
           <a:p>
             <a:pPr algn="ctr"/>
-            <a:endParaRPr/>
           </a:p>
         </p:txBody>
       </p:sp>
@@ -27412,7 +26935,6 @@
           <a:lstStyle/>
           <a:p>
             <a:pPr algn="ctr"/>
-            <a:endParaRPr/>
           </a:p>
         </p:txBody>
       </p:sp>
@@ -27444,7 +26966,6 @@
           <a:lstStyle/>
           <a:p>
             <a:pPr algn="ctr"/>
-            <a:endParaRPr/>
           </a:p>
         </p:txBody>
       </p:sp>
@@ -27465,7 +26986,7 @@
           <a:noFill/>
         </p:spPr>
         <p:txBody>
-          <a:bodyPr wrap="none" lIns="0" tIns="0" rIns="0" bIns="0" anchor="t">
+          <a:bodyPr wrap="none" lIns="0" rIns="0" tIns="0" bIns="0" anchor="t">
             <a:spAutoFit/>
           </a:bodyPr>
           <a:lstStyle/>
@@ -27507,7 +27028,7 @@
           <a:noFill/>
         </p:spPr>
         <p:txBody>
-          <a:bodyPr wrap="none" lIns="0" tIns="0" rIns="0" bIns="0" anchor="t">
+          <a:bodyPr wrap="none" lIns="0" rIns="0" tIns="0" bIns="0" anchor="t">
             <a:spAutoFit/>
           </a:bodyPr>
           <a:lstStyle/>
@@ -27521,29 +27042,14 @@
               </a:spcAft>
             </a:pPr>
             <a:r>
-              <a:rPr sz="2279" b="1" i="0" dirty="0">
+              <a:rPr sz="2279" b="1" i="0">
                 <a:solidFill>
                   <a:srgbClr val="0A1B3E"/>
                 </a:solidFill>
                 <a:latin typeface="Microsoft YaHei"/>
               </a:rPr>
-              <a:t>V1.1 </a:t>
-            </a:r>
-            <a:r>
-              <a:rPr sz="2279" b="1" i="0" dirty="0" err="1">
-                <a:solidFill>
-                  <a:srgbClr val="0A1B3E"/>
-                </a:solidFill>
-                <a:latin typeface="Microsoft YaHei"/>
-              </a:rPr>
-              <a:t>已用可重复证据证明整条链路可行</a:t>
-            </a:r>
-            <a:endParaRPr sz="2279" b="1" i="0" dirty="0">
-              <a:solidFill>
-                <a:srgbClr val="0A1B3E"/>
-              </a:solidFill>
-              <a:latin typeface="Microsoft YaHei"/>
-            </a:endParaRPr>
+              <a:t>V1.2 让视觉表达与工程证据同时可复现</a:t>
+            </a:r>
           </a:p>
         </p:txBody>
       </p:sp>
@@ -27564,7 +27070,7 @@
           <a:noFill/>
         </p:spPr>
         <p:txBody>
-          <a:bodyPr wrap="none" lIns="0" tIns="0" rIns="0" bIns="0" anchor="t">
+          <a:bodyPr wrap="none" lIns="0" rIns="0" tIns="0" bIns="0" anchor="t">
             <a:spAutoFit/>
           </a:bodyPr>
           <a:lstStyle/>
@@ -27615,7 +27121,6 @@
           <a:lstStyle/>
           <a:p>
             <a:pPr algn="ctr"/>
-            <a:endParaRPr/>
           </a:p>
         </p:txBody>
       </p:sp>
@@ -27645,7 +27150,6 @@
           <a:lstStyle/>
           <a:p>
             <a:pPr algn="ctr"/>
-            <a:endParaRPr/>
           </a:p>
         </p:txBody>
       </p:sp>
@@ -27675,7 +27179,6 @@
           <a:lstStyle/>
           <a:p>
             <a:pPr algn="ctr"/>
-            <a:endParaRPr/>
           </a:p>
         </p:txBody>
       </p:sp>
@@ -27705,7 +27208,6 @@
           <a:lstStyle/>
           <a:p>
             <a:pPr algn="ctr"/>
-            <a:endParaRPr/>
           </a:p>
         </p:txBody>
       </p:sp>
@@ -27735,7 +27237,6 @@
           <a:lstStyle/>
           <a:p>
             <a:pPr algn="ctr"/>
-            <a:endParaRPr/>
           </a:p>
         </p:txBody>
       </p:sp>
@@ -27765,7 +27266,6 @@
           <a:lstStyle/>
           <a:p>
             <a:pPr algn="ctr"/>
-            <a:endParaRPr/>
           </a:p>
         </p:txBody>
       </p:sp>
@@ -27795,7 +27295,6 @@
           <a:lstStyle/>
           <a:p>
             <a:pPr algn="ctr"/>
-            <a:endParaRPr/>
           </a:p>
         </p:txBody>
       </p:sp>
@@ -27825,7 +27324,6 @@
           <a:lstStyle/>
           <a:p>
             <a:pPr algn="ctr"/>
-            <a:endParaRPr/>
           </a:p>
         </p:txBody>
       </p:sp>
@@ -27855,7 +27353,6 @@
           <a:lstStyle/>
           <a:p>
             <a:pPr algn="ctr"/>
-            <a:endParaRPr/>
           </a:p>
         </p:txBody>
       </p:sp>
@@ -27885,7 +27382,6 @@
           <a:lstStyle/>
           <a:p>
             <a:pPr algn="ctr"/>
-            <a:endParaRPr/>
           </a:p>
         </p:txBody>
       </p:sp>
@@ -27917,7 +27413,6 @@
           <a:lstStyle/>
           <a:p>
             <a:pPr algn="ctr"/>
-            <a:endParaRPr/>
           </a:p>
         </p:txBody>
       </p:sp>
@@ -27949,7 +27444,6 @@
           <a:lstStyle/>
           <a:p>
             <a:pPr algn="ctr"/>
-            <a:endParaRPr/>
           </a:p>
         </p:txBody>
       </p:sp>
@@ -27981,7 +27475,6 @@
           <a:lstStyle/>
           <a:p>
             <a:pPr algn="ctr"/>
-            <a:endParaRPr/>
           </a:p>
         </p:txBody>
       </p:sp>
@@ -28013,7 +27506,6 @@
           <a:lstStyle/>
           <a:p>
             <a:pPr algn="ctr"/>
-            <a:endParaRPr/>
           </a:p>
         </p:txBody>
       </p:sp>
@@ -28047,7 +27539,6 @@
           <a:lstStyle/>
           <a:p>
             <a:pPr algn="ctr"/>
-            <a:endParaRPr/>
           </a:p>
         </p:txBody>
       </p:sp>
@@ -28068,7 +27559,7 @@
           <a:noFill/>
         </p:spPr>
         <p:txBody>
-          <a:bodyPr wrap="none" lIns="0" tIns="0" rIns="0" bIns="0" anchor="t">
+          <a:bodyPr wrap="none" lIns="0" rIns="0" tIns="0" bIns="0" anchor="t">
             <a:spAutoFit/>
           </a:bodyPr>
           <a:lstStyle/>
@@ -28110,7 +27601,7 @@
           <a:noFill/>
         </p:spPr>
         <p:txBody>
-          <a:bodyPr wrap="none" lIns="0" tIns="0" rIns="0" bIns="0" anchor="t">
+          <a:bodyPr wrap="none" lIns="0" rIns="0" tIns="0" bIns="0" anchor="t">
             <a:spAutoFit/>
           </a:bodyPr>
           <a:lstStyle/>
@@ -28124,7 +27615,7 @@
               </a:spcAft>
             </a:pPr>
             <a:r>
-              <a:rPr sz="1739" b="1" i="0" dirty="0" err="1">
+              <a:rPr sz="1739" b="1" i="0">
                 <a:solidFill>
                   <a:srgbClr val="FFFFFF"/>
                 </a:solidFill>
@@ -28132,12 +27623,6 @@
               </a:rPr>
               <a:t>测试、双安装路径、端到端示例与编译报告共同构成工程证据</a:t>
             </a:r>
-            <a:endParaRPr sz="1739" b="1" i="0" dirty="0">
-              <a:solidFill>
-                <a:srgbClr val="FFFFFF"/>
-              </a:solidFill>
-              <a:latin typeface="Microsoft YaHei"/>
-            </a:endParaRPr>
           </a:p>
         </p:txBody>
       </p:sp>
@@ -28169,7 +27654,6 @@
           <a:lstStyle/>
           <a:p>
             <a:pPr algn="ctr"/>
-            <a:endParaRPr/>
           </a:p>
         </p:txBody>
       </p:sp>
@@ -28203,7 +27687,6 @@
           <a:lstStyle/>
           <a:p>
             <a:pPr algn="ctr"/>
-            <a:endParaRPr/>
           </a:p>
         </p:txBody>
       </p:sp>
@@ -28235,7 +27718,6 @@
           <a:lstStyle/>
           <a:p>
             <a:pPr algn="ctr"/>
-            <a:endParaRPr/>
           </a:p>
         </p:txBody>
       </p:sp>
@@ -28256,7 +27738,7 @@
           <a:noFill/>
         </p:spPr>
         <p:txBody>
-          <a:bodyPr wrap="none" lIns="0" tIns="0" rIns="0" bIns="0" anchor="t">
+          <a:bodyPr wrap="none" lIns="0" rIns="0" tIns="0" bIns="0" anchor="t">
             <a:spAutoFit/>
           </a:bodyPr>
           <a:lstStyle/>
@@ -28298,7 +27780,7 @@
           <a:noFill/>
         </p:spPr>
         <p:txBody>
-          <a:bodyPr wrap="none" lIns="0" tIns="0" rIns="0" bIns="0" anchor="t">
+          <a:bodyPr wrap="none" lIns="0" rIns="0" tIns="0" bIns="0" anchor="t">
             <a:spAutoFit/>
           </a:bodyPr>
           <a:lstStyle/>
@@ -28332,15 +27814,15 @@
         <p:spPr>
           <a:xfrm>
             <a:off x="1402080" y="2810866"/>
-            <a:ext cx="646956" cy="603504"/>
-          </a:xfrm>
-          <a:prstGeom prst="rect">
-            <a:avLst/>
-          </a:prstGeom>
-          <a:noFill/>
-        </p:spPr>
-        <p:txBody>
-          <a:bodyPr wrap="none" lIns="0" tIns="0" rIns="0" bIns="0" anchor="t">
+            <a:ext cx="929396" cy="603504"/>
+          </a:xfrm>
+          <a:prstGeom prst="rect">
+            <a:avLst/>
+          </a:prstGeom>
+          <a:noFill/>
+        </p:spPr>
+        <p:txBody>
+          <a:bodyPr wrap="none" lIns="0" rIns="0" tIns="0" bIns="0" anchor="t">
             <a:spAutoFit/>
           </a:bodyPr>
           <a:lstStyle/>
@@ -28360,7 +27842,7 @@
                 </a:solidFill>
                 <a:latin typeface="Microsoft YaHei"/>
               </a:rPr>
-              <a:t>65</a:t>
+              <a:t>70+</a:t>
             </a:r>
           </a:p>
         </p:txBody>
@@ -28373,7 +27855,7 @@
         </p:nvSpPr>
         <p:spPr>
           <a:xfrm>
-            <a:off x="2286000" y="3044190"/>
+            <a:off x="2499360" y="3044190"/>
             <a:ext cx="609600" cy="228600"/>
           </a:xfrm>
           <a:prstGeom prst="rect">
@@ -28382,7 +27864,7 @@
           <a:noFill/>
         </p:spPr>
         <p:txBody>
-          <a:bodyPr wrap="none" lIns="0" tIns="0" rIns="0" bIns="0" anchor="t">
+          <a:bodyPr wrap="none" lIns="0" rIns="0" tIns="0" bIns="0" anchor="t">
             <a:spAutoFit/>
           </a:bodyPr>
           <a:lstStyle/>
@@ -28424,7 +27906,7 @@
           <a:noFill/>
         </p:spPr>
         <p:txBody>
-          <a:bodyPr wrap="none" lIns="0" tIns="0" rIns="0" bIns="0" anchor="t">
+          <a:bodyPr wrap="none" lIns="0" rIns="0" tIns="0" bIns="0" anchor="t">
             <a:spAutoFit/>
           </a:bodyPr>
           <a:lstStyle/>
@@ -28477,7 +27959,6 @@
           <a:lstStyle/>
           <a:p>
             <a:pPr algn="ctr"/>
-            <a:endParaRPr/>
           </a:p>
         </p:txBody>
       </p:sp>
@@ -28511,7 +27992,6 @@
           <a:lstStyle/>
           <a:p>
             <a:pPr algn="ctr"/>
-            <a:endParaRPr/>
           </a:p>
         </p:txBody>
       </p:sp>
@@ -28543,7 +28023,6 @@
           <a:lstStyle/>
           <a:p>
             <a:pPr algn="ctr"/>
-            <a:endParaRPr/>
           </a:p>
         </p:txBody>
       </p:sp>
@@ -28564,7 +28043,7 @@
           <a:noFill/>
         </p:spPr>
         <p:txBody>
-          <a:bodyPr wrap="none" lIns="0" tIns="0" rIns="0" bIns="0" anchor="t">
+          <a:bodyPr wrap="none" lIns="0" rIns="0" tIns="0" bIns="0" anchor="t">
             <a:spAutoFit/>
           </a:bodyPr>
           <a:lstStyle/>
@@ -28606,7 +28085,7 @@
           <a:noFill/>
         </p:spPr>
         <p:txBody>
-          <a:bodyPr wrap="none" lIns="0" tIns="0" rIns="0" bIns="0" anchor="t">
+          <a:bodyPr wrap="none" lIns="0" rIns="0" tIns="0" bIns="0" anchor="t">
             <a:spAutoFit/>
           </a:bodyPr>
           <a:lstStyle/>
@@ -28648,7 +28127,7 @@
           <a:noFill/>
         </p:spPr>
         <p:txBody>
-          <a:bodyPr wrap="none" lIns="0" tIns="0" rIns="0" bIns="0" anchor="t">
+          <a:bodyPr wrap="none" lIns="0" rIns="0" tIns="0" bIns="0" anchor="t">
             <a:spAutoFit/>
           </a:bodyPr>
           <a:lstStyle/>
@@ -28690,7 +28169,7 @@
           <a:noFill/>
         </p:spPr>
         <p:txBody>
-          <a:bodyPr wrap="none" lIns="0" tIns="0" rIns="0" bIns="0" anchor="t">
+          <a:bodyPr wrap="none" lIns="0" rIns="0" tIns="0" bIns="0" anchor="t">
             <a:spAutoFit/>
           </a:bodyPr>
           <a:lstStyle/>
@@ -28732,7 +28211,7 @@
           <a:noFill/>
         </p:spPr>
         <p:txBody>
-          <a:bodyPr wrap="none" lIns="0" tIns="0" rIns="0" bIns="0" anchor="t">
+          <a:bodyPr wrap="none" lIns="0" rIns="0" tIns="0" bIns="0" anchor="t">
             <a:spAutoFit/>
           </a:bodyPr>
           <a:lstStyle/>
@@ -28774,7 +28253,7 @@
           <a:noFill/>
         </p:spPr>
         <p:txBody>
-          <a:bodyPr wrap="none" lIns="0" tIns="0" rIns="0" bIns="0" anchor="t">
+          <a:bodyPr wrap="none" lIns="0" rIns="0" tIns="0" bIns="0" anchor="t">
             <a:spAutoFit/>
           </a:bodyPr>
           <a:lstStyle/>
@@ -28827,7 +28306,6 @@
           <a:lstStyle/>
           <a:p>
             <a:pPr algn="ctr"/>
-            <a:endParaRPr/>
           </a:p>
         </p:txBody>
       </p:sp>
@@ -28861,7 +28339,6 @@
           <a:lstStyle/>
           <a:p>
             <a:pPr algn="ctr"/>
-            <a:endParaRPr/>
           </a:p>
         </p:txBody>
       </p:sp>
@@ -28882,7 +28359,7 @@
           <a:noFill/>
         </p:spPr>
         <p:txBody>
-          <a:bodyPr wrap="none" lIns="0" tIns="0" rIns="0" bIns="0" anchor="t">
+          <a:bodyPr wrap="none" lIns="0" rIns="0" tIns="0" bIns="0" anchor="t">
             <a:spAutoFit/>
           </a:bodyPr>
           <a:lstStyle/>
@@ -28924,7 +28401,7 @@
           <a:noFill/>
         </p:spPr>
         <p:txBody>
-          <a:bodyPr wrap="none" lIns="0" tIns="0" rIns="0" bIns="0" anchor="t">
+          <a:bodyPr wrap="none" lIns="0" rIns="0" tIns="0" bIns="0" anchor="t">
             <a:spAutoFit/>
           </a:bodyPr>
           <a:lstStyle/>
@@ -28966,7 +28443,7 @@
           <a:noFill/>
         </p:spPr>
         <p:txBody>
-          <a:bodyPr wrap="none" lIns="0" tIns="0" rIns="0" bIns="0" anchor="t">
+          <a:bodyPr wrap="none" lIns="0" rIns="0" tIns="0" bIns="0" anchor="t">
             <a:spAutoFit/>
           </a:bodyPr>
           <a:lstStyle/>
@@ -29021,7 +28498,6 @@
           <a:lstStyle/>
           <a:p>
             <a:pPr algn="ctr"/>
-            <a:endParaRPr/>
           </a:p>
         </p:txBody>
       </p:sp>
@@ -29055,7 +28531,6 @@
           <a:lstStyle/>
           <a:p>
             <a:pPr algn="ctr"/>
-            <a:endParaRPr/>
           </a:p>
         </p:txBody>
       </p:sp>
@@ -29089,7 +28564,6 @@
           <a:lstStyle/>
           <a:p>
             <a:pPr algn="ctr"/>
-            <a:endParaRPr/>
           </a:p>
         </p:txBody>
       </p:sp>
@@ -29121,7 +28595,6 @@
           <a:lstStyle/>
           <a:p>
             <a:pPr algn="ctr"/>
-            <a:endParaRPr/>
           </a:p>
         </p:txBody>
       </p:sp>
@@ -29153,7 +28626,6 @@
           <a:lstStyle/>
           <a:p>
             <a:pPr algn="ctr"/>
-            <a:endParaRPr/>
           </a:p>
         </p:txBody>
       </p:sp>
@@ -29185,7 +28657,6 @@
           <a:lstStyle/>
           <a:p>
             <a:pPr algn="ctr"/>
-            <a:endParaRPr/>
           </a:p>
         </p:txBody>
       </p:sp>
@@ -29217,7 +28688,6 @@
           <a:lstStyle/>
           <a:p>
             <a:pPr algn="ctr"/>
-            <a:endParaRPr/>
           </a:p>
         </p:txBody>
       </p:sp>
@@ -29238,7 +28708,7 @@
           <a:noFill/>
         </p:spPr>
         <p:txBody>
-          <a:bodyPr wrap="none" lIns="0" tIns="0" rIns="0" bIns="0" anchor="t">
+          <a:bodyPr wrap="none" lIns="0" rIns="0" tIns="0" bIns="0" anchor="t">
             <a:spAutoFit/>
           </a:bodyPr>
           <a:lstStyle/>
@@ -29280,7 +28750,7 @@
           <a:noFill/>
         </p:spPr>
         <p:txBody>
-          <a:bodyPr wrap="none" lIns="0" tIns="0" rIns="0" bIns="0" anchor="t">
+          <a:bodyPr wrap="none" lIns="0" rIns="0" tIns="0" bIns="0" anchor="t">
             <a:spAutoFit/>
           </a:bodyPr>
           <a:lstStyle/>
@@ -29331,7 +28801,6 @@
           <a:lstStyle/>
           <a:p>
             <a:pPr algn="ctr"/>
-            <a:endParaRPr/>
           </a:p>
         </p:txBody>
       </p:sp>
@@ -29352,7 +28821,7 @@
           <a:noFill/>
         </p:spPr>
         <p:txBody>
-          <a:bodyPr wrap="none" lIns="0" tIns="0" rIns="0" bIns="0" anchor="t">
+          <a:bodyPr wrap="none" lIns="0" rIns="0" tIns="0" bIns="0" anchor="t">
             <a:spAutoFit/>
           </a:bodyPr>
           <a:lstStyle/>
@@ -29405,7 +28874,6 @@
           <a:lstStyle/>
           <a:p>
             <a:pPr algn="ctr"/>
-            <a:endParaRPr/>
           </a:p>
         </p:txBody>
       </p:sp>
@@ -29437,7 +28905,6 @@
           <a:lstStyle/>
           <a:p>
             <a:pPr algn="ctr"/>
-            <a:endParaRPr/>
           </a:p>
         </p:txBody>
       </p:sp>
@@ -29469,7 +28936,6 @@
           <a:lstStyle/>
           <a:p>
             <a:pPr algn="ctr"/>
-            <a:endParaRPr/>
           </a:p>
         </p:txBody>
       </p:sp>
@@ -29490,7 +28956,7 @@
           <a:noFill/>
         </p:spPr>
         <p:txBody>
-          <a:bodyPr wrap="none" lIns="0" tIns="0" rIns="0" bIns="0" anchor="t">
+          <a:bodyPr wrap="none" lIns="0" rIns="0" tIns="0" bIns="0" anchor="t">
             <a:spAutoFit/>
           </a:bodyPr>
           <a:lstStyle/>
@@ -29532,7 +28998,7 @@
           <a:noFill/>
         </p:spPr>
         <p:txBody>
-          <a:bodyPr wrap="none" lIns="0" tIns="0" rIns="0" bIns="0" anchor="t">
+          <a:bodyPr wrap="none" lIns="0" rIns="0" tIns="0" bIns="0" anchor="t">
             <a:spAutoFit/>
           </a:bodyPr>
           <a:lstStyle/>
@@ -29574,7 +29040,7 @@
           <a:noFill/>
         </p:spPr>
         <p:txBody>
-          <a:bodyPr wrap="none" lIns="0" tIns="0" rIns="0" bIns="0" anchor="t">
+          <a:bodyPr wrap="none" lIns="0" rIns="0" tIns="0" bIns="0" anchor="t">
             <a:spAutoFit/>
           </a:bodyPr>
           <a:lstStyle/>
@@ -29616,7 +29082,7 @@
           <a:noFill/>
         </p:spPr>
         <p:txBody>
-          <a:bodyPr wrap="none" lIns="0" tIns="0" rIns="0" bIns="0" anchor="t">
+          <a:bodyPr wrap="none" lIns="0" rIns="0" tIns="0" bIns="0" anchor="t">
             <a:spAutoFit/>
           </a:bodyPr>
           <a:lstStyle/>
@@ -29667,7 +29133,6 @@
           <a:lstStyle/>
           <a:p>
             <a:pPr algn="ctr"/>
-            <a:endParaRPr/>
           </a:p>
         </p:txBody>
       </p:sp>
@@ -29701,7 +29166,6 @@
           <a:lstStyle/>
           <a:p>
             <a:pPr algn="ctr"/>
-            <a:endParaRPr/>
           </a:p>
         </p:txBody>
       </p:sp>
@@ -29731,7 +29195,6 @@
           <a:lstStyle/>
           <a:p>
             <a:pPr algn="ctr"/>
-            <a:endParaRPr/>
           </a:p>
         </p:txBody>
       </p:sp>
@@ -29752,7 +29215,7 @@
           <a:noFill/>
         </p:spPr>
         <p:txBody>
-          <a:bodyPr wrap="none" lIns="0" tIns="0" rIns="0" bIns="0" anchor="t">
+          <a:bodyPr wrap="none" lIns="0" rIns="0" tIns="0" bIns="0" anchor="t">
             <a:spAutoFit/>
           </a:bodyPr>
           <a:lstStyle/>
@@ -29794,7 +29257,7 @@
           <a:noFill/>
         </p:spPr>
         <p:txBody>
-          <a:bodyPr wrap="none" lIns="0" tIns="0" rIns="0" bIns="0" anchor="t">
+          <a:bodyPr wrap="none" lIns="0" rIns="0" tIns="0" bIns="0" anchor="t">
             <a:spAutoFit/>
           </a:bodyPr>
           <a:lstStyle/>
@@ -29836,7 +29299,7 @@
           <a:noFill/>
         </p:spPr>
         <p:txBody>
-          <a:bodyPr wrap="none" lIns="0" tIns="0" rIns="0" bIns="0" anchor="t">
+          <a:bodyPr wrap="none" lIns="0" rIns="0" tIns="0" bIns="0" anchor="t">
             <a:spAutoFit/>
           </a:bodyPr>
           <a:lstStyle/>
@@ -29891,7 +29354,6 @@
           <a:lstStyle/>
           <a:p>
             <a:pPr algn="ctr"/>
-            <a:endParaRPr/>
           </a:p>
         </p:txBody>
       </p:sp>
@@ -29921,7 +29383,6 @@
           <a:lstStyle/>
           <a:p>
             <a:pPr algn="ctr"/>
-            <a:endParaRPr/>
           </a:p>
         </p:txBody>
       </p:sp>
@@ -29942,7 +29403,7 @@
           <a:noFill/>
         </p:spPr>
         <p:txBody>
-          <a:bodyPr wrap="none" lIns="0" tIns="0" rIns="0" bIns="0" anchor="t">
+          <a:bodyPr wrap="none" lIns="0" rIns="0" tIns="0" bIns="0" anchor="t">
             <a:spAutoFit/>
           </a:bodyPr>
           <a:lstStyle/>
@@ -29984,7 +29445,7 @@
           <a:noFill/>
         </p:spPr>
         <p:txBody>
-          <a:bodyPr wrap="none" lIns="0" tIns="0" rIns="0" bIns="0" anchor="t">
+          <a:bodyPr wrap="none" lIns="0" rIns="0" tIns="0" bIns="0" anchor="t">
             <a:spAutoFit/>
           </a:bodyPr>
           <a:lstStyle/>
@@ -30026,7 +29487,7 @@
           <a:noFill/>
         </p:spPr>
         <p:txBody>
-          <a:bodyPr wrap="none" lIns="0" tIns="0" rIns="0" bIns="0" anchor="t">
+          <a:bodyPr wrap="none" lIns="0" rIns="0" tIns="0" bIns="0" anchor="t">
             <a:spAutoFit/>
           </a:bodyPr>
           <a:lstStyle/>
@@ -30068,7 +29529,7 @@
           <a:noFill/>
         </p:spPr>
         <p:txBody>
-          <a:bodyPr wrap="none" lIns="0" tIns="0" rIns="0" bIns="0" anchor="t">
+          <a:bodyPr wrap="none" lIns="0" rIns="0" tIns="0" bIns="0" anchor="t">
             <a:spAutoFit/>
           </a:bodyPr>
           <a:lstStyle/>
@@ -30110,7 +29571,7 @@
           <a:noFill/>
         </p:spPr>
         <p:txBody>
-          <a:bodyPr wrap="none" lIns="0" tIns="0" rIns="0" bIns="0" anchor="t">
+          <a:bodyPr wrap="none" lIns="0" rIns="0" tIns="0" bIns="0" anchor="t">
             <a:spAutoFit/>
           </a:bodyPr>
           <a:lstStyle/>
@@ -30163,7 +29624,6 @@
           <a:lstStyle/>
           <a:p>
             <a:pPr algn="ctr"/>
-            <a:endParaRPr/>
           </a:p>
         </p:txBody>
       </p:sp>
@@ -30193,7 +29653,6 @@
           <a:lstStyle/>
           <a:p>
             <a:pPr algn="ctr"/>
-            <a:endParaRPr/>
           </a:p>
         </p:txBody>
       </p:sp>
@@ -30214,7 +29673,7 @@
           <a:noFill/>
         </p:spPr>
         <p:txBody>
-          <a:bodyPr wrap="none" lIns="0" tIns="0" rIns="0" bIns="0" anchor="t">
+          <a:bodyPr wrap="none" lIns="0" rIns="0" tIns="0" bIns="0" anchor="t">
             <a:spAutoFit/>
           </a:bodyPr>
           <a:lstStyle/>
@@ -30256,7 +29715,7 @@
           <a:noFill/>
         </p:spPr>
         <p:txBody>
-          <a:bodyPr wrap="none" lIns="0" tIns="0" rIns="0" bIns="0" anchor="t">
+          <a:bodyPr wrap="none" lIns="0" rIns="0" tIns="0" bIns="0" anchor="t">
             <a:spAutoFit/>
           </a:bodyPr>
           <a:lstStyle/>
@@ -30298,7 +29757,7 @@
           <a:noFill/>
         </p:spPr>
         <p:txBody>
-          <a:bodyPr wrap="none" lIns="0" tIns="0" rIns="0" bIns="0" anchor="t">
+          <a:bodyPr wrap="none" lIns="0" rIns="0" tIns="0" bIns="0" anchor="t">
             <a:spAutoFit/>
           </a:bodyPr>
           <a:lstStyle/>
@@ -30340,7 +29799,7 @@
           <a:noFill/>
         </p:spPr>
         <p:txBody>
-          <a:bodyPr wrap="none" lIns="0" tIns="0" rIns="0" bIns="0" anchor="t">
+          <a:bodyPr wrap="none" lIns="0" rIns="0" tIns="0" bIns="0" anchor="t">
             <a:spAutoFit/>
           </a:bodyPr>
           <a:lstStyle/>
